--- a/slides/04 Sokoban.pptx
+++ b/slides/04 Sokoban.pptx
@@ -15535,7 +15535,7 @@
 </p:sld>
 </file>
 
-<file path=ppt/slides/slide26.xml><?xml version="1.0" encoding="utf-8"?>
+<file path=ppt/slides/slide25.xml><?xml version="1.0" encoding="utf-8"?>
 <p:sld xmlns:a="http://schemas.openxmlformats.org/drawingml/2006/main" xmlns:r="http://schemas.openxmlformats.org/officeDocument/2006/relationships" xmlns:mc="http://schemas.openxmlformats.org/markup-compatibility/2006" xmlns:mv="urn:schemas-microsoft-com:mac:vml" xmlns:p="http://schemas.openxmlformats.org/presentationml/2006/main" xmlns:c="http://schemas.openxmlformats.org/drawingml/2006/chart" xmlns:dgm="http://schemas.openxmlformats.org/drawingml/2006/diagram" xmlns:o="urn:schemas-microsoft-com:office:office" xmlns:v="urn:schemas-microsoft-com:vml" xmlns:pvml="urn:schemas-microsoft-com:office:powerpoint" xmlns:com="http://schemas.openxmlformats.org/drawingml/2006/compatibility" xmlns:p14="http://schemas.microsoft.com/office/powerpoint/2010/main" xmlns:p15="http://schemas.microsoft.com/office/powerpoint/2012/main" xmlns:ahyp="http://schemas.microsoft.com/office/drawing/2018/hyperlinkcolor">
   <p:cSld>
     <p:spTree>
@@ -15675,7 +15675,7 @@
 </p:sld>
 </file>
 
-<file path=ppt/slides/slide27.xml><?xml version="1.0" encoding="utf-8"?>
+<file path=ppt/slides/slide26.xml><?xml version="1.0" encoding="utf-8"?>
 <p:sld xmlns:a="http://schemas.openxmlformats.org/drawingml/2006/main" xmlns:p="http://schemas.openxmlformats.org/presentationml/2006/main" xmlns:r="http://schemas.openxmlformats.org/officeDocument/2006/relationships">
   <p:cSld>
     <p:spTree>
@@ -16532,6 +16532,145 @@
               <a:cs typeface="Consolas"/>
               <a:sym typeface="Consolas"/>
             </a:endParaRPr>
+          </a:p>
+        </p:txBody>
+      </p:sp>
+    </p:spTree>
+  </p:cSld>
+  <p:clrMapOvr>
+    <a:masterClrMapping/>
+  </p:clrMapOvr>
+</p:sld>
+</file>
+
+<file path=ppt/slides/slide27.xml><?xml version="1.0" encoding="utf-8"?>
+<p:sld xmlns:a="http://schemas.openxmlformats.org/drawingml/2006/main" xmlns:p="http://schemas.openxmlformats.org/presentationml/2006/main" xmlns:r="http://schemas.openxmlformats.org/officeDocument/2006/relationships">
+  <p:cSld>
+    <p:spTree>
+      <p:nvGrpSpPr>
+        <p:cNvPr id="1" name=""/>
+        <p:cNvGrpSpPr/>
+        <p:nvPr/>
+      </p:nvGrpSpPr>
+      <p:grpSpPr/>
+      <p:sp>
+        <p:nvSpPr>
+          <p:cNvPr id="2" name="Title 1"/>
+          <p:cNvSpPr>
+            <a:spLocks noGrp="1"/>
+          </p:cNvSpPr>
+          <p:nvPr>
+            <p:ph type="title"/>
+          </p:nvPr>
+        </p:nvSpPr>
+        <p:spPr/>
+        <p:txBody>
+          <a:bodyPr/>
+          <a:lstStyle/>
+          <a:p>
+            <a:pPr indent="0" lvl="0" marL="0" rtl="0" algn="l">
+              <a:spcBef>
+                <a:spcPts val="0"/>
+              </a:spcBef>
+              <a:spcAft>
+                <a:spcPts val="0"/>
+              </a:spcAft>
+              <a:buNone/>
+            </a:pPr>
+            <a:r>
+              <a:rPr lang="en"/>
+              <a:t>Try It: What a Move Remembers</a:t>
+            </a:r>
+            <a:endParaRPr/>
+          </a:p>
+        </p:txBody>
+      </p:sp>
+      <p:sp>
+        <p:nvSpPr>
+          <p:cNvPr id="3" name="Text Placeholder 2"/>
+          <p:cNvSpPr>
+            <a:spLocks noGrp="1"/>
+          </p:cNvSpPr>
+          <p:nvPr>
+            <p:ph type="body" idx="1"/>
+          </p:nvPr>
+        </p:nvSpPr>
+        <p:spPr>
+          <a:xfrm>
+            <a:off x="311700" y="885950"/>
+            <a:ext cx="8520600" cy="1673352"/>
+          </a:xfrm>
+        </p:spPr>
+        <p:txBody>
+          <a:bodyPr/>
+          <a:lstStyle/>
+          <a:p>
+            <a:pPr indent="-330200" lvl="0" marL="457200" rtl="0" algn="l">
+              <a:spcBef>
+                <a:spcPts val="0"/>
+              </a:spcBef>
+              <a:spcAft>
+                <a:spcPts val="0"/>
+              </a:spcAft>
+              <a:buSzPts val="1600"/>
+              <a:buChar char="●"/>
+            </a:pPr>
+            <a:r>
+              <a:rPr lang="en"/>
+              <a:t>In Sokoban2:</a:t>
+            </a:r>
+            <a:endParaRPr/>
+          </a:p>
+          <a:p>
+            <a:pPr indent="-330200" lvl="0" marL="457200" rtl="0" algn="l">
+              <a:spcBef>
+                <a:spcPts val="0"/>
+              </a:spcBef>
+              <a:spcAft>
+                <a:spcPts val="0"/>
+              </a:spcAft>
+              <a:buSzPts val="1600"/>
+              <a:buChar char="●"/>
+            </a:pPr>
+            <a:r>
+              <a:rPr lang="en"/>
+              <a:t>Give MoveCommand a Direction property</a:t>
+            </a:r>
+            <a:endParaRPr/>
+          </a:p>
+          <a:p>
+            <a:pPr indent="-330200" lvl="0" marL="457200" rtl="0" algn="l">
+              <a:spcBef>
+                <a:spcPts val="0"/>
+              </a:spcBef>
+              <a:spcAft>
+                <a:spcPts val="0"/>
+              </a:spcAft>
+              <a:buSzPts val="1600"/>
+              <a:buChar char="●"/>
+            </a:pPr>
+            <a:r>
+              <a:rPr lang="en"/>
+              <a:t>Show the last move’s direction in the window title</a:t>
+            </a:r>
+            <a:endParaRPr/>
+          </a:p>
+          <a:p>
+            <a:pPr indent="-330200" lvl="0" marL="457200" rtl="0" algn="l">
+              <a:spcBef>
+                <a:spcPts val="0"/>
+              </a:spcBef>
+              <a:spcAft>
+                <a:spcPts val="0"/>
+              </a:spcAft>
+              <a:buSzPts val="1600"/>
+              <a:buChar char="●"/>
+            </a:pPr>
+            <a:r>
+              <a:rPr lang="en"/>
+              <a:t>To undo a move, what else would it need to remember?</a:t>
+            </a:r>
+            <a:endParaRPr/>
           </a:p>
         </p:txBody>
       </p:sp>
@@ -16579,7 +16718,89 @@
             </a:pPr>
             <a:r>
               <a:rPr lang="en"/>
-              <a:t>Try It: What a Move Remembers</a:t>
+              <a:t>What a Command Remembers</a:t>
+            </a:r>
+            <a:endParaRPr/>
+          </a:p>
+        </p:txBody>
+      </p:sp>
+      <p:pic>
+        <p:nvPicPr>
+          <p:cNvPr id="3" name="Picture 2" descr="remember.png"/>
+          <p:cNvPicPr>
+            <a:picLocks noChangeAspect="1"/>
+          </p:cNvPicPr>
+          <p:nvPr/>
+        </p:nvPicPr>
+        <p:blipFill>
+          <a:blip r:embed="rId2"/>
+          <a:stretch>
+            <a:fillRect/>
+          </a:stretch>
+        </p:blipFill>
+        <p:spPr>
+          <a:xfrm>
+            <a:off x="320039" y="1051560"/>
+            <a:ext cx="8503920" cy="3543300"/>
+          </a:xfrm>
+          <a:prstGeom prst="rect">
+            <a:avLst/>
+          </a:prstGeom>
+        </p:spPr>
+      </p:pic>
+    </p:spTree>
+  </p:cSld>
+  <p:clrMapOvr>
+    <a:masterClrMapping/>
+  </p:clrMapOvr>
+</p:sld>
+</file>
+
+<file path=ppt/slides/slide29.xml><?xml version="1.0" encoding="utf-8"?>
+<p:sld xmlns:a="http://schemas.openxmlformats.org/drawingml/2006/main" xmlns:p="http://schemas.openxmlformats.org/presentationml/2006/main" xmlns:r="http://schemas.openxmlformats.org/officeDocument/2006/relationships">
+  <p:cSld>
+    <p:spTree>
+      <p:nvGrpSpPr>
+        <p:cNvPr id="1" name=""/>
+        <p:cNvGrpSpPr/>
+        <p:nvPr/>
+      </p:nvGrpSpPr>
+      <p:grpSpPr/>
+      <p:sp>
+        <p:nvSpPr>
+          <p:cNvPr id="140" name="Google Shape;140;p23"/>
+          <p:cNvSpPr txBox="1"/>
+          <p:nvPr>
+            <p:ph type="title"/>
+          </p:nvPr>
+        </p:nvSpPr>
+        <p:spPr>
+          <a:xfrm>
+            <a:off x="311700" y="195615"/>
+            <a:ext cx="8520600" cy="572700"/>
+          </a:xfrm>
+          <a:prstGeom prst="rect">
+            <a:avLst/>
+          </a:prstGeom>
+        </p:spPr>
+        <p:txBody>
+          <a:bodyPr anchorCtr="0" anchor="t" bIns="91425" lIns="91425" spcFirstLastPara="1" rIns="91425" wrap="square" tIns="91425">
+            <a:normAutofit fontScale="90000"/>
+          </a:bodyPr>
+          <a:lstStyle/>
+          <a:p>
+            <a:pPr indent="0" lvl="0" marL="0" rtl="0" algn="l">
+              <a:spcBef>
+                <a:spcPts val="0"/>
+              </a:spcBef>
+              <a:spcAft>
+                <a:spcPts val="0"/>
+              </a:spcAft>
+              <a:buNone/>
+            </a:pPr>
+            <a:r>
+              <a:rPr lang="en"/>
+              <a:t>Undoable Moves</a:t>
             </a:r>
             <a:endParaRPr/>
           </a:p>
@@ -16587,25 +16808,31 @@
       </p:sp>
       <p:sp>
         <p:nvSpPr>
-          <p:cNvPr id="3" name="Text Placeholder 2"/>
-          <p:cNvSpPr>
-            <a:spLocks noGrp="1"/>
-          </p:cNvSpPr>
+          <p:cNvPr id="293" name="Google Shape;293;p45"/>
+          <p:cNvSpPr txBox="1"/>
           <p:nvPr>
-            <p:ph type="body" idx="1"/>
+            <p:ph type="title"/>
           </p:nvPr>
         </p:nvSpPr>
         <p:spPr>
           <a:xfrm>
-            <a:off x="311700" y="885950"/>
-            <a:ext cx="8520600" cy="1673352"/>
+            <a:off x="311700" y="1152475"/>
+            <a:ext cx="3700000" cy="3500000"/>
           </a:xfrm>
+          <a:prstGeom prst="rect">
+            <a:avLst/>
+          </a:prstGeom>
         </p:spPr>
         <p:txBody>
-          <a:bodyPr/>
+          <a:bodyPr anchorCtr="0" anchor="t" bIns="91425" lIns="91425" spcFirstLastPara="1" rIns="91425" wrap="square" tIns="91425">
+            <a:normAutofit fontScale="90000"/>
+          </a:bodyPr>
           <a:lstStyle/>
           <a:p>
             <a:pPr indent="-330200" lvl="0" marL="457200" rtl="0" algn="l">
+              <a:buClr>
+                <a:srgbClr val="DEE2E6"/>
+              </a:buClr>
               <a:spcBef>
                 <a:spcPts val="0"/>
               </a:spcBef>
@@ -16616,13 +16843,20 @@
               <a:buChar char="●"/>
             </a:pPr>
             <a:r>
-              <a:rPr lang="en"/>
-              <a:t>In Sokoban2:</a:t>
+              <a:rPr lang="en" sz="1600">
+                <a:solidFill>
+                  <a:srgbClr val="DEE2E6"/>
+                </a:solidFill>
+              </a:rPr>
+              <a:t>A command must be able to reverse what it did</a:t>
             </a:r>
             <a:endParaRPr/>
           </a:p>
           <a:p>
             <a:pPr indent="-330200" lvl="0" marL="457200" rtl="0" algn="l">
+              <a:buClr>
+                <a:srgbClr val="DEE2E6"/>
+              </a:buClr>
               <a:spcBef>
                 <a:spcPts val="0"/>
               </a:spcBef>
@@ -16633,13 +16867,44 @@
               <a:buChar char="●"/>
             </a:pPr>
             <a:r>
-              <a:rPr lang="en"/>
-              <a:t>Give MoveCommand a Direction property</a:t>
+              <a:rPr lang="en" sz="1600">
+                <a:solidFill>
+                  <a:srgbClr val="DEE2E6"/>
+                </a:solidFill>
+              </a:rPr>
+              <a:t>Moving the player back is not enough</a:t>
             </a:r>
             <a:endParaRPr/>
           </a:p>
           <a:p>
+            <a:pPr indent="-317500" lvl="1" marL="914400" rtl="0" algn="l">
+              <a:buClr>
+                <a:srgbClr val="6C757D"/>
+              </a:buClr>
+              <a:spcBef>
+                <a:spcPts val="0"/>
+              </a:spcBef>
+              <a:spcAft>
+                <a:spcPts val="0"/>
+              </a:spcAft>
+              <a:buSzPts val="1400"/>
+              <a:buChar char="○"/>
+            </a:pPr>
+            <a:r>
+              <a:rPr lang="en" sz="1400">
+                <a:solidFill>
+                  <a:srgbClr val="6C757D"/>
+                </a:solidFill>
+              </a:rPr>
+              <a:t>A push must pull the box back too</a:t>
+            </a:r>
+            <a:endParaRPr/>
+          </a:p>
+          <a:p>
             <a:pPr indent="-330200" lvl="0" marL="457200" rtl="0" algn="l">
+              <a:buClr>
+                <a:srgbClr val="DEE2E6"/>
+              </a:buClr>
               <a:spcBef>
                 <a:spcPts val="0"/>
               </a:spcBef>
@@ -16650,27 +16915,760 @@
               <a:buChar char="●"/>
             </a:pPr>
             <a:r>
-              <a:rPr lang="en"/>
-              <a:t>Show the last move’s direction in the window title</a:t>
+              <a:rPr lang="en" sz="1600">
+                <a:solidFill>
+                  <a:srgbClr val="DEE2E6"/>
+                </a:solidFill>
+              </a:rPr>
+              <a:t>MoveCommand remembers the MoveResult</a:t>
             </a:r>
             <a:endParaRPr/>
           </a:p>
-          <a:p>
-            <a:pPr indent="-330200" lvl="0" marL="457200" rtl="0" algn="l">
-              <a:spcBef>
-                <a:spcPts val="0"/>
-              </a:spcBef>
-              <a:spcAft>
-                <a:spcPts val="0"/>
-              </a:spcAft>
-              <a:buSzPts val="1600"/>
-              <a:buChar char="●"/>
-            </a:pPr>
-            <a:r>
-              <a:rPr lang="en"/>
-              <a:t>To undo a move, what else would it need to remember?</a:t>
-            </a:r>
-            <a:endParaRPr/>
+        </p:txBody>
+      </p:sp>
+      <p:sp>
+        <p:nvSpPr>
+          <p:cNvPr id="141" name="Google Shape;141;p23"/>
+          <p:cNvSpPr txBox="1"/>
+          <p:nvPr>
+            <p:ph idx="2" type="body"/>
+          </p:nvPr>
+        </p:nvSpPr>
+        <p:spPr>
+          <a:xfrm>
+            <a:off x="4150000" y="1152475"/>
+            <a:ext cx="4750000" cy="3600000"/>
+          </a:xfrm>
+          <a:prstGeom prst="rect">
+            <a:avLst/>
+          </a:prstGeom>
+        </p:spPr>
+        <p:txBody>
+          <a:bodyPr anchorCtr="0" anchor="t" bIns="91425" lIns="91425" spcFirstLastPara="1" rIns="91425" wrap="square" tIns="91425">
+            <a:noAutofit/>
+          </a:bodyPr>
+          <a:lstStyle/>
+          <a:p>
+            <a:pPr indent="0" lvl="0" marL="0" rtl="0" algn="l">
+              <a:lnSpc>
+                <a:spcPct val="115000"/>
+              </a:lnSpc>
+              <a:spcBef>
+                <a:spcPts val="0"/>
+              </a:spcBef>
+              <a:spcAft>
+                <a:spcPts val="0"/>
+              </a:spcAft>
+              <a:buNone/>
+            </a:pPr>
+            <a:r>
+              <a:rPr lang="en" sz="1000">
+                <a:highlight>
+                  <a:schemeClr val="dk2"/>
+                </a:highlight>
+                <a:latin typeface="Consolas"/>
+                <a:ea typeface="Consolas"/>
+                <a:cs typeface="Consolas"/>
+                <a:sym typeface="Consolas"/>
+              </a:rPr>
+              <a:t>private MoveResult _result;</a:t>
+            </a:r>
+            <a:endParaRPr sz="1000">
+              <a:solidFill>
+                <a:srgbClr val="CCCCCC"/>
+              </a:solidFill>
+              <a:highlight>
+                <a:schemeClr val="dk2"/>
+              </a:highlight>
+              <a:latin typeface="Consolas"/>
+              <a:ea typeface="Consolas"/>
+              <a:cs typeface="Consolas"/>
+              <a:sym typeface="Consolas"/>
+            </a:endParaRPr>
+          </a:p>
+          <a:p>
+            <a:pPr indent="0" lvl="0" marL="0" rtl="0" algn="l">
+              <a:lnSpc>
+                <a:spcPct val="115000"/>
+              </a:lnSpc>
+              <a:spcBef>
+                <a:spcPts val="0"/>
+              </a:spcBef>
+              <a:spcAft>
+                <a:spcPts val="0"/>
+              </a:spcAft>
+              <a:buNone/>
+            </a:pPr>
+            <a:r>
+              <a:rPr lang="en" sz="1000">
+                <a:highlight>
+                  <a:schemeClr val="dk2"/>
+                </a:highlight>
+                <a:latin typeface="Consolas"/>
+                <a:ea typeface="Consolas"/>
+                <a:cs typeface="Consolas"/>
+                <a:sym typeface="Consolas"/>
+              </a:rPr>
+              <a:t/>
+            </a:r>
+            <a:endParaRPr sz="1000">
+              <a:solidFill>
+                <a:srgbClr val="CCCCCC"/>
+              </a:solidFill>
+              <a:highlight>
+                <a:schemeClr val="dk2"/>
+              </a:highlight>
+              <a:latin typeface="Consolas"/>
+              <a:ea typeface="Consolas"/>
+              <a:cs typeface="Consolas"/>
+              <a:sym typeface="Consolas"/>
+            </a:endParaRPr>
+          </a:p>
+          <a:p>
+            <a:pPr indent="0" lvl="0" marL="0" rtl="0" algn="l">
+              <a:lnSpc>
+                <a:spcPct val="115000"/>
+              </a:lnSpc>
+              <a:spcBef>
+                <a:spcPts val="0"/>
+              </a:spcBef>
+              <a:spcAft>
+                <a:spcPts val="0"/>
+              </a:spcAft>
+              <a:buNone/>
+            </a:pPr>
+            <a:r>
+              <a:rPr lang="en" sz="1000">
+                <a:highlight>
+                  <a:schemeClr val="dk2"/>
+                </a:highlight>
+                <a:latin typeface="Consolas"/>
+                <a:ea typeface="Consolas"/>
+                <a:cs typeface="Consolas"/>
+                <a:sym typeface="Consolas"/>
+              </a:rPr>
+              <a:t>public void Execute() =&gt;</a:t>
+            </a:r>
+            <a:endParaRPr sz="1000">
+              <a:solidFill>
+                <a:srgbClr val="CCCCCC"/>
+              </a:solidFill>
+              <a:highlight>
+                <a:schemeClr val="dk2"/>
+              </a:highlight>
+              <a:latin typeface="Consolas"/>
+              <a:ea typeface="Consolas"/>
+              <a:cs typeface="Consolas"/>
+              <a:sym typeface="Consolas"/>
+            </a:endParaRPr>
+          </a:p>
+          <a:p>
+            <a:pPr indent="0" lvl="0" marL="0" rtl="0" algn="l">
+              <a:lnSpc>
+                <a:spcPct val="115000"/>
+              </a:lnSpc>
+              <a:spcBef>
+                <a:spcPts val="0"/>
+              </a:spcBef>
+              <a:spcAft>
+                <a:spcPts val="0"/>
+              </a:spcAft>
+              <a:buNone/>
+            </a:pPr>
+            <a:r>
+              <a:rPr lang="en" sz="1000">
+                <a:highlight>
+                  <a:schemeClr val="dk2"/>
+                </a:highlight>
+                <a:latin typeface="Consolas"/>
+                <a:ea typeface="Consolas"/>
+                <a:cs typeface="Consolas"/>
+                <a:sym typeface="Consolas"/>
+              </a:rPr>
+              <a:t>    _result = level.Move(direction);</a:t>
+            </a:r>
+            <a:endParaRPr sz="1000">
+              <a:solidFill>
+                <a:srgbClr val="CCCCCC"/>
+              </a:solidFill>
+              <a:highlight>
+                <a:schemeClr val="dk2"/>
+              </a:highlight>
+              <a:latin typeface="Consolas"/>
+              <a:ea typeface="Consolas"/>
+              <a:cs typeface="Consolas"/>
+              <a:sym typeface="Consolas"/>
+            </a:endParaRPr>
+          </a:p>
+          <a:p>
+            <a:pPr indent="0" lvl="0" marL="0" rtl="0" algn="l">
+              <a:lnSpc>
+                <a:spcPct val="115000"/>
+              </a:lnSpc>
+              <a:spcBef>
+                <a:spcPts val="0"/>
+              </a:spcBef>
+              <a:spcAft>
+                <a:spcPts val="0"/>
+              </a:spcAft>
+              <a:buNone/>
+            </a:pPr>
+            <a:r>
+              <a:rPr lang="en" sz="1000">
+                <a:highlight>
+                  <a:schemeClr val="dk2"/>
+                </a:highlight>
+                <a:latin typeface="Consolas"/>
+                <a:ea typeface="Consolas"/>
+                <a:cs typeface="Consolas"/>
+                <a:sym typeface="Consolas"/>
+              </a:rPr>
+              <a:t>public void Undo() =&gt;</a:t>
+            </a:r>
+            <a:endParaRPr sz="1000">
+              <a:solidFill>
+                <a:srgbClr val="CCCCCC"/>
+              </a:solidFill>
+              <a:highlight>
+                <a:schemeClr val="dk2"/>
+              </a:highlight>
+              <a:latin typeface="Consolas"/>
+              <a:ea typeface="Consolas"/>
+              <a:cs typeface="Consolas"/>
+              <a:sym typeface="Consolas"/>
+            </a:endParaRPr>
+          </a:p>
+          <a:p>
+            <a:pPr indent="0" lvl="0" marL="0" rtl="0" algn="l">
+              <a:lnSpc>
+                <a:spcPct val="115000"/>
+              </a:lnSpc>
+              <a:spcBef>
+                <a:spcPts val="0"/>
+              </a:spcBef>
+              <a:spcAft>
+                <a:spcPts val="0"/>
+              </a:spcAft>
+              <a:buNone/>
+            </a:pPr>
+            <a:r>
+              <a:rPr lang="en" sz="1000">
+                <a:highlight>
+                  <a:schemeClr val="dk2"/>
+                </a:highlight>
+                <a:latin typeface="Consolas"/>
+                <a:ea typeface="Consolas"/>
+                <a:cs typeface="Consolas"/>
+                <a:sym typeface="Consolas"/>
+              </a:rPr>
+              <a:t>    level.UndoMove(direction, _result);</a:t>
+            </a:r>
+            <a:endParaRPr sz="1000">
+              <a:solidFill>
+                <a:srgbClr val="CCCCCC"/>
+              </a:solidFill>
+              <a:highlight>
+                <a:schemeClr val="dk2"/>
+              </a:highlight>
+              <a:latin typeface="Consolas"/>
+              <a:ea typeface="Consolas"/>
+              <a:cs typeface="Consolas"/>
+              <a:sym typeface="Consolas"/>
+            </a:endParaRPr>
+          </a:p>
+          <a:p>
+            <a:pPr indent="0" lvl="0" marL="0" rtl="0" algn="l">
+              <a:lnSpc>
+                <a:spcPct val="115000"/>
+              </a:lnSpc>
+              <a:spcBef>
+                <a:spcPts val="0"/>
+              </a:spcBef>
+              <a:spcAft>
+                <a:spcPts val="0"/>
+              </a:spcAft>
+              <a:buNone/>
+            </a:pPr>
+            <a:r>
+              <a:rPr lang="en" sz="1000">
+                <a:highlight>
+                  <a:schemeClr val="dk2"/>
+                </a:highlight>
+                <a:latin typeface="Consolas"/>
+                <a:ea typeface="Consolas"/>
+                <a:cs typeface="Consolas"/>
+                <a:sym typeface="Consolas"/>
+              </a:rPr>
+              <a:t/>
+            </a:r>
+            <a:endParaRPr sz="1000">
+              <a:solidFill>
+                <a:srgbClr val="CCCCCC"/>
+              </a:solidFill>
+              <a:highlight>
+                <a:schemeClr val="dk2"/>
+              </a:highlight>
+              <a:latin typeface="Consolas"/>
+              <a:ea typeface="Consolas"/>
+              <a:cs typeface="Consolas"/>
+              <a:sym typeface="Consolas"/>
+            </a:endParaRPr>
+          </a:p>
+          <a:p>
+            <a:pPr indent="0" lvl="0" marL="0" rtl="0" algn="l">
+              <a:lnSpc>
+                <a:spcPct val="115000"/>
+              </a:lnSpc>
+              <a:spcBef>
+                <a:spcPts val="0"/>
+              </a:spcBef>
+              <a:spcAft>
+                <a:spcPts val="0"/>
+              </a:spcAft>
+              <a:buNone/>
+            </a:pPr>
+            <a:r>
+              <a:rPr lang="en" sz="1000">
+                <a:highlight>
+                  <a:schemeClr val="dk2"/>
+                </a:highlight>
+                <a:latin typeface="Consolas"/>
+                <a:ea typeface="Consolas"/>
+                <a:cs typeface="Consolas"/>
+                <a:sym typeface="Consolas"/>
+              </a:rPr>
+              <a:t>// Level.cs</a:t>
+            </a:r>
+            <a:endParaRPr sz="1000">
+              <a:solidFill>
+                <a:srgbClr val="CCCCCC"/>
+              </a:solidFill>
+              <a:highlight>
+                <a:schemeClr val="dk2"/>
+              </a:highlight>
+              <a:latin typeface="Consolas"/>
+              <a:ea typeface="Consolas"/>
+              <a:cs typeface="Consolas"/>
+              <a:sym typeface="Consolas"/>
+            </a:endParaRPr>
+          </a:p>
+          <a:p>
+            <a:pPr indent="0" lvl="0" marL="0" rtl="0" algn="l">
+              <a:lnSpc>
+                <a:spcPct val="115000"/>
+              </a:lnSpc>
+              <a:spcBef>
+                <a:spcPts val="0"/>
+              </a:spcBef>
+              <a:spcAft>
+                <a:spcPts val="0"/>
+              </a:spcAft>
+              <a:buNone/>
+            </a:pPr>
+            <a:r>
+              <a:rPr lang="en" sz="1000">
+                <a:highlight>
+                  <a:schemeClr val="dk2"/>
+                </a:highlight>
+                <a:latin typeface="Consolas"/>
+                <a:ea typeface="Consolas"/>
+                <a:cs typeface="Consolas"/>
+                <a:sym typeface="Consolas"/>
+              </a:rPr>
+              <a:t>public void UndoMove(Point direction,</a:t>
+            </a:r>
+            <a:endParaRPr sz="1000">
+              <a:solidFill>
+                <a:srgbClr val="CCCCCC"/>
+              </a:solidFill>
+              <a:highlight>
+                <a:schemeClr val="dk2"/>
+              </a:highlight>
+              <a:latin typeface="Consolas"/>
+              <a:ea typeface="Consolas"/>
+              <a:cs typeface="Consolas"/>
+              <a:sym typeface="Consolas"/>
+            </a:endParaRPr>
+          </a:p>
+          <a:p>
+            <a:pPr indent="0" lvl="0" marL="0" rtl="0" algn="l">
+              <a:lnSpc>
+                <a:spcPct val="115000"/>
+              </a:lnSpc>
+              <a:spcBef>
+                <a:spcPts val="0"/>
+              </a:spcBef>
+              <a:spcAft>
+                <a:spcPts val="0"/>
+              </a:spcAft>
+              <a:buNone/>
+            </a:pPr>
+            <a:r>
+              <a:rPr lang="en" sz="1000">
+                <a:highlight>
+                  <a:schemeClr val="dk2"/>
+                </a:highlight>
+                <a:latin typeface="Consolas"/>
+                <a:ea typeface="Consolas"/>
+                <a:cs typeface="Consolas"/>
+                <a:sym typeface="Consolas"/>
+              </a:rPr>
+              <a:t>                     MoveResult result)</a:t>
+            </a:r>
+            <a:endParaRPr sz="1000">
+              <a:solidFill>
+                <a:srgbClr val="CCCCCC"/>
+              </a:solidFill>
+              <a:highlight>
+                <a:schemeClr val="dk2"/>
+              </a:highlight>
+              <a:latin typeface="Consolas"/>
+              <a:ea typeface="Consolas"/>
+              <a:cs typeface="Consolas"/>
+              <a:sym typeface="Consolas"/>
+            </a:endParaRPr>
+          </a:p>
+          <a:p>
+            <a:pPr indent="0" lvl="0" marL="0" rtl="0" algn="l">
+              <a:lnSpc>
+                <a:spcPct val="115000"/>
+              </a:lnSpc>
+              <a:spcBef>
+                <a:spcPts val="0"/>
+              </a:spcBef>
+              <a:spcAft>
+                <a:spcPts val="0"/>
+              </a:spcAft>
+              <a:buNone/>
+            </a:pPr>
+            <a:r>
+              <a:rPr lang="en" sz="1000">
+                <a:highlight>
+                  <a:schemeClr val="dk2"/>
+                </a:highlight>
+                <a:latin typeface="Consolas"/>
+                <a:ea typeface="Consolas"/>
+                <a:cs typeface="Consolas"/>
+                <a:sym typeface="Consolas"/>
+              </a:rPr>
+              <a:t>{</a:t>
+            </a:r>
+            <a:endParaRPr sz="1000">
+              <a:solidFill>
+                <a:srgbClr val="CCCCCC"/>
+              </a:solidFill>
+              <a:highlight>
+                <a:schemeClr val="dk2"/>
+              </a:highlight>
+              <a:latin typeface="Consolas"/>
+              <a:ea typeface="Consolas"/>
+              <a:cs typeface="Consolas"/>
+              <a:sym typeface="Consolas"/>
+            </a:endParaRPr>
+          </a:p>
+          <a:p>
+            <a:pPr indent="0" lvl="0" marL="0" rtl="0" algn="l">
+              <a:lnSpc>
+                <a:spcPct val="115000"/>
+              </a:lnSpc>
+              <a:spcBef>
+                <a:spcPts val="0"/>
+              </a:spcBef>
+              <a:spcAft>
+                <a:spcPts val="0"/>
+              </a:spcAft>
+              <a:buNone/>
+            </a:pPr>
+            <a:r>
+              <a:rPr lang="en" sz="1000">
+                <a:highlight>
+                  <a:schemeClr val="dk2"/>
+                </a:highlight>
+                <a:latin typeface="Consolas"/>
+                <a:ea typeface="Consolas"/>
+                <a:cs typeface="Consolas"/>
+                <a:sym typeface="Consolas"/>
+              </a:rPr>
+              <a:t>    if (result == MoveResult.Pushed)</a:t>
+            </a:r>
+            <a:endParaRPr sz="1000">
+              <a:solidFill>
+                <a:srgbClr val="CCCCCC"/>
+              </a:solidFill>
+              <a:highlight>
+                <a:schemeClr val="dk2"/>
+              </a:highlight>
+              <a:latin typeface="Consolas"/>
+              <a:ea typeface="Consolas"/>
+              <a:cs typeface="Consolas"/>
+              <a:sym typeface="Consolas"/>
+            </a:endParaRPr>
+          </a:p>
+          <a:p>
+            <a:pPr indent="0" lvl="0" marL="0" rtl="0" algn="l">
+              <a:lnSpc>
+                <a:spcPct val="115000"/>
+              </a:lnSpc>
+              <a:spcBef>
+                <a:spcPts val="0"/>
+              </a:spcBef>
+              <a:spcAft>
+                <a:spcPts val="0"/>
+              </a:spcAft>
+              <a:buNone/>
+            </a:pPr>
+            <a:r>
+              <a:rPr lang="en" sz="1000">
+                <a:highlight>
+                  <a:schemeClr val="dk2"/>
+                </a:highlight>
+                <a:latin typeface="Consolas"/>
+                <a:ea typeface="Consolas"/>
+                <a:cs typeface="Consolas"/>
+                <a:sym typeface="Consolas"/>
+              </a:rPr>
+              <a:t>    {</a:t>
+            </a:r>
+            <a:endParaRPr sz="1000">
+              <a:solidFill>
+                <a:srgbClr val="CCCCCC"/>
+              </a:solidFill>
+              <a:highlight>
+                <a:schemeClr val="dk2"/>
+              </a:highlight>
+              <a:latin typeface="Consolas"/>
+              <a:ea typeface="Consolas"/>
+              <a:cs typeface="Consolas"/>
+              <a:sym typeface="Consolas"/>
+            </a:endParaRPr>
+          </a:p>
+          <a:p>
+            <a:pPr indent="0" lvl="0" marL="0" rtl="0" algn="l">
+              <a:lnSpc>
+                <a:spcPct val="115000"/>
+              </a:lnSpc>
+              <a:spcBef>
+                <a:spcPts val="0"/>
+              </a:spcBef>
+              <a:spcAft>
+                <a:spcPts val="0"/>
+              </a:spcAft>
+              <a:buNone/>
+            </a:pPr>
+            <a:r>
+              <a:rPr lang="en" sz="1000">
+                <a:highlight>
+                  <a:schemeClr val="dk2"/>
+                </a:highlight>
+                <a:latin typeface="Consolas"/>
+                <a:ea typeface="Consolas"/>
+                <a:cs typeface="Consolas"/>
+                <a:sym typeface="Consolas"/>
+              </a:rPr>
+              <a:t>        _boxes.Remove(Player + direction);</a:t>
+            </a:r>
+            <a:endParaRPr sz="1000">
+              <a:solidFill>
+                <a:srgbClr val="CCCCCC"/>
+              </a:solidFill>
+              <a:highlight>
+                <a:schemeClr val="dk2"/>
+              </a:highlight>
+              <a:latin typeface="Consolas"/>
+              <a:ea typeface="Consolas"/>
+              <a:cs typeface="Consolas"/>
+              <a:sym typeface="Consolas"/>
+            </a:endParaRPr>
+          </a:p>
+          <a:p>
+            <a:pPr indent="0" lvl="0" marL="0" rtl="0" algn="l">
+              <a:lnSpc>
+                <a:spcPct val="115000"/>
+              </a:lnSpc>
+              <a:spcBef>
+                <a:spcPts val="0"/>
+              </a:spcBef>
+              <a:spcAft>
+                <a:spcPts val="0"/>
+              </a:spcAft>
+              <a:buNone/>
+            </a:pPr>
+            <a:r>
+              <a:rPr lang="en" sz="1000">
+                <a:highlight>
+                  <a:schemeClr val="dk2"/>
+                </a:highlight>
+                <a:latin typeface="Consolas"/>
+                <a:ea typeface="Consolas"/>
+                <a:cs typeface="Consolas"/>
+                <a:sym typeface="Consolas"/>
+              </a:rPr>
+              <a:t>        _boxes.Add(Player);</a:t>
+            </a:r>
+            <a:endParaRPr sz="1000">
+              <a:solidFill>
+                <a:srgbClr val="CCCCCC"/>
+              </a:solidFill>
+              <a:highlight>
+                <a:schemeClr val="dk2"/>
+              </a:highlight>
+              <a:latin typeface="Consolas"/>
+              <a:ea typeface="Consolas"/>
+              <a:cs typeface="Consolas"/>
+              <a:sym typeface="Consolas"/>
+            </a:endParaRPr>
+          </a:p>
+          <a:p>
+            <a:pPr indent="0" lvl="0" marL="0" rtl="0" algn="l">
+              <a:lnSpc>
+                <a:spcPct val="115000"/>
+              </a:lnSpc>
+              <a:spcBef>
+                <a:spcPts val="0"/>
+              </a:spcBef>
+              <a:spcAft>
+                <a:spcPts val="0"/>
+              </a:spcAft>
+              <a:buNone/>
+            </a:pPr>
+            <a:r>
+              <a:rPr lang="en" sz="1000">
+                <a:highlight>
+                  <a:schemeClr val="dk2"/>
+                </a:highlight>
+                <a:latin typeface="Consolas"/>
+                <a:ea typeface="Consolas"/>
+                <a:cs typeface="Consolas"/>
+                <a:sym typeface="Consolas"/>
+              </a:rPr>
+              <a:t>    }</a:t>
+            </a:r>
+            <a:endParaRPr sz="1000">
+              <a:solidFill>
+                <a:srgbClr val="CCCCCC"/>
+              </a:solidFill>
+              <a:highlight>
+                <a:schemeClr val="dk2"/>
+              </a:highlight>
+              <a:latin typeface="Consolas"/>
+              <a:ea typeface="Consolas"/>
+              <a:cs typeface="Consolas"/>
+              <a:sym typeface="Consolas"/>
+            </a:endParaRPr>
+          </a:p>
+          <a:p>
+            <a:pPr indent="0" lvl="0" marL="0" rtl="0" algn="l">
+              <a:lnSpc>
+                <a:spcPct val="115000"/>
+              </a:lnSpc>
+              <a:spcBef>
+                <a:spcPts val="0"/>
+              </a:spcBef>
+              <a:spcAft>
+                <a:spcPts val="0"/>
+              </a:spcAft>
+              <a:buNone/>
+            </a:pPr>
+            <a:r>
+              <a:rPr lang="en" sz="1000">
+                <a:highlight>
+                  <a:schemeClr val="dk2"/>
+                </a:highlight>
+                <a:latin typeface="Consolas"/>
+                <a:ea typeface="Consolas"/>
+                <a:cs typeface="Consolas"/>
+                <a:sym typeface="Consolas"/>
+              </a:rPr>
+              <a:t>    if (result != MoveResult.Blocked)</a:t>
+            </a:r>
+            <a:endParaRPr sz="1000">
+              <a:solidFill>
+                <a:srgbClr val="CCCCCC"/>
+              </a:solidFill>
+              <a:highlight>
+                <a:schemeClr val="dk2"/>
+              </a:highlight>
+              <a:latin typeface="Consolas"/>
+              <a:ea typeface="Consolas"/>
+              <a:cs typeface="Consolas"/>
+              <a:sym typeface="Consolas"/>
+            </a:endParaRPr>
+          </a:p>
+          <a:p>
+            <a:pPr indent="0" lvl="0" marL="0" rtl="0" algn="l">
+              <a:lnSpc>
+                <a:spcPct val="115000"/>
+              </a:lnSpc>
+              <a:spcBef>
+                <a:spcPts val="0"/>
+              </a:spcBef>
+              <a:spcAft>
+                <a:spcPts val="0"/>
+              </a:spcAft>
+              <a:buNone/>
+            </a:pPr>
+            <a:r>
+              <a:rPr lang="en" sz="1000">
+                <a:highlight>
+                  <a:schemeClr val="dk2"/>
+                </a:highlight>
+                <a:latin typeface="Consolas"/>
+                <a:ea typeface="Consolas"/>
+                <a:cs typeface="Consolas"/>
+                <a:sym typeface="Consolas"/>
+              </a:rPr>
+              <a:t>        Player -= direction;</a:t>
+            </a:r>
+            <a:endParaRPr sz="1000">
+              <a:solidFill>
+                <a:srgbClr val="CCCCCC"/>
+              </a:solidFill>
+              <a:highlight>
+                <a:schemeClr val="dk2"/>
+              </a:highlight>
+              <a:latin typeface="Consolas"/>
+              <a:ea typeface="Consolas"/>
+              <a:cs typeface="Consolas"/>
+              <a:sym typeface="Consolas"/>
+            </a:endParaRPr>
+          </a:p>
+          <a:p>
+            <a:pPr indent="0" lvl="0" marL="0" rtl="0" algn="l">
+              <a:lnSpc>
+                <a:spcPct val="115000"/>
+              </a:lnSpc>
+              <a:spcBef>
+                <a:spcPts val="0"/>
+              </a:spcBef>
+              <a:spcAft>
+                <a:spcPts val="0"/>
+              </a:spcAft>
+              <a:buNone/>
+            </a:pPr>
+            <a:r>
+              <a:rPr lang="en" sz="1000">
+                <a:highlight>
+                  <a:schemeClr val="dk2"/>
+                </a:highlight>
+                <a:latin typeface="Consolas"/>
+                <a:ea typeface="Consolas"/>
+                <a:cs typeface="Consolas"/>
+                <a:sym typeface="Consolas"/>
+              </a:rPr>
+              <a:t>}</a:t>
+            </a:r>
+            <a:endParaRPr sz="1000">
+              <a:solidFill>
+                <a:srgbClr val="CCCCCC"/>
+              </a:solidFill>
+              <a:highlight>
+                <a:schemeClr val="dk2"/>
+              </a:highlight>
+              <a:latin typeface="Consolas"/>
+              <a:ea typeface="Consolas"/>
+              <a:cs typeface="Consolas"/>
+              <a:sym typeface="Consolas"/>
+            </a:endParaRPr>
           </a:p>
         </p:txBody>
       </p:sp>
@@ -16771,81 +17769,7 @@
 </p:sld>
 </file>
 
-<file path=ppt/slides/slide31.xml><?xml version="1.0" encoding="utf-8"?>
-<p:sld xmlns:a="http://schemas.openxmlformats.org/drawingml/2006/main" xmlns:p="http://schemas.openxmlformats.org/presentationml/2006/main" xmlns:r="http://schemas.openxmlformats.org/officeDocument/2006/relationships">
-  <p:cSld>
-    <p:spTree>
-      <p:nvGrpSpPr>
-        <p:cNvPr id="1" name=""/>
-        <p:cNvGrpSpPr/>
-        <p:nvPr/>
-      </p:nvGrpSpPr>
-      <p:grpSpPr/>
-      <p:sp>
-        <p:nvSpPr>
-          <p:cNvPr id="2" name="Title 1"/>
-          <p:cNvSpPr>
-            <a:spLocks noGrp="1"/>
-          </p:cNvSpPr>
-          <p:nvPr>
-            <p:ph type="title"/>
-          </p:nvPr>
-        </p:nvSpPr>
-        <p:spPr/>
-        <p:txBody>
-          <a:bodyPr/>
-          <a:lstStyle/>
-          <a:p>
-            <a:pPr indent="0" lvl="0" marL="0" rtl="0" algn="l">
-              <a:spcBef>
-                <a:spcPts val="0"/>
-              </a:spcBef>
-              <a:spcAft>
-                <a:spcPts val="0"/>
-              </a:spcAft>
-              <a:buNone/>
-            </a:pPr>
-            <a:r>
-              <a:rPr lang="en"/>
-              <a:t>What a Command Remembers</a:t>
-            </a:r>
-            <a:endParaRPr/>
-          </a:p>
-        </p:txBody>
-      </p:sp>
-      <p:pic>
-        <p:nvPicPr>
-          <p:cNvPr id="3" name="Picture 2" descr="remember.png"/>
-          <p:cNvPicPr>
-            <a:picLocks noChangeAspect="1"/>
-          </p:cNvPicPr>
-          <p:nvPr/>
-        </p:nvPicPr>
-        <p:blipFill>
-          <a:blip r:embed="rId2"/>
-          <a:stretch>
-            <a:fillRect/>
-          </a:stretch>
-        </p:blipFill>
-        <p:spPr>
-          <a:xfrm>
-            <a:off x="320039" y="1051560"/>
-            <a:ext cx="8503920" cy="3543300"/>
-          </a:xfrm>
-          <a:prstGeom prst="rect">
-            <a:avLst/>
-          </a:prstGeom>
-        </p:spPr>
-      </p:pic>
-    </p:spTree>
-  </p:cSld>
-  <p:clrMapOvr>
-    <a:masterClrMapping/>
-  </p:clrMapOvr>
-</p:sld>
-</file>
-
-<file path=ppt/slides/slide32.xml><?xml version="1.0" encoding="utf-8"?>
+<file path=ppt/slides/slide30.xml><?xml version="1.0" encoding="utf-8"?>
 <p:sld xmlns:a="http://schemas.openxmlformats.org/drawingml/2006/main" xmlns:p="http://schemas.openxmlformats.org/presentationml/2006/main" xmlns:r="http://schemas.openxmlformats.org/officeDocument/2006/relationships">
   <p:cSld>
     <p:spTree>
@@ -16889,7 +17813,7 @@
             </a:pPr>
             <a:r>
               <a:rPr lang="en"/>
-              <a:t>Undoable Moves</a:t>
+              <a:t>Command History</a:t>
             </a:r>
             <a:endParaRPr/>
           </a:p>
@@ -16937,7 +17861,7 @@
                   <a:srgbClr val="DEE2E6"/>
                 </a:solidFill>
               </a:rPr>
-              <a:t>A command must be able to reverse what it did</a:t>
+              <a:t>Two stacks: done and undone</a:t>
             </a:r>
             <a:endParaRPr/>
           </a:p>
@@ -16961,7 +17885,31 @@
                   <a:srgbClr val="DEE2E6"/>
                 </a:solidFill>
               </a:rPr>
-              <a:t>Moving the player back is not enough</a:t>
+              <a:t>Z undoes, Y redoes</a:t>
+            </a:r>
+            <a:endParaRPr/>
+          </a:p>
+          <a:p>
+            <a:pPr indent="-330200" lvl="0" marL="457200" rtl="0" algn="l">
+              <a:buClr>
+                <a:srgbClr val="DEE2E6"/>
+              </a:buClr>
+              <a:spcBef>
+                <a:spcPts val="0"/>
+              </a:spcBef>
+              <a:spcAft>
+                <a:spcPts val="0"/>
+              </a:spcAft>
+              <a:buSzPts val="1600"/>
+              <a:buChar char="●"/>
+            </a:pPr>
+            <a:r>
+              <a:rPr lang="en" sz="1600">
+                <a:solidFill>
+                  <a:srgbClr val="DEE2E6"/>
+                </a:solidFill>
+              </a:rPr>
+              <a:t>A new command clears the redo stack</a:t>
             </a:r>
             <a:endParaRPr/>
           </a:p>
@@ -16985,7 +17933,7 @@
                   <a:srgbClr val="6C757D"/>
                 </a:solidFill>
               </a:rPr>
-              <a:t>A push must pull the box back too</a:t>
+              <a:t>The undone moves can’t be redone any more</a:t>
             </a:r>
             <a:endParaRPr/>
           </a:p>
@@ -17009,7 +17957,7 @@
                   <a:srgbClr val="DEE2E6"/>
                 </a:solidFill>
               </a:rPr>
-              <a:t>MoveCommand remembers the MoveResult</a:t>
+              <a:t>The move counter is the undo stack’s size</a:t>
             </a:r>
             <a:endParaRPr/>
           </a:p>
@@ -17060,7 +18008,7 @@
                 <a:cs typeface="Consolas"/>
                 <a:sym typeface="Consolas"/>
               </a:rPr>
-              <a:t>private MoveResult _result;</a:t>
+              <a:t>public void Execute(ICommand command)</a:t>
             </a:r>
             <a:endParaRPr sz="1000">
               <a:solidFill>
@@ -17098,7 +18046,7 @@
                 <a:cs typeface="Consolas"/>
                 <a:sym typeface="Consolas"/>
               </a:rPr>
-              <a:t/>
+              <a:t>{</a:t>
             </a:r>
             <a:endParaRPr sz="1000">
               <a:solidFill>
@@ -17136,7 +18084,7 @@
                 <a:cs typeface="Consolas"/>
                 <a:sym typeface="Consolas"/>
               </a:rPr>
-              <a:t>public void Execute() =&gt;</a:t>
+              <a:t>    command.Execute();</a:t>
             </a:r>
             <a:endParaRPr sz="1000">
               <a:solidFill>
@@ -17174,7 +18122,7 @@
                 <a:cs typeface="Consolas"/>
                 <a:sym typeface="Consolas"/>
               </a:rPr>
-              <a:t>    _result = level.Move(direction);</a:t>
+              <a:t>    _done.Push(command);</a:t>
             </a:r>
             <a:endParaRPr sz="1000">
               <a:solidFill>
@@ -17212,7 +18160,7 @@
                 <a:cs typeface="Consolas"/>
                 <a:sym typeface="Consolas"/>
               </a:rPr>
-              <a:t>public void Undo() =&gt;</a:t>
+              <a:t>    _undone.Clear();</a:t>
             </a:r>
             <a:endParaRPr sz="1000">
               <a:solidFill>
@@ -17250,7 +18198,7 @@
                 <a:cs typeface="Consolas"/>
                 <a:sym typeface="Consolas"/>
               </a:rPr>
-              <a:t>    level.UndoMove(direction, _result);</a:t>
+              <a:t>}</a:t>
             </a:r>
             <a:endParaRPr sz="1000">
               <a:solidFill>
@@ -17326,7 +18274,7 @@
                 <a:cs typeface="Consolas"/>
                 <a:sym typeface="Consolas"/>
               </a:rPr>
-              <a:t>// Level.cs</a:t>
+              <a:t>public void Undo()</a:t>
             </a:r>
             <a:endParaRPr sz="1000">
               <a:solidFill>
@@ -17364,7 +18312,7 @@
                 <a:cs typeface="Consolas"/>
                 <a:sym typeface="Consolas"/>
               </a:rPr>
-              <a:t>public void UndoMove(Point direction,</a:t>
+              <a:t>{</a:t>
             </a:r>
             <a:endParaRPr sz="1000">
               <a:solidFill>
@@ -17402,7 +18350,7 @@
                 <a:cs typeface="Consolas"/>
                 <a:sym typeface="Consolas"/>
               </a:rPr>
-              <a:t>                     MoveResult result)</a:t>
+              <a:t>    if (_done.TryPop(out ICommand command))</a:t>
             </a:r>
             <a:endParaRPr sz="1000">
               <a:solidFill>
@@ -17440,7 +18388,7 @@
                 <a:cs typeface="Consolas"/>
                 <a:sym typeface="Consolas"/>
               </a:rPr>
-              <a:t>{</a:t>
+              <a:t>    {</a:t>
             </a:r>
             <a:endParaRPr sz="1000">
               <a:solidFill>
@@ -17478,7 +18426,7 @@
                 <a:cs typeface="Consolas"/>
                 <a:sym typeface="Consolas"/>
               </a:rPr>
-              <a:t>    if (result == MoveResult.Pushed)</a:t>
+              <a:t>        command.Undo();</a:t>
             </a:r>
             <a:endParaRPr sz="1000">
               <a:solidFill>
@@ -17516,7 +18464,7 @@
                 <a:cs typeface="Consolas"/>
                 <a:sym typeface="Consolas"/>
               </a:rPr>
-              <a:t>    {</a:t>
+              <a:t>        _undone.Push(command);</a:t>
             </a:r>
             <a:endParaRPr sz="1000">
               <a:solidFill>
@@ -17554,7 +18502,7 @@
                 <a:cs typeface="Consolas"/>
                 <a:sym typeface="Consolas"/>
               </a:rPr>
-              <a:t>        _boxes.Remove(Player + direction);</a:t>
+              <a:t>    }</a:t>
             </a:r>
             <a:endParaRPr sz="1000">
               <a:solidFill>
@@ -17592,7 +18540,7 @@
                 <a:cs typeface="Consolas"/>
                 <a:sym typeface="Consolas"/>
               </a:rPr>
-              <a:t>        _boxes.Add(Player);</a:t>
+              <a:t>}</a:t>
             </a:r>
             <a:endParaRPr sz="1000">
               <a:solidFill>
@@ -17630,7 +18578,7 @@
                 <a:cs typeface="Consolas"/>
                 <a:sym typeface="Consolas"/>
               </a:rPr>
-              <a:t>    }</a:t>
+              <a:t/>
             </a:r>
             <a:endParaRPr sz="1000">
               <a:solidFill>
@@ -17668,7 +18616,7 @@
                 <a:cs typeface="Consolas"/>
                 <a:sym typeface="Consolas"/>
               </a:rPr>
-              <a:t>    if (result != MoveResult.Blocked)</a:t>
+              <a:t>// Redo: the same, the other way around</a:t>
             </a:r>
             <a:endParaRPr sz="1000">
               <a:solidFill>
@@ -17683,82 +18631,6 @@
               <a:sym typeface="Consolas"/>
             </a:endParaRPr>
           </a:p>
-          <a:p>
-            <a:pPr indent="0" lvl="0" marL="0" rtl="0" algn="l">
-              <a:lnSpc>
-                <a:spcPct val="115000"/>
-              </a:lnSpc>
-              <a:spcBef>
-                <a:spcPts val="0"/>
-              </a:spcBef>
-              <a:spcAft>
-                <a:spcPts val="0"/>
-              </a:spcAft>
-              <a:buNone/>
-            </a:pPr>
-            <a:r>
-              <a:rPr lang="en" sz="1000">
-                <a:highlight>
-                  <a:schemeClr val="dk2"/>
-                </a:highlight>
-                <a:latin typeface="Consolas"/>
-                <a:ea typeface="Consolas"/>
-                <a:cs typeface="Consolas"/>
-                <a:sym typeface="Consolas"/>
-              </a:rPr>
-              <a:t>        Player -= direction;</a:t>
-            </a:r>
-            <a:endParaRPr sz="1000">
-              <a:solidFill>
-                <a:srgbClr val="CCCCCC"/>
-              </a:solidFill>
-              <a:highlight>
-                <a:schemeClr val="dk2"/>
-              </a:highlight>
-              <a:latin typeface="Consolas"/>
-              <a:ea typeface="Consolas"/>
-              <a:cs typeface="Consolas"/>
-              <a:sym typeface="Consolas"/>
-            </a:endParaRPr>
-          </a:p>
-          <a:p>
-            <a:pPr indent="0" lvl="0" marL="0" rtl="0" algn="l">
-              <a:lnSpc>
-                <a:spcPct val="115000"/>
-              </a:lnSpc>
-              <a:spcBef>
-                <a:spcPts val="0"/>
-              </a:spcBef>
-              <a:spcAft>
-                <a:spcPts val="0"/>
-              </a:spcAft>
-              <a:buNone/>
-            </a:pPr>
-            <a:r>
-              <a:rPr lang="en" sz="1000">
-                <a:highlight>
-                  <a:schemeClr val="dk2"/>
-                </a:highlight>
-                <a:latin typeface="Consolas"/>
-                <a:ea typeface="Consolas"/>
-                <a:cs typeface="Consolas"/>
-                <a:sym typeface="Consolas"/>
-              </a:rPr>
-              <a:t>}</a:t>
-            </a:r>
-            <a:endParaRPr sz="1000">
-              <a:solidFill>
-                <a:srgbClr val="CCCCCC"/>
-              </a:solidFill>
-              <a:highlight>
-                <a:schemeClr val="dk2"/>
-              </a:highlight>
-              <a:latin typeface="Consolas"/>
-              <a:ea typeface="Consolas"/>
-              <a:cs typeface="Consolas"/>
-              <a:sym typeface="Consolas"/>
-            </a:endParaRPr>
-          </a:p>
         </p:txBody>
       </p:sp>
     </p:spTree>
@@ -17769,879 +18641,7 @@
 </p:sld>
 </file>
 
-<file path=ppt/slides/slide33.xml><?xml version="1.0" encoding="utf-8"?>
-<p:sld xmlns:a="http://schemas.openxmlformats.org/drawingml/2006/main" xmlns:p="http://schemas.openxmlformats.org/presentationml/2006/main" xmlns:r="http://schemas.openxmlformats.org/officeDocument/2006/relationships">
-  <p:cSld>
-    <p:spTree>
-      <p:nvGrpSpPr>
-        <p:cNvPr id="1" name=""/>
-        <p:cNvGrpSpPr/>
-        <p:nvPr/>
-      </p:nvGrpSpPr>
-      <p:grpSpPr/>
-      <p:sp>
-        <p:nvSpPr>
-          <p:cNvPr id="140" name="Google Shape;140;p23"/>
-          <p:cNvSpPr txBox="1"/>
-          <p:nvPr>
-            <p:ph type="title"/>
-          </p:nvPr>
-        </p:nvSpPr>
-        <p:spPr>
-          <a:xfrm>
-            <a:off x="311700" y="195615"/>
-            <a:ext cx="8520600" cy="572700"/>
-          </a:xfrm>
-          <a:prstGeom prst="rect">
-            <a:avLst/>
-          </a:prstGeom>
-        </p:spPr>
-        <p:txBody>
-          <a:bodyPr anchorCtr="0" anchor="t" bIns="91425" lIns="91425" spcFirstLastPara="1" rIns="91425" wrap="square" tIns="91425">
-            <a:normAutofit fontScale="90000"/>
-          </a:bodyPr>
-          <a:lstStyle/>
-          <a:p>
-            <a:pPr indent="0" lvl="0" marL="0" rtl="0" algn="l">
-              <a:spcBef>
-                <a:spcPts val="0"/>
-              </a:spcBef>
-              <a:spcAft>
-                <a:spcPts val="0"/>
-              </a:spcAft>
-              <a:buNone/>
-            </a:pPr>
-            <a:r>
-              <a:rPr lang="en"/>
-              <a:t>Command History</a:t>
-            </a:r>
-            <a:endParaRPr/>
-          </a:p>
-        </p:txBody>
-      </p:sp>
-      <p:sp>
-        <p:nvSpPr>
-          <p:cNvPr id="293" name="Google Shape;293;p45"/>
-          <p:cNvSpPr txBox="1"/>
-          <p:nvPr>
-            <p:ph type="title"/>
-          </p:nvPr>
-        </p:nvSpPr>
-        <p:spPr>
-          <a:xfrm>
-            <a:off x="311700" y="1152475"/>
-            <a:ext cx="3700000" cy="3500000"/>
-          </a:xfrm>
-          <a:prstGeom prst="rect">
-            <a:avLst/>
-          </a:prstGeom>
-        </p:spPr>
-        <p:txBody>
-          <a:bodyPr anchorCtr="0" anchor="t" bIns="91425" lIns="91425" spcFirstLastPara="1" rIns="91425" wrap="square" tIns="91425">
-            <a:normAutofit fontScale="90000"/>
-          </a:bodyPr>
-          <a:lstStyle/>
-          <a:p>
-            <a:pPr indent="-330200" lvl="0" marL="457200" rtl="0" algn="l">
-              <a:buClr>
-                <a:srgbClr val="DEE2E6"/>
-              </a:buClr>
-              <a:spcBef>
-                <a:spcPts val="0"/>
-              </a:spcBef>
-              <a:spcAft>
-                <a:spcPts val="0"/>
-              </a:spcAft>
-              <a:buSzPts val="1600"/>
-              <a:buChar char="●"/>
-            </a:pPr>
-            <a:r>
-              <a:rPr lang="en" sz="1600">
-                <a:solidFill>
-                  <a:srgbClr val="DEE2E6"/>
-                </a:solidFill>
-              </a:rPr>
-              <a:t>Two stacks: done and undone</a:t>
-            </a:r>
-            <a:endParaRPr/>
-          </a:p>
-          <a:p>
-            <a:pPr indent="-330200" lvl="0" marL="457200" rtl="0" algn="l">
-              <a:buClr>
-                <a:srgbClr val="DEE2E6"/>
-              </a:buClr>
-              <a:spcBef>
-                <a:spcPts val="0"/>
-              </a:spcBef>
-              <a:spcAft>
-                <a:spcPts val="0"/>
-              </a:spcAft>
-              <a:buSzPts val="1600"/>
-              <a:buChar char="●"/>
-            </a:pPr>
-            <a:r>
-              <a:rPr lang="en" sz="1600">
-                <a:solidFill>
-                  <a:srgbClr val="DEE2E6"/>
-                </a:solidFill>
-              </a:rPr>
-              <a:t>Z undoes, Y redoes</a:t>
-            </a:r>
-            <a:endParaRPr/>
-          </a:p>
-          <a:p>
-            <a:pPr indent="-330200" lvl="0" marL="457200" rtl="0" algn="l">
-              <a:buClr>
-                <a:srgbClr val="DEE2E6"/>
-              </a:buClr>
-              <a:spcBef>
-                <a:spcPts val="0"/>
-              </a:spcBef>
-              <a:spcAft>
-                <a:spcPts val="0"/>
-              </a:spcAft>
-              <a:buSzPts val="1600"/>
-              <a:buChar char="●"/>
-            </a:pPr>
-            <a:r>
-              <a:rPr lang="en" sz="1600">
-                <a:solidFill>
-                  <a:srgbClr val="DEE2E6"/>
-                </a:solidFill>
-              </a:rPr>
-              <a:t>A new command clears the redo stack</a:t>
-            </a:r>
-            <a:endParaRPr/>
-          </a:p>
-          <a:p>
-            <a:pPr indent="-317500" lvl="1" marL="914400" rtl="0" algn="l">
-              <a:buClr>
-                <a:srgbClr val="6C757D"/>
-              </a:buClr>
-              <a:spcBef>
-                <a:spcPts val="0"/>
-              </a:spcBef>
-              <a:spcAft>
-                <a:spcPts val="0"/>
-              </a:spcAft>
-              <a:buSzPts val="1400"/>
-              <a:buChar char="○"/>
-            </a:pPr>
-            <a:r>
-              <a:rPr lang="en" sz="1400">
-                <a:solidFill>
-                  <a:srgbClr val="6C757D"/>
-                </a:solidFill>
-              </a:rPr>
-              <a:t>The undone moves can’t be redone any more</a:t>
-            </a:r>
-            <a:endParaRPr/>
-          </a:p>
-          <a:p>
-            <a:pPr indent="-330200" lvl="0" marL="457200" rtl="0" algn="l">
-              <a:buClr>
-                <a:srgbClr val="DEE2E6"/>
-              </a:buClr>
-              <a:spcBef>
-                <a:spcPts val="0"/>
-              </a:spcBef>
-              <a:spcAft>
-                <a:spcPts val="0"/>
-              </a:spcAft>
-              <a:buSzPts val="1600"/>
-              <a:buChar char="●"/>
-            </a:pPr>
-            <a:r>
-              <a:rPr lang="en" sz="1600">
-                <a:solidFill>
-                  <a:srgbClr val="DEE2E6"/>
-                </a:solidFill>
-              </a:rPr>
-              <a:t>The move counter is the undo stack’s size</a:t>
-            </a:r>
-            <a:endParaRPr/>
-          </a:p>
-        </p:txBody>
-      </p:sp>
-      <p:sp>
-        <p:nvSpPr>
-          <p:cNvPr id="141" name="Google Shape;141;p23"/>
-          <p:cNvSpPr txBox="1"/>
-          <p:nvPr>
-            <p:ph idx="2" type="body"/>
-          </p:nvPr>
-        </p:nvSpPr>
-        <p:spPr>
-          <a:xfrm>
-            <a:off x="4150000" y="1152475"/>
-            <a:ext cx="4750000" cy="3600000"/>
-          </a:xfrm>
-          <a:prstGeom prst="rect">
-            <a:avLst/>
-          </a:prstGeom>
-        </p:spPr>
-        <p:txBody>
-          <a:bodyPr anchorCtr="0" anchor="t" bIns="91425" lIns="91425" spcFirstLastPara="1" rIns="91425" wrap="square" tIns="91425">
-            <a:noAutofit/>
-          </a:bodyPr>
-          <a:lstStyle/>
-          <a:p>
-            <a:pPr indent="0" lvl="0" marL="0" rtl="0" algn="l">
-              <a:lnSpc>
-                <a:spcPct val="115000"/>
-              </a:lnSpc>
-              <a:spcBef>
-                <a:spcPts val="0"/>
-              </a:spcBef>
-              <a:spcAft>
-                <a:spcPts val="0"/>
-              </a:spcAft>
-              <a:buNone/>
-            </a:pPr>
-            <a:r>
-              <a:rPr lang="en" sz="1000">
-                <a:highlight>
-                  <a:schemeClr val="dk2"/>
-                </a:highlight>
-                <a:latin typeface="Consolas"/>
-                <a:ea typeface="Consolas"/>
-                <a:cs typeface="Consolas"/>
-                <a:sym typeface="Consolas"/>
-              </a:rPr>
-              <a:t>public void Execute(ICommand command)</a:t>
-            </a:r>
-            <a:endParaRPr sz="1000">
-              <a:solidFill>
-                <a:srgbClr val="CCCCCC"/>
-              </a:solidFill>
-              <a:highlight>
-                <a:schemeClr val="dk2"/>
-              </a:highlight>
-              <a:latin typeface="Consolas"/>
-              <a:ea typeface="Consolas"/>
-              <a:cs typeface="Consolas"/>
-              <a:sym typeface="Consolas"/>
-            </a:endParaRPr>
-          </a:p>
-          <a:p>
-            <a:pPr indent="0" lvl="0" marL="0" rtl="0" algn="l">
-              <a:lnSpc>
-                <a:spcPct val="115000"/>
-              </a:lnSpc>
-              <a:spcBef>
-                <a:spcPts val="0"/>
-              </a:spcBef>
-              <a:spcAft>
-                <a:spcPts val="0"/>
-              </a:spcAft>
-              <a:buNone/>
-            </a:pPr>
-            <a:r>
-              <a:rPr lang="en" sz="1000">
-                <a:highlight>
-                  <a:schemeClr val="dk2"/>
-                </a:highlight>
-                <a:latin typeface="Consolas"/>
-                <a:ea typeface="Consolas"/>
-                <a:cs typeface="Consolas"/>
-                <a:sym typeface="Consolas"/>
-              </a:rPr>
-              <a:t>{</a:t>
-            </a:r>
-            <a:endParaRPr sz="1000">
-              <a:solidFill>
-                <a:srgbClr val="CCCCCC"/>
-              </a:solidFill>
-              <a:highlight>
-                <a:schemeClr val="dk2"/>
-              </a:highlight>
-              <a:latin typeface="Consolas"/>
-              <a:ea typeface="Consolas"/>
-              <a:cs typeface="Consolas"/>
-              <a:sym typeface="Consolas"/>
-            </a:endParaRPr>
-          </a:p>
-          <a:p>
-            <a:pPr indent="0" lvl="0" marL="0" rtl="0" algn="l">
-              <a:lnSpc>
-                <a:spcPct val="115000"/>
-              </a:lnSpc>
-              <a:spcBef>
-                <a:spcPts val="0"/>
-              </a:spcBef>
-              <a:spcAft>
-                <a:spcPts val="0"/>
-              </a:spcAft>
-              <a:buNone/>
-            </a:pPr>
-            <a:r>
-              <a:rPr lang="en" sz="1000">
-                <a:highlight>
-                  <a:schemeClr val="dk2"/>
-                </a:highlight>
-                <a:latin typeface="Consolas"/>
-                <a:ea typeface="Consolas"/>
-                <a:cs typeface="Consolas"/>
-                <a:sym typeface="Consolas"/>
-              </a:rPr>
-              <a:t>    command.Execute();</a:t>
-            </a:r>
-            <a:endParaRPr sz="1000">
-              <a:solidFill>
-                <a:srgbClr val="CCCCCC"/>
-              </a:solidFill>
-              <a:highlight>
-                <a:schemeClr val="dk2"/>
-              </a:highlight>
-              <a:latin typeface="Consolas"/>
-              <a:ea typeface="Consolas"/>
-              <a:cs typeface="Consolas"/>
-              <a:sym typeface="Consolas"/>
-            </a:endParaRPr>
-          </a:p>
-          <a:p>
-            <a:pPr indent="0" lvl="0" marL="0" rtl="0" algn="l">
-              <a:lnSpc>
-                <a:spcPct val="115000"/>
-              </a:lnSpc>
-              <a:spcBef>
-                <a:spcPts val="0"/>
-              </a:spcBef>
-              <a:spcAft>
-                <a:spcPts val="0"/>
-              </a:spcAft>
-              <a:buNone/>
-            </a:pPr>
-            <a:r>
-              <a:rPr lang="en" sz="1000">
-                <a:highlight>
-                  <a:schemeClr val="dk2"/>
-                </a:highlight>
-                <a:latin typeface="Consolas"/>
-                <a:ea typeface="Consolas"/>
-                <a:cs typeface="Consolas"/>
-                <a:sym typeface="Consolas"/>
-              </a:rPr>
-              <a:t>    _done.Push(command);</a:t>
-            </a:r>
-            <a:endParaRPr sz="1000">
-              <a:solidFill>
-                <a:srgbClr val="CCCCCC"/>
-              </a:solidFill>
-              <a:highlight>
-                <a:schemeClr val="dk2"/>
-              </a:highlight>
-              <a:latin typeface="Consolas"/>
-              <a:ea typeface="Consolas"/>
-              <a:cs typeface="Consolas"/>
-              <a:sym typeface="Consolas"/>
-            </a:endParaRPr>
-          </a:p>
-          <a:p>
-            <a:pPr indent="0" lvl="0" marL="0" rtl="0" algn="l">
-              <a:lnSpc>
-                <a:spcPct val="115000"/>
-              </a:lnSpc>
-              <a:spcBef>
-                <a:spcPts val="0"/>
-              </a:spcBef>
-              <a:spcAft>
-                <a:spcPts val="0"/>
-              </a:spcAft>
-              <a:buNone/>
-            </a:pPr>
-            <a:r>
-              <a:rPr lang="en" sz="1000">
-                <a:highlight>
-                  <a:schemeClr val="dk2"/>
-                </a:highlight>
-                <a:latin typeface="Consolas"/>
-                <a:ea typeface="Consolas"/>
-                <a:cs typeface="Consolas"/>
-                <a:sym typeface="Consolas"/>
-              </a:rPr>
-              <a:t>    _undone.Clear();</a:t>
-            </a:r>
-            <a:endParaRPr sz="1000">
-              <a:solidFill>
-                <a:srgbClr val="CCCCCC"/>
-              </a:solidFill>
-              <a:highlight>
-                <a:schemeClr val="dk2"/>
-              </a:highlight>
-              <a:latin typeface="Consolas"/>
-              <a:ea typeface="Consolas"/>
-              <a:cs typeface="Consolas"/>
-              <a:sym typeface="Consolas"/>
-            </a:endParaRPr>
-          </a:p>
-          <a:p>
-            <a:pPr indent="0" lvl="0" marL="0" rtl="0" algn="l">
-              <a:lnSpc>
-                <a:spcPct val="115000"/>
-              </a:lnSpc>
-              <a:spcBef>
-                <a:spcPts val="0"/>
-              </a:spcBef>
-              <a:spcAft>
-                <a:spcPts val="0"/>
-              </a:spcAft>
-              <a:buNone/>
-            </a:pPr>
-            <a:r>
-              <a:rPr lang="en" sz="1000">
-                <a:highlight>
-                  <a:schemeClr val="dk2"/>
-                </a:highlight>
-                <a:latin typeface="Consolas"/>
-                <a:ea typeface="Consolas"/>
-                <a:cs typeface="Consolas"/>
-                <a:sym typeface="Consolas"/>
-              </a:rPr>
-              <a:t>}</a:t>
-            </a:r>
-            <a:endParaRPr sz="1000">
-              <a:solidFill>
-                <a:srgbClr val="CCCCCC"/>
-              </a:solidFill>
-              <a:highlight>
-                <a:schemeClr val="dk2"/>
-              </a:highlight>
-              <a:latin typeface="Consolas"/>
-              <a:ea typeface="Consolas"/>
-              <a:cs typeface="Consolas"/>
-              <a:sym typeface="Consolas"/>
-            </a:endParaRPr>
-          </a:p>
-          <a:p>
-            <a:pPr indent="0" lvl="0" marL="0" rtl="0" algn="l">
-              <a:lnSpc>
-                <a:spcPct val="115000"/>
-              </a:lnSpc>
-              <a:spcBef>
-                <a:spcPts val="0"/>
-              </a:spcBef>
-              <a:spcAft>
-                <a:spcPts val="0"/>
-              </a:spcAft>
-              <a:buNone/>
-            </a:pPr>
-            <a:r>
-              <a:rPr lang="en" sz="1000">
-                <a:highlight>
-                  <a:schemeClr val="dk2"/>
-                </a:highlight>
-                <a:latin typeface="Consolas"/>
-                <a:ea typeface="Consolas"/>
-                <a:cs typeface="Consolas"/>
-                <a:sym typeface="Consolas"/>
-              </a:rPr>
-              <a:t/>
-            </a:r>
-            <a:endParaRPr sz="1000">
-              <a:solidFill>
-                <a:srgbClr val="CCCCCC"/>
-              </a:solidFill>
-              <a:highlight>
-                <a:schemeClr val="dk2"/>
-              </a:highlight>
-              <a:latin typeface="Consolas"/>
-              <a:ea typeface="Consolas"/>
-              <a:cs typeface="Consolas"/>
-              <a:sym typeface="Consolas"/>
-            </a:endParaRPr>
-          </a:p>
-          <a:p>
-            <a:pPr indent="0" lvl="0" marL="0" rtl="0" algn="l">
-              <a:lnSpc>
-                <a:spcPct val="115000"/>
-              </a:lnSpc>
-              <a:spcBef>
-                <a:spcPts val="0"/>
-              </a:spcBef>
-              <a:spcAft>
-                <a:spcPts val="0"/>
-              </a:spcAft>
-              <a:buNone/>
-            </a:pPr>
-            <a:r>
-              <a:rPr lang="en" sz="1000">
-                <a:highlight>
-                  <a:schemeClr val="dk2"/>
-                </a:highlight>
-                <a:latin typeface="Consolas"/>
-                <a:ea typeface="Consolas"/>
-                <a:cs typeface="Consolas"/>
-                <a:sym typeface="Consolas"/>
-              </a:rPr>
-              <a:t>public void Undo()</a:t>
-            </a:r>
-            <a:endParaRPr sz="1000">
-              <a:solidFill>
-                <a:srgbClr val="CCCCCC"/>
-              </a:solidFill>
-              <a:highlight>
-                <a:schemeClr val="dk2"/>
-              </a:highlight>
-              <a:latin typeface="Consolas"/>
-              <a:ea typeface="Consolas"/>
-              <a:cs typeface="Consolas"/>
-              <a:sym typeface="Consolas"/>
-            </a:endParaRPr>
-          </a:p>
-          <a:p>
-            <a:pPr indent="0" lvl="0" marL="0" rtl="0" algn="l">
-              <a:lnSpc>
-                <a:spcPct val="115000"/>
-              </a:lnSpc>
-              <a:spcBef>
-                <a:spcPts val="0"/>
-              </a:spcBef>
-              <a:spcAft>
-                <a:spcPts val="0"/>
-              </a:spcAft>
-              <a:buNone/>
-            </a:pPr>
-            <a:r>
-              <a:rPr lang="en" sz="1000">
-                <a:highlight>
-                  <a:schemeClr val="dk2"/>
-                </a:highlight>
-                <a:latin typeface="Consolas"/>
-                <a:ea typeface="Consolas"/>
-                <a:cs typeface="Consolas"/>
-                <a:sym typeface="Consolas"/>
-              </a:rPr>
-              <a:t>{</a:t>
-            </a:r>
-            <a:endParaRPr sz="1000">
-              <a:solidFill>
-                <a:srgbClr val="CCCCCC"/>
-              </a:solidFill>
-              <a:highlight>
-                <a:schemeClr val="dk2"/>
-              </a:highlight>
-              <a:latin typeface="Consolas"/>
-              <a:ea typeface="Consolas"/>
-              <a:cs typeface="Consolas"/>
-              <a:sym typeface="Consolas"/>
-            </a:endParaRPr>
-          </a:p>
-          <a:p>
-            <a:pPr indent="0" lvl="0" marL="0" rtl="0" algn="l">
-              <a:lnSpc>
-                <a:spcPct val="115000"/>
-              </a:lnSpc>
-              <a:spcBef>
-                <a:spcPts val="0"/>
-              </a:spcBef>
-              <a:spcAft>
-                <a:spcPts val="0"/>
-              </a:spcAft>
-              <a:buNone/>
-            </a:pPr>
-            <a:r>
-              <a:rPr lang="en" sz="1000">
-                <a:highlight>
-                  <a:schemeClr val="dk2"/>
-                </a:highlight>
-                <a:latin typeface="Consolas"/>
-                <a:ea typeface="Consolas"/>
-                <a:cs typeface="Consolas"/>
-                <a:sym typeface="Consolas"/>
-              </a:rPr>
-              <a:t>    if (_done.TryPop(out ICommand command))</a:t>
-            </a:r>
-            <a:endParaRPr sz="1000">
-              <a:solidFill>
-                <a:srgbClr val="CCCCCC"/>
-              </a:solidFill>
-              <a:highlight>
-                <a:schemeClr val="dk2"/>
-              </a:highlight>
-              <a:latin typeface="Consolas"/>
-              <a:ea typeface="Consolas"/>
-              <a:cs typeface="Consolas"/>
-              <a:sym typeface="Consolas"/>
-            </a:endParaRPr>
-          </a:p>
-          <a:p>
-            <a:pPr indent="0" lvl="0" marL="0" rtl="0" algn="l">
-              <a:lnSpc>
-                <a:spcPct val="115000"/>
-              </a:lnSpc>
-              <a:spcBef>
-                <a:spcPts val="0"/>
-              </a:spcBef>
-              <a:spcAft>
-                <a:spcPts val="0"/>
-              </a:spcAft>
-              <a:buNone/>
-            </a:pPr>
-            <a:r>
-              <a:rPr lang="en" sz="1000">
-                <a:highlight>
-                  <a:schemeClr val="dk2"/>
-                </a:highlight>
-                <a:latin typeface="Consolas"/>
-                <a:ea typeface="Consolas"/>
-                <a:cs typeface="Consolas"/>
-                <a:sym typeface="Consolas"/>
-              </a:rPr>
-              <a:t>    {</a:t>
-            </a:r>
-            <a:endParaRPr sz="1000">
-              <a:solidFill>
-                <a:srgbClr val="CCCCCC"/>
-              </a:solidFill>
-              <a:highlight>
-                <a:schemeClr val="dk2"/>
-              </a:highlight>
-              <a:latin typeface="Consolas"/>
-              <a:ea typeface="Consolas"/>
-              <a:cs typeface="Consolas"/>
-              <a:sym typeface="Consolas"/>
-            </a:endParaRPr>
-          </a:p>
-          <a:p>
-            <a:pPr indent="0" lvl="0" marL="0" rtl="0" algn="l">
-              <a:lnSpc>
-                <a:spcPct val="115000"/>
-              </a:lnSpc>
-              <a:spcBef>
-                <a:spcPts val="0"/>
-              </a:spcBef>
-              <a:spcAft>
-                <a:spcPts val="0"/>
-              </a:spcAft>
-              <a:buNone/>
-            </a:pPr>
-            <a:r>
-              <a:rPr lang="en" sz="1000">
-                <a:highlight>
-                  <a:schemeClr val="dk2"/>
-                </a:highlight>
-                <a:latin typeface="Consolas"/>
-                <a:ea typeface="Consolas"/>
-                <a:cs typeface="Consolas"/>
-                <a:sym typeface="Consolas"/>
-              </a:rPr>
-              <a:t>        command.Undo();</a:t>
-            </a:r>
-            <a:endParaRPr sz="1000">
-              <a:solidFill>
-                <a:srgbClr val="CCCCCC"/>
-              </a:solidFill>
-              <a:highlight>
-                <a:schemeClr val="dk2"/>
-              </a:highlight>
-              <a:latin typeface="Consolas"/>
-              <a:ea typeface="Consolas"/>
-              <a:cs typeface="Consolas"/>
-              <a:sym typeface="Consolas"/>
-            </a:endParaRPr>
-          </a:p>
-          <a:p>
-            <a:pPr indent="0" lvl="0" marL="0" rtl="0" algn="l">
-              <a:lnSpc>
-                <a:spcPct val="115000"/>
-              </a:lnSpc>
-              <a:spcBef>
-                <a:spcPts val="0"/>
-              </a:spcBef>
-              <a:spcAft>
-                <a:spcPts val="0"/>
-              </a:spcAft>
-              <a:buNone/>
-            </a:pPr>
-            <a:r>
-              <a:rPr lang="en" sz="1000">
-                <a:highlight>
-                  <a:schemeClr val="dk2"/>
-                </a:highlight>
-                <a:latin typeface="Consolas"/>
-                <a:ea typeface="Consolas"/>
-                <a:cs typeface="Consolas"/>
-                <a:sym typeface="Consolas"/>
-              </a:rPr>
-              <a:t>        _undone.Push(command);</a:t>
-            </a:r>
-            <a:endParaRPr sz="1000">
-              <a:solidFill>
-                <a:srgbClr val="CCCCCC"/>
-              </a:solidFill>
-              <a:highlight>
-                <a:schemeClr val="dk2"/>
-              </a:highlight>
-              <a:latin typeface="Consolas"/>
-              <a:ea typeface="Consolas"/>
-              <a:cs typeface="Consolas"/>
-              <a:sym typeface="Consolas"/>
-            </a:endParaRPr>
-          </a:p>
-          <a:p>
-            <a:pPr indent="0" lvl="0" marL="0" rtl="0" algn="l">
-              <a:lnSpc>
-                <a:spcPct val="115000"/>
-              </a:lnSpc>
-              <a:spcBef>
-                <a:spcPts val="0"/>
-              </a:spcBef>
-              <a:spcAft>
-                <a:spcPts val="0"/>
-              </a:spcAft>
-              <a:buNone/>
-            </a:pPr>
-            <a:r>
-              <a:rPr lang="en" sz="1000">
-                <a:highlight>
-                  <a:schemeClr val="dk2"/>
-                </a:highlight>
-                <a:latin typeface="Consolas"/>
-                <a:ea typeface="Consolas"/>
-                <a:cs typeface="Consolas"/>
-                <a:sym typeface="Consolas"/>
-              </a:rPr>
-              <a:t>    }</a:t>
-            </a:r>
-            <a:endParaRPr sz="1000">
-              <a:solidFill>
-                <a:srgbClr val="CCCCCC"/>
-              </a:solidFill>
-              <a:highlight>
-                <a:schemeClr val="dk2"/>
-              </a:highlight>
-              <a:latin typeface="Consolas"/>
-              <a:ea typeface="Consolas"/>
-              <a:cs typeface="Consolas"/>
-              <a:sym typeface="Consolas"/>
-            </a:endParaRPr>
-          </a:p>
-          <a:p>
-            <a:pPr indent="0" lvl="0" marL="0" rtl="0" algn="l">
-              <a:lnSpc>
-                <a:spcPct val="115000"/>
-              </a:lnSpc>
-              <a:spcBef>
-                <a:spcPts val="0"/>
-              </a:spcBef>
-              <a:spcAft>
-                <a:spcPts val="0"/>
-              </a:spcAft>
-              <a:buNone/>
-            </a:pPr>
-            <a:r>
-              <a:rPr lang="en" sz="1000">
-                <a:highlight>
-                  <a:schemeClr val="dk2"/>
-                </a:highlight>
-                <a:latin typeface="Consolas"/>
-                <a:ea typeface="Consolas"/>
-                <a:cs typeface="Consolas"/>
-                <a:sym typeface="Consolas"/>
-              </a:rPr>
-              <a:t>}</a:t>
-            </a:r>
-            <a:endParaRPr sz="1000">
-              <a:solidFill>
-                <a:srgbClr val="CCCCCC"/>
-              </a:solidFill>
-              <a:highlight>
-                <a:schemeClr val="dk2"/>
-              </a:highlight>
-              <a:latin typeface="Consolas"/>
-              <a:ea typeface="Consolas"/>
-              <a:cs typeface="Consolas"/>
-              <a:sym typeface="Consolas"/>
-            </a:endParaRPr>
-          </a:p>
-          <a:p>
-            <a:pPr indent="0" lvl="0" marL="0" rtl="0" algn="l">
-              <a:lnSpc>
-                <a:spcPct val="115000"/>
-              </a:lnSpc>
-              <a:spcBef>
-                <a:spcPts val="0"/>
-              </a:spcBef>
-              <a:spcAft>
-                <a:spcPts val="0"/>
-              </a:spcAft>
-              <a:buNone/>
-            </a:pPr>
-            <a:r>
-              <a:rPr lang="en" sz="1000">
-                <a:highlight>
-                  <a:schemeClr val="dk2"/>
-                </a:highlight>
-                <a:latin typeface="Consolas"/>
-                <a:ea typeface="Consolas"/>
-                <a:cs typeface="Consolas"/>
-                <a:sym typeface="Consolas"/>
-              </a:rPr>
-              <a:t/>
-            </a:r>
-            <a:endParaRPr sz="1000">
-              <a:solidFill>
-                <a:srgbClr val="CCCCCC"/>
-              </a:solidFill>
-              <a:highlight>
-                <a:schemeClr val="dk2"/>
-              </a:highlight>
-              <a:latin typeface="Consolas"/>
-              <a:ea typeface="Consolas"/>
-              <a:cs typeface="Consolas"/>
-              <a:sym typeface="Consolas"/>
-            </a:endParaRPr>
-          </a:p>
-          <a:p>
-            <a:pPr indent="0" lvl="0" marL="0" rtl="0" algn="l">
-              <a:lnSpc>
-                <a:spcPct val="115000"/>
-              </a:lnSpc>
-              <a:spcBef>
-                <a:spcPts val="0"/>
-              </a:spcBef>
-              <a:spcAft>
-                <a:spcPts val="0"/>
-              </a:spcAft>
-              <a:buNone/>
-            </a:pPr>
-            <a:r>
-              <a:rPr lang="en" sz="1000">
-                <a:highlight>
-                  <a:schemeClr val="dk2"/>
-                </a:highlight>
-                <a:latin typeface="Consolas"/>
-                <a:ea typeface="Consolas"/>
-                <a:cs typeface="Consolas"/>
-                <a:sym typeface="Consolas"/>
-              </a:rPr>
-              <a:t>// Redo: the same, the other way around</a:t>
-            </a:r>
-            <a:endParaRPr sz="1000">
-              <a:solidFill>
-                <a:srgbClr val="CCCCCC"/>
-              </a:solidFill>
-              <a:highlight>
-                <a:schemeClr val="dk2"/>
-              </a:highlight>
-              <a:latin typeface="Consolas"/>
-              <a:ea typeface="Consolas"/>
-              <a:cs typeface="Consolas"/>
-              <a:sym typeface="Consolas"/>
-            </a:endParaRPr>
-          </a:p>
-        </p:txBody>
-      </p:sp>
-    </p:spTree>
-  </p:cSld>
-  <p:clrMapOvr>
-    <a:masterClrMapping/>
-  </p:clrMapOvr>
-</p:sld>
-</file>
-
-<file path=ppt/slides/slide34.xml><?xml version="1.0" encoding="utf-8"?>
+<file path=ppt/slides/slide31.xml><?xml version="1.0" encoding="utf-8"?>
 <p:sld xmlns:a="http://schemas.openxmlformats.org/drawingml/2006/main" xmlns:p="http://schemas.openxmlformats.org/presentationml/2006/main" xmlns:r="http://schemas.openxmlformats.org/officeDocument/2006/relationships">
   <p:cSld>
     <p:spTree>
@@ -18715,7 +18715,7 @@
 </p:sld>
 </file>
 
-<file path=ppt/slides/slide35.xml><?xml version="1.0" encoding="utf-8"?>
+<file path=ppt/slides/slide32.xml><?xml version="1.0" encoding="utf-8"?>
 <p:sld xmlns:a="http://schemas.openxmlformats.org/drawingml/2006/main" xmlns:p="http://schemas.openxmlformats.org/presentationml/2006/main" xmlns:r="http://schemas.openxmlformats.org/officeDocument/2006/relationships">
   <p:cSld>
     <p:spTree>
@@ -19032,7 +19032,7 @@
 </p:sld>
 </file>
 
-<file path=ppt/slides/slide36.xml><?xml version="1.0" encoding="utf-8"?>
+<file path=ppt/slides/slide33.xml><?xml version="1.0" encoding="utf-8"?>
 <p:sld xmlns:a="http://schemas.openxmlformats.org/drawingml/2006/main" xmlns:r="http://schemas.openxmlformats.org/officeDocument/2006/relationships" xmlns:mc="http://schemas.openxmlformats.org/markup-compatibility/2006" xmlns:mv="urn:schemas-microsoft-com:mac:vml" xmlns:p="http://schemas.openxmlformats.org/presentationml/2006/main" xmlns:c="http://schemas.openxmlformats.org/drawingml/2006/chart" xmlns:dgm="http://schemas.openxmlformats.org/drawingml/2006/diagram" xmlns:o="urn:schemas-microsoft-com:office:office" xmlns:v="urn:schemas-microsoft-com:vml" xmlns:pvml="urn:schemas-microsoft-com:office:powerpoint" xmlns:com="http://schemas.openxmlformats.org/drawingml/2006/compatibility" xmlns:p14="http://schemas.microsoft.com/office/powerpoint/2010/main" xmlns:p15="http://schemas.microsoft.com/office/powerpoint/2012/main" xmlns:ahyp="http://schemas.microsoft.com/office/drawing/2018/hyperlinkcolor">
   <p:cSld>
     <p:spTree>
@@ -19166,7 +19166,7 @@
 </p:sld>
 </file>
 
-<file path=ppt/slides/slide37.xml><?xml version="1.0" encoding="utf-8"?>
+<file path=ppt/slides/slide34.xml><?xml version="1.0" encoding="utf-8"?>
 <p:sld xmlns:a="http://schemas.openxmlformats.org/drawingml/2006/main" xmlns:p="http://schemas.openxmlformats.org/presentationml/2006/main" xmlns:r="http://schemas.openxmlformats.org/officeDocument/2006/relationships">
   <p:cSld>
     <p:spTree>
@@ -19319,6 +19319,1860 @@
   <p:clrMapOvr>
     <a:masterClrMapping/>
   </p:clrMapOvr>
+</p:sld>
+</file>
+
+<file path=ppt/slides/slide35.xml><?xml version="1.0" encoding="utf-8"?>
+<p:sld xmlns:a="http://schemas.openxmlformats.org/drawingml/2006/main" xmlns:p="http://schemas.openxmlformats.org/presentationml/2006/main" xmlns:r="http://schemas.openxmlformats.org/officeDocument/2006/relationships">
+  <p:cSld>
+    <p:spTree>
+      <p:nvGrpSpPr>
+        <p:cNvPr id="1" name=""/>
+        <p:cNvGrpSpPr/>
+        <p:nvPr/>
+      </p:nvGrpSpPr>
+      <p:grpSpPr/>
+      <p:sp>
+        <p:nvSpPr>
+          <p:cNvPr id="2" name="Title 1"/>
+          <p:cNvSpPr>
+            <a:spLocks noGrp="1"/>
+          </p:cNvSpPr>
+          <p:nvPr>
+            <p:ph type="title"/>
+          </p:nvPr>
+        </p:nvSpPr>
+        <p:spPr/>
+        <p:txBody>
+          <a:bodyPr/>
+          <a:lstStyle/>
+          <a:p>
+            <a:pPr indent="0" lvl="0" marL="0" rtl="0" algn="l">
+              <a:spcBef>
+                <a:spcPts val="0"/>
+              </a:spcBef>
+              <a:spcAft>
+                <a:spcPts val="0"/>
+              </a:spcAft>
+              <a:buNone/>
+            </a:pPr>
+            <a:r>
+              <a:rPr lang="en"/>
+              <a:t>Try It: Swap Two Keys</a:t>
+            </a:r>
+            <a:endParaRPr/>
+          </a:p>
+        </p:txBody>
+      </p:sp>
+      <p:sp>
+        <p:nvSpPr>
+          <p:cNvPr id="3" name="Text Placeholder 2"/>
+          <p:cNvSpPr>
+            <a:spLocks noGrp="1"/>
+          </p:cNvSpPr>
+          <p:nvPr>
+            <p:ph type="body" idx="1"/>
+          </p:nvPr>
+        </p:nvSpPr>
+        <p:spPr>
+          <a:xfrm>
+            <a:off x="311700" y="885950"/>
+            <a:ext cx="8520600" cy="1673352"/>
+          </a:xfrm>
+        </p:spPr>
+        <p:txBody>
+          <a:bodyPr/>
+          <a:lstStyle/>
+          <a:p>
+            <a:pPr indent="-330200" lvl="0" marL="457200" rtl="0" algn="l">
+              <a:spcBef>
+                <a:spcPts val="0"/>
+              </a:spcBef>
+              <a:spcAft>
+                <a:spcPts val="0"/>
+              </a:spcAft>
+              <a:buSzPts val="1600"/>
+              <a:buChar char="●"/>
+            </a:pPr>
+            <a:r>
+              <a:rPr lang="en"/>
+              <a:t>In Sokoban4, HandleInput:</a:t>
+            </a:r>
+            <a:endParaRPr/>
+          </a:p>
+          <a:p>
+            <a:pPr indent="-330200" lvl="0" marL="457200" rtl="0" algn="l">
+              <a:spcBef>
+                <a:spcPts val="0"/>
+              </a:spcBef>
+              <a:spcAft>
+                <a:spcPts val="0"/>
+              </a:spcAft>
+              <a:buSzPts val="1600"/>
+              <a:buChar char="●"/>
+            </a:pPr>
+            <a:r>
+              <a:rPr lang="en"/>
+              <a:t>Replace the four move lines with a Keys → direction dictionary</a:t>
+            </a:r>
+            <a:endParaRPr/>
+          </a:p>
+          <a:p>
+            <a:pPr indent="-330200" lvl="0" marL="457200" rtl="0" algn="l">
+              <a:spcBef>
+                <a:spcPts val="0"/>
+              </a:spcBef>
+              <a:spcAft>
+                <a:spcPts val="0"/>
+              </a:spcAft>
+              <a:buSzPts val="1600"/>
+              <a:buChar char="●"/>
+            </a:pPr>
+            <a:r>
+              <a:rPr lang="en"/>
+              <a:t>Add a key that swaps the up and down bindings while you play</a:t>
+            </a:r>
+            <a:endParaRPr/>
+          </a:p>
+          <a:p>
+            <a:pPr indent="-330200" lvl="0" marL="457200" rtl="0" algn="l">
+              <a:spcBef>
+                <a:spcPts val="0"/>
+              </a:spcBef>
+              <a:spcAft>
+                <a:spcPts val="0"/>
+              </a:spcAft>
+              <a:buSzPts val="1600"/>
+              <a:buChar char="●"/>
+            </a:pPr>
+            <a:r>
+              <a:rPr lang="en"/>
+              <a:t>What changed, and what didn’t need to know?</a:t>
+            </a:r>
+            <a:endParaRPr/>
+          </a:p>
+        </p:txBody>
+      </p:sp>
+    </p:spTree>
+  </p:cSld>
+  <p:clrMapOvr>
+    <a:masterClrMapping/>
+  </p:clrMapOvr>
+</p:sld>
+</file>
+
+<file path=ppt/slides/slide36.xml><?xml version="1.0" encoding="utf-8"?>
+<p:sld xmlns:a="http://schemas.openxmlformats.org/drawingml/2006/main" xmlns:r="http://schemas.openxmlformats.org/officeDocument/2006/relationships" xmlns:mc="http://schemas.openxmlformats.org/markup-compatibility/2006" xmlns:mv="urn:schemas-microsoft-com:mac:vml" xmlns:p="http://schemas.openxmlformats.org/presentationml/2006/main" xmlns:c="http://schemas.openxmlformats.org/drawingml/2006/chart" xmlns:dgm="http://schemas.openxmlformats.org/drawingml/2006/diagram" xmlns:o="urn:schemas-microsoft-com:office:office" xmlns:v="urn:schemas-microsoft-com:vml" xmlns:pvml="urn:schemas-microsoft-com:office:powerpoint" xmlns:com="http://schemas.openxmlformats.org/drawingml/2006/compatibility" xmlns:p14="http://schemas.microsoft.com/office/powerpoint/2010/main" xmlns:p15="http://schemas.microsoft.com/office/powerpoint/2012/main" xmlns:ahyp="http://schemas.microsoft.com/office/drawing/2018/hyperlinkcolor">
+  <p:cSld>
+    <p:spTree>
+      <p:nvGrpSpPr>
+        <p:cNvPr id="292" name="Shape 292"/>
+        <p:cNvGrpSpPr/>
+        <p:nvPr/>
+      </p:nvGrpSpPr>
+      <p:grpSpPr>
+        <a:xfrm>
+          <a:off x="0" y="0"/>
+          <a:ext cx="0" cy="0"/>
+          <a:chOff x="0" y="0"/>
+          <a:chExt cx="0" cy="0"/>
+        </a:xfrm>
+      </p:grpSpPr>
+      <p:sp>
+        <p:nvSpPr>
+          <p:cNvPr id="293" name="Google Shape;293;p45"/>
+          <p:cNvSpPr txBox="1"/>
+          <p:nvPr>
+            <p:ph type="title"/>
+          </p:nvPr>
+        </p:nvSpPr>
+        <p:spPr>
+          <a:xfrm>
+            <a:off x="311700" y="195615"/>
+            <a:ext cx="8520600" cy="572700"/>
+          </a:xfrm>
+          <a:prstGeom prst="rect">
+            <a:avLst/>
+          </a:prstGeom>
+        </p:spPr>
+        <p:txBody>
+          <a:bodyPr anchorCtr="0" anchor="t" bIns="91425" lIns="91425" spcFirstLastPara="1" rIns="91425" wrap="square" tIns="91425">
+            <a:normAutofit fontScale="90000"/>
+          </a:bodyPr>
+          <a:lstStyle/>
+          <a:p>
+            <a:pPr indent="0" lvl="0" marL="0" rtl="0" algn="l">
+              <a:spcBef>
+                <a:spcPts val="0"/>
+              </a:spcBef>
+              <a:spcAft>
+                <a:spcPts val="0"/>
+              </a:spcAft>
+              <a:buNone/>
+            </a:pPr>
+            <a:r>
+              <a:rPr lang="en">
+                <a:solidFill>
+                  <a:schemeClr val="accent5"/>
+                </a:solidFill>
+              </a:rPr>
+              <a:t>Exercises</a:t>
+            </a:r>
+            <a:endParaRPr>
+              <a:solidFill>
+                <a:schemeClr val="accent5"/>
+              </a:solidFill>
+            </a:endParaRPr>
+          </a:p>
+        </p:txBody>
+      </p:sp>
+      <p:sp>
+        <p:nvSpPr>
+          <p:cNvPr id="294" name="Google Shape;294;p45"/>
+          <p:cNvSpPr txBox="1"/>
+          <p:nvPr>
+            <p:ph idx="1" type="body"/>
+          </p:nvPr>
+        </p:nvSpPr>
+        <p:spPr>
+          <a:xfrm>
+            <a:off x="311700" y="885950"/>
+            <a:ext cx="8520600" cy="2057400"/>
+          </a:xfrm>
+          <a:prstGeom prst="rect">
+            <a:avLst/>
+          </a:prstGeom>
+        </p:spPr>
+        <p:txBody>
+          <a:bodyPr anchorCtr="0" anchor="t" bIns="91425" lIns="91425" spcFirstLastPara="1" rIns="91425" wrap="square" tIns="91425">
+            <a:normAutofit/>
+          </a:bodyPr>
+          <a:lstStyle/>
+          <a:p>
+            <a:pPr indent="-330200" lvl="0" marL="457200" rtl="0" algn="l">
+              <a:spcBef>
+                <a:spcPts val="0"/>
+              </a:spcBef>
+              <a:spcAft>
+                <a:spcPts val="0"/>
+              </a:spcAft>
+              <a:buSzPts val="1600"/>
+              <a:buChar char="●"/>
+            </a:pPr>
+            <a:r>
+              <a:rPr lang="en"/>
+              <a:t>Start from Sokoban4. Full instructions are on the course site.</a:t>
+            </a:r>
+            <a:endParaRPr/>
+          </a:p>
+          <a:p>
+            <a:pPr indent="-330200" lvl="0" marL="457200" rtl="0" algn="l">
+              <a:spcBef>
+                <a:spcPts val="0"/>
+              </a:spcBef>
+              <a:spcAft>
+                <a:spcPts val="0"/>
+              </a:spcAft>
+              <a:buSzPts val="1600"/>
+              <a:buChar char="●"/>
+            </a:pPr>
+            <a:r>
+              <a:rPr lang="en"/>
+              <a:t>A new level: design level8.txt. Is it solvable?</a:t>
+            </a:r>
+            <a:endParaRPr/>
+          </a:p>
+          <a:p>
+            <a:pPr indent="-330200" lvl="0" marL="457200" rtl="0" algn="l">
+              <a:spcBef>
+                <a:spcPts val="0"/>
+              </a:spcBef>
+              <a:spcAft>
+                <a:spcPts val="0"/>
+              </a:spcAft>
+              <a:buSzPts val="1600"/>
+              <a:buChar char="●"/>
+            </a:pPr>
+            <a:r>
+              <a:rPr lang="en"/>
+              <a:t>Two more tests: pushing a box off a goal, walking onto a goal</a:t>
+            </a:r>
+            <a:endParaRPr/>
+          </a:p>
+          <a:p>
+            <a:pPr indent="-330200" lvl="0" marL="457200" rtl="0" algn="l">
+              <a:spcBef>
+                <a:spcPts val="0"/>
+              </a:spcBef>
+              <a:spcAft>
+                <a:spcPts val="0"/>
+              </a:spcAft>
+              <a:buSzPts val="1600"/>
+              <a:buChar char="●"/>
+            </a:pPr>
+            <a:r>
+              <a:rPr lang="en"/>
+              <a:t>Test first: boxes can’t be pushed onto ice (~)</a:t>
+            </a:r>
+            <a:endParaRPr/>
+          </a:p>
+          <a:p>
+            <a:pPr indent="-330200" lvl="0" marL="457200" rtl="0" algn="l">
+              <a:spcBef>
+                <a:spcPts val="0"/>
+              </a:spcBef>
+              <a:spcAft>
+                <a:spcPts val="0"/>
+              </a:spcAft>
+              <a:buSzPts val="1600"/>
+              <a:buChar char="●"/>
+            </a:pPr>
+            <a:r>
+              <a:rPr lang="en"/>
+              <a:t>Replay: when a level is solved, replay the solution</a:t>
+            </a:r>
+            <a:endParaRPr/>
+          </a:p>
+        </p:txBody>
+      </p:sp>
+    </p:spTree>
+  </p:cSld>
+  <p:clrMapOvr>
+    <a:masterClrMapping/>
+  </p:clrMapOvr>
+  <p:timing>
+    <p:tnLst>
+      <p:par>
+        <p:cTn dur="indefinite" nodeType="tmRoot" restart="never">
+          <p:childTnLst>
+            <p:seq concurrent="1" nextAc="seek">
+              <p:cTn dur="indefinite" id="2" nodeType="mainSeq">
+                <p:childTnLst>
+                  <p:par>
+                    <p:cTn fill="hold">
+                      <p:stCondLst>
+                        <p:cond delay="indefinite"/>
+                      </p:stCondLst>
+                      <p:childTnLst>
+                        <p:par>
+                          <p:cTn fill="hold">
+                            <p:stCondLst>
+                              <p:cond delay="0"/>
+                            </p:stCondLst>
+                            <p:childTnLst>
+                              <p:par>
+                                <p:cTn fill="hold" nodeType="clickEffect" presetClass="entr" presetID="1" presetSubtype="0">
+                                  <p:stCondLst>
+                                    <p:cond delay="0"/>
+                                  </p:stCondLst>
+                                  <p:childTnLst>
+                                    <p:set>
+                                      <p:cBhvr>
+                                        <p:cTn dur="1" fill="hold">
+                                          <p:stCondLst>
+                                            <p:cond delay="0"/>
+                                          </p:stCondLst>
+                                        </p:cTn>
+                                        <p:tgtEl>
+                                          <p:spTgt spid="294">
+                                            <p:txEl>
+                                              <p:pRg end="0" st="0"/>
+                                            </p:txEl>
+                                          </p:spTgt>
+                                        </p:tgtEl>
+                                        <p:attrNameLst>
+                                          <p:attrName>style.visibility</p:attrName>
+                                        </p:attrNameLst>
+                                      </p:cBhvr>
+                                      <p:to>
+                                        <p:strVal val="visible"/>
+                                      </p:to>
+                                    </p:set>
+                                  </p:childTnLst>
+                                </p:cTn>
+                              </p:par>
+                            </p:childTnLst>
+                          </p:cTn>
+                        </p:par>
+                      </p:childTnLst>
+                    </p:cTn>
+                  </p:par>
+                  <p:par>
+                    <p:cTn fill="hold">
+                      <p:stCondLst>
+                        <p:cond delay="indefinite"/>
+                      </p:stCondLst>
+                      <p:childTnLst>
+                        <p:par>
+                          <p:cTn fill="hold">
+                            <p:stCondLst>
+                              <p:cond delay="0"/>
+                            </p:stCondLst>
+                            <p:childTnLst>
+                              <p:par>
+                                <p:cTn fill="hold" nodeType="clickEffect" presetClass="entr" presetID="1" presetSubtype="0">
+                                  <p:stCondLst>
+                                    <p:cond delay="0"/>
+                                  </p:stCondLst>
+                                  <p:childTnLst>
+                                    <p:set>
+                                      <p:cBhvr>
+                                        <p:cTn dur="1" fill="hold">
+                                          <p:stCondLst>
+                                            <p:cond delay="0"/>
+                                          </p:stCondLst>
+                                        </p:cTn>
+                                        <p:tgtEl>
+                                          <p:spTgt spid="294">
+                                            <p:txEl>
+                                              <p:pRg end="1" st="1"/>
+                                            </p:txEl>
+                                          </p:spTgt>
+                                        </p:tgtEl>
+                                        <p:attrNameLst>
+                                          <p:attrName>style.visibility</p:attrName>
+                                        </p:attrNameLst>
+                                      </p:cBhvr>
+                                      <p:to>
+                                        <p:strVal val="visible"/>
+                                      </p:to>
+                                    </p:set>
+                                  </p:childTnLst>
+                                </p:cTn>
+                              </p:par>
+                            </p:childTnLst>
+                          </p:cTn>
+                        </p:par>
+                      </p:childTnLst>
+                    </p:cTn>
+                  </p:par>
+                  <p:par>
+                    <p:cTn fill="hold">
+                      <p:stCondLst>
+                        <p:cond delay="indefinite"/>
+                      </p:stCondLst>
+                      <p:childTnLst>
+                        <p:par>
+                          <p:cTn fill="hold">
+                            <p:stCondLst>
+                              <p:cond delay="0"/>
+                            </p:stCondLst>
+                            <p:childTnLst>
+                              <p:par>
+                                <p:cTn fill="hold" nodeType="clickEffect" presetClass="entr" presetID="1" presetSubtype="0">
+                                  <p:stCondLst>
+                                    <p:cond delay="0"/>
+                                  </p:stCondLst>
+                                  <p:childTnLst>
+                                    <p:set>
+                                      <p:cBhvr>
+                                        <p:cTn dur="1" fill="hold">
+                                          <p:stCondLst>
+                                            <p:cond delay="0"/>
+                                          </p:stCondLst>
+                                        </p:cTn>
+                                        <p:tgtEl>
+                                          <p:spTgt spid="294">
+                                            <p:txEl>
+                                              <p:pRg end="2" st="2"/>
+                                            </p:txEl>
+                                          </p:spTgt>
+                                        </p:tgtEl>
+                                        <p:attrNameLst>
+                                          <p:attrName>style.visibility</p:attrName>
+                                        </p:attrNameLst>
+                                      </p:cBhvr>
+                                      <p:to>
+                                        <p:strVal val="visible"/>
+                                      </p:to>
+                                    </p:set>
+                                  </p:childTnLst>
+                                </p:cTn>
+                              </p:par>
+                            </p:childTnLst>
+                          </p:cTn>
+                        </p:par>
+                      </p:childTnLst>
+                    </p:cTn>
+                  </p:par>
+                  <p:par>
+                    <p:cTn fill="hold">
+                      <p:stCondLst>
+                        <p:cond delay="indefinite"/>
+                      </p:stCondLst>
+                      <p:childTnLst>
+                        <p:par>
+                          <p:cTn fill="hold">
+                            <p:stCondLst>
+                              <p:cond delay="0"/>
+                            </p:stCondLst>
+                            <p:childTnLst>
+                              <p:par>
+                                <p:cTn fill="hold" nodeType="clickEffect" presetClass="entr" presetID="1" presetSubtype="0">
+                                  <p:stCondLst>
+                                    <p:cond delay="0"/>
+                                  </p:stCondLst>
+                                  <p:childTnLst>
+                                    <p:set>
+                                      <p:cBhvr>
+                                        <p:cTn dur="1" fill="hold">
+                                          <p:stCondLst>
+                                            <p:cond delay="0"/>
+                                          </p:stCondLst>
+                                        </p:cTn>
+                                        <p:tgtEl>
+                                          <p:spTgt spid="294">
+                                            <p:txEl>
+                                              <p:pRg end="3" st="3"/>
+                                            </p:txEl>
+                                          </p:spTgt>
+                                        </p:tgtEl>
+                                        <p:attrNameLst>
+                                          <p:attrName>style.visibility</p:attrName>
+                                        </p:attrNameLst>
+                                      </p:cBhvr>
+                                      <p:to>
+                                        <p:strVal val="visible"/>
+                                      </p:to>
+                                    </p:set>
+                                  </p:childTnLst>
+                                </p:cTn>
+                              </p:par>
+                            </p:childTnLst>
+                          </p:cTn>
+                        </p:par>
+                      </p:childTnLst>
+                    </p:cTn>
+                  </p:par>
+                  <p:par>
+                    <p:cTn fill="hold">
+                      <p:stCondLst>
+                        <p:cond delay="indefinite"/>
+                      </p:stCondLst>
+                      <p:childTnLst>
+                        <p:par>
+                          <p:cTn fill="hold">
+                            <p:stCondLst>
+                              <p:cond delay="0"/>
+                            </p:stCondLst>
+                            <p:childTnLst>
+                              <p:par>
+                                <p:cTn fill="hold" nodeType="clickEffect" presetClass="entr" presetID="1" presetSubtype="0">
+                                  <p:stCondLst>
+                                    <p:cond delay="0"/>
+                                  </p:stCondLst>
+                                  <p:childTnLst>
+                                    <p:set>
+                                      <p:cBhvr>
+                                        <p:cTn dur="1" fill="hold">
+                                          <p:stCondLst>
+                                            <p:cond delay="0"/>
+                                          </p:stCondLst>
+                                        </p:cTn>
+                                        <p:tgtEl>
+                                          <p:spTgt spid="294">
+                                            <p:txEl>
+                                              <p:pRg end="4" st="4"/>
+                                            </p:txEl>
+                                          </p:spTgt>
+                                        </p:tgtEl>
+                                        <p:attrNameLst>
+                                          <p:attrName>style.visibility</p:attrName>
+                                        </p:attrNameLst>
+                                      </p:cBhvr>
+                                      <p:to>
+                                        <p:strVal val="visible"/>
+                                      </p:to>
+                                    </p:set>
+                                  </p:childTnLst>
+                                </p:cTn>
+                              </p:par>
+                            </p:childTnLst>
+                          </p:cTn>
+                        </p:par>
+                      </p:childTnLst>
+                    </p:cTn>
+                  </p:par>
+                  <p:par>
+                    <p:cTn fill="hold">
+                      <p:stCondLst>
+                        <p:cond delay="indefinite"/>
+                      </p:stCondLst>
+                      <p:childTnLst>
+                        <p:par>
+                          <p:cTn fill="hold">
+                            <p:stCondLst>
+                              <p:cond delay="0"/>
+                            </p:stCondLst>
+                            <p:childTnLst>
+                              <p:par>
+                                <p:cTn fill="hold" nodeType="clickEffect" presetClass="entr" presetID="1" presetSubtype="0">
+                                  <p:stCondLst>
+                                    <p:cond delay="0"/>
+                                  </p:stCondLst>
+                                  <p:childTnLst>
+                                    <p:set>
+                                      <p:cBhvr>
+                                        <p:cTn dur="1" fill="hold">
+                                          <p:stCondLst>
+                                            <p:cond delay="0"/>
+                                          </p:stCondLst>
+                                        </p:cTn>
+                                        <p:tgtEl>
+                                          <p:spTgt spid="294">
+                                            <p:txEl>
+                                              <p:pRg end="5" st="5"/>
+                                            </p:txEl>
+                                          </p:spTgt>
+                                        </p:tgtEl>
+                                        <p:attrNameLst>
+                                          <p:attrName>style.visibility</p:attrName>
+                                        </p:attrNameLst>
+                                      </p:cBhvr>
+                                      <p:to>
+                                        <p:strVal val="visible"/>
+                                      </p:to>
+                                    </p:set>
+                                  </p:childTnLst>
+                                </p:cTn>
+                              </p:par>
+                            </p:childTnLst>
+                          </p:cTn>
+                        </p:par>
+                      </p:childTnLst>
+                    </p:cTn>
+                  </p:par>
+                  <p:par>
+                    <p:cTn fill="hold">
+                      <p:stCondLst>
+                        <p:cond delay="indefinite"/>
+                      </p:stCondLst>
+                      <p:childTnLst>
+                        <p:par>
+                          <p:cTn fill="hold">
+                            <p:stCondLst>
+                              <p:cond delay="0"/>
+                            </p:stCondLst>
+                            <p:childTnLst>
+                              <p:par>
+                                <p:cTn fill="hold" nodeType="clickEffect" presetClass="entr" presetID="1" presetSubtype="0">
+                                  <p:stCondLst>
+                                    <p:cond delay="0"/>
+                                  </p:stCondLst>
+                                  <p:childTnLst>
+                                    <p:set>
+                                      <p:cBhvr>
+                                        <p:cTn dur="1" fill="hold">
+                                          <p:stCondLst>
+                                            <p:cond delay="0"/>
+                                          </p:stCondLst>
+                                        </p:cTn>
+                                        <p:tgtEl>
+                                          <p:spTgt spid="294">
+                                            <p:txEl>
+                                              <p:pRg end="6" st="6"/>
+                                            </p:txEl>
+                                          </p:spTgt>
+                                        </p:tgtEl>
+                                        <p:attrNameLst>
+                                          <p:attrName>style.visibility</p:attrName>
+                                        </p:attrNameLst>
+                                      </p:cBhvr>
+                                      <p:to>
+                                        <p:strVal val="visible"/>
+                                      </p:to>
+                                    </p:set>
+                                  </p:childTnLst>
+                                </p:cTn>
+                              </p:par>
+                            </p:childTnLst>
+                          </p:cTn>
+                        </p:par>
+                      </p:childTnLst>
+                    </p:cTn>
+                  </p:par>
+                  <p:par>
+                    <p:cTn fill="hold">
+                      <p:stCondLst>
+                        <p:cond delay="indefinite"/>
+                      </p:stCondLst>
+                      <p:childTnLst>
+                        <p:par>
+                          <p:cTn fill="hold">
+                            <p:stCondLst>
+                              <p:cond delay="0"/>
+                            </p:stCondLst>
+                            <p:childTnLst>
+                              <p:par>
+                                <p:cTn fill="hold" nodeType="clickEffect" presetClass="entr" presetID="1" presetSubtype="0">
+                                  <p:stCondLst>
+                                    <p:cond delay="0"/>
+                                  </p:stCondLst>
+                                  <p:childTnLst>
+                                    <p:set>
+                                      <p:cBhvr>
+                                        <p:cTn dur="1" fill="hold">
+                                          <p:stCondLst>
+                                            <p:cond delay="0"/>
+                                          </p:stCondLst>
+                                        </p:cTn>
+                                        <p:tgtEl>
+                                          <p:spTgt spid="294">
+                                            <p:txEl>
+                                              <p:pRg end="7" st="7"/>
+                                            </p:txEl>
+                                          </p:spTgt>
+                                        </p:tgtEl>
+                                        <p:attrNameLst>
+                                          <p:attrName>style.visibility</p:attrName>
+                                        </p:attrNameLst>
+                                      </p:cBhvr>
+                                      <p:to>
+                                        <p:strVal val="visible"/>
+                                      </p:to>
+                                    </p:set>
+                                  </p:childTnLst>
+                                </p:cTn>
+                              </p:par>
+                            </p:childTnLst>
+                          </p:cTn>
+                        </p:par>
+                      </p:childTnLst>
+                    </p:cTn>
+                  </p:par>
+                  <p:par>
+                    <p:cTn fill="hold">
+                      <p:stCondLst>
+                        <p:cond delay="indefinite"/>
+                      </p:stCondLst>
+                      <p:childTnLst>
+                        <p:par>
+                          <p:cTn fill="hold">
+                            <p:stCondLst>
+                              <p:cond delay="0"/>
+                            </p:stCondLst>
+                            <p:childTnLst>
+                              <p:par>
+                                <p:cTn fill="hold" nodeType="clickEffect" presetClass="entr" presetID="1" presetSubtype="0">
+                                  <p:stCondLst>
+                                    <p:cond delay="0"/>
+                                  </p:stCondLst>
+                                  <p:childTnLst>
+                                    <p:set>
+                                      <p:cBhvr>
+                                        <p:cTn dur="1" fill="hold">
+                                          <p:stCondLst>
+                                            <p:cond delay="0"/>
+                                          </p:stCondLst>
+                                        </p:cTn>
+                                        <p:tgtEl>
+                                          <p:spTgt spid="294">
+                                            <p:txEl>
+                                              <p:pRg end="8" st="8"/>
+                                            </p:txEl>
+                                          </p:spTgt>
+                                        </p:tgtEl>
+                                        <p:attrNameLst>
+                                          <p:attrName>style.visibility</p:attrName>
+                                        </p:attrNameLst>
+                                      </p:cBhvr>
+                                      <p:to>
+                                        <p:strVal val="visible"/>
+                                      </p:to>
+                                    </p:set>
+                                  </p:childTnLst>
+                                </p:cTn>
+                              </p:par>
+                            </p:childTnLst>
+                          </p:cTn>
+                        </p:par>
+                      </p:childTnLst>
+                    </p:cTn>
+                  </p:par>
+                  <p:par>
+                    <p:cTn fill="hold">
+                      <p:stCondLst>
+                        <p:cond delay="indefinite"/>
+                      </p:stCondLst>
+                      <p:childTnLst>
+                        <p:par>
+                          <p:cTn fill="hold">
+                            <p:stCondLst>
+                              <p:cond delay="0"/>
+                            </p:stCondLst>
+                            <p:childTnLst>
+                              <p:par>
+                                <p:cTn fill="hold" nodeType="clickEffect" presetClass="entr" presetID="1" presetSubtype="0">
+                                  <p:stCondLst>
+                                    <p:cond delay="0"/>
+                                  </p:stCondLst>
+                                  <p:childTnLst>
+                                    <p:set>
+                                      <p:cBhvr>
+                                        <p:cTn dur="1" fill="hold">
+                                          <p:stCondLst>
+                                            <p:cond delay="0"/>
+                                          </p:stCondLst>
+                                        </p:cTn>
+                                        <p:tgtEl>
+                                          <p:spTgt spid="294">
+                                            <p:txEl>
+                                              <p:pRg end="9" st="9"/>
+                                            </p:txEl>
+                                          </p:spTgt>
+                                        </p:tgtEl>
+                                        <p:attrNameLst>
+                                          <p:attrName>style.visibility</p:attrName>
+                                        </p:attrNameLst>
+                                      </p:cBhvr>
+                                      <p:to>
+                                        <p:strVal val="visible"/>
+                                      </p:to>
+                                    </p:set>
+                                  </p:childTnLst>
+                                </p:cTn>
+                              </p:par>
+                            </p:childTnLst>
+                          </p:cTn>
+                        </p:par>
+                      </p:childTnLst>
+                    </p:cTn>
+                  </p:par>
+                  <p:par>
+                    <p:cTn fill="hold">
+                      <p:stCondLst>
+                        <p:cond delay="indefinite"/>
+                      </p:stCondLst>
+                      <p:childTnLst>
+                        <p:par>
+                          <p:cTn fill="hold">
+                            <p:stCondLst>
+                              <p:cond delay="0"/>
+                            </p:stCondLst>
+                            <p:childTnLst>
+                              <p:par>
+                                <p:cTn fill="hold" nodeType="clickEffect" presetClass="entr" presetID="1" presetSubtype="0">
+                                  <p:stCondLst>
+                                    <p:cond delay="0"/>
+                                  </p:stCondLst>
+                                  <p:childTnLst>
+                                    <p:set>
+                                      <p:cBhvr>
+                                        <p:cTn dur="1" fill="hold">
+                                          <p:stCondLst>
+                                            <p:cond delay="0"/>
+                                          </p:stCondLst>
+                                        </p:cTn>
+                                        <p:tgtEl>
+                                          <p:spTgt spid="294">
+                                            <p:txEl>
+                                              <p:pRg end="10" st="10"/>
+                                            </p:txEl>
+                                          </p:spTgt>
+                                        </p:tgtEl>
+                                        <p:attrNameLst>
+                                          <p:attrName>style.visibility</p:attrName>
+                                        </p:attrNameLst>
+                                      </p:cBhvr>
+                                      <p:to>
+                                        <p:strVal val="visible"/>
+                                      </p:to>
+                                    </p:set>
+                                  </p:childTnLst>
+                                </p:cTn>
+                              </p:par>
+                            </p:childTnLst>
+                          </p:cTn>
+                        </p:par>
+                      </p:childTnLst>
+                    </p:cTn>
+                  </p:par>
+                  <p:par>
+                    <p:cTn fill="hold">
+                      <p:stCondLst>
+                        <p:cond delay="indefinite"/>
+                      </p:stCondLst>
+                      <p:childTnLst>
+                        <p:par>
+                          <p:cTn fill="hold">
+                            <p:stCondLst>
+                              <p:cond delay="0"/>
+                            </p:stCondLst>
+                            <p:childTnLst>
+                              <p:par>
+                                <p:cTn fill="hold" nodeType="clickEffect" presetClass="entr" presetID="1" presetSubtype="0">
+                                  <p:stCondLst>
+                                    <p:cond delay="0"/>
+                                  </p:stCondLst>
+                                  <p:childTnLst>
+                                    <p:set>
+                                      <p:cBhvr>
+                                        <p:cTn dur="1" fill="hold">
+                                          <p:stCondLst>
+                                            <p:cond delay="0"/>
+                                          </p:stCondLst>
+                                        </p:cTn>
+                                        <p:tgtEl>
+                                          <p:spTgt spid="294">
+                                            <p:txEl>
+                                              <p:pRg end="11" st="11"/>
+                                            </p:txEl>
+                                          </p:spTgt>
+                                        </p:tgtEl>
+                                        <p:attrNameLst>
+                                          <p:attrName>style.visibility</p:attrName>
+                                        </p:attrNameLst>
+                                      </p:cBhvr>
+                                      <p:to>
+                                        <p:strVal val="visible"/>
+                                      </p:to>
+                                    </p:set>
+                                  </p:childTnLst>
+                                </p:cTn>
+                              </p:par>
+                            </p:childTnLst>
+                          </p:cTn>
+                        </p:par>
+                      </p:childTnLst>
+                    </p:cTn>
+                  </p:par>
+                  <p:par>
+                    <p:cTn fill="hold">
+                      <p:stCondLst>
+                        <p:cond delay="indefinite"/>
+                      </p:stCondLst>
+                      <p:childTnLst>
+                        <p:par>
+                          <p:cTn fill="hold">
+                            <p:stCondLst>
+                              <p:cond delay="0"/>
+                            </p:stCondLst>
+                            <p:childTnLst>
+                              <p:par>
+                                <p:cTn fill="hold" nodeType="clickEffect" presetClass="entr" presetID="1" presetSubtype="0">
+                                  <p:stCondLst>
+                                    <p:cond delay="0"/>
+                                  </p:stCondLst>
+                                  <p:childTnLst>
+                                    <p:set>
+                                      <p:cBhvr>
+                                        <p:cTn dur="1" fill="hold">
+                                          <p:stCondLst>
+                                            <p:cond delay="0"/>
+                                          </p:stCondLst>
+                                        </p:cTn>
+                                        <p:tgtEl>
+                                          <p:spTgt spid="294">
+                                            <p:txEl>
+                                              <p:pRg end="12" st="12"/>
+                                            </p:txEl>
+                                          </p:spTgt>
+                                        </p:tgtEl>
+                                        <p:attrNameLst>
+                                          <p:attrName>style.visibility</p:attrName>
+                                        </p:attrNameLst>
+                                      </p:cBhvr>
+                                      <p:to>
+                                        <p:strVal val="visible"/>
+                                      </p:to>
+                                    </p:set>
+                                  </p:childTnLst>
+                                </p:cTn>
+                              </p:par>
+                            </p:childTnLst>
+                          </p:cTn>
+                        </p:par>
+                      </p:childTnLst>
+                    </p:cTn>
+                  </p:par>
+                </p:childTnLst>
+              </p:cTn>
+              <p:prevCondLst>
+                <p:cond evt="onPrev">
+                  <p:tgtEl>
+                    <p:sldTgt/>
+                  </p:tgtEl>
+                </p:cond>
+              </p:prevCondLst>
+              <p:nextCondLst>
+                <p:cond evt="onNext">
+                  <p:tgtEl>
+                    <p:sldTgt/>
+                  </p:tgtEl>
+                </p:cond>
+              </p:nextCondLst>
+            </p:seq>
+          </p:childTnLst>
+        </p:cTn>
+      </p:par>
+    </p:tnLst>
+  </p:timing>
+</p:sld>
+</file>
+
+<file path=ppt/slides/slide37.xml><?xml version="1.0" encoding="utf-8"?>
+<p:sld xmlns:a="http://schemas.openxmlformats.org/drawingml/2006/main" xmlns:r="http://schemas.openxmlformats.org/officeDocument/2006/relationships" xmlns:mc="http://schemas.openxmlformats.org/markup-compatibility/2006" xmlns:mv="urn:schemas-microsoft-com:mac:vml" xmlns:p="http://schemas.openxmlformats.org/presentationml/2006/main" xmlns:c="http://schemas.openxmlformats.org/drawingml/2006/chart" xmlns:dgm="http://schemas.openxmlformats.org/drawingml/2006/diagram" xmlns:o="urn:schemas-microsoft-com:office:office" xmlns:v="urn:schemas-microsoft-com:vml" xmlns:pvml="urn:schemas-microsoft-com:office:powerpoint" xmlns:com="http://schemas.openxmlformats.org/drawingml/2006/compatibility" xmlns:p14="http://schemas.microsoft.com/office/powerpoint/2010/main" xmlns:p15="http://schemas.microsoft.com/office/powerpoint/2012/main" xmlns:ahyp="http://schemas.microsoft.com/office/drawing/2018/hyperlinkcolor">
+  <p:cSld>
+    <p:spTree>
+      <p:nvGrpSpPr>
+        <p:cNvPr id="292" name="Shape 292"/>
+        <p:cNvGrpSpPr/>
+        <p:nvPr/>
+      </p:nvGrpSpPr>
+      <p:grpSpPr>
+        <a:xfrm>
+          <a:off x="0" y="0"/>
+          <a:ext cx="0" cy="0"/>
+          <a:chOff x="0" y="0"/>
+          <a:chExt cx="0" cy="0"/>
+        </a:xfrm>
+      </p:grpSpPr>
+      <p:sp>
+        <p:nvSpPr>
+          <p:cNvPr id="293" name="Google Shape;293;p45"/>
+          <p:cNvSpPr txBox="1"/>
+          <p:nvPr>
+            <p:ph type="title"/>
+          </p:nvPr>
+        </p:nvSpPr>
+        <p:spPr>
+          <a:xfrm>
+            <a:off x="311700" y="195615"/>
+            <a:ext cx="8520600" cy="572700"/>
+          </a:xfrm>
+          <a:prstGeom prst="rect">
+            <a:avLst/>
+          </a:prstGeom>
+        </p:spPr>
+        <p:txBody>
+          <a:bodyPr anchorCtr="0" anchor="t" bIns="91425" lIns="91425" spcFirstLastPara="1" rIns="91425" wrap="square" tIns="91425">
+            <a:normAutofit fontScale="90000"/>
+          </a:bodyPr>
+          <a:lstStyle/>
+          <a:p>
+            <a:pPr indent="0" lvl="0" marL="0" rtl="0" algn="l">
+              <a:spcBef>
+                <a:spcPts val="0"/>
+              </a:spcBef>
+              <a:spcAft>
+                <a:spcPts val="0"/>
+              </a:spcAft>
+              <a:buNone/>
+            </a:pPr>
+            <a:r>
+              <a:rPr lang="en">
+                <a:solidFill>
+                  <a:schemeClr val="accent5"/>
+                </a:solidFill>
+              </a:rPr>
+              <a:t>Exercise: Commands</a:t>
+            </a:r>
+            <a:endParaRPr>
+              <a:solidFill>
+                <a:schemeClr val="accent5"/>
+              </a:solidFill>
+            </a:endParaRPr>
+          </a:p>
+        </p:txBody>
+      </p:sp>
+      <p:sp>
+        <p:nvSpPr>
+          <p:cNvPr id="294" name="Google Shape;294;p45"/>
+          <p:cNvSpPr txBox="1"/>
+          <p:nvPr>
+            <p:ph idx="1" type="body"/>
+          </p:nvPr>
+        </p:nvSpPr>
+        <p:spPr>
+          <a:xfrm>
+            <a:off x="311700" y="885950"/>
+            <a:ext cx="8520600" cy="4023300"/>
+          </a:xfrm>
+          <a:prstGeom prst="rect">
+            <a:avLst/>
+          </a:prstGeom>
+        </p:spPr>
+        <p:txBody>
+          <a:bodyPr anchorCtr="0" anchor="t" bIns="91425" lIns="91425" spcFirstLastPara="1" rIns="91425" wrap="square" tIns="91425">
+            <a:normAutofit/>
+          </a:bodyPr>
+          <a:lstStyle/>
+          <a:p>
+            <a:pPr indent="-330200" lvl="0" marL="457200" rtl="0" algn="l">
+              <a:spcBef>
+                <a:spcPts val="0"/>
+              </a:spcBef>
+              <a:spcAft>
+                <a:spcPts val="0"/>
+              </a:spcAft>
+              <a:buSzPts val="1600"/>
+              <a:buChar char="●"/>
+            </a:pPr>
+            <a:r>
+              <a:rPr lang="en"/>
+              <a:t>Restart as a command</a:t>
+            </a:r>
+            <a:endParaRPr/>
+          </a:p>
+          <a:p>
+            <a:pPr indent="-317500" lvl="1" marL="914400" rtl="0" algn="l">
+              <a:spcBef>
+                <a:spcPts val="0"/>
+              </a:spcBef>
+              <a:spcAft>
+                <a:spcPts val="0"/>
+              </a:spcAft>
+              <a:buSzPts val="1400"/>
+              <a:buChar char="○"/>
+            </a:pPr>
+            <a:r>
+              <a:rPr lang="en"/>
+              <a:t>Make R a command too, so a restart can be undone</a:t>
+            </a:r>
+            <a:endParaRPr/>
+          </a:p>
+          <a:p>
+            <a:pPr indent="-317500" lvl="1" marL="914400" rtl="0" algn="l">
+              <a:spcBef>
+                <a:spcPts val="0"/>
+              </a:spcBef>
+              <a:spcAft>
+                <a:spcPts val="0"/>
+              </a:spcAft>
+              <a:buSzPts val="1400"/>
+              <a:buChar char="○"/>
+            </a:pPr>
+            <a:r>
+              <a:rPr lang="en"/>
+              <a:t>What must it remember?</a:t>
+            </a:r>
+            <a:endParaRPr/>
+          </a:p>
+          <a:p>
+            <a:pPr indent="-330200" lvl="0" marL="457200" rtl="0" algn="l">
+              <a:spcBef>
+                <a:spcPts val="0"/>
+              </a:spcBef>
+              <a:spcAft>
+                <a:spcPts val="0"/>
+              </a:spcAft>
+              <a:buSzPts val="1600"/>
+              <a:buChar char="●"/>
+            </a:pPr>
+            <a:r>
+              <a:rPr lang="en"/>
+              <a:t>Stretch: snapshot undo</a:t>
+            </a:r>
+            <a:endParaRPr/>
+          </a:p>
+          <a:p>
+            <a:pPr indent="-317500" lvl="1" marL="914400" rtl="0" algn="l">
+              <a:spcBef>
+                <a:spcPts val="0"/>
+              </a:spcBef>
+              <a:spcAft>
+                <a:spcPts val="0"/>
+              </a:spcAft>
+              <a:buSzPts val="1400"/>
+              <a:buChar char="○"/>
+            </a:pPr>
+            <a:r>
+              <a:rPr lang="en"/>
+              <a:t>Replace CommandHistory with a history of Level snapshots</a:t>
+            </a:r>
+            <a:endParaRPr/>
+          </a:p>
+          <a:p>
+            <a:pPr indent="-317500" lvl="1" marL="914400" rtl="0" algn="l">
+              <a:spcBef>
+                <a:spcPts val="0"/>
+              </a:spcBef>
+              <a:spcAft>
+                <a:spcPts val="0"/>
+              </a:spcAft>
+              <a:buSzPts val="1400"/>
+              <a:buChar char="○"/>
+            </a:pPr>
+            <a:r>
+              <a:rPr lang="en"/>
+              <a:t>Compare: code, memory, and how easy each is to get wrong</a:t>
+            </a:r>
+            <a:endParaRPr/>
+          </a:p>
+        </p:txBody>
+      </p:sp>
+    </p:spTree>
+  </p:cSld>
+  <p:clrMapOvr>
+    <a:masterClrMapping/>
+  </p:clrMapOvr>
+  <p:timing>
+    <p:tnLst>
+      <p:par>
+        <p:cTn dur="indefinite" nodeType="tmRoot" restart="never">
+          <p:childTnLst>
+            <p:seq concurrent="1" nextAc="seek">
+              <p:cTn dur="indefinite" id="2" nodeType="mainSeq">
+                <p:childTnLst>
+                  <p:par>
+                    <p:cTn fill="hold">
+                      <p:stCondLst>
+                        <p:cond delay="indefinite"/>
+                      </p:stCondLst>
+                      <p:childTnLst>
+                        <p:par>
+                          <p:cTn fill="hold">
+                            <p:stCondLst>
+                              <p:cond delay="0"/>
+                            </p:stCondLst>
+                            <p:childTnLst>
+                              <p:par>
+                                <p:cTn fill="hold" nodeType="clickEffect" presetClass="entr" presetID="1" presetSubtype="0">
+                                  <p:stCondLst>
+                                    <p:cond delay="0"/>
+                                  </p:stCondLst>
+                                  <p:childTnLst>
+                                    <p:set>
+                                      <p:cBhvr>
+                                        <p:cTn dur="1" fill="hold">
+                                          <p:stCondLst>
+                                            <p:cond delay="0"/>
+                                          </p:stCondLst>
+                                        </p:cTn>
+                                        <p:tgtEl>
+                                          <p:spTgt spid="294">
+                                            <p:txEl>
+                                              <p:pRg end="0" st="0"/>
+                                            </p:txEl>
+                                          </p:spTgt>
+                                        </p:tgtEl>
+                                        <p:attrNameLst>
+                                          <p:attrName>style.visibility</p:attrName>
+                                        </p:attrNameLst>
+                                      </p:cBhvr>
+                                      <p:to>
+                                        <p:strVal val="visible"/>
+                                      </p:to>
+                                    </p:set>
+                                  </p:childTnLst>
+                                </p:cTn>
+                              </p:par>
+                            </p:childTnLst>
+                          </p:cTn>
+                        </p:par>
+                      </p:childTnLst>
+                    </p:cTn>
+                  </p:par>
+                  <p:par>
+                    <p:cTn fill="hold">
+                      <p:stCondLst>
+                        <p:cond delay="indefinite"/>
+                      </p:stCondLst>
+                      <p:childTnLst>
+                        <p:par>
+                          <p:cTn fill="hold">
+                            <p:stCondLst>
+                              <p:cond delay="0"/>
+                            </p:stCondLst>
+                            <p:childTnLst>
+                              <p:par>
+                                <p:cTn fill="hold" nodeType="clickEffect" presetClass="entr" presetID="1" presetSubtype="0">
+                                  <p:stCondLst>
+                                    <p:cond delay="0"/>
+                                  </p:stCondLst>
+                                  <p:childTnLst>
+                                    <p:set>
+                                      <p:cBhvr>
+                                        <p:cTn dur="1" fill="hold">
+                                          <p:stCondLst>
+                                            <p:cond delay="0"/>
+                                          </p:stCondLst>
+                                        </p:cTn>
+                                        <p:tgtEl>
+                                          <p:spTgt spid="294">
+                                            <p:txEl>
+                                              <p:pRg end="1" st="1"/>
+                                            </p:txEl>
+                                          </p:spTgt>
+                                        </p:tgtEl>
+                                        <p:attrNameLst>
+                                          <p:attrName>style.visibility</p:attrName>
+                                        </p:attrNameLst>
+                                      </p:cBhvr>
+                                      <p:to>
+                                        <p:strVal val="visible"/>
+                                      </p:to>
+                                    </p:set>
+                                  </p:childTnLst>
+                                </p:cTn>
+                              </p:par>
+                            </p:childTnLst>
+                          </p:cTn>
+                        </p:par>
+                      </p:childTnLst>
+                    </p:cTn>
+                  </p:par>
+                  <p:par>
+                    <p:cTn fill="hold">
+                      <p:stCondLst>
+                        <p:cond delay="indefinite"/>
+                      </p:stCondLst>
+                      <p:childTnLst>
+                        <p:par>
+                          <p:cTn fill="hold">
+                            <p:stCondLst>
+                              <p:cond delay="0"/>
+                            </p:stCondLst>
+                            <p:childTnLst>
+                              <p:par>
+                                <p:cTn fill="hold" nodeType="clickEffect" presetClass="entr" presetID="1" presetSubtype="0">
+                                  <p:stCondLst>
+                                    <p:cond delay="0"/>
+                                  </p:stCondLst>
+                                  <p:childTnLst>
+                                    <p:set>
+                                      <p:cBhvr>
+                                        <p:cTn dur="1" fill="hold">
+                                          <p:stCondLst>
+                                            <p:cond delay="0"/>
+                                          </p:stCondLst>
+                                        </p:cTn>
+                                        <p:tgtEl>
+                                          <p:spTgt spid="294">
+                                            <p:txEl>
+                                              <p:pRg end="2" st="2"/>
+                                            </p:txEl>
+                                          </p:spTgt>
+                                        </p:tgtEl>
+                                        <p:attrNameLst>
+                                          <p:attrName>style.visibility</p:attrName>
+                                        </p:attrNameLst>
+                                      </p:cBhvr>
+                                      <p:to>
+                                        <p:strVal val="visible"/>
+                                      </p:to>
+                                    </p:set>
+                                  </p:childTnLst>
+                                </p:cTn>
+                              </p:par>
+                            </p:childTnLst>
+                          </p:cTn>
+                        </p:par>
+                      </p:childTnLst>
+                    </p:cTn>
+                  </p:par>
+                  <p:par>
+                    <p:cTn fill="hold">
+                      <p:stCondLst>
+                        <p:cond delay="indefinite"/>
+                      </p:stCondLst>
+                      <p:childTnLst>
+                        <p:par>
+                          <p:cTn fill="hold">
+                            <p:stCondLst>
+                              <p:cond delay="0"/>
+                            </p:stCondLst>
+                            <p:childTnLst>
+                              <p:par>
+                                <p:cTn fill="hold" nodeType="clickEffect" presetClass="entr" presetID="1" presetSubtype="0">
+                                  <p:stCondLst>
+                                    <p:cond delay="0"/>
+                                  </p:stCondLst>
+                                  <p:childTnLst>
+                                    <p:set>
+                                      <p:cBhvr>
+                                        <p:cTn dur="1" fill="hold">
+                                          <p:stCondLst>
+                                            <p:cond delay="0"/>
+                                          </p:stCondLst>
+                                        </p:cTn>
+                                        <p:tgtEl>
+                                          <p:spTgt spid="294">
+                                            <p:txEl>
+                                              <p:pRg end="3" st="3"/>
+                                            </p:txEl>
+                                          </p:spTgt>
+                                        </p:tgtEl>
+                                        <p:attrNameLst>
+                                          <p:attrName>style.visibility</p:attrName>
+                                        </p:attrNameLst>
+                                      </p:cBhvr>
+                                      <p:to>
+                                        <p:strVal val="visible"/>
+                                      </p:to>
+                                    </p:set>
+                                  </p:childTnLst>
+                                </p:cTn>
+                              </p:par>
+                            </p:childTnLst>
+                          </p:cTn>
+                        </p:par>
+                      </p:childTnLst>
+                    </p:cTn>
+                  </p:par>
+                  <p:par>
+                    <p:cTn fill="hold">
+                      <p:stCondLst>
+                        <p:cond delay="indefinite"/>
+                      </p:stCondLst>
+                      <p:childTnLst>
+                        <p:par>
+                          <p:cTn fill="hold">
+                            <p:stCondLst>
+                              <p:cond delay="0"/>
+                            </p:stCondLst>
+                            <p:childTnLst>
+                              <p:par>
+                                <p:cTn fill="hold" nodeType="clickEffect" presetClass="entr" presetID="1" presetSubtype="0">
+                                  <p:stCondLst>
+                                    <p:cond delay="0"/>
+                                  </p:stCondLst>
+                                  <p:childTnLst>
+                                    <p:set>
+                                      <p:cBhvr>
+                                        <p:cTn dur="1" fill="hold">
+                                          <p:stCondLst>
+                                            <p:cond delay="0"/>
+                                          </p:stCondLst>
+                                        </p:cTn>
+                                        <p:tgtEl>
+                                          <p:spTgt spid="294">
+                                            <p:txEl>
+                                              <p:pRg end="4" st="4"/>
+                                            </p:txEl>
+                                          </p:spTgt>
+                                        </p:tgtEl>
+                                        <p:attrNameLst>
+                                          <p:attrName>style.visibility</p:attrName>
+                                        </p:attrNameLst>
+                                      </p:cBhvr>
+                                      <p:to>
+                                        <p:strVal val="visible"/>
+                                      </p:to>
+                                    </p:set>
+                                  </p:childTnLst>
+                                </p:cTn>
+                              </p:par>
+                            </p:childTnLst>
+                          </p:cTn>
+                        </p:par>
+                      </p:childTnLst>
+                    </p:cTn>
+                  </p:par>
+                  <p:par>
+                    <p:cTn fill="hold">
+                      <p:stCondLst>
+                        <p:cond delay="indefinite"/>
+                      </p:stCondLst>
+                      <p:childTnLst>
+                        <p:par>
+                          <p:cTn fill="hold">
+                            <p:stCondLst>
+                              <p:cond delay="0"/>
+                            </p:stCondLst>
+                            <p:childTnLst>
+                              <p:par>
+                                <p:cTn fill="hold" nodeType="clickEffect" presetClass="entr" presetID="1" presetSubtype="0">
+                                  <p:stCondLst>
+                                    <p:cond delay="0"/>
+                                  </p:stCondLst>
+                                  <p:childTnLst>
+                                    <p:set>
+                                      <p:cBhvr>
+                                        <p:cTn dur="1" fill="hold">
+                                          <p:stCondLst>
+                                            <p:cond delay="0"/>
+                                          </p:stCondLst>
+                                        </p:cTn>
+                                        <p:tgtEl>
+                                          <p:spTgt spid="294">
+                                            <p:txEl>
+                                              <p:pRg end="5" st="5"/>
+                                            </p:txEl>
+                                          </p:spTgt>
+                                        </p:tgtEl>
+                                        <p:attrNameLst>
+                                          <p:attrName>style.visibility</p:attrName>
+                                        </p:attrNameLst>
+                                      </p:cBhvr>
+                                      <p:to>
+                                        <p:strVal val="visible"/>
+                                      </p:to>
+                                    </p:set>
+                                  </p:childTnLst>
+                                </p:cTn>
+                              </p:par>
+                            </p:childTnLst>
+                          </p:cTn>
+                        </p:par>
+                      </p:childTnLst>
+                    </p:cTn>
+                  </p:par>
+                  <p:par>
+                    <p:cTn fill="hold">
+                      <p:stCondLst>
+                        <p:cond delay="indefinite"/>
+                      </p:stCondLst>
+                      <p:childTnLst>
+                        <p:par>
+                          <p:cTn fill="hold">
+                            <p:stCondLst>
+                              <p:cond delay="0"/>
+                            </p:stCondLst>
+                            <p:childTnLst>
+                              <p:par>
+                                <p:cTn fill="hold" nodeType="clickEffect" presetClass="entr" presetID="1" presetSubtype="0">
+                                  <p:stCondLst>
+                                    <p:cond delay="0"/>
+                                  </p:stCondLst>
+                                  <p:childTnLst>
+                                    <p:set>
+                                      <p:cBhvr>
+                                        <p:cTn dur="1" fill="hold">
+                                          <p:stCondLst>
+                                            <p:cond delay="0"/>
+                                          </p:stCondLst>
+                                        </p:cTn>
+                                        <p:tgtEl>
+                                          <p:spTgt spid="294">
+                                            <p:txEl>
+                                              <p:pRg end="6" st="6"/>
+                                            </p:txEl>
+                                          </p:spTgt>
+                                        </p:tgtEl>
+                                        <p:attrNameLst>
+                                          <p:attrName>style.visibility</p:attrName>
+                                        </p:attrNameLst>
+                                      </p:cBhvr>
+                                      <p:to>
+                                        <p:strVal val="visible"/>
+                                      </p:to>
+                                    </p:set>
+                                  </p:childTnLst>
+                                </p:cTn>
+                              </p:par>
+                            </p:childTnLst>
+                          </p:cTn>
+                        </p:par>
+                      </p:childTnLst>
+                    </p:cTn>
+                  </p:par>
+                  <p:par>
+                    <p:cTn fill="hold">
+                      <p:stCondLst>
+                        <p:cond delay="indefinite"/>
+                      </p:stCondLst>
+                      <p:childTnLst>
+                        <p:par>
+                          <p:cTn fill="hold">
+                            <p:stCondLst>
+                              <p:cond delay="0"/>
+                            </p:stCondLst>
+                            <p:childTnLst>
+                              <p:par>
+                                <p:cTn fill="hold" nodeType="clickEffect" presetClass="entr" presetID="1" presetSubtype="0">
+                                  <p:stCondLst>
+                                    <p:cond delay="0"/>
+                                  </p:stCondLst>
+                                  <p:childTnLst>
+                                    <p:set>
+                                      <p:cBhvr>
+                                        <p:cTn dur="1" fill="hold">
+                                          <p:stCondLst>
+                                            <p:cond delay="0"/>
+                                          </p:stCondLst>
+                                        </p:cTn>
+                                        <p:tgtEl>
+                                          <p:spTgt spid="294">
+                                            <p:txEl>
+                                              <p:pRg end="7" st="7"/>
+                                            </p:txEl>
+                                          </p:spTgt>
+                                        </p:tgtEl>
+                                        <p:attrNameLst>
+                                          <p:attrName>style.visibility</p:attrName>
+                                        </p:attrNameLst>
+                                      </p:cBhvr>
+                                      <p:to>
+                                        <p:strVal val="visible"/>
+                                      </p:to>
+                                    </p:set>
+                                  </p:childTnLst>
+                                </p:cTn>
+                              </p:par>
+                            </p:childTnLst>
+                          </p:cTn>
+                        </p:par>
+                      </p:childTnLst>
+                    </p:cTn>
+                  </p:par>
+                  <p:par>
+                    <p:cTn fill="hold">
+                      <p:stCondLst>
+                        <p:cond delay="indefinite"/>
+                      </p:stCondLst>
+                      <p:childTnLst>
+                        <p:par>
+                          <p:cTn fill="hold">
+                            <p:stCondLst>
+                              <p:cond delay="0"/>
+                            </p:stCondLst>
+                            <p:childTnLst>
+                              <p:par>
+                                <p:cTn fill="hold" nodeType="clickEffect" presetClass="entr" presetID="1" presetSubtype="0">
+                                  <p:stCondLst>
+                                    <p:cond delay="0"/>
+                                  </p:stCondLst>
+                                  <p:childTnLst>
+                                    <p:set>
+                                      <p:cBhvr>
+                                        <p:cTn dur="1" fill="hold">
+                                          <p:stCondLst>
+                                            <p:cond delay="0"/>
+                                          </p:stCondLst>
+                                        </p:cTn>
+                                        <p:tgtEl>
+                                          <p:spTgt spid="294">
+                                            <p:txEl>
+                                              <p:pRg end="8" st="8"/>
+                                            </p:txEl>
+                                          </p:spTgt>
+                                        </p:tgtEl>
+                                        <p:attrNameLst>
+                                          <p:attrName>style.visibility</p:attrName>
+                                        </p:attrNameLst>
+                                      </p:cBhvr>
+                                      <p:to>
+                                        <p:strVal val="visible"/>
+                                      </p:to>
+                                    </p:set>
+                                  </p:childTnLst>
+                                </p:cTn>
+                              </p:par>
+                            </p:childTnLst>
+                          </p:cTn>
+                        </p:par>
+                      </p:childTnLst>
+                    </p:cTn>
+                  </p:par>
+                  <p:par>
+                    <p:cTn fill="hold">
+                      <p:stCondLst>
+                        <p:cond delay="indefinite"/>
+                      </p:stCondLst>
+                      <p:childTnLst>
+                        <p:par>
+                          <p:cTn fill="hold">
+                            <p:stCondLst>
+                              <p:cond delay="0"/>
+                            </p:stCondLst>
+                            <p:childTnLst>
+                              <p:par>
+                                <p:cTn fill="hold" nodeType="clickEffect" presetClass="entr" presetID="1" presetSubtype="0">
+                                  <p:stCondLst>
+                                    <p:cond delay="0"/>
+                                  </p:stCondLst>
+                                  <p:childTnLst>
+                                    <p:set>
+                                      <p:cBhvr>
+                                        <p:cTn dur="1" fill="hold">
+                                          <p:stCondLst>
+                                            <p:cond delay="0"/>
+                                          </p:stCondLst>
+                                        </p:cTn>
+                                        <p:tgtEl>
+                                          <p:spTgt spid="294">
+                                            <p:txEl>
+                                              <p:pRg end="9" st="9"/>
+                                            </p:txEl>
+                                          </p:spTgt>
+                                        </p:tgtEl>
+                                        <p:attrNameLst>
+                                          <p:attrName>style.visibility</p:attrName>
+                                        </p:attrNameLst>
+                                      </p:cBhvr>
+                                      <p:to>
+                                        <p:strVal val="visible"/>
+                                      </p:to>
+                                    </p:set>
+                                  </p:childTnLst>
+                                </p:cTn>
+                              </p:par>
+                            </p:childTnLst>
+                          </p:cTn>
+                        </p:par>
+                      </p:childTnLst>
+                    </p:cTn>
+                  </p:par>
+                  <p:par>
+                    <p:cTn fill="hold">
+                      <p:stCondLst>
+                        <p:cond delay="indefinite"/>
+                      </p:stCondLst>
+                      <p:childTnLst>
+                        <p:par>
+                          <p:cTn fill="hold">
+                            <p:stCondLst>
+                              <p:cond delay="0"/>
+                            </p:stCondLst>
+                            <p:childTnLst>
+                              <p:par>
+                                <p:cTn fill="hold" nodeType="clickEffect" presetClass="entr" presetID="1" presetSubtype="0">
+                                  <p:stCondLst>
+                                    <p:cond delay="0"/>
+                                  </p:stCondLst>
+                                  <p:childTnLst>
+                                    <p:set>
+                                      <p:cBhvr>
+                                        <p:cTn dur="1" fill="hold">
+                                          <p:stCondLst>
+                                            <p:cond delay="0"/>
+                                          </p:stCondLst>
+                                        </p:cTn>
+                                        <p:tgtEl>
+                                          <p:spTgt spid="294">
+                                            <p:txEl>
+                                              <p:pRg end="10" st="10"/>
+                                            </p:txEl>
+                                          </p:spTgt>
+                                        </p:tgtEl>
+                                        <p:attrNameLst>
+                                          <p:attrName>style.visibility</p:attrName>
+                                        </p:attrNameLst>
+                                      </p:cBhvr>
+                                      <p:to>
+                                        <p:strVal val="visible"/>
+                                      </p:to>
+                                    </p:set>
+                                  </p:childTnLst>
+                                </p:cTn>
+                              </p:par>
+                            </p:childTnLst>
+                          </p:cTn>
+                        </p:par>
+                      </p:childTnLst>
+                    </p:cTn>
+                  </p:par>
+                  <p:par>
+                    <p:cTn fill="hold">
+                      <p:stCondLst>
+                        <p:cond delay="indefinite"/>
+                      </p:stCondLst>
+                      <p:childTnLst>
+                        <p:par>
+                          <p:cTn fill="hold">
+                            <p:stCondLst>
+                              <p:cond delay="0"/>
+                            </p:stCondLst>
+                            <p:childTnLst>
+                              <p:par>
+                                <p:cTn fill="hold" nodeType="clickEffect" presetClass="entr" presetID="1" presetSubtype="0">
+                                  <p:stCondLst>
+                                    <p:cond delay="0"/>
+                                  </p:stCondLst>
+                                  <p:childTnLst>
+                                    <p:set>
+                                      <p:cBhvr>
+                                        <p:cTn dur="1" fill="hold">
+                                          <p:stCondLst>
+                                            <p:cond delay="0"/>
+                                          </p:stCondLst>
+                                        </p:cTn>
+                                        <p:tgtEl>
+                                          <p:spTgt spid="294">
+                                            <p:txEl>
+                                              <p:pRg end="11" st="11"/>
+                                            </p:txEl>
+                                          </p:spTgt>
+                                        </p:tgtEl>
+                                        <p:attrNameLst>
+                                          <p:attrName>style.visibility</p:attrName>
+                                        </p:attrNameLst>
+                                      </p:cBhvr>
+                                      <p:to>
+                                        <p:strVal val="visible"/>
+                                      </p:to>
+                                    </p:set>
+                                  </p:childTnLst>
+                                </p:cTn>
+                              </p:par>
+                            </p:childTnLst>
+                          </p:cTn>
+                        </p:par>
+                      </p:childTnLst>
+                    </p:cTn>
+                  </p:par>
+                  <p:par>
+                    <p:cTn fill="hold">
+                      <p:stCondLst>
+                        <p:cond delay="indefinite"/>
+                      </p:stCondLst>
+                      <p:childTnLst>
+                        <p:par>
+                          <p:cTn fill="hold">
+                            <p:stCondLst>
+                              <p:cond delay="0"/>
+                            </p:stCondLst>
+                            <p:childTnLst>
+                              <p:par>
+                                <p:cTn fill="hold" nodeType="clickEffect" presetClass="entr" presetID="1" presetSubtype="0">
+                                  <p:stCondLst>
+                                    <p:cond delay="0"/>
+                                  </p:stCondLst>
+                                  <p:childTnLst>
+                                    <p:set>
+                                      <p:cBhvr>
+                                        <p:cTn dur="1" fill="hold">
+                                          <p:stCondLst>
+                                            <p:cond delay="0"/>
+                                          </p:stCondLst>
+                                        </p:cTn>
+                                        <p:tgtEl>
+                                          <p:spTgt spid="294">
+                                            <p:txEl>
+                                              <p:pRg end="12" st="12"/>
+                                            </p:txEl>
+                                          </p:spTgt>
+                                        </p:tgtEl>
+                                        <p:attrNameLst>
+                                          <p:attrName>style.visibility</p:attrName>
+                                        </p:attrNameLst>
+                                      </p:cBhvr>
+                                      <p:to>
+                                        <p:strVal val="visible"/>
+                                      </p:to>
+                                    </p:set>
+                                  </p:childTnLst>
+                                </p:cTn>
+                              </p:par>
+                            </p:childTnLst>
+                          </p:cTn>
+                        </p:par>
+                      </p:childTnLst>
+                    </p:cTn>
+                  </p:par>
+                </p:childTnLst>
+              </p:cTn>
+              <p:prevCondLst>
+                <p:cond evt="onPrev">
+                  <p:tgtEl>
+                    <p:sldTgt/>
+                  </p:tgtEl>
+                </p:cond>
+              </p:prevCondLst>
+              <p:nextCondLst>
+                <p:cond evt="onNext">
+                  <p:tgtEl>
+                    <p:sldTgt/>
+                  </p:tgtEl>
+                </p:cond>
+              </p:nextCondLst>
+            </p:seq>
+          </p:childTnLst>
+        </p:cTn>
+      </p:par>
+    </p:tnLst>
+  </p:timing>
 </p:sld>
 </file>
 
@@ -19358,7 +21212,7 @@
             </a:pPr>
             <a:r>
               <a:rPr lang="en"/>
-              <a:t>Try It: Swap Two Keys</a:t>
+              <a:t>Check Yourself</a:t>
             </a:r>
             <a:endParaRPr/>
           </a:p>
@@ -19377,7 +21231,7 @@
         <p:spPr>
           <a:xfrm>
             <a:off x="311700" y="885950"/>
-            <a:ext cx="8520600" cy="1673352"/>
+            <a:ext cx="8520600" cy="1719072"/>
           </a:xfrm>
         </p:spPr>
         <p:txBody>
@@ -19396,7 +21250,7 @@
             </a:pPr>
             <a:r>
               <a:rPr lang="en"/>
-              <a:t>In Sokoban4, HandleInput:</a:t>
+              <a:t>What does turning a request into an object make possible?</a:t>
             </a:r>
             <a:endParaRPr/>
           </a:p>
@@ -19413,7 +21267,7 @@
             </a:pPr>
             <a:r>
               <a:rPr lang="en"/>
-              <a:t>Replace the four move lines with a Keys → direction dictionary</a:t>
+              <a:t>Why does a move command remember whether it pushed a box?</a:t>
             </a:r>
             <a:endParaRPr/>
           </a:p>
@@ -19430,7 +21284,7 @@
             </a:pPr>
             <a:r>
               <a:rPr lang="en"/>
-              <a:t>Add a key that swaps the up and down bindings while you play</a:t>
+              <a:t>Why is the redo stack cleared when a new command is executed?</a:t>
             </a:r>
             <a:endParaRPr/>
           </a:p>
@@ -19447,9 +21301,43 @@
             </a:pPr>
             <a:r>
               <a:rPr lang="en"/>
-              <a:t>What changed, and what didn’t need to know?</a:t>
+              <a:t>Why can Level be unit-tested, but not code in Game1.Update?</a:t>
             </a:r>
             <a:endParaRPr/>
+          </a:p>
+        </p:txBody>
+      </p:sp>
+      <p:sp>
+        <p:nvSpPr>
+          <p:cNvPr id="4" name="TextBox 3"/>
+          <p:cNvSpPr txBox="1"/>
+          <p:nvPr/>
+        </p:nvSpPr>
+        <p:spPr>
+          <a:xfrm>
+            <a:off x="457200" y="3182112"/>
+            <a:ext cx="8229600" cy="457200"/>
+          </a:xfrm>
+          <a:prstGeom prst="rect">
+            <a:avLst/>
+          </a:prstGeom>
+          <a:noFill/>
+        </p:spPr>
+        <p:txBody>
+          <a:bodyPr wrap="square">
+            <a:spAutoFit/>
+          </a:bodyPr>
+          <a:lstStyle/>
+          <a:p>
+            <a:pPr algn="ctr"/>
+            <a:r>
+              <a:rPr sz="1400" b="0" i="0">
+                <a:solidFill>
+                  <a:srgbClr val="9AA3AB"/>
+                </a:solidFill>
+              </a:rPr>
+              <a:t>The answers, and more questions, are on the course site.</a:t>
+            </a:r>
           </a:p>
         </p:txBody>
       </p:sp>
@@ -19516,7 +21404,7 @@
                   <a:schemeClr val="accent5"/>
                 </a:solidFill>
               </a:rPr>
-              <a:t>Exercises</a:t>
+              <a:t>Apply It to Your Project</a:t>
             </a:r>
             <a:endParaRPr>
               <a:solidFill>
@@ -19537,7 +21425,7 @@
         <p:spPr>
           <a:xfrm>
             <a:off x="311700" y="885950"/>
-            <a:ext cx="8520600" cy="2057400"/>
+            <a:ext cx="8520600" cy="4023300"/>
           </a:xfrm>
           <a:prstGeom prst="rect">
             <a:avLst/>
@@ -19561,7 +21449,24 @@
             </a:pPr>
             <a:r>
               <a:rPr lang="en"/>
-              <a:t>Start from Sokoban4. Full instructions are on the course site.</a:t>
+              <a:t>Which rules could be separated from drawing and input?</a:t>
+            </a:r>
+            <a:endParaRPr/>
+          </a:p>
+          <a:p>
+            <a:pPr indent="-317500" lvl="1" marL="914400" rtl="0" algn="l">
+              <a:spcBef>
+                <a:spcPts val="0"/>
+              </a:spcBef>
+              <a:spcAft>
+                <a:spcPts val="0"/>
+              </a:spcAft>
+              <a:buSzPts val="1400"/>
+              <a:buChar char="○"/>
+            </a:pPr>
+            <a:r>
+              <a:rPr lang="en"/>
+              <a:t>Write one unit test for one of them</a:t>
             </a:r>
             <a:endParaRPr/>
           </a:p>
@@ -19578,7 +21483,24 @@
             </a:pPr>
             <a:r>
               <a:rPr lang="en"/>
-              <a:t>A new level: design level8.txt. Is it solvable?</a:t>
+              <a:t>Would undo, replays or queued actions be useful in your game?</a:t>
+            </a:r>
+            <a:endParaRPr/>
+          </a:p>
+          <a:p>
+            <a:pPr indent="-317500" lvl="1" marL="914400" rtl="0" algn="l">
+              <a:spcBef>
+                <a:spcPts val="0"/>
+              </a:spcBef>
+              <a:spcAft>
+                <a:spcPts val="0"/>
+              </a:spcAft>
+              <a:buSzPts val="1400"/>
+              <a:buChar char="○"/>
+            </a:pPr>
+            <a:r>
+              <a:rPr lang="en"/>
+              <a:t>Which actions would become commands, and what would each remember?</a:t>
             </a:r>
             <a:endParaRPr/>
           </a:p>
@@ -19595,41 +21517,7 @@
             </a:pPr>
             <a:r>
               <a:rPr lang="en"/>
-              <a:t>Two more tests: pushing a box off a goal, walking onto a goal</a:t>
-            </a:r>
-            <a:endParaRPr/>
-          </a:p>
-          <a:p>
-            <a:pPr indent="-330200" lvl="0" marL="457200" rtl="0" algn="l">
-              <a:spcBef>
-                <a:spcPts val="0"/>
-              </a:spcBef>
-              <a:spcAft>
-                <a:spcPts val="0"/>
-              </a:spcAft>
-              <a:buSzPts val="1600"/>
-              <a:buChar char="●"/>
-            </a:pPr>
-            <a:r>
-              <a:rPr lang="en"/>
-              <a:t>Test first: boxes can’t be pushed onto ice (~)</a:t>
-            </a:r>
-            <a:endParaRPr/>
-          </a:p>
-          <a:p>
-            <a:pPr indent="-330200" lvl="0" marL="457200" rtl="0" algn="l">
-              <a:spcBef>
-                <a:spcPts val="0"/>
-              </a:spcBef>
-              <a:spcAft>
-                <a:spcPts val="0"/>
-              </a:spcAft>
-              <a:buSzPts val="1600"/>
-              <a:buChar char="●"/>
-            </a:pPr>
-            <a:r>
-              <a:rPr lang="en"/>
-              <a:t>Replay: when a level is solved, replay the solution</a:t>
+              <a:t>Could your levels, or part of them, be data files?</a:t>
             </a:r>
             <a:endParaRPr/>
           </a:p>
@@ -20776,1894 +22664,6 @@
 </p:sld>
 </file>
 
-<file path=ppt/slides/slide40.xml><?xml version="1.0" encoding="utf-8"?>
-<p:sld xmlns:a="http://schemas.openxmlformats.org/drawingml/2006/main" xmlns:r="http://schemas.openxmlformats.org/officeDocument/2006/relationships" xmlns:mc="http://schemas.openxmlformats.org/markup-compatibility/2006" xmlns:mv="urn:schemas-microsoft-com:mac:vml" xmlns:p="http://schemas.openxmlformats.org/presentationml/2006/main" xmlns:c="http://schemas.openxmlformats.org/drawingml/2006/chart" xmlns:dgm="http://schemas.openxmlformats.org/drawingml/2006/diagram" xmlns:o="urn:schemas-microsoft-com:office:office" xmlns:v="urn:schemas-microsoft-com:vml" xmlns:pvml="urn:schemas-microsoft-com:office:powerpoint" xmlns:com="http://schemas.openxmlformats.org/drawingml/2006/compatibility" xmlns:p14="http://schemas.microsoft.com/office/powerpoint/2010/main" xmlns:p15="http://schemas.microsoft.com/office/powerpoint/2012/main" xmlns:ahyp="http://schemas.microsoft.com/office/drawing/2018/hyperlinkcolor">
-  <p:cSld>
-    <p:spTree>
-      <p:nvGrpSpPr>
-        <p:cNvPr id="292" name="Shape 292"/>
-        <p:cNvGrpSpPr/>
-        <p:nvPr/>
-      </p:nvGrpSpPr>
-      <p:grpSpPr>
-        <a:xfrm>
-          <a:off x="0" y="0"/>
-          <a:ext cx="0" cy="0"/>
-          <a:chOff x="0" y="0"/>
-          <a:chExt cx="0" cy="0"/>
-        </a:xfrm>
-      </p:grpSpPr>
-      <p:sp>
-        <p:nvSpPr>
-          <p:cNvPr id="293" name="Google Shape;293;p45"/>
-          <p:cNvSpPr txBox="1"/>
-          <p:nvPr>
-            <p:ph type="title"/>
-          </p:nvPr>
-        </p:nvSpPr>
-        <p:spPr>
-          <a:xfrm>
-            <a:off x="311700" y="195615"/>
-            <a:ext cx="8520600" cy="572700"/>
-          </a:xfrm>
-          <a:prstGeom prst="rect">
-            <a:avLst/>
-          </a:prstGeom>
-        </p:spPr>
-        <p:txBody>
-          <a:bodyPr anchorCtr="0" anchor="t" bIns="91425" lIns="91425" spcFirstLastPara="1" rIns="91425" wrap="square" tIns="91425">
-            <a:normAutofit fontScale="90000"/>
-          </a:bodyPr>
-          <a:lstStyle/>
-          <a:p>
-            <a:pPr indent="0" lvl="0" marL="0" rtl="0" algn="l">
-              <a:spcBef>
-                <a:spcPts val="0"/>
-              </a:spcBef>
-              <a:spcAft>
-                <a:spcPts val="0"/>
-              </a:spcAft>
-              <a:buNone/>
-            </a:pPr>
-            <a:r>
-              <a:rPr lang="en">
-                <a:solidFill>
-                  <a:schemeClr val="accent5"/>
-                </a:solidFill>
-              </a:rPr>
-              <a:t>Exercise: Commands</a:t>
-            </a:r>
-            <a:endParaRPr>
-              <a:solidFill>
-                <a:schemeClr val="accent5"/>
-              </a:solidFill>
-            </a:endParaRPr>
-          </a:p>
-        </p:txBody>
-      </p:sp>
-      <p:sp>
-        <p:nvSpPr>
-          <p:cNvPr id="294" name="Google Shape;294;p45"/>
-          <p:cNvSpPr txBox="1"/>
-          <p:nvPr>
-            <p:ph idx="1" type="body"/>
-          </p:nvPr>
-        </p:nvSpPr>
-        <p:spPr>
-          <a:xfrm>
-            <a:off x="311700" y="885950"/>
-            <a:ext cx="8520600" cy="4023300"/>
-          </a:xfrm>
-          <a:prstGeom prst="rect">
-            <a:avLst/>
-          </a:prstGeom>
-        </p:spPr>
-        <p:txBody>
-          <a:bodyPr anchorCtr="0" anchor="t" bIns="91425" lIns="91425" spcFirstLastPara="1" rIns="91425" wrap="square" tIns="91425">
-            <a:normAutofit/>
-          </a:bodyPr>
-          <a:lstStyle/>
-          <a:p>
-            <a:pPr indent="-330200" lvl="0" marL="457200" rtl="0" algn="l">
-              <a:spcBef>
-                <a:spcPts val="0"/>
-              </a:spcBef>
-              <a:spcAft>
-                <a:spcPts val="0"/>
-              </a:spcAft>
-              <a:buSzPts val="1600"/>
-              <a:buChar char="●"/>
-            </a:pPr>
-            <a:r>
-              <a:rPr lang="en"/>
-              <a:t>Restart as a command</a:t>
-            </a:r>
-            <a:endParaRPr/>
-          </a:p>
-          <a:p>
-            <a:pPr indent="-317500" lvl="1" marL="914400" rtl="0" algn="l">
-              <a:spcBef>
-                <a:spcPts val="0"/>
-              </a:spcBef>
-              <a:spcAft>
-                <a:spcPts val="0"/>
-              </a:spcAft>
-              <a:buSzPts val="1400"/>
-              <a:buChar char="○"/>
-            </a:pPr>
-            <a:r>
-              <a:rPr lang="en"/>
-              <a:t>Make R a command too, so a restart can be undone</a:t>
-            </a:r>
-            <a:endParaRPr/>
-          </a:p>
-          <a:p>
-            <a:pPr indent="-317500" lvl="1" marL="914400" rtl="0" algn="l">
-              <a:spcBef>
-                <a:spcPts val="0"/>
-              </a:spcBef>
-              <a:spcAft>
-                <a:spcPts val="0"/>
-              </a:spcAft>
-              <a:buSzPts val="1400"/>
-              <a:buChar char="○"/>
-            </a:pPr>
-            <a:r>
-              <a:rPr lang="en"/>
-              <a:t>What must it remember?</a:t>
-            </a:r>
-            <a:endParaRPr/>
-          </a:p>
-          <a:p>
-            <a:pPr indent="-330200" lvl="0" marL="457200" rtl="0" algn="l">
-              <a:spcBef>
-                <a:spcPts val="0"/>
-              </a:spcBef>
-              <a:spcAft>
-                <a:spcPts val="0"/>
-              </a:spcAft>
-              <a:buSzPts val="1600"/>
-              <a:buChar char="●"/>
-            </a:pPr>
-            <a:r>
-              <a:rPr lang="en"/>
-              <a:t>Stretch: snapshot undo</a:t>
-            </a:r>
-            <a:endParaRPr/>
-          </a:p>
-          <a:p>
-            <a:pPr indent="-317500" lvl="1" marL="914400" rtl="0" algn="l">
-              <a:spcBef>
-                <a:spcPts val="0"/>
-              </a:spcBef>
-              <a:spcAft>
-                <a:spcPts val="0"/>
-              </a:spcAft>
-              <a:buSzPts val="1400"/>
-              <a:buChar char="○"/>
-            </a:pPr>
-            <a:r>
-              <a:rPr lang="en"/>
-              <a:t>Replace CommandHistory with a history of Level snapshots</a:t>
-            </a:r>
-            <a:endParaRPr/>
-          </a:p>
-          <a:p>
-            <a:pPr indent="-317500" lvl="1" marL="914400" rtl="0" algn="l">
-              <a:spcBef>
-                <a:spcPts val="0"/>
-              </a:spcBef>
-              <a:spcAft>
-                <a:spcPts val="0"/>
-              </a:spcAft>
-              <a:buSzPts val="1400"/>
-              <a:buChar char="○"/>
-            </a:pPr>
-            <a:r>
-              <a:rPr lang="en"/>
-              <a:t>Compare: code, memory, and how easy each is to get wrong</a:t>
-            </a:r>
-            <a:endParaRPr/>
-          </a:p>
-        </p:txBody>
-      </p:sp>
-    </p:spTree>
-  </p:cSld>
-  <p:clrMapOvr>
-    <a:masterClrMapping/>
-  </p:clrMapOvr>
-  <p:timing>
-    <p:tnLst>
-      <p:par>
-        <p:cTn dur="indefinite" nodeType="tmRoot" restart="never">
-          <p:childTnLst>
-            <p:seq concurrent="1" nextAc="seek">
-              <p:cTn dur="indefinite" id="2" nodeType="mainSeq">
-                <p:childTnLst>
-                  <p:par>
-                    <p:cTn fill="hold">
-                      <p:stCondLst>
-                        <p:cond delay="indefinite"/>
-                      </p:stCondLst>
-                      <p:childTnLst>
-                        <p:par>
-                          <p:cTn fill="hold">
-                            <p:stCondLst>
-                              <p:cond delay="0"/>
-                            </p:stCondLst>
-                            <p:childTnLst>
-                              <p:par>
-                                <p:cTn fill="hold" nodeType="clickEffect" presetClass="entr" presetID="1" presetSubtype="0">
-                                  <p:stCondLst>
-                                    <p:cond delay="0"/>
-                                  </p:stCondLst>
-                                  <p:childTnLst>
-                                    <p:set>
-                                      <p:cBhvr>
-                                        <p:cTn dur="1" fill="hold">
-                                          <p:stCondLst>
-                                            <p:cond delay="0"/>
-                                          </p:stCondLst>
-                                        </p:cTn>
-                                        <p:tgtEl>
-                                          <p:spTgt spid="294">
-                                            <p:txEl>
-                                              <p:pRg end="0" st="0"/>
-                                            </p:txEl>
-                                          </p:spTgt>
-                                        </p:tgtEl>
-                                        <p:attrNameLst>
-                                          <p:attrName>style.visibility</p:attrName>
-                                        </p:attrNameLst>
-                                      </p:cBhvr>
-                                      <p:to>
-                                        <p:strVal val="visible"/>
-                                      </p:to>
-                                    </p:set>
-                                  </p:childTnLst>
-                                </p:cTn>
-                              </p:par>
-                            </p:childTnLst>
-                          </p:cTn>
-                        </p:par>
-                      </p:childTnLst>
-                    </p:cTn>
-                  </p:par>
-                  <p:par>
-                    <p:cTn fill="hold">
-                      <p:stCondLst>
-                        <p:cond delay="indefinite"/>
-                      </p:stCondLst>
-                      <p:childTnLst>
-                        <p:par>
-                          <p:cTn fill="hold">
-                            <p:stCondLst>
-                              <p:cond delay="0"/>
-                            </p:stCondLst>
-                            <p:childTnLst>
-                              <p:par>
-                                <p:cTn fill="hold" nodeType="clickEffect" presetClass="entr" presetID="1" presetSubtype="0">
-                                  <p:stCondLst>
-                                    <p:cond delay="0"/>
-                                  </p:stCondLst>
-                                  <p:childTnLst>
-                                    <p:set>
-                                      <p:cBhvr>
-                                        <p:cTn dur="1" fill="hold">
-                                          <p:stCondLst>
-                                            <p:cond delay="0"/>
-                                          </p:stCondLst>
-                                        </p:cTn>
-                                        <p:tgtEl>
-                                          <p:spTgt spid="294">
-                                            <p:txEl>
-                                              <p:pRg end="1" st="1"/>
-                                            </p:txEl>
-                                          </p:spTgt>
-                                        </p:tgtEl>
-                                        <p:attrNameLst>
-                                          <p:attrName>style.visibility</p:attrName>
-                                        </p:attrNameLst>
-                                      </p:cBhvr>
-                                      <p:to>
-                                        <p:strVal val="visible"/>
-                                      </p:to>
-                                    </p:set>
-                                  </p:childTnLst>
-                                </p:cTn>
-                              </p:par>
-                            </p:childTnLst>
-                          </p:cTn>
-                        </p:par>
-                      </p:childTnLst>
-                    </p:cTn>
-                  </p:par>
-                  <p:par>
-                    <p:cTn fill="hold">
-                      <p:stCondLst>
-                        <p:cond delay="indefinite"/>
-                      </p:stCondLst>
-                      <p:childTnLst>
-                        <p:par>
-                          <p:cTn fill="hold">
-                            <p:stCondLst>
-                              <p:cond delay="0"/>
-                            </p:stCondLst>
-                            <p:childTnLst>
-                              <p:par>
-                                <p:cTn fill="hold" nodeType="clickEffect" presetClass="entr" presetID="1" presetSubtype="0">
-                                  <p:stCondLst>
-                                    <p:cond delay="0"/>
-                                  </p:stCondLst>
-                                  <p:childTnLst>
-                                    <p:set>
-                                      <p:cBhvr>
-                                        <p:cTn dur="1" fill="hold">
-                                          <p:stCondLst>
-                                            <p:cond delay="0"/>
-                                          </p:stCondLst>
-                                        </p:cTn>
-                                        <p:tgtEl>
-                                          <p:spTgt spid="294">
-                                            <p:txEl>
-                                              <p:pRg end="2" st="2"/>
-                                            </p:txEl>
-                                          </p:spTgt>
-                                        </p:tgtEl>
-                                        <p:attrNameLst>
-                                          <p:attrName>style.visibility</p:attrName>
-                                        </p:attrNameLst>
-                                      </p:cBhvr>
-                                      <p:to>
-                                        <p:strVal val="visible"/>
-                                      </p:to>
-                                    </p:set>
-                                  </p:childTnLst>
-                                </p:cTn>
-                              </p:par>
-                            </p:childTnLst>
-                          </p:cTn>
-                        </p:par>
-                      </p:childTnLst>
-                    </p:cTn>
-                  </p:par>
-                  <p:par>
-                    <p:cTn fill="hold">
-                      <p:stCondLst>
-                        <p:cond delay="indefinite"/>
-                      </p:stCondLst>
-                      <p:childTnLst>
-                        <p:par>
-                          <p:cTn fill="hold">
-                            <p:stCondLst>
-                              <p:cond delay="0"/>
-                            </p:stCondLst>
-                            <p:childTnLst>
-                              <p:par>
-                                <p:cTn fill="hold" nodeType="clickEffect" presetClass="entr" presetID="1" presetSubtype="0">
-                                  <p:stCondLst>
-                                    <p:cond delay="0"/>
-                                  </p:stCondLst>
-                                  <p:childTnLst>
-                                    <p:set>
-                                      <p:cBhvr>
-                                        <p:cTn dur="1" fill="hold">
-                                          <p:stCondLst>
-                                            <p:cond delay="0"/>
-                                          </p:stCondLst>
-                                        </p:cTn>
-                                        <p:tgtEl>
-                                          <p:spTgt spid="294">
-                                            <p:txEl>
-                                              <p:pRg end="3" st="3"/>
-                                            </p:txEl>
-                                          </p:spTgt>
-                                        </p:tgtEl>
-                                        <p:attrNameLst>
-                                          <p:attrName>style.visibility</p:attrName>
-                                        </p:attrNameLst>
-                                      </p:cBhvr>
-                                      <p:to>
-                                        <p:strVal val="visible"/>
-                                      </p:to>
-                                    </p:set>
-                                  </p:childTnLst>
-                                </p:cTn>
-                              </p:par>
-                            </p:childTnLst>
-                          </p:cTn>
-                        </p:par>
-                      </p:childTnLst>
-                    </p:cTn>
-                  </p:par>
-                  <p:par>
-                    <p:cTn fill="hold">
-                      <p:stCondLst>
-                        <p:cond delay="indefinite"/>
-                      </p:stCondLst>
-                      <p:childTnLst>
-                        <p:par>
-                          <p:cTn fill="hold">
-                            <p:stCondLst>
-                              <p:cond delay="0"/>
-                            </p:stCondLst>
-                            <p:childTnLst>
-                              <p:par>
-                                <p:cTn fill="hold" nodeType="clickEffect" presetClass="entr" presetID="1" presetSubtype="0">
-                                  <p:stCondLst>
-                                    <p:cond delay="0"/>
-                                  </p:stCondLst>
-                                  <p:childTnLst>
-                                    <p:set>
-                                      <p:cBhvr>
-                                        <p:cTn dur="1" fill="hold">
-                                          <p:stCondLst>
-                                            <p:cond delay="0"/>
-                                          </p:stCondLst>
-                                        </p:cTn>
-                                        <p:tgtEl>
-                                          <p:spTgt spid="294">
-                                            <p:txEl>
-                                              <p:pRg end="4" st="4"/>
-                                            </p:txEl>
-                                          </p:spTgt>
-                                        </p:tgtEl>
-                                        <p:attrNameLst>
-                                          <p:attrName>style.visibility</p:attrName>
-                                        </p:attrNameLst>
-                                      </p:cBhvr>
-                                      <p:to>
-                                        <p:strVal val="visible"/>
-                                      </p:to>
-                                    </p:set>
-                                  </p:childTnLst>
-                                </p:cTn>
-                              </p:par>
-                            </p:childTnLst>
-                          </p:cTn>
-                        </p:par>
-                      </p:childTnLst>
-                    </p:cTn>
-                  </p:par>
-                  <p:par>
-                    <p:cTn fill="hold">
-                      <p:stCondLst>
-                        <p:cond delay="indefinite"/>
-                      </p:stCondLst>
-                      <p:childTnLst>
-                        <p:par>
-                          <p:cTn fill="hold">
-                            <p:stCondLst>
-                              <p:cond delay="0"/>
-                            </p:stCondLst>
-                            <p:childTnLst>
-                              <p:par>
-                                <p:cTn fill="hold" nodeType="clickEffect" presetClass="entr" presetID="1" presetSubtype="0">
-                                  <p:stCondLst>
-                                    <p:cond delay="0"/>
-                                  </p:stCondLst>
-                                  <p:childTnLst>
-                                    <p:set>
-                                      <p:cBhvr>
-                                        <p:cTn dur="1" fill="hold">
-                                          <p:stCondLst>
-                                            <p:cond delay="0"/>
-                                          </p:stCondLst>
-                                        </p:cTn>
-                                        <p:tgtEl>
-                                          <p:spTgt spid="294">
-                                            <p:txEl>
-                                              <p:pRg end="5" st="5"/>
-                                            </p:txEl>
-                                          </p:spTgt>
-                                        </p:tgtEl>
-                                        <p:attrNameLst>
-                                          <p:attrName>style.visibility</p:attrName>
-                                        </p:attrNameLst>
-                                      </p:cBhvr>
-                                      <p:to>
-                                        <p:strVal val="visible"/>
-                                      </p:to>
-                                    </p:set>
-                                  </p:childTnLst>
-                                </p:cTn>
-                              </p:par>
-                            </p:childTnLst>
-                          </p:cTn>
-                        </p:par>
-                      </p:childTnLst>
-                    </p:cTn>
-                  </p:par>
-                  <p:par>
-                    <p:cTn fill="hold">
-                      <p:stCondLst>
-                        <p:cond delay="indefinite"/>
-                      </p:stCondLst>
-                      <p:childTnLst>
-                        <p:par>
-                          <p:cTn fill="hold">
-                            <p:stCondLst>
-                              <p:cond delay="0"/>
-                            </p:stCondLst>
-                            <p:childTnLst>
-                              <p:par>
-                                <p:cTn fill="hold" nodeType="clickEffect" presetClass="entr" presetID="1" presetSubtype="0">
-                                  <p:stCondLst>
-                                    <p:cond delay="0"/>
-                                  </p:stCondLst>
-                                  <p:childTnLst>
-                                    <p:set>
-                                      <p:cBhvr>
-                                        <p:cTn dur="1" fill="hold">
-                                          <p:stCondLst>
-                                            <p:cond delay="0"/>
-                                          </p:stCondLst>
-                                        </p:cTn>
-                                        <p:tgtEl>
-                                          <p:spTgt spid="294">
-                                            <p:txEl>
-                                              <p:pRg end="6" st="6"/>
-                                            </p:txEl>
-                                          </p:spTgt>
-                                        </p:tgtEl>
-                                        <p:attrNameLst>
-                                          <p:attrName>style.visibility</p:attrName>
-                                        </p:attrNameLst>
-                                      </p:cBhvr>
-                                      <p:to>
-                                        <p:strVal val="visible"/>
-                                      </p:to>
-                                    </p:set>
-                                  </p:childTnLst>
-                                </p:cTn>
-                              </p:par>
-                            </p:childTnLst>
-                          </p:cTn>
-                        </p:par>
-                      </p:childTnLst>
-                    </p:cTn>
-                  </p:par>
-                  <p:par>
-                    <p:cTn fill="hold">
-                      <p:stCondLst>
-                        <p:cond delay="indefinite"/>
-                      </p:stCondLst>
-                      <p:childTnLst>
-                        <p:par>
-                          <p:cTn fill="hold">
-                            <p:stCondLst>
-                              <p:cond delay="0"/>
-                            </p:stCondLst>
-                            <p:childTnLst>
-                              <p:par>
-                                <p:cTn fill="hold" nodeType="clickEffect" presetClass="entr" presetID="1" presetSubtype="0">
-                                  <p:stCondLst>
-                                    <p:cond delay="0"/>
-                                  </p:stCondLst>
-                                  <p:childTnLst>
-                                    <p:set>
-                                      <p:cBhvr>
-                                        <p:cTn dur="1" fill="hold">
-                                          <p:stCondLst>
-                                            <p:cond delay="0"/>
-                                          </p:stCondLst>
-                                        </p:cTn>
-                                        <p:tgtEl>
-                                          <p:spTgt spid="294">
-                                            <p:txEl>
-                                              <p:pRg end="7" st="7"/>
-                                            </p:txEl>
-                                          </p:spTgt>
-                                        </p:tgtEl>
-                                        <p:attrNameLst>
-                                          <p:attrName>style.visibility</p:attrName>
-                                        </p:attrNameLst>
-                                      </p:cBhvr>
-                                      <p:to>
-                                        <p:strVal val="visible"/>
-                                      </p:to>
-                                    </p:set>
-                                  </p:childTnLst>
-                                </p:cTn>
-                              </p:par>
-                            </p:childTnLst>
-                          </p:cTn>
-                        </p:par>
-                      </p:childTnLst>
-                    </p:cTn>
-                  </p:par>
-                  <p:par>
-                    <p:cTn fill="hold">
-                      <p:stCondLst>
-                        <p:cond delay="indefinite"/>
-                      </p:stCondLst>
-                      <p:childTnLst>
-                        <p:par>
-                          <p:cTn fill="hold">
-                            <p:stCondLst>
-                              <p:cond delay="0"/>
-                            </p:stCondLst>
-                            <p:childTnLst>
-                              <p:par>
-                                <p:cTn fill="hold" nodeType="clickEffect" presetClass="entr" presetID="1" presetSubtype="0">
-                                  <p:stCondLst>
-                                    <p:cond delay="0"/>
-                                  </p:stCondLst>
-                                  <p:childTnLst>
-                                    <p:set>
-                                      <p:cBhvr>
-                                        <p:cTn dur="1" fill="hold">
-                                          <p:stCondLst>
-                                            <p:cond delay="0"/>
-                                          </p:stCondLst>
-                                        </p:cTn>
-                                        <p:tgtEl>
-                                          <p:spTgt spid="294">
-                                            <p:txEl>
-                                              <p:pRg end="8" st="8"/>
-                                            </p:txEl>
-                                          </p:spTgt>
-                                        </p:tgtEl>
-                                        <p:attrNameLst>
-                                          <p:attrName>style.visibility</p:attrName>
-                                        </p:attrNameLst>
-                                      </p:cBhvr>
-                                      <p:to>
-                                        <p:strVal val="visible"/>
-                                      </p:to>
-                                    </p:set>
-                                  </p:childTnLst>
-                                </p:cTn>
-                              </p:par>
-                            </p:childTnLst>
-                          </p:cTn>
-                        </p:par>
-                      </p:childTnLst>
-                    </p:cTn>
-                  </p:par>
-                  <p:par>
-                    <p:cTn fill="hold">
-                      <p:stCondLst>
-                        <p:cond delay="indefinite"/>
-                      </p:stCondLst>
-                      <p:childTnLst>
-                        <p:par>
-                          <p:cTn fill="hold">
-                            <p:stCondLst>
-                              <p:cond delay="0"/>
-                            </p:stCondLst>
-                            <p:childTnLst>
-                              <p:par>
-                                <p:cTn fill="hold" nodeType="clickEffect" presetClass="entr" presetID="1" presetSubtype="0">
-                                  <p:stCondLst>
-                                    <p:cond delay="0"/>
-                                  </p:stCondLst>
-                                  <p:childTnLst>
-                                    <p:set>
-                                      <p:cBhvr>
-                                        <p:cTn dur="1" fill="hold">
-                                          <p:stCondLst>
-                                            <p:cond delay="0"/>
-                                          </p:stCondLst>
-                                        </p:cTn>
-                                        <p:tgtEl>
-                                          <p:spTgt spid="294">
-                                            <p:txEl>
-                                              <p:pRg end="9" st="9"/>
-                                            </p:txEl>
-                                          </p:spTgt>
-                                        </p:tgtEl>
-                                        <p:attrNameLst>
-                                          <p:attrName>style.visibility</p:attrName>
-                                        </p:attrNameLst>
-                                      </p:cBhvr>
-                                      <p:to>
-                                        <p:strVal val="visible"/>
-                                      </p:to>
-                                    </p:set>
-                                  </p:childTnLst>
-                                </p:cTn>
-                              </p:par>
-                            </p:childTnLst>
-                          </p:cTn>
-                        </p:par>
-                      </p:childTnLst>
-                    </p:cTn>
-                  </p:par>
-                  <p:par>
-                    <p:cTn fill="hold">
-                      <p:stCondLst>
-                        <p:cond delay="indefinite"/>
-                      </p:stCondLst>
-                      <p:childTnLst>
-                        <p:par>
-                          <p:cTn fill="hold">
-                            <p:stCondLst>
-                              <p:cond delay="0"/>
-                            </p:stCondLst>
-                            <p:childTnLst>
-                              <p:par>
-                                <p:cTn fill="hold" nodeType="clickEffect" presetClass="entr" presetID="1" presetSubtype="0">
-                                  <p:stCondLst>
-                                    <p:cond delay="0"/>
-                                  </p:stCondLst>
-                                  <p:childTnLst>
-                                    <p:set>
-                                      <p:cBhvr>
-                                        <p:cTn dur="1" fill="hold">
-                                          <p:stCondLst>
-                                            <p:cond delay="0"/>
-                                          </p:stCondLst>
-                                        </p:cTn>
-                                        <p:tgtEl>
-                                          <p:spTgt spid="294">
-                                            <p:txEl>
-                                              <p:pRg end="10" st="10"/>
-                                            </p:txEl>
-                                          </p:spTgt>
-                                        </p:tgtEl>
-                                        <p:attrNameLst>
-                                          <p:attrName>style.visibility</p:attrName>
-                                        </p:attrNameLst>
-                                      </p:cBhvr>
-                                      <p:to>
-                                        <p:strVal val="visible"/>
-                                      </p:to>
-                                    </p:set>
-                                  </p:childTnLst>
-                                </p:cTn>
-                              </p:par>
-                            </p:childTnLst>
-                          </p:cTn>
-                        </p:par>
-                      </p:childTnLst>
-                    </p:cTn>
-                  </p:par>
-                  <p:par>
-                    <p:cTn fill="hold">
-                      <p:stCondLst>
-                        <p:cond delay="indefinite"/>
-                      </p:stCondLst>
-                      <p:childTnLst>
-                        <p:par>
-                          <p:cTn fill="hold">
-                            <p:stCondLst>
-                              <p:cond delay="0"/>
-                            </p:stCondLst>
-                            <p:childTnLst>
-                              <p:par>
-                                <p:cTn fill="hold" nodeType="clickEffect" presetClass="entr" presetID="1" presetSubtype="0">
-                                  <p:stCondLst>
-                                    <p:cond delay="0"/>
-                                  </p:stCondLst>
-                                  <p:childTnLst>
-                                    <p:set>
-                                      <p:cBhvr>
-                                        <p:cTn dur="1" fill="hold">
-                                          <p:stCondLst>
-                                            <p:cond delay="0"/>
-                                          </p:stCondLst>
-                                        </p:cTn>
-                                        <p:tgtEl>
-                                          <p:spTgt spid="294">
-                                            <p:txEl>
-                                              <p:pRg end="11" st="11"/>
-                                            </p:txEl>
-                                          </p:spTgt>
-                                        </p:tgtEl>
-                                        <p:attrNameLst>
-                                          <p:attrName>style.visibility</p:attrName>
-                                        </p:attrNameLst>
-                                      </p:cBhvr>
-                                      <p:to>
-                                        <p:strVal val="visible"/>
-                                      </p:to>
-                                    </p:set>
-                                  </p:childTnLst>
-                                </p:cTn>
-                              </p:par>
-                            </p:childTnLst>
-                          </p:cTn>
-                        </p:par>
-                      </p:childTnLst>
-                    </p:cTn>
-                  </p:par>
-                  <p:par>
-                    <p:cTn fill="hold">
-                      <p:stCondLst>
-                        <p:cond delay="indefinite"/>
-                      </p:stCondLst>
-                      <p:childTnLst>
-                        <p:par>
-                          <p:cTn fill="hold">
-                            <p:stCondLst>
-                              <p:cond delay="0"/>
-                            </p:stCondLst>
-                            <p:childTnLst>
-                              <p:par>
-                                <p:cTn fill="hold" nodeType="clickEffect" presetClass="entr" presetID="1" presetSubtype="0">
-                                  <p:stCondLst>
-                                    <p:cond delay="0"/>
-                                  </p:stCondLst>
-                                  <p:childTnLst>
-                                    <p:set>
-                                      <p:cBhvr>
-                                        <p:cTn dur="1" fill="hold">
-                                          <p:stCondLst>
-                                            <p:cond delay="0"/>
-                                          </p:stCondLst>
-                                        </p:cTn>
-                                        <p:tgtEl>
-                                          <p:spTgt spid="294">
-                                            <p:txEl>
-                                              <p:pRg end="12" st="12"/>
-                                            </p:txEl>
-                                          </p:spTgt>
-                                        </p:tgtEl>
-                                        <p:attrNameLst>
-                                          <p:attrName>style.visibility</p:attrName>
-                                        </p:attrNameLst>
-                                      </p:cBhvr>
-                                      <p:to>
-                                        <p:strVal val="visible"/>
-                                      </p:to>
-                                    </p:set>
-                                  </p:childTnLst>
-                                </p:cTn>
-                              </p:par>
-                            </p:childTnLst>
-                          </p:cTn>
-                        </p:par>
-                      </p:childTnLst>
-                    </p:cTn>
-                  </p:par>
-                </p:childTnLst>
-              </p:cTn>
-              <p:prevCondLst>
-                <p:cond evt="onPrev">
-                  <p:tgtEl>
-                    <p:sldTgt/>
-                  </p:tgtEl>
-                </p:cond>
-              </p:prevCondLst>
-              <p:nextCondLst>
-                <p:cond evt="onNext">
-                  <p:tgtEl>
-                    <p:sldTgt/>
-                  </p:tgtEl>
-                </p:cond>
-              </p:nextCondLst>
-            </p:seq>
-          </p:childTnLst>
-        </p:cTn>
-      </p:par>
-    </p:tnLst>
-  </p:timing>
-</p:sld>
-</file>
-
-<file path=ppt/slides/slide41.xml><?xml version="1.0" encoding="utf-8"?>
-<p:sld xmlns:a="http://schemas.openxmlformats.org/drawingml/2006/main" xmlns:p="http://schemas.openxmlformats.org/presentationml/2006/main" xmlns:r="http://schemas.openxmlformats.org/officeDocument/2006/relationships">
-  <p:cSld>
-    <p:spTree>
-      <p:nvGrpSpPr>
-        <p:cNvPr id="1" name=""/>
-        <p:cNvGrpSpPr/>
-        <p:nvPr/>
-      </p:nvGrpSpPr>
-      <p:grpSpPr/>
-      <p:sp>
-        <p:nvSpPr>
-          <p:cNvPr id="2" name="Title 1"/>
-          <p:cNvSpPr>
-            <a:spLocks noGrp="1"/>
-          </p:cNvSpPr>
-          <p:nvPr>
-            <p:ph type="title"/>
-          </p:nvPr>
-        </p:nvSpPr>
-        <p:spPr/>
-        <p:txBody>
-          <a:bodyPr/>
-          <a:lstStyle/>
-          <a:p>
-            <a:pPr indent="0" lvl="0" marL="0" rtl="0" algn="l">
-              <a:spcBef>
-                <a:spcPts val="0"/>
-              </a:spcBef>
-              <a:spcAft>
-                <a:spcPts val="0"/>
-              </a:spcAft>
-              <a:buNone/>
-            </a:pPr>
-            <a:r>
-              <a:rPr lang="en"/>
-              <a:t>Check Yourself</a:t>
-            </a:r>
-            <a:endParaRPr/>
-          </a:p>
-        </p:txBody>
-      </p:sp>
-      <p:sp>
-        <p:nvSpPr>
-          <p:cNvPr id="3" name="Text Placeholder 2"/>
-          <p:cNvSpPr>
-            <a:spLocks noGrp="1"/>
-          </p:cNvSpPr>
-          <p:nvPr>
-            <p:ph type="body" idx="1"/>
-          </p:nvPr>
-        </p:nvSpPr>
-        <p:spPr>
-          <a:xfrm>
-            <a:off x="311700" y="885950"/>
-            <a:ext cx="8520600" cy="1719072"/>
-          </a:xfrm>
-        </p:spPr>
-        <p:txBody>
-          <a:bodyPr/>
-          <a:lstStyle/>
-          <a:p>
-            <a:pPr indent="-330200" lvl="0" marL="457200" rtl="0" algn="l">
-              <a:spcBef>
-                <a:spcPts val="0"/>
-              </a:spcBef>
-              <a:spcAft>
-                <a:spcPts val="0"/>
-              </a:spcAft>
-              <a:buSzPts val="1600"/>
-              <a:buChar char="●"/>
-            </a:pPr>
-            <a:r>
-              <a:rPr lang="en"/>
-              <a:t>What does turning a request into an object make possible?</a:t>
-            </a:r>
-            <a:endParaRPr/>
-          </a:p>
-          <a:p>
-            <a:pPr indent="-330200" lvl="0" marL="457200" rtl="0" algn="l">
-              <a:spcBef>
-                <a:spcPts val="0"/>
-              </a:spcBef>
-              <a:spcAft>
-                <a:spcPts val="0"/>
-              </a:spcAft>
-              <a:buSzPts val="1600"/>
-              <a:buChar char="●"/>
-            </a:pPr>
-            <a:r>
-              <a:rPr lang="en"/>
-              <a:t>Why does a move command remember whether it pushed a box?</a:t>
-            </a:r>
-            <a:endParaRPr/>
-          </a:p>
-          <a:p>
-            <a:pPr indent="-330200" lvl="0" marL="457200" rtl="0" algn="l">
-              <a:spcBef>
-                <a:spcPts val="0"/>
-              </a:spcBef>
-              <a:spcAft>
-                <a:spcPts val="0"/>
-              </a:spcAft>
-              <a:buSzPts val="1600"/>
-              <a:buChar char="●"/>
-            </a:pPr>
-            <a:r>
-              <a:rPr lang="en"/>
-              <a:t>Why is the redo stack cleared when a new command is executed?</a:t>
-            </a:r>
-            <a:endParaRPr/>
-          </a:p>
-          <a:p>
-            <a:pPr indent="-330200" lvl="0" marL="457200" rtl="0" algn="l">
-              <a:spcBef>
-                <a:spcPts val="0"/>
-              </a:spcBef>
-              <a:spcAft>
-                <a:spcPts val="0"/>
-              </a:spcAft>
-              <a:buSzPts val="1600"/>
-              <a:buChar char="●"/>
-            </a:pPr>
-            <a:r>
-              <a:rPr lang="en"/>
-              <a:t>Why can Level be unit-tested, but not code in Game1.Update?</a:t>
-            </a:r>
-            <a:endParaRPr/>
-          </a:p>
-        </p:txBody>
-      </p:sp>
-      <p:sp>
-        <p:nvSpPr>
-          <p:cNvPr id="4" name="TextBox 3"/>
-          <p:cNvSpPr txBox="1"/>
-          <p:nvPr/>
-        </p:nvSpPr>
-        <p:spPr>
-          <a:xfrm>
-            <a:off x="457200" y="3182112"/>
-            <a:ext cx="8229600" cy="457200"/>
-          </a:xfrm>
-          <a:prstGeom prst="rect">
-            <a:avLst/>
-          </a:prstGeom>
-          <a:noFill/>
-        </p:spPr>
-        <p:txBody>
-          <a:bodyPr wrap="square">
-            <a:spAutoFit/>
-          </a:bodyPr>
-          <a:lstStyle/>
-          <a:p>
-            <a:pPr algn="ctr"/>
-            <a:r>
-              <a:rPr sz="1400" b="0" i="0">
-                <a:solidFill>
-                  <a:srgbClr val="9AA3AB"/>
-                </a:solidFill>
-              </a:rPr>
-              <a:t>The answers, and more questions, are on the course site.</a:t>
-            </a:r>
-          </a:p>
-        </p:txBody>
-      </p:sp>
-    </p:spTree>
-  </p:cSld>
-  <p:clrMapOvr>
-    <a:masterClrMapping/>
-  </p:clrMapOvr>
-</p:sld>
-</file>
-
-<file path=ppt/slides/slide42.xml><?xml version="1.0" encoding="utf-8"?>
-<p:sld xmlns:a="http://schemas.openxmlformats.org/drawingml/2006/main" xmlns:r="http://schemas.openxmlformats.org/officeDocument/2006/relationships" xmlns:mc="http://schemas.openxmlformats.org/markup-compatibility/2006" xmlns:mv="urn:schemas-microsoft-com:mac:vml" xmlns:p="http://schemas.openxmlformats.org/presentationml/2006/main" xmlns:c="http://schemas.openxmlformats.org/drawingml/2006/chart" xmlns:dgm="http://schemas.openxmlformats.org/drawingml/2006/diagram" xmlns:o="urn:schemas-microsoft-com:office:office" xmlns:v="urn:schemas-microsoft-com:vml" xmlns:pvml="urn:schemas-microsoft-com:office:powerpoint" xmlns:com="http://schemas.openxmlformats.org/drawingml/2006/compatibility" xmlns:p14="http://schemas.microsoft.com/office/powerpoint/2010/main" xmlns:p15="http://schemas.microsoft.com/office/powerpoint/2012/main" xmlns:ahyp="http://schemas.microsoft.com/office/drawing/2018/hyperlinkcolor">
-  <p:cSld>
-    <p:spTree>
-      <p:nvGrpSpPr>
-        <p:cNvPr id="292" name="Shape 292"/>
-        <p:cNvGrpSpPr/>
-        <p:nvPr/>
-      </p:nvGrpSpPr>
-      <p:grpSpPr>
-        <a:xfrm>
-          <a:off x="0" y="0"/>
-          <a:ext cx="0" cy="0"/>
-          <a:chOff x="0" y="0"/>
-          <a:chExt cx="0" cy="0"/>
-        </a:xfrm>
-      </p:grpSpPr>
-      <p:sp>
-        <p:nvSpPr>
-          <p:cNvPr id="293" name="Google Shape;293;p45"/>
-          <p:cNvSpPr txBox="1"/>
-          <p:nvPr>
-            <p:ph type="title"/>
-          </p:nvPr>
-        </p:nvSpPr>
-        <p:spPr>
-          <a:xfrm>
-            <a:off x="311700" y="195615"/>
-            <a:ext cx="8520600" cy="572700"/>
-          </a:xfrm>
-          <a:prstGeom prst="rect">
-            <a:avLst/>
-          </a:prstGeom>
-        </p:spPr>
-        <p:txBody>
-          <a:bodyPr anchorCtr="0" anchor="t" bIns="91425" lIns="91425" spcFirstLastPara="1" rIns="91425" wrap="square" tIns="91425">
-            <a:normAutofit fontScale="90000"/>
-          </a:bodyPr>
-          <a:lstStyle/>
-          <a:p>
-            <a:pPr indent="0" lvl="0" marL="0" rtl="0" algn="l">
-              <a:spcBef>
-                <a:spcPts val="0"/>
-              </a:spcBef>
-              <a:spcAft>
-                <a:spcPts val="0"/>
-              </a:spcAft>
-              <a:buNone/>
-            </a:pPr>
-            <a:r>
-              <a:rPr lang="en">
-                <a:solidFill>
-                  <a:schemeClr val="accent5"/>
-                </a:solidFill>
-              </a:rPr>
-              <a:t>Apply It to Your Project</a:t>
-            </a:r>
-            <a:endParaRPr>
-              <a:solidFill>
-                <a:schemeClr val="accent5"/>
-              </a:solidFill>
-            </a:endParaRPr>
-          </a:p>
-        </p:txBody>
-      </p:sp>
-      <p:sp>
-        <p:nvSpPr>
-          <p:cNvPr id="294" name="Google Shape;294;p45"/>
-          <p:cNvSpPr txBox="1"/>
-          <p:nvPr>
-            <p:ph idx="1" type="body"/>
-          </p:nvPr>
-        </p:nvSpPr>
-        <p:spPr>
-          <a:xfrm>
-            <a:off x="311700" y="885950"/>
-            <a:ext cx="8520600" cy="4023300"/>
-          </a:xfrm>
-          <a:prstGeom prst="rect">
-            <a:avLst/>
-          </a:prstGeom>
-        </p:spPr>
-        <p:txBody>
-          <a:bodyPr anchorCtr="0" anchor="t" bIns="91425" lIns="91425" spcFirstLastPara="1" rIns="91425" wrap="square" tIns="91425">
-            <a:normAutofit/>
-          </a:bodyPr>
-          <a:lstStyle/>
-          <a:p>
-            <a:pPr indent="-330200" lvl="0" marL="457200" rtl="0" algn="l">
-              <a:spcBef>
-                <a:spcPts val="0"/>
-              </a:spcBef>
-              <a:spcAft>
-                <a:spcPts val="0"/>
-              </a:spcAft>
-              <a:buSzPts val="1600"/>
-              <a:buChar char="●"/>
-            </a:pPr>
-            <a:r>
-              <a:rPr lang="en"/>
-              <a:t>Which rules could be separated from drawing and input?</a:t>
-            </a:r>
-            <a:endParaRPr/>
-          </a:p>
-          <a:p>
-            <a:pPr indent="-317500" lvl="1" marL="914400" rtl="0" algn="l">
-              <a:spcBef>
-                <a:spcPts val="0"/>
-              </a:spcBef>
-              <a:spcAft>
-                <a:spcPts val="0"/>
-              </a:spcAft>
-              <a:buSzPts val="1400"/>
-              <a:buChar char="○"/>
-            </a:pPr>
-            <a:r>
-              <a:rPr lang="en"/>
-              <a:t>Write one unit test for one of them</a:t>
-            </a:r>
-            <a:endParaRPr/>
-          </a:p>
-          <a:p>
-            <a:pPr indent="-330200" lvl="0" marL="457200" rtl="0" algn="l">
-              <a:spcBef>
-                <a:spcPts val="0"/>
-              </a:spcBef>
-              <a:spcAft>
-                <a:spcPts val="0"/>
-              </a:spcAft>
-              <a:buSzPts val="1600"/>
-              <a:buChar char="●"/>
-            </a:pPr>
-            <a:r>
-              <a:rPr lang="en"/>
-              <a:t>Would undo, replays or queued actions be useful in your game?</a:t>
-            </a:r>
-            <a:endParaRPr/>
-          </a:p>
-          <a:p>
-            <a:pPr indent="-317500" lvl="1" marL="914400" rtl="0" algn="l">
-              <a:spcBef>
-                <a:spcPts val="0"/>
-              </a:spcBef>
-              <a:spcAft>
-                <a:spcPts val="0"/>
-              </a:spcAft>
-              <a:buSzPts val="1400"/>
-              <a:buChar char="○"/>
-            </a:pPr>
-            <a:r>
-              <a:rPr lang="en"/>
-              <a:t>Which actions would become commands, and what would each remember?</a:t>
-            </a:r>
-            <a:endParaRPr/>
-          </a:p>
-          <a:p>
-            <a:pPr indent="-330200" lvl="0" marL="457200" rtl="0" algn="l">
-              <a:spcBef>
-                <a:spcPts val="0"/>
-              </a:spcBef>
-              <a:spcAft>
-                <a:spcPts val="0"/>
-              </a:spcAft>
-              <a:buSzPts val="1600"/>
-              <a:buChar char="●"/>
-            </a:pPr>
-            <a:r>
-              <a:rPr lang="en"/>
-              <a:t>Could your levels, or part of them, be data files?</a:t>
-            </a:r>
-            <a:endParaRPr/>
-          </a:p>
-        </p:txBody>
-      </p:sp>
-    </p:spTree>
-  </p:cSld>
-  <p:clrMapOvr>
-    <a:masterClrMapping/>
-  </p:clrMapOvr>
-  <p:timing>
-    <p:tnLst>
-      <p:par>
-        <p:cTn dur="indefinite" nodeType="tmRoot" restart="never">
-          <p:childTnLst>
-            <p:seq concurrent="1" nextAc="seek">
-              <p:cTn dur="indefinite" id="2" nodeType="mainSeq">
-                <p:childTnLst>
-                  <p:par>
-                    <p:cTn fill="hold">
-                      <p:stCondLst>
-                        <p:cond delay="indefinite"/>
-                      </p:stCondLst>
-                      <p:childTnLst>
-                        <p:par>
-                          <p:cTn fill="hold">
-                            <p:stCondLst>
-                              <p:cond delay="0"/>
-                            </p:stCondLst>
-                            <p:childTnLst>
-                              <p:par>
-                                <p:cTn fill="hold" nodeType="clickEffect" presetClass="entr" presetID="1" presetSubtype="0">
-                                  <p:stCondLst>
-                                    <p:cond delay="0"/>
-                                  </p:stCondLst>
-                                  <p:childTnLst>
-                                    <p:set>
-                                      <p:cBhvr>
-                                        <p:cTn dur="1" fill="hold">
-                                          <p:stCondLst>
-                                            <p:cond delay="0"/>
-                                          </p:stCondLst>
-                                        </p:cTn>
-                                        <p:tgtEl>
-                                          <p:spTgt spid="294">
-                                            <p:txEl>
-                                              <p:pRg end="0" st="0"/>
-                                            </p:txEl>
-                                          </p:spTgt>
-                                        </p:tgtEl>
-                                        <p:attrNameLst>
-                                          <p:attrName>style.visibility</p:attrName>
-                                        </p:attrNameLst>
-                                      </p:cBhvr>
-                                      <p:to>
-                                        <p:strVal val="visible"/>
-                                      </p:to>
-                                    </p:set>
-                                  </p:childTnLst>
-                                </p:cTn>
-                              </p:par>
-                            </p:childTnLst>
-                          </p:cTn>
-                        </p:par>
-                      </p:childTnLst>
-                    </p:cTn>
-                  </p:par>
-                  <p:par>
-                    <p:cTn fill="hold">
-                      <p:stCondLst>
-                        <p:cond delay="indefinite"/>
-                      </p:stCondLst>
-                      <p:childTnLst>
-                        <p:par>
-                          <p:cTn fill="hold">
-                            <p:stCondLst>
-                              <p:cond delay="0"/>
-                            </p:stCondLst>
-                            <p:childTnLst>
-                              <p:par>
-                                <p:cTn fill="hold" nodeType="clickEffect" presetClass="entr" presetID="1" presetSubtype="0">
-                                  <p:stCondLst>
-                                    <p:cond delay="0"/>
-                                  </p:stCondLst>
-                                  <p:childTnLst>
-                                    <p:set>
-                                      <p:cBhvr>
-                                        <p:cTn dur="1" fill="hold">
-                                          <p:stCondLst>
-                                            <p:cond delay="0"/>
-                                          </p:stCondLst>
-                                        </p:cTn>
-                                        <p:tgtEl>
-                                          <p:spTgt spid="294">
-                                            <p:txEl>
-                                              <p:pRg end="1" st="1"/>
-                                            </p:txEl>
-                                          </p:spTgt>
-                                        </p:tgtEl>
-                                        <p:attrNameLst>
-                                          <p:attrName>style.visibility</p:attrName>
-                                        </p:attrNameLst>
-                                      </p:cBhvr>
-                                      <p:to>
-                                        <p:strVal val="visible"/>
-                                      </p:to>
-                                    </p:set>
-                                  </p:childTnLst>
-                                </p:cTn>
-                              </p:par>
-                            </p:childTnLst>
-                          </p:cTn>
-                        </p:par>
-                      </p:childTnLst>
-                    </p:cTn>
-                  </p:par>
-                  <p:par>
-                    <p:cTn fill="hold">
-                      <p:stCondLst>
-                        <p:cond delay="indefinite"/>
-                      </p:stCondLst>
-                      <p:childTnLst>
-                        <p:par>
-                          <p:cTn fill="hold">
-                            <p:stCondLst>
-                              <p:cond delay="0"/>
-                            </p:stCondLst>
-                            <p:childTnLst>
-                              <p:par>
-                                <p:cTn fill="hold" nodeType="clickEffect" presetClass="entr" presetID="1" presetSubtype="0">
-                                  <p:stCondLst>
-                                    <p:cond delay="0"/>
-                                  </p:stCondLst>
-                                  <p:childTnLst>
-                                    <p:set>
-                                      <p:cBhvr>
-                                        <p:cTn dur="1" fill="hold">
-                                          <p:stCondLst>
-                                            <p:cond delay="0"/>
-                                          </p:stCondLst>
-                                        </p:cTn>
-                                        <p:tgtEl>
-                                          <p:spTgt spid="294">
-                                            <p:txEl>
-                                              <p:pRg end="2" st="2"/>
-                                            </p:txEl>
-                                          </p:spTgt>
-                                        </p:tgtEl>
-                                        <p:attrNameLst>
-                                          <p:attrName>style.visibility</p:attrName>
-                                        </p:attrNameLst>
-                                      </p:cBhvr>
-                                      <p:to>
-                                        <p:strVal val="visible"/>
-                                      </p:to>
-                                    </p:set>
-                                  </p:childTnLst>
-                                </p:cTn>
-                              </p:par>
-                            </p:childTnLst>
-                          </p:cTn>
-                        </p:par>
-                      </p:childTnLst>
-                    </p:cTn>
-                  </p:par>
-                  <p:par>
-                    <p:cTn fill="hold">
-                      <p:stCondLst>
-                        <p:cond delay="indefinite"/>
-                      </p:stCondLst>
-                      <p:childTnLst>
-                        <p:par>
-                          <p:cTn fill="hold">
-                            <p:stCondLst>
-                              <p:cond delay="0"/>
-                            </p:stCondLst>
-                            <p:childTnLst>
-                              <p:par>
-                                <p:cTn fill="hold" nodeType="clickEffect" presetClass="entr" presetID="1" presetSubtype="0">
-                                  <p:stCondLst>
-                                    <p:cond delay="0"/>
-                                  </p:stCondLst>
-                                  <p:childTnLst>
-                                    <p:set>
-                                      <p:cBhvr>
-                                        <p:cTn dur="1" fill="hold">
-                                          <p:stCondLst>
-                                            <p:cond delay="0"/>
-                                          </p:stCondLst>
-                                        </p:cTn>
-                                        <p:tgtEl>
-                                          <p:spTgt spid="294">
-                                            <p:txEl>
-                                              <p:pRg end="3" st="3"/>
-                                            </p:txEl>
-                                          </p:spTgt>
-                                        </p:tgtEl>
-                                        <p:attrNameLst>
-                                          <p:attrName>style.visibility</p:attrName>
-                                        </p:attrNameLst>
-                                      </p:cBhvr>
-                                      <p:to>
-                                        <p:strVal val="visible"/>
-                                      </p:to>
-                                    </p:set>
-                                  </p:childTnLst>
-                                </p:cTn>
-                              </p:par>
-                            </p:childTnLst>
-                          </p:cTn>
-                        </p:par>
-                      </p:childTnLst>
-                    </p:cTn>
-                  </p:par>
-                  <p:par>
-                    <p:cTn fill="hold">
-                      <p:stCondLst>
-                        <p:cond delay="indefinite"/>
-                      </p:stCondLst>
-                      <p:childTnLst>
-                        <p:par>
-                          <p:cTn fill="hold">
-                            <p:stCondLst>
-                              <p:cond delay="0"/>
-                            </p:stCondLst>
-                            <p:childTnLst>
-                              <p:par>
-                                <p:cTn fill="hold" nodeType="clickEffect" presetClass="entr" presetID="1" presetSubtype="0">
-                                  <p:stCondLst>
-                                    <p:cond delay="0"/>
-                                  </p:stCondLst>
-                                  <p:childTnLst>
-                                    <p:set>
-                                      <p:cBhvr>
-                                        <p:cTn dur="1" fill="hold">
-                                          <p:stCondLst>
-                                            <p:cond delay="0"/>
-                                          </p:stCondLst>
-                                        </p:cTn>
-                                        <p:tgtEl>
-                                          <p:spTgt spid="294">
-                                            <p:txEl>
-                                              <p:pRg end="4" st="4"/>
-                                            </p:txEl>
-                                          </p:spTgt>
-                                        </p:tgtEl>
-                                        <p:attrNameLst>
-                                          <p:attrName>style.visibility</p:attrName>
-                                        </p:attrNameLst>
-                                      </p:cBhvr>
-                                      <p:to>
-                                        <p:strVal val="visible"/>
-                                      </p:to>
-                                    </p:set>
-                                  </p:childTnLst>
-                                </p:cTn>
-                              </p:par>
-                            </p:childTnLst>
-                          </p:cTn>
-                        </p:par>
-                      </p:childTnLst>
-                    </p:cTn>
-                  </p:par>
-                  <p:par>
-                    <p:cTn fill="hold">
-                      <p:stCondLst>
-                        <p:cond delay="indefinite"/>
-                      </p:stCondLst>
-                      <p:childTnLst>
-                        <p:par>
-                          <p:cTn fill="hold">
-                            <p:stCondLst>
-                              <p:cond delay="0"/>
-                            </p:stCondLst>
-                            <p:childTnLst>
-                              <p:par>
-                                <p:cTn fill="hold" nodeType="clickEffect" presetClass="entr" presetID="1" presetSubtype="0">
-                                  <p:stCondLst>
-                                    <p:cond delay="0"/>
-                                  </p:stCondLst>
-                                  <p:childTnLst>
-                                    <p:set>
-                                      <p:cBhvr>
-                                        <p:cTn dur="1" fill="hold">
-                                          <p:stCondLst>
-                                            <p:cond delay="0"/>
-                                          </p:stCondLst>
-                                        </p:cTn>
-                                        <p:tgtEl>
-                                          <p:spTgt spid="294">
-                                            <p:txEl>
-                                              <p:pRg end="5" st="5"/>
-                                            </p:txEl>
-                                          </p:spTgt>
-                                        </p:tgtEl>
-                                        <p:attrNameLst>
-                                          <p:attrName>style.visibility</p:attrName>
-                                        </p:attrNameLst>
-                                      </p:cBhvr>
-                                      <p:to>
-                                        <p:strVal val="visible"/>
-                                      </p:to>
-                                    </p:set>
-                                  </p:childTnLst>
-                                </p:cTn>
-                              </p:par>
-                            </p:childTnLst>
-                          </p:cTn>
-                        </p:par>
-                      </p:childTnLst>
-                    </p:cTn>
-                  </p:par>
-                  <p:par>
-                    <p:cTn fill="hold">
-                      <p:stCondLst>
-                        <p:cond delay="indefinite"/>
-                      </p:stCondLst>
-                      <p:childTnLst>
-                        <p:par>
-                          <p:cTn fill="hold">
-                            <p:stCondLst>
-                              <p:cond delay="0"/>
-                            </p:stCondLst>
-                            <p:childTnLst>
-                              <p:par>
-                                <p:cTn fill="hold" nodeType="clickEffect" presetClass="entr" presetID="1" presetSubtype="0">
-                                  <p:stCondLst>
-                                    <p:cond delay="0"/>
-                                  </p:stCondLst>
-                                  <p:childTnLst>
-                                    <p:set>
-                                      <p:cBhvr>
-                                        <p:cTn dur="1" fill="hold">
-                                          <p:stCondLst>
-                                            <p:cond delay="0"/>
-                                          </p:stCondLst>
-                                        </p:cTn>
-                                        <p:tgtEl>
-                                          <p:spTgt spid="294">
-                                            <p:txEl>
-                                              <p:pRg end="6" st="6"/>
-                                            </p:txEl>
-                                          </p:spTgt>
-                                        </p:tgtEl>
-                                        <p:attrNameLst>
-                                          <p:attrName>style.visibility</p:attrName>
-                                        </p:attrNameLst>
-                                      </p:cBhvr>
-                                      <p:to>
-                                        <p:strVal val="visible"/>
-                                      </p:to>
-                                    </p:set>
-                                  </p:childTnLst>
-                                </p:cTn>
-                              </p:par>
-                            </p:childTnLst>
-                          </p:cTn>
-                        </p:par>
-                      </p:childTnLst>
-                    </p:cTn>
-                  </p:par>
-                  <p:par>
-                    <p:cTn fill="hold">
-                      <p:stCondLst>
-                        <p:cond delay="indefinite"/>
-                      </p:stCondLst>
-                      <p:childTnLst>
-                        <p:par>
-                          <p:cTn fill="hold">
-                            <p:stCondLst>
-                              <p:cond delay="0"/>
-                            </p:stCondLst>
-                            <p:childTnLst>
-                              <p:par>
-                                <p:cTn fill="hold" nodeType="clickEffect" presetClass="entr" presetID="1" presetSubtype="0">
-                                  <p:stCondLst>
-                                    <p:cond delay="0"/>
-                                  </p:stCondLst>
-                                  <p:childTnLst>
-                                    <p:set>
-                                      <p:cBhvr>
-                                        <p:cTn dur="1" fill="hold">
-                                          <p:stCondLst>
-                                            <p:cond delay="0"/>
-                                          </p:stCondLst>
-                                        </p:cTn>
-                                        <p:tgtEl>
-                                          <p:spTgt spid="294">
-                                            <p:txEl>
-                                              <p:pRg end="7" st="7"/>
-                                            </p:txEl>
-                                          </p:spTgt>
-                                        </p:tgtEl>
-                                        <p:attrNameLst>
-                                          <p:attrName>style.visibility</p:attrName>
-                                        </p:attrNameLst>
-                                      </p:cBhvr>
-                                      <p:to>
-                                        <p:strVal val="visible"/>
-                                      </p:to>
-                                    </p:set>
-                                  </p:childTnLst>
-                                </p:cTn>
-                              </p:par>
-                            </p:childTnLst>
-                          </p:cTn>
-                        </p:par>
-                      </p:childTnLst>
-                    </p:cTn>
-                  </p:par>
-                  <p:par>
-                    <p:cTn fill="hold">
-                      <p:stCondLst>
-                        <p:cond delay="indefinite"/>
-                      </p:stCondLst>
-                      <p:childTnLst>
-                        <p:par>
-                          <p:cTn fill="hold">
-                            <p:stCondLst>
-                              <p:cond delay="0"/>
-                            </p:stCondLst>
-                            <p:childTnLst>
-                              <p:par>
-                                <p:cTn fill="hold" nodeType="clickEffect" presetClass="entr" presetID="1" presetSubtype="0">
-                                  <p:stCondLst>
-                                    <p:cond delay="0"/>
-                                  </p:stCondLst>
-                                  <p:childTnLst>
-                                    <p:set>
-                                      <p:cBhvr>
-                                        <p:cTn dur="1" fill="hold">
-                                          <p:stCondLst>
-                                            <p:cond delay="0"/>
-                                          </p:stCondLst>
-                                        </p:cTn>
-                                        <p:tgtEl>
-                                          <p:spTgt spid="294">
-                                            <p:txEl>
-                                              <p:pRg end="8" st="8"/>
-                                            </p:txEl>
-                                          </p:spTgt>
-                                        </p:tgtEl>
-                                        <p:attrNameLst>
-                                          <p:attrName>style.visibility</p:attrName>
-                                        </p:attrNameLst>
-                                      </p:cBhvr>
-                                      <p:to>
-                                        <p:strVal val="visible"/>
-                                      </p:to>
-                                    </p:set>
-                                  </p:childTnLst>
-                                </p:cTn>
-                              </p:par>
-                            </p:childTnLst>
-                          </p:cTn>
-                        </p:par>
-                      </p:childTnLst>
-                    </p:cTn>
-                  </p:par>
-                  <p:par>
-                    <p:cTn fill="hold">
-                      <p:stCondLst>
-                        <p:cond delay="indefinite"/>
-                      </p:stCondLst>
-                      <p:childTnLst>
-                        <p:par>
-                          <p:cTn fill="hold">
-                            <p:stCondLst>
-                              <p:cond delay="0"/>
-                            </p:stCondLst>
-                            <p:childTnLst>
-                              <p:par>
-                                <p:cTn fill="hold" nodeType="clickEffect" presetClass="entr" presetID="1" presetSubtype="0">
-                                  <p:stCondLst>
-                                    <p:cond delay="0"/>
-                                  </p:stCondLst>
-                                  <p:childTnLst>
-                                    <p:set>
-                                      <p:cBhvr>
-                                        <p:cTn dur="1" fill="hold">
-                                          <p:stCondLst>
-                                            <p:cond delay="0"/>
-                                          </p:stCondLst>
-                                        </p:cTn>
-                                        <p:tgtEl>
-                                          <p:spTgt spid="294">
-                                            <p:txEl>
-                                              <p:pRg end="9" st="9"/>
-                                            </p:txEl>
-                                          </p:spTgt>
-                                        </p:tgtEl>
-                                        <p:attrNameLst>
-                                          <p:attrName>style.visibility</p:attrName>
-                                        </p:attrNameLst>
-                                      </p:cBhvr>
-                                      <p:to>
-                                        <p:strVal val="visible"/>
-                                      </p:to>
-                                    </p:set>
-                                  </p:childTnLst>
-                                </p:cTn>
-                              </p:par>
-                            </p:childTnLst>
-                          </p:cTn>
-                        </p:par>
-                      </p:childTnLst>
-                    </p:cTn>
-                  </p:par>
-                  <p:par>
-                    <p:cTn fill="hold">
-                      <p:stCondLst>
-                        <p:cond delay="indefinite"/>
-                      </p:stCondLst>
-                      <p:childTnLst>
-                        <p:par>
-                          <p:cTn fill="hold">
-                            <p:stCondLst>
-                              <p:cond delay="0"/>
-                            </p:stCondLst>
-                            <p:childTnLst>
-                              <p:par>
-                                <p:cTn fill="hold" nodeType="clickEffect" presetClass="entr" presetID="1" presetSubtype="0">
-                                  <p:stCondLst>
-                                    <p:cond delay="0"/>
-                                  </p:stCondLst>
-                                  <p:childTnLst>
-                                    <p:set>
-                                      <p:cBhvr>
-                                        <p:cTn dur="1" fill="hold">
-                                          <p:stCondLst>
-                                            <p:cond delay="0"/>
-                                          </p:stCondLst>
-                                        </p:cTn>
-                                        <p:tgtEl>
-                                          <p:spTgt spid="294">
-                                            <p:txEl>
-                                              <p:pRg end="10" st="10"/>
-                                            </p:txEl>
-                                          </p:spTgt>
-                                        </p:tgtEl>
-                                        <p:attrNameLst>
-                                          <p:attrName>style.visibility</p:attrName>
-                                        </p:attrNameLst>
-                                      </p:cBhvr>
-                                      <p:to>
-                                        <p:strVal val="visible"/>
-                                      </p:to>
-                                    </p:set>
-                                  </p:childTnLst>
-                                </p:cTn>
-                              </p:par>
-                            </p:childTnLst>
-                          </p:cTn>
-                        </p:par>
-                      </p:childTnLst>
-                    </p:cTn>
-                  </p:par>
-                  <p:par>
-                    <p:cTn fill="hold">
-                      <p:stCondLst>
-                        <p:cond delay="indefinite"/>
-                      </p:stCondLst>
-                      <p:childTnLst>
-                        <p:par>
-                          <p:cTn fill="hold">
-                            <p:stCondLst>
-                              <p:cond delay="0"/>
-                            </p:stCondLst>
-                            <p:childTnLst>
-                              <p:par>
-                                <p:cTn fill="hold" nodeType="clickEffect" presetClass="entr" presetID="1" presetSubtype="0">
-                                  <p:stCondLst>
-                                    <p:cond delay="0"/>
-                                  </p:stCondLst>
-                                  <p:childTnLst>
-                                    <p:set>
-                                      <p:cBhvr>
-                                        <p:cTn dur="1" fill="hold">
-                                          <p:stCondLst>
-                                            <p:cond delay="0"/>
-                                          </p:stCondLst>
-                                        </p:cTn>
-                                        <p:tgtEl>
-                                          <p:spTgt spid="294">
-                                            <p:txEl>
-                                              <p:pRg end="11" st="11"/>
-                                            </p:txEl>
-                                          </p:spTgt>
-                                        </p:tgtEl>
-                                        <p:attrNameLst>
-                                          <p:attrName>style.visibility</p:attrName>
-                                        </p:attrNameLst>
-                                      </p:cBhvr>
-                                      <p:to>
-                                        <p:strVal val="visible"/>
-                                      </p:to>
-                                    </p:set>
-                                  </p:childTnLst>
-                                </p:cTn>
-                              </p:par>
-                            </p:childTnLst>
-                          </p:cTn>
-                        </p:par>
-                      </p:childTnLst>
-                    </p:cTn>
-                  </p:par>
-                  <p:par>
-                    <p:cTn fill="hold">
-                      <p:stCondLst>
-                        <p:cond delay="indefinite"/>
-                      </p:stCondLst>
-                      <p:childTnLst>
-                        <p:par>
-                          <p:cTn fill="hold">
-                            <p:stCondLst>
-                              <p:cond delay="0"/>
-                            </p:stCondLst>
-                            <p:childTnLst>
-                              <p:par>
-                                <p:cTn fill="hold" nodeType="clickEffect" presetClass="entr" presetID="1" presetSubtype="0">
-                                  <p:stCondLst>
-                                    <p:cond delay="0"/>
-                                  </p:stCondLst>
-                                  <p:childTnLst>
-                                    <p:set>
-                                      <p:cBhvr>
-                                        <p:cTn dur="1" fill="hold">
-                                          <p:stCondLst>
-                                            <p:cond delay="0"/>
-                                          </p:stCondLst>
-                                        </p:cTn>
-                                        <p:tgtEl>
-                                          <p:spTgt spid="294">
-                                            <p:txEl>
-                                              <p:pRg end="12" st="12"/>
-                                            </p:txEl>
-                                          </p:spTgt>
-                                        </p:tgtEl>
-                                        <p:attrNameLst>
-                                          <p:attrName>style.visibility</p:attrName>
-                                        </p:attrNameLst>
-                                      </p:cBhvr>
-                                      <p:to>
-                                        <p:strVal val="visible"/>
-                                      </p:to>
-                                    </p:set>
-                                  </p:childTnLst>
-                                </p:cTn>
-                              </p:par>
-                            </p:childTnLst>
-                          </p:cTn>
-                        </p:par>
-                      </p:childTnLst>
-                    </p:cTn>
-                  </p:par>
-                </p:childTnLst>
-              </p:cTn>
-              <p:prevCondLst>
-                <p:cond evt="onPrev">
-                  <p:tgtEl>
-                    <p:sldTgt/>
-                  </p:tgtEl>
-                </p:cond>
-              </p:prevCondLst>
-              <p:nextCondLst>
-                <p:cond evt="onNext">
-                  <p:tgtEl>
-                    <p:sldTgt/>
-                  </p:tgtEl>
-                </p:cond>
-              </p:nextCondLst>
-            </p:seq>
-          </p:childTnLst>
-        </p:cTn>
-      </p:par>
-    </p:tnLst>
-  </p:timing>
-</p:sld>
-</file>
-
 <file path=ppt/slides/slide5.xml><?xml version="1.0" encoding="utf-8"?>
 <p:sld xmlns:a="http://schemas.openxmlformats.org/drawingml/2006/main" xmlns:r="http://schemas.openxmlformats.org/officeDocument/2006/relationships" xmlns:mc="http://schemas.openxmlformats.org/markup-compatibility/2006" xmlns:mv="urn:schemas-microsoft-com:mac:vml" xmlns:p="http://schemas.openxmlformats.org/presentationml/2006/main" xmlns:c="http://schemas.openxmlformats.org/drawingml/2006/chart" xmlns:dgm="http://schemas.openxmlformats.org/drawingml/2006/diagram" xmlns:o="urn:schemas-microsoft-com:office:office" xmlns:v="urn:schemas-microsoft-com:vml" xmlns:pvml="urn:schemas-microsoft-com:office:powerpoint" xmlns:com="http://schemas.openxmlformats.org/drawingml/2006/compatibility" xmlns:p14="http://schemas.microsoft.com/office/powerpoint/2010/main" xmlns:p15="http://schemas.microsoft.com/office/powerpoint/2012/main" xmlns:ahyp="http://schemas.microsoft.com/office/drawing/2018/hyperlinkcolor">
   <p:cSld>

--- a/slides/04 Sokoban.pptx
+++ b/slides/04 Sokoban.pptx
@@ -1854,7 +1854,12 @@
           <a:lstStyle/>
           <a:p>
             <a:r>
-              <a:t>Input, undo and redo: three uses of the same idea. Today we do all three.</a:t>
+              <a:t>Four uses of the same idea: once a request is an object, it can be rebound, undone, replayed and sent.</a:t>
+            </a:r>
+          </a:p>
+          <a:p>
+            <a:r>
+              <a:t>Today we build undo, redo and a replay. Ask: which of these would your own game use?</a:t>
             </a:r>
           </a:p>
         </p:txBody>
@@ -15603,7 +15608,7 @@
         <p:spPr>
           <a:xfrm>
             <a:off x="311700" y="885950"/>
-            <a:ext cx="1263900" cy="1046100"/>
+            <a:ext cx="8520600" cy="2011680"/>
           </a:xfrm>
           <a:prstGeom prst="rect">
             <a:avLst/>
@@ -15627,7 +15632,7 @@
             </a:pPr>
             <a:r>
               <a:rPr lang="en"/>
-              <a:t>Input</a:t>
+              <a:t>Input: a button holds a command, so keys can be rebound</a:t>
             </a:r>
             <a:endParaRPr/>
           </a:p>
@@ -15644,7 +15649,7 @@
             </a:pPr>
             <a:r>
               <a:rPr lang="en"/>
-              <a:t>Undo</a:t>
+              <a:t>Undo and redo: a command remembers how to reverse itself</a:t>
             </a:r>
             <a:endParaRPr/>
           </a:p>
@@ -15661,7 +15666,24 @@
             </a:pPr>
             <a:r>
               <a:rPr lang="en"/>
-              <a:t>Redo</a:t>
+              <a:t>Replay: the list of commands, executed again from the start</a:t>
+            </a:r>
+            <a:endParaRPr/>
+          </a:p>
+          <a:p>
+            <a:pPr indent="-330200" lvl="0" marL="457200" rtl="0" algn="l">
+              <a:spcBef>
+                <a:spcPts val="0"/>
+              </a:spcBef>
+              <a:spcAft>
+                <a:spcPts val="0"/>
+              </a:spcAft>
+              <a:buSzPts val="1600"/>
+              <a:buChar char="●"/>
+            </a:pPr>
+            <a:r>
+              <a:rPr lang="en"/>
+              <a:t>Queues and networks: a command can be kept, sent, and run later</a:t>
             </a:r>
             <a:endParaRPr/>
           </a:p>

--- a/slides/04 Sokoban.pptx
+++ b/slides/04 Sokoban.pptx
@@ -11677,7 +11677,7 @@
                 <a:cs typeface="Consolas"/>
                 <a:sym typeface="Consolas"/>
               </a:rPr>
-              <a:t>FireGun</a:t>
+              <a:t>Fire</a:t>
             </a:r>
             <a:r>
               <a:rPr lang="en" sz="1000">
@@ -11999,7 +11999,7 @@
                 <a:cs typeface="Consolas"/>
                 <a:sym typeface="Consolas"/>
               </a:rPr>
-              <a:t>Lurch</a:t>
+              <a:t>Dodge</a:t>
             </a:r>
             <a:r>
               <a:rPr lang="en" sz="1000">
@@ -13416,7 +13416,7 @@
                 <a:cs typeface="Consolas"/>
                 <a:sym typeface="Consolas"/>
               </a:rPr>
-              <a:t>LurchCommand</a:t>
+              <a:t>DodgeCommand</a:t>
             </a:r>
             <a:r>
               <a:rPr lang="en" sz="1000">

--- a/slides/04 Sokoban.pptx
+++ b/slides/04 Sokoban.pptx
@@ -43,6 +43,8 @@
     <p:sldId id="280" r:id="rId30"/>
     <p:sldId id="317" r:id="rId34"/>
     <p:sldId id="316" r:id="rId35"/>
+    <p:sldId id="321" r:id="rId32"/>
+    <p:sldId id="322" r:id="rId31"/>
     <p:sldId id="292" r:id="rId42"/>
     <p:sldId id="293" r:id="rId52"/>
     <p:sldId id="310" r:id="rId41"/>
@@ -1923,6 +1925,127 @@
           <a:p>
             <a:r>
               <a:t>Ask: new art, which class? LevelView. A new rule? Level.</a:t>
+            </a:r>
+          </a:p>
+        </p:txBody>
+      </p:sp>
+    </p:spTree>
+  </p:cSld>
+  <p:clrMapOvr>
+    <a:masterClrMapping/>
+  </p:clrMapOvr>
+</p:notes>
+</file>
+
+<file path=ppt/notesSlides/notesSlide23.xml><?xml version="1.0" encoding="utf-8"?>
+<p:notes xmlns:a="http://schemas.openxmlformats.org/drawingml/2006/main" xmlns:p="http://schemas.openxmlformats.org/presentationml/2006/main" xmlns:r="http://schemas.openxmlformats.org/officeDocument/2006/relationships">
+  <p:cSld>
+    <p:spTree>
+      <p:nvGrpSpPr>
+        <p:cNvPr id="1" name=""/>
+        <p:cNvGrpSpPr/>
+        <p:nvPr/>
+      </p:nvGrpSpPr>
+      <p:grpSpPr>
+        <a:xfrm>
+          <a:off x="0" y="0"/>
+          <a:ext cx="0" cy="0"/>
+          <a:chOff x="0" y="0"/>
+          <a:chExt cx="0" cy="0"/>
+        </a:xfrm>
+      </p:grpSpPr>
+      <p:sp>
+        <p:nvSpPr>
+          <p:cNvPr id="2" name="Slide Image Placeholder 1"/>
+          <p:cNvSpPr>
+            <a:spLocks noGrp="1"/>
+          </p:cNvSpPr>
+          <p:nvPr>
+            <p:ph type="sldImg" idx="2"/>
+          </p:nvPr>
+        </p:nvSpPr>
+        <p:spPr/>
+      </p:sp>
+      <p:sp>
+        <p:nvSpPr>
+          <p:cNvPr id="3" name="Notes Placeholder 2"/>
+          <p:cNvSpPr>
+            <a:spLocks noGrp="1"/>
+          </p:cNvSpPr>
+          <p:nvPr>
+            <p:ph type="body" idx="1"/>
+          </p:nvPr>
+        </p:nvSpPr>
+        <p:spPr/>
+        <p:txBody>
+          <a:bodyPr/>
+          <a:lstStyle/>
+          <a:p>
+            <a:r>
+              <a:t>The session in one slide. Read each concern aloud and let the class give the answer before pointing at it.</a:t>
+            </a:r>
+          </a:p>
+        </p:txBody>
+      </p:sp>
+    </p:spTree>
+  </p:cSld>
+  <p:clrMapOvr>
+    <a:masterClrMapping/>
+  </p:clrMapOvr>
+</p:notes>
+</file>
+
+<file path=ppt/notesSlides/notesSlide24.xml><?xml version="1.0" encoding="utf-8"?>
+<p:notes xmlns:a="http://schemas.openxmlformats.org/drawingml/2006/main" xmlns:p="http://schemas.openxmlformats.org/presentationml/2006/main" xmlns:r="http://schemas.openxmlformats.org/officeDocument/2006/relationships">
+  <p:cSld>
+    <p:spTree>
+      <p:nvGrpSpPr>
+        <p:cNvPr id="1" name=""/>
+        <p:cNvGrpSpPr/>
+        <p:nvPr/>
+      </p:nvGrpSpPr>
+      <p:grpSpPr>
+        <a:xfrm>
+          <a:off x="0" y="0"/>
+          <a:ext cx="0" cy="0"/>
+          <a:chOff x="0" y="0"/>
+          <a:chExt cx="0" cy="0"/>
+        </a:xfrm>
+      </p:grpSpPr>
+      <p:sp>
+        <p:nvSpPr>
+          <p:cNvPr id="2" name="Slide Image Placeholder 1"/>
+          <p:cNvSpPr>
+            <a:spLocks noGrp="1"/>
+          </p:cNvSpPr>
+          <p:nvPr>
+            <p:ph type="sldImg" idx="2"/>
+          </p:nvPr>
+        </p:nvSpPr>
+        <p:spPr/>
+      </p:sp>
+      <p:sp>
+        <p:nvSpPr>
+          <p:cNvPr id="3" name="Notes Placeholder 2"/>
+          <p:cNvSpPr>
+            <a:spLocks noGrp="1"/>
+          </p:cNvSpPr>
+          <p:nvPr>
+            <p:ph type="body" idx="1"/>
+          </p:nvPr>
+        </p:nvSpPr>
+        <p:spPr/>
+        <p:txBody>
+          <a:bodyPr/>
+          <a:lstStyle/>
+          <a:p>
+            <a:r>
+              <a:t>Who holds what in the finished Sokoban. Level, LevelView and CommandHistory do not know each other; Game1 connects them.</a:t>
+            </a:r>
+          </a:p>
+          <a:p>
+            <a:r>
+              <a:t>A MoveCommand is the only thing besides Game1 that changes the level. Ask: why does that make undo safe?</a:t>
             </a:r>
           </a:p>
         </p:txBody>
@@ -22686,6 +22809,1178 @@
 </p:sld>
 </file>
 
+<file path=ppt/slides/slide40.xml><?xml version="1.0" encoding="utf-8"?>
+<p:sld xmlns:a="http://schemas.openxmlformats.org/drawingml/2006/main" xmlns:p="http://schemas.openxmlformats.org/presentationml/2006/main" xmlns:r="http://schemas.openxmlformats.org/officeDocument/2006/relationships">
+  <p:cSld>
+    <p:spTree>
+      <p:nvGrpSpPr>
+        <p:cNvPr id="1" name=""/>
+        <p:cNvGrpSpPr/>
+        <p:nvPr/>
+      </p:nvGrpSpPr>
+      <p:grpSpPr/>
+      <p:sp>
+        <p:nvSpPr>
+          <p:cNvPr id="2" name="Title 1"/>
+          <p:cNvSpPr>
+            <a:spLocks noGrp="1"/>
+          </p:cNvSpPr>
+          <p:nvPr>
+            <p:ph type="title"/>
+          </p:nvPr>
+        </p:nvSpPr>
+        <p:spPr/>
+        <p:txBody>
+          <a:bodyPr/>
+          <a:lstStyle/>
+          <a:p>
+            <a:pPr indent="0" lvl="0" marL="0" rtl="0" algn="l">
+              <a:spcBef>
+                <a:spcPts val="0"/>
+              </a:spcBef>
+              <a:spcAft>
+                <a:spcPts val="0"/>
+              </a:spcAft>
+              <a:buNone/>
+            </a:pPr>
+            <a:r>
+              <a:rPr lang="en"/>
+              <a:t>The Whole Game</a:t>
+            </a:r>
+            <a:endParaRPr/>
+          </a:p>
+        </p:txBody>
+      </p:sp>
+      <p:sp>
+        <p:nvSpPr>
+          <p:cNvPr id="3" name="Text Placeholder 2"/>
+          <p:cNvSpPr>
+            <a:spLocks noGrp="1"/>
+          </p:cNvSpPr>
+          <p:nvPr>
+            <p:ph type="body" idx="1"/>
+          </p:nvPr>
+        </p:nvSpPr>
+        <p:spPr>
+          <a:xfrm>
+            <a:off x="311700" y="885950"/>
+            <a:ext cx="8520600" cy="521208"/>
+          </a:xfrm>
+        </p:spPr>
+        <p:txBody>
+          <a:bodyPr/>
+          <a:lstStyle/>
+          <a:p>
+            <a:pPr indent="-330200" lvl="0" marL="457200" rtl="0" algn="l">
+              <a:spcBef>
+                <a:spcPts val="0"/>
+              </a:spcBef>
+              <a:spcAft>
+                <a:spcPts val="0"/>
+              </a:spcAft>
+              <a:buSzPts val="1600"/>
+              <a:buChar char="●"/>
+            </a:pPr>
+            <a:r>
+              <a:rPr lang="en" b="1"/>
+              <a:t>Sokoban4 adds a title screen, seven levels and a restart. The rules did not change.</a:t>
+            </a:r>
+            <a:endParaRPr/>
+          </a:p>
+        </p:txBody>
+      </p:sp>
+      <p:sp>
+        <p:nvSpPr>
+          <p:cNvPr id="4" name="Rounded Rectangle 3"/>
+          <p:cNvSpPr/>
+          <p:nvPr/>
+        </p:nvSpPr>
+        <p:spPr>
+          <a:xfrm>
+            <a:off x="3429000" y="1481328"/>
+            <a:ext cx="2286000" cy="566928"/>
+          </a:xfrm>
+          <a:prstGeom prst="roundRect">
+            <a:avLst>
+              <a:gd name="adj" fmla="val 12000"/>
+            </a:avLst>
+          </a:prstGeom>
+          <a:solidFill>
+            <a:srgbClr val="2E3338"/>
+          </a:solidFill>
+          <a:ln w="25400">
+            <a:solidFill>
+              <a:srgbClr val="D45D35"/>
+            </a:solidFill>
+          </a:ln>
+          <a:effectLst/>
+        </p:spPr>
+        <p:style>
+          <a:lnRef idx="1">
+            <a:schemeClr val="accent1"/>
+          </a:lnRef>
+          <a:fillRef idx="3">
+            <a:schemeClr val="accent1"/>
+          </a:fillRef>
+          <a:effectRef idx="2">
+            <a:schemeClr val="accent1"/>
+          </a:effectRef>
+          <a:fontRef idx="minor">
+            <a:schemeClr val="lt1"/>
+          </a:fontRef>
+        </p:style>
+        <p:txBody>
+          <a:bodyPr rtlCol="0" anchor="ctr" wrap="square" lIns="73152" rIns="73152"/>
+          <a:lstStyle/>
+          <a:p>
+            <a:pPr algn="ctr"/>
+            <a:r>
+              <a:rPr sz="1300" b="1">
+                <a:solidFill>
+                  <a:srgbClr val="DEE2E6"/>
+                </a:solidFill>
+              </a:rPr>
+              <a:t>Game1 : Core</a:t>
+            </a:r>
+          </a:p>
+          <a:p>
+            <a:pPr algn="ctr"/>
+            <a:r>
+              <a:rPr sz="1100" b="0">
+                <a:solidFill>
+                  <a:srgbClr val="9AA3AB"/>
+                </a:solidFill>
+              </a:rPr>
+              <a:t>connects the parts</a:t>
+            </a:r>
+          </a:p>
+        </p:txBody>
+      </p:sp>
+      <p:sp>
+        <p:nvSpPr>
+          <p:cNvPr id="5" name="Rounded Rectangle 4"/>
+          <p:cNvSpPr/>
+          <p:nvPr/>
+        </p:nvSpPr>
+        <p:spPr>
+          <a:xfrm>
+            <a:off x="374904" y="2596896"/>
+            <a:ext cx="2016252" cy="566928"/>
+          </a:xfrm>
+          <a:prstGeom prst="roundRect">
+            <a:avLst>
+              <a:gd name="adj" fmla="val 12000"/>
+            </a:avLst>
+          </a:prstGeom>
+          <a:solidFill>
+            <a:srgbClr val="2E3338"/>
+          </a:solidFill>
+          <a:ln>
+            <a:noFill/>
+          </a:ln>
+          <a:effectLst/>
+        </p:spPr>
+        <p:style>
+          <a:lnRef idx="1">
+            <a:schemeClr val="accent1"/>
+          </a:lnRef>
+          <a:fillRef idx="3">
+            <a:schemeClr val="accent1"/>
+          </a:fillRef>
+          <a:effectRef idx="2">
+            <a:schemeClr val="accent1"/>
+          </a:effectRef>
+          <a:fontRef idx="minor">
+            <a:schemeClr val="lt1"/>
+          </a:fontRef>
+        </p:style>
+        <p:txBody>
+          <a:bodyPr rtlCol="0" anchor="ctr" wrap="square" lIns="73152" rIns="73152"/>
+          <a:lstStyle/>
+          <a:p>
+            <a:pPr algn="ctr"/>
+            <a:r>
+              <a:rPr sz="1300" b="1">
+                <a:solidFill>
+                  <a:srgbClr val="DEE2E6"/>
+                </a:solidFill>
+              </a:rPr>
+              <a:t>Level</a:t>
+            </a:r>
+          </a:p>
+          <a:p>
+            <a:pPr algn="ctr"/>
+            <a:r>
+              <a:rPr sz="1100" b="0">
+                <a:solidFill>
+                  <a:srgbClr val="9AA3AB"/>
+                </a:solidFill>
+              </a:rPr>
+              <a:t>state and rules</a:t>
+            </a:r>
+          </a:p>
+        </p:txBody>
+      </p:sp>
+      <p:cxnSp>
+        <p:nvCxnSpPr>
+          <p:cNvPr id="6" name="Connector 5"/>
+          <p:cNvCxnSpPr/>
+          <p:nvPr/>
+        </p:nvCxnSpPr>
+        <p:spPr>
+          <a:xfrm flipH="1">
+            <a:off x="1383030" y="2066544"/>
+            <a:ext cx="3188970" cy="512064"/>
+          </a:xfrm>
+          <a:prstGeom prst="line">
+            <a:avLst/>
+          </a:prstGeom>
+          <a:ln w="25400">
+            <a:solidFill>
+              <a:srgbClr val="9AA3AB"/>
+            </a:solidFill>
+            <a:tailEnd type="triangle"/>
+          </a:ln>
+        </p:spPr>
+        <p:style>
+          <a:lnRef idx="2">
+            <a:schemeClr val="accent1"/>
+          </a:lnRef>
+          <a:fillRef idx="0">
+            <a:schemeClr val="accent1"/>
+          </a:fillRef>
+          <a:effectRef idx="1">
+            <a:schemeClr val="accent1"/>
+          </a:effectRef>
+          <a:fontRef idx="minor">
+            <a:schemeClr val="tx1"/>
+          </a:fontRef>
+        </p:style>
+      </p:cxnSp>
+      <p:sp>
+        <p:nvSpPr>
+          <p:cNvPr id="7" name="Rounded Rectangle 6"/>
+          <p:cNvSpPr/>
+          <p:nvPr/>
+        </p:nvSpPr>
+        <p:spPr>
+          <a:xfrm>
+            <a:off x="2500884" y="2596896"/>
+            <a:ext cx="2016252" cy="566928"/>
+          </a:xfrm>
+          <a:prstGeom prst="roundRect">
+            <a:avLst>
+              <a:gd name="adj" fmla="val 12000"/>
+            </a:avLst>
+          </a:prstGeom>
+          <a:solidFill>
+            <a:srgbClr val="2E3338"/>
+          </a:solidFill>
+          <a:ln>
+            <a:noFill/>
+          </a:ln>
+          <a:effectLst/>
+        </p:spPr>
+        <p:style>
+          <a:lnRef idx="1">
+            <a:schemeClr val="accent1"/>
+          </a:lnRef>
+          <a:fillRef idx="3">
+            <a:schemeClr val="accent1"/>
+          </a:fillRef>
+          <a:effectRef idx="2">
+            <a:schemeClr val="accent1"/>
+          </a:effectRef>
+          <a:fontRef idx="minor">
+            <a:schemeClr val="lt1"/>
+          </a:fontRef>
+        </p:style>
+        <p:txBody>
+          <a:bodyPr rtlCol="0" anchor="ctr" wrap="square" lIns="73152" rIns="73152"/>
+          <a:lstStyle/>
+          <a:p>
+            <a:pPr algn="ctr"/>
+            <a:r>
+              <a:rPr sz="1300" b="1">
+                <a:solidFill>
+                  <a:srgbClr val="DEE2E6"/>
+                </a:solidFill>
+              </a:rPr>
+              <a:t>LevelView</a:t>
+            </a:r>
+          </a:p>
+          <a:p>
+            <a:pPr algn="ctr"/>
+            <a:r>
+              <a:rPr sz="1100" b="0">
+                <a:solidFill>
+                  <a:srgbClr val="9AA3AB"/>
+                </a:solidFill>
+              </a:rPr>
+              <a:t>only reads the level</a:t>
+            </a:r>
+          </a:p>
+        </p:txBody>
+      </p:sp>
+      <p:cxnSp>
+        <p:nvCxnSpPr>
+          <p:cNvPr id="8" name="Connector 7"/>
+          <p:cNvCxnSpPr/>
+          <p:nvPr/>
+        </p:nvCxnSpPr>
+        <p:spPr>
+          <a:xfrm flipH="1">
+            <a:off x="3509010" y="2066544"/>
+            <a:ext cx="1062990" cy="512064"/>
+          </a:xfrm>
+          <a:prstGeom prst="line">
+            <a:avLst/>
+          </a:prstGeom>
+          <a:ln w="25400">
+            <a:solidFill>
+              <a:srgbClr val="9AA3AB"/>
+            </a:solidFill>
+            <a:tailEnd type="triangle"/>
+          </a:ln>
+        </p:spPr>
+        <p:style>
+          <a:lnRef idx="2">
+            <a:schemeClr val="accent1"/>
+          </a:lnRef>
+          <a:fillRef idx="0">
+            <a:schemeClr val="accent1"/>
+          </a:fillRef>
+          <a:effectRef idx="1">
+            <a:schemeClr val="accent1"/>
+          </a:effectRef>
+          <a:fontRef idx="minor">
+            <a:schemeClr val="tx1"/>
+          </a:fontRef>
+        </p:style>
+      </p:cxnSp>
+      <p:sp>
+        <p:nvSpPr>
+          <p:cNvPr id="9" name="Rounded Rectangle 8"/>
+          <p:cNvSpPr/>
+          <p:nvPr/>
+        </p:nvSpPr>
+        <p:spPr>
+          <a:xfrm>
+            <a:off x="4626864" y="2596896"/>
+            <a:ext cx="2016252" cy="566928"/>
+          </a:xfrm>
+          <a:prstGeom prst="roundRect">
+            <a:avLst>
+              <a:gd name="adj" fmla="val 12000"/>
+            </a:avLst>
+          </a:prstGeom>
+          <a:solidFill>
+            <a:srgbClr val="2E3338"/>
+          </a:solidFill>
+          <a:ln>
+            <a:noFill/>
+          </a:ln>
+          <a:effectLst/>
+        </p:spPr>
+        <p:style>
+          <a:lnRef idx="1">
+            <a:schemeClr val="accent1"/>
+          </a:lnRef>
+          <a:fillRef idx="3">
+            <a:schemeClr val="accent1"/>
+          </a:fillRef>
+          <a:effectRef idx="2">
+            <a:schemeClr val="accent1"/>
+          </a:effectRef>
+          <a:fontRef idx="minor">
+            <a:schemeClr val="lt1"/>
+          </a:fontRef>
+        </p:style>
+        <p:txBody>
+          <a:bodyPr rtlCol="0" anchor="ctr" wrap="square" lIns="73152" rIns="73152"/>
+          <a:lstStyle/>
+          <a:p>
+            <a:pPr algn="ctr"/>
+            <a:r>
+              <a:rPr sz="1300" b="1">
+                <a:solidFill>
+                  <a:srgbClr val="DEE2E6"/>
+                </a:solidFill>
+              </a:rPr>
+              <a:t>CommandHistory</a:t>
+            </a:r>
+          </a:p>
+          <a:p>
+            <a:pPr algn="ctr"/>
+            <a:r>
+              <a:rPr sz="1100" b="0">
+                <a:solidFill>
+                  <a:srgbClr val="9AA3AB"/>
+                </a:solidFill>
+              </a:rPr>
+              <a:t>done and undone</a:t>
+            </a:r>
+          </a:p>
+        </p:txBody>
+      </p:sp>
+      <p:sp>
+        <p:nvSpPr>
+          <p:cNvPr id="10" name="Rounded Rectangle 9"/>
+          <p:cNvSpPr/>
+          <p:nvPr/>
+        </p:nvSpPr>
+        <p:spPr>
+          <a:xfrm>
+            <a:off x="4626864" y="3712464"/>
+            <a:ext cx="2016252" cy="566928"/>
+          </a:xfrm>
+          <a:prstGeom prst="roundRect">
+            <a:avLst>
+              <a:gd name="adj" fmla="val 12000"/>
+            </a:avLst>
+          </a:prstGeom>
+          <a:solidFill>
+            <a:srgbClr val="2E3338"/>
+          </a:solidFill>
+          <a:ln>
+            <a:noFill/>
+          </a:ln>
+          <a:effectLst/>
+        </p:spPr>
+        <p:style>
+          <a:lnRef idx="1">
+            <a:schemeClr val="accent1"/>
+          </a:lnRef>
+          <a:fillRef idx="3">
+            <a:schemeClr val="accent1"/>
+          </a:fillRef>
+          <a:effectRef idx="2">
+            <a:schemeClr val="accent1"/>
+          </a:effectRef>
+          <a:fontRef idx="minor">
+            <a:schemeClr val="lt1"/>
+          </a:fontRef>
+        </p:style>
+        <p:txBody>
+          <a:bodyPr rtlCol="0" anchor="ctr" wrap="square" lIns="73152" rIns="73152"/>
+          <a:lstStyle/>
+          <a:p>
+            <a:pPr algn="ctr"/>
+            <a:r>
+              <a:rPr sz="1300" b="1">
+                <a:solidFill>
+                  <a:srgbClr val="DEE2E6"/>
+                </a:solidFill>
+              </a:rPr>
+              <a:t>MoveCommand</a:t>
+            </a:r>
+          </a:p>
+          <a:p>
+            <a:pPr algn="ctr"/>
+            <a:r>
+              <a:rPr sz="1100" b="0">
+                <a:solidFill>
+                  <a:srgbClr val="9AA3AB"/>
+                </a:solidFill>
+              </a:rPr>
+              <a:t>changes the level</a:t>
+            </a:r>
+          </a:p>
+        </p:txBody>
+      </p:sp>
+      <p:cxnSp>
+        <p:nvCxnSpPr>
+          <p:cNvPr id="11" name="Connector 10"/>
+          <p:cNvCxnSpPr/>
+          <p:nvPr/>
+        </p:nvCxnSpPr>
+        <p:spPr>
+          <a:xfrm>
+            <a:off x="5634990" y="3182112"/>
+            <a:ext cx="0" cy="512064"/>
+          </a:xfrm>
+          <a:prstGeom prst="line">
+            <a:avLst/>
+          </a:prstGeom>
+          <a:ln w="25400">
+            <a:solidFill>
+              <a:srgbClr val="9AA3AB"/>
+            </a:solidFill>
+            <a:tailEnd type="triangle"/>
+          </a:ln>
+        </p:spPr>
+        <p:style>
+          <a:lnRef idx="2">
+            <a:schemeClr val="accent1"/>
+          </a:lnRef>
+          <a:fillRef idx="0">
+            <a:schemeClr val="accent1"/>
+          </a:fillRef>
+          <a:effectRef idx="1">
+            <a:schemeClr val="accent1"/>
+          </a:effectRef>
+          <a:fontRef idx="minor">
+            <a:schemeClr val="tx1"/>
+          </a:fontRef>
+        </p:style>
+      </p:cxnSp>
+      <p:cxnSp>
+        <p:nvCxnSpPr>
+          <p:cNvPr id="12" name="Connector 11"/>
+          <p:cNvCxnSpPr/>
+          <p:nvPr/>
+        </p:nvCxnSpPr>
+        <p:spPr>
+          <a:xfrm>
+            <a:off x="4572000" y="2066544"/>
+            <a:ext cx="1062990" cy="512064"/>
+          </a:xfrm>
+          <a:prstGeom prst="line">
+            <a:avLst/>
+          </a:prstGeom>
+          <a:ln w="25400">
+            <a:solidFill>
+              <a:srgbClr val="9AA3AB"/>
+            </a:solidFill>
+            <a:tailEnd type="triangle"/>
+          </a:ln>
+        </p:spPr>
+        <p:style>
+          <a:lnRef idx="2">
+            <a:schemeClr val="accent1"/>
+          </a:lnRef>
+          <a:fillRef idx="0">
+            <a:schemeClr val="accent1"/>
+          </a:fillRef>
+          <a:effectRef idx="1">
+            <a:schemeClr val="accent1"/>
+          </a:effectRef>
+          <a:fontRef idx="minor">
+            <a:schemeClr val="tx1"/>
+          </a:fontRef>
+        </p:style>
+      </p:cxnSp>
+      <p:sp>
+        <p:nvSpPr>
+          <p:cNvPr id="13" name="Rounded Rectangle 12"/>
+          <p:cNvSpPr/>
+          <p:nvPr/>
+        </p:nvSpPr>
+        <p:spPr>
+          <a:xfrm>
+            <a:off x="6752844" y="2596896"/>
+            <a:ext cx="2016252" cy="566928"/>
+          </a:xfrm>
+          <a:prstGeom prst="roundRect">
+            <a:avLst>
+              <a:gd name="adj" fmla="val 12000"/>
+            </a:avLst>
+          </a:prstGeom>
+          <a:solidFill>
+            <a:srgbClr val="2E3338"/>
+          </a:solidFill>
+          <a:ln>
+            <a:noFill/>
+          </a:ln>
+          <a:effectLst/>
+        </p:spPr>
+        <p:style>
+          <a:lnRef idx="1">
+            <a:schemeClr val="accent1"/>
+          </a:lnRef>
+          <a:fillRef idx="3">
+            <a:schemeClr val="accent1"/>
+          </a:fillRef>
+          <a:effectRef idx="2">
+            <a:schemeClr val="accent1"/>
+          </a:effectRef>
+          <a:fontRef idx="minor">
+            <a:schemeClr val="lt1"/>
+          </a:fontRef>
+        </p:style>
+        <p:txBody>
+          <a:bodyPr rtlCol="0" anchor="ctr" wrap="square" lIns="73152" rIns="73152"/>
+          <a:lstStyle/>
+          <a:p>
+            <a:pPr algn="ctr"/>
+            <a:r>
+              <a:rPr sz="1300" b="1">
+                <a:solidFill>
+                  <a:srgbClr val="DEE2E6"/>
+                </a:solidFill>
+              </a:rPr>
+              <a:t>GameController</a:t>
+            </a:r>
+          </a:p>
+          <a:p>
+            <a:pPr algn="ctr"/>
+            <a:r>
+              <a:rPr sz="1100" b="0">
+                <a:solidFill>
+                  <a:srgbClr val="9AA3AB"/>
+                </a:solidFill>
+              </a:rPr>
+              <a:t>asked for actions</a:t>
+            </a:r>
+          </a:p>
+        </p:txBody>
+      </p:sp>
+      <p:cxnSp>
+        <p:nvCxnSpPr>
+          <p:cNvPr id="14" name="Connector 13"/>
+          <p:cNvCxnSpPr/>
+          <p:nvPr/>
+        </p:nvCxnSpPr>
+        <p:spPr>
+          <a:xfrm>
+            <a:off x="4572000" y="2066544"/>
+            <a:ext cx="3188970" cy="512064"/>
+          </a:xfrm>
+          <a:prstGeom prst="line">
+            <a:avLst/>
+          </a:prstGeom>
+          <a:ln w="25400">
+            <a:solidFill>
+              <a:srgbClr val="9AA3AB"/>
+            </a:solidFill>
+            <a:tailEnd type="triangle"/>
+          </a:ln>
+        </p:spPr>
+        <p:style>
+          <a:lnRef idx="2">
+            <a:schemeClr val="accent1"/>
+          </a:lnRef>
+          <a:fillRef idx="0">
+            <a:schemeClr val="accent1"/>
+          </a:fillRef>
+          <a:effectRef idx="1">
+            <a:schemeClr val="accent1"/>
+          </a:effectRef>
+          <a:fontRef idx="minor">
+            <a:schemeClr val="tx1"/>
+          </a:fontRef>
+        </p:style>
+      </p:cxnSp>
+      <p:sp>
+        <p:nvSpPr>
+          <p:cNvPr id="15" name="TextBox 14"/>
+          <p:cNvSpPr txBox="1"/>
+          <p:nvPr/>
+        </p:nvSpPr>
+        <p:spPr>
+          <a:xfrm>
+            <a:off x="457200" y="4462272"/>
+            <a:ext cx="8229600" cy="365760"/>
+          </a:xfrm>
+          <a:prstGeom prst="rect">
+            <a:avLst/>
+          </a:prstGeom>
+          <a:noFill/>
+        </p:spPr>
+        <p:txBody>
+          <a:bodyPr wrap="square">
+            <a:spAutoFit/>
+          </a:bodyPr>
+          <a:lstStyle/>
+          <a:p>
+            <a:pPr algn="ctr"/>
+            <a:r>
+              <a:rPr sz="1300" b="0" i="0">
+                <a:solidFill>
+                  <a:srgbClr val="9AA3AB"/>
+                </a:solidFill>
+              </a:rPr>
+              <a:t>The rules, the view and the history never refer to each other.</a:t>
+            </a:r>
+          </a:p>
+        </p:txBody>
+      </p:sp>
+    </p:spTree>
+  </p:cSld>
+  <p:clrMapOvr>
+    <a:masterClrMapping/>
+  </p:clrMapOvr>
+</p:sld>
+</file>
+
+<file path=ppt/slides/slide41.xml><?xml version="1.0" encoding="utf-8"?>
+<p:sld xmlns:a="http://schemas.openxmlformats.org/drawingml/2006/main" xmlns:p="http://schemas.openxmlformats.org/presentationml/2006/main" xmlns:r="http://schemas.openxmlformats.org/officeDocument/2006/relationships">
+  <p:cSld>
+    <p:spTree>
+      <p:nvGrpSpPr>
+        <p:cNvPr id="1" name=""/>
+        <p:cNvGrpSpPr/>
+        <p:nvPr/>
+      </p:nvGrpSpPr>
+      <p:grpSpPr/>
+      <p:sp>
+        <p:nvSpPr>
+          <p:cNvPr id="2" name="Title 1"/>
+          <p:cNvSpPr>
+            <a:spLocks noGrp="1"/>
+          </p:cNvSpPr>
+          <p:nvPr>
+            <p:ph type="title"/>
+          </p:nvPr>
+        </p:nvSpPr>
+        <p:spPr/>
+        <p:txBody>
+          <a:bodyPr/>
+          <a:lstStyle/>
+          <a:p>
+            <a:pPr indent="0" lvl="0" marL="0" rtl="0" algn="l">
+              <a:spcBef>
+                <a:spcPts val="0"/>
+              </a:spcBef>
+              <a:spcAft>
+                <a:spcPts val="0"/>
+              </a:spcAft>
+              <a:buNone/>
+            </a:pPr>
+            <a:r>
+              <a:rPr lang="en"/>
+              <a:t>Summary</a:t>
+            </a:r>
+            <a:endParaRPr/>
+          </a:p>
+        </p:txBody>
+      </p:sp>
+      <p:sp>
+        <p:nvSpPr>
+          <p:cNvPr id="3" name="Text Placeholder 2"/>
+          <p:cNvSpPr>
+            <a:spLocks noGrp="1"/>
+          </p:cNvSpPr>
+          <p:nvPr>
+            <p:ph type="body" idx="1"/>
+          </p:nvPr>
+        </p:nvSpPr>
+        <p:spPr>
+          <a:xfrm>
+            <a:off x="311700" y="885950"/>
+            <a:ext cx="8520600" cy="521208"/>
+          </a:xfrm>
+        </p:spPr>
+        <p:txBody>
+          <a:bodyPr/>
+          <a:lstStyle/>
+          <a:p>
+            <a:pPr indent="-330200" lvl="0" marL="457200" rtl="0" algn="l">
+              <a:spcBef>
+                <a:spcPts val="0"/>
+              </a:spcBef>
+              <a:spcAft>
+                <a:spcPts val="0"/>
+              </a:spcAft>
+              <a:buSzPts val="1600"/>
+              <a:buChar char="●"/>
+            </a:pPr>
+            <a:r>
+              <a:rPr lang="en" b="1"/>
+              <a:t>Six concerns, and this session’s answer to each.</a:t>
+            </a:r>
+            <a:endParaRPr/>
+          </a:p>
+        </p:txBody>
+      </p:sp>
+      <p:sp>
+        <p:nvSpPr>
+          <p:cNvPr id="4" name="Rounded Rectangle 3"/>
+          <p:cNvSpPr/>
+          <p:nvPr/>
+        </p:nvSpPr>
+        <p:spPr>
+          <a:xfrm>
+            <a:off x="548640" y="1417320"/>
+            <a:ext cx="2560320" cy="914400"/>
+          </a:xfrm>
+          <a:prstGeom prst="roundRect">
+            <a:avLst>
+              <a:gd name="adj" fmla="val 12000"/>
+            </a:avLst>
+          </a:prstGeom>
+          <a:solidFill>
+            <a:srgbClr val="2E3338"/>
+          </a:solidFill>
+          <a:ln>
+            <a:noFill/>
+          </a:ln>
+          <a:effectLst/>
+        </p:spPr>
+        <p:style>
+          <a:lnRef idx="1">
+            <a:schemeClr val="accent1"/>
+          </a:lnRef>
+          <a:fillRef idx="3">
+            <a:schemeClr val="accent1"/>
+          </a:fillRef>
+          <a:effectRef idx="2">
+            <a:schemeClr val="accent1"/>
+          </a:effectRef>
+          <a:fontRef idx="minor">
+            <a:schemeClr val="lt1"/>
+          </a:fontRef>
+        </p:style>
+        <p:txBody>
+          <a:bodyPr rtlCol="0" anchor="ctr" wrap="square" lIns="73152" rIns="73152"/>
+          <a:lstStyle/>
+          <a:p>
+            <a:pPr algn="ctr"/>
+            <a:r>
+              <a:rPr sz="1500" b="1">
+                <a:solidFill>
+                  <a:srgbClr val="DEE2E6"/>
+                </a:solidFill>
+              </a:rPr>
+              <a:t>What a level looks like</a:t>
+            </a:r>
+          </a:p>
+          <a:p>
+            <a:pPr algn="ctr"/>
+            <a:r>
+              <a:rPr sz="1300" b="0">
+                <a:solidFill>
+                  <a:srgbClr val="9AA3AB"/>
+                </a:solidFill>
+              </a:rPr>
+              <a:t>A text file, a character per cell</a:t>
+            </a:r>
+          </a:p>
+        </p:txBody>
+      </p:sp>
+      <p:sp>
+        <p:nvSpPr>
+          <p:cNvPr id="5" name="Rounded Rectangle 4"/>
+          <p:cNvSpPr/>
+          <p:nvPr/>
+        </p:nvSpPr>
+        <p:spPr>
+          <a:xfrm>
+            <a:off x="3291840" y="1417320"/>
+            <a:ext cx="2560320" cy="914400"/>
+          </a:xfrm>
+          <a:prstGeom prst="roundRect">
+            <a:avLst>
+              <a:gd name="adj" fmla="val 12000"/>
+            </a:avLst>
+          </a:prstGeom>
+          <a:solidFill>
+            <a:srgbClr val="2E3338"/>
+          </a:solidFill>
+          <a:ln>
+            <a:noFill/>
+          </a:ln>
+          <a:effectLst/>
+        </p:spPr>
+        <p:style>
+          <a:lnRef idx="1">
+            <a:schemeClr val="accent1"/>
+          </a:lnRef>
+          <a:fillRef idx="3">
+            <a:schemeClr val="accent1"/>
+          </a:fillRef>
+          <a:effectRef idx="2">
+            <a:schemeClr val="accent1"/>
+          </a:effectRef>
+          <a:fontRef idx="minor">
+            <a:schemeClr val="lt1"/>
+          </a:fontRef>
+        </p:style>
+        <p:txBody>
+          <a:bodyPr rtlCol="0" anchor="ctr" wrap="square" lIns="73152" rIns="73152"/>
+          <a:lstStyle/>
+          <a:p>
+            <a:pPr algn="ctr"/>
+            <a:r>
+              <a:rPr sz="1500" b="1">
+                <a:solidFill>
+                  <a:srgbClr val="DEE2E6"/>
+                </a:solidFill>
+              </a:rPr>
+              <a:t>Rules that can be tested</a:t>
+            </a:r>
+          </a:p>
+          <a:p>
+            <a:pPr algn="ctr"/>
+            <a:r>
+              <a:rPr sz="1300" b="0">
+                <a:solidFill>
+                  <a:srgbClr val="9AA3AB"/>
+                </a:solidFill>
+              </a:rPr>
+              <a:t>Level, apart from LevelView</a:t>
+            </a:r>
+          </a:p>
+        </p:txBody>
+      </p:sp>
+      <p:sp>
+        <p:nvSpPr>
+          <p:cNvPr id="6" name="Rounded Rectangle 5"/>
+          <p:cNvSpPr/>
+          <p:nvPr/>
+        </p:nvSpPr>
+        <p:spPr>
+          <a:xfrm>
+            <a:off x="6035040" y="1417320"/>
+            <a:ext cx="2560320" cy="914400"/>
+          </a:xfrm>
+          <a:prstGeom prst="roundRect">
+            <a:avLst>
+              <a:gd name="adj" fmla="val 12000"/>
+            </a:avLst>
+          </a:prstGeom>
+          <a:solidFill>
+            <a:srgbClr val="2E3338"/>
+          </a:solidFill>
+          <a:ln>
+            <a:noFill/>
+          </a:ln>
+          <a:effectLst/>
+        </p:spPr>
+        <p:style>
+          <a:lnRef idx="1">
+            <a:schemeClr val="accent1"/>
+          </a:lnRef>
+          <a:fillRef idx="3">
+            <a:schemeClr val="accent1"/>
+          </a:fillRef>
+          <a:effectRef idx="2">
+            <a:schemeClr val="accent1"/>
+          </a:effectRef>
+          <a:fontRef idx="minor">
+            <a:schemeClr val="lt1"/>
+          </a:fontRef>
+        </p:style>
+        <p:txBody>
+          <a:bodyPr rtlCol="0" anchor="ctr" wrap="square" lIns="73152" rIns="73152"/>
+          <a:lstStyle/>
+          <a:p>
+            <a:pPr algn="ctr"/>
+            <a:r>
+              <a:rPr sz="1500" b="1">
+                <a:solidFill>
+                  <a:srgbClr val="DEE2E6"/>
+                </a:solidFill>
+              </a:rPr>
+              <a:t>Checking the rules</a:t>
+            </a:r>
+          </a:p>
+          <a:p>
+            <a:pPr algn="ctr"/>
+            <a:r>
+              <a:rPr sz="1300" b="0">
+                <a:solidFill>
+                  <a:srgbClr val="9AA3AB"/>
+                </a:solidFill>
+              </a:rPr>
+              <a:t>Unit tests: arrange, act, assert</a:t>
+            </a:r>
+          </a:p>
+        </p:txBody>
+      </p:sp>
+      <p:sp>
+        <p:nvSpPr>
+          <p:cNvPr id="7" name="Rounded Rectangle 6"/>
+          <p:cNvSpPr/>
+          <p:nvPr/>
+        </p:nvSpPr>
+        <p:spPr>
+          <a:xfrm>
+            <a:off x="548640" y="2468880"/>
+            <a:ext cx="2560320" cy="914400"/>
+          </a:xfrm>
+          <a:prstGeom prst="roundRect">
+            <a:avLst>
+              <a:gd name="adj" fmla="val 12000"/>
+            </a:avLst>
+          </a:prstGeom>
+          <a:solidFill>
+            <a:srgbClr val="2E3338"/>
+          </a:solidFill>
+          <a:ln>
+            <a:noFill/>
+          </a:ln>
+          <a:effectLst/>
+        </p:spPr>
+        <p:style>
+          <a:lnRef idx="1">
+            <a:schemeClr val="accent1"/>
+          </a:lnRef>
+          <a:fillRef idx="3">
+            <a:schemeClr val="accent1"/>
+          </a:fillRef>
+          <a:effectRef idx="2">
+            <a:schemeClr val="accent1"/>
+          </a:effectRef>
+          <a:fontRef idx="minor">
+            <a:schemeClr val="lt1"/>
+          </a:fontRef>
+        </p:style>
+        <p:txBody>
+          <a:bodyPr rtlCol="0" anchor="ctr" wrap="square" lIns="73152" rIns="73152"/>
+          <a:lstStyle/>
+          <a:p>
+            <a:pPr algn="ctr"/>
+            <a:r>
+              <a:rPr sz="1500" b="1">
+                <a:solidFill>
+                  <a:srgbClr val="DEE2E6"/>
+                </a:solidFill>
+              </a:rPr>
+              <a:t>A move that can be kept</a:t>
+            </a:r>
+          </a:p>
+          <a:p>
+            <a:pPr algn="ctr"/>
+            <a:r>
+              <a:rPr sz="1300" b="0">
+                <a:solidFill>
+                  <a:srgbClr val="9AA3AB"/>
+                </a:solidFill>
+              </a:rPr>
+              <a:t>Command</a:t>
+            </a:r>
+          </a:p>
+        </p:txBody>
+      </p:sp>
+      <p:sp>
+        <p:nvSpPr>
+          <p:cNvPr id="8" name="Rounded Rectangle 7"/>
+          <p:cNvSpPr/>
+          <p:nvPr/>
+        </p:nvSpPr>
+        <p:spPr>
+          <a:xfrm>
+            <a:off x="3291840" y="2468880"/>
+            <a:ext cx="2560320" cy="914400"/>
+          </a:xfrm>
+          <a:prstGeom prst="roundRect">
+            <a:avLst>
+              <a:gd name="adj" fmla="val 12000"/>
+            </a:avLst>
+          </a:prstGeom>
+          <a:solidFill>
+            <a:srgbClr val="2E3338"/>
+          </a:solidFill>
+          <a:ln>
+            <a:noFill/>
+          </a:ln>
+          <a:effectLst/>
+        </p:spPr>
+        <p:style>
+          <a:lnRef idx="1">
+            <a:schemeClr val="accent1"/>
+          </a:lnRef>
+          <a:fillRef idx="3">
+            <a:schemeClr val="accent1"/>
+          </a:fillRef>
+          <a:effectRef idx="2">
+            <a:schemeClr val="accent1"/>
+          </a:effectRef>
+          <a:fontRef idx="minor">
+            <a:schemeClr val="lt1"/>
+          </a:fontRef>
+        </p:style>
+        <p:txBody>
+          <a:bodyPr rtlCol="0" anchor="ctr" wrap="square" lIns="73152" rIns="73152"/>
+          <a:lstStyle/>
+          <a:p>
+            <a:pPr algn="ctr"/>
+            <a:r>
+              <a:rPr sz="1500" b="1">
+                <a:solidFill>
+                  <a:srgbClr val="DEE2E6"/>
+                </a:solidFill>
+              </a:rPr>
+              <a:t>Undo and redo</a:t>
+            </a:r>
+          </a:p>
+          <a:p>
+            <a:pPr algn="ctr"/>
+            <a:r>
+              <a:rPr sz="1300" b="0">
+                <a:solidFill>
+                  <a:srgbClr val="9AA3AB"/>
+                </a:solidFill>
+              </a:rPr>
+              <a:t>Two stacks of commands</a:t>
+            </a:r>
+          </a:p>
+        </p:txBody>
+      </p:sp>
+      <p:sp>
+        <p:nvSpPr>
+          <p:cNvPr id="9" name="Rounded Rectangle 8"/>
+          <p:cNvSpPr/>
+          <p:nvPr/>
+        </p:nvSpPr>
+        <p:spPr>
+          <a:xfrm>
+            <a:off x="6035040" y="2468880"/>
+            <a:ext cx="2560320" cy="914400"/>
+          </a:xfrm>
+          <a:prstGeom prst="roundRect">
+            <a:avLst>
+              <a:gd name="adj" fmla="val 12000"/>
+            </a:avLst>
+          </a:prstGeom>
+          <a:solidFill>
+            <a:srgbClr val="2E3338"/>
+          </a:solidFill>
+          <a:ln>
+            <a:noFill/>
+          </a:ln>
+          <a:effectLst/>
+        </p:spPr>
+        <p:style>
+          <a:lnRef idx="1">
+            <a:schemeClr val="accent1"/>
+          </a:lnRef>
+          <a:fillRef idx="3">
+            <a:schemeClr val="accent1"/>
+          </a:fillRef>
+          <a:effectRef idx="2">
+            <a:schemeClr val="accent1"/>
+          </a:effectRef>
+          <a:fontRef idx="minor">
+            <a:schemeClr val="lt1"/>
+          </a:fontRef>
+        </p:style>
+        <p:txBody>
+          <a:bodyPr rtlCol="0" anchor="ctr" wrap="square" lIns="73152" rIns="73152"/>
+          <a:lstStyle/>
+          <a:p>
+            <a:pPr algn="ctr"/>
+            <a:r>
+              <a:rPr sz="1500" b="1">
+                <a:solidFill>
+                  <a:srgbClr val="DEE2E6"/>
+                </a:solidFill>
+              </a:rPr>
+              <a:t>Keys the player can change</a:t>
+            </a:r>
+          </a:p>
+          <a:p>
+            <a:pPr algn="ctr"/>
+            <a:r>
+              <a:rPr sz="1300" b="0">
+                <a:solidFill>
+                  <a:srgbClr val="9AA3AB"/>
+                </a:solidFill>
+              </a:rPr>
+              <a:t>A table from keys to moves</a:t>
+            </a:r>
+          </a:p>
+        </p:txBody>
+      </p:sp>
+    </p:spTree>
+  </p:cSld>
+  <p:clrMapOvr>
+    <a:masterClrMapping/>
+  </p:clrMapOvr>
+</p:sld>
+</file>
+
 <file path=ppt/slides/slide5.xml><?xml version="1.0" encoding="utf-8"?>
 <p:sld xmlns:a="http://schemas.openxmlformats.org/drawingml/2006/main" xmlns:r="http://schemas.openxmlformats.org/officeDocument/2006/relationships" xmlns:mc="http://schemas.openxmlformats.org/markup-compatibility/2006" xmlns:mv="urn:schemas-microsoft-com:mac:vml" xmlns:p="http://schemas.openxmlformats.org/presentationml/2006/main" xmlns:c="http://schemas.openxmlformats.org/drawingml/2006/chart" xmlns:dgm="http://schemas.openxmlformats.org/drawingml/2006/diagram" xmlns:o="urn:schemas-microsoft-com:office:office" xmlns:v="urn:schemas-microsoft-com:vml" xmlns:pvml="urn:schemas-microsoft-com:office:powerpoint" xmlns:com="http://schemas.openxmlformats.org/drawingml/2006/compatibility" xmlns:p14="http://schemas.microsoft.com/office/powerpoint/2010/main" xmlns:p15="http://schemas.microsoft.com/office/powerpoint/2012/main" xmlns:ahyp="http://schemas.microsoft.com/office/drawing/2018/hyperlinkcolor">
   <p:cSld>

--- a/slides/04 Sokoban.pptx
+++ b/slides/04 Sokoban.pptx
@@ -2386,7 +2386,7 @@
           <a:lstStyle/>
           <a:p>
             <a:r>
-              <a:t>Ask: is moving the player back enough? No: a push must pull the box back too. So the command remembers what happened.</a:t>
+              <a:t>Ask: is moving the player back enough? No: a push must pull the box back too. The command therefore remembers what happened.</a:t>
             </a:r>
           </a:p>
         </p:txBody>
@@ -19607,6 +19607,1178 @@
 </file>
 
 <file path=ppt/slides/slide36.xml><?xml version="1.0" encoding="utf-8"?>
+<p:sld xmlns:a="http://schemas.openxmlformats.org/drawingml/2006/main" xmlns:p="http://schemas.openxmlformats.org/presentationml/2006/main" xmlns:r="http://schemas.openxmlformats.org/officeDocument/2006/relationships">
+  <p:cSld>
+    <p:spTree>
+      <p:nvGrpSpPr>
+        <p:cNvPr id="1" name=""/>
+        <p:cNvGrpSpPr/>
+        <p:nvPr/>
+      </p:nvGrpSpPr>
+      <p:grpSpPr/>
+      <p:sp>
+        <p:nvSpPr>
+          <p:cNvPr id="2" name="Title 1"/>
+          <p:cNvSpPr>
+            <a:spLocks noGrp="1"/>
+          </p:cNvSpPr>
+          <p:nvPr>
+            <p:ph type="title"/>
+          </p:nvPr>
+        </p:nvSpPr>
+        <p:spPr/>
+        <p:txBody>
+          <a:bodyPr/>
+          <a:lstStyle/>
+          <a:p>
+            <a:pPr indent="0" lvl="0" marL="0" rtl="0" algn="l">
+              <a:spcBef>
+                <a:spcPts val="0"/>
+              </a:spcBef>
+              <a:spcAft>
+                <a:spcPts val="0"/>
+              </a:spcAft>
+              <a:buNone/>
+            </a:pPr>
+            <a:r>
+              <a:rPr lang="en"/>
+              <a:t>The Whole Game</a:t>
+            </a:r>
+            <a:endParaRPr/>
+          </a:p>
+        </p:txBody>
+      </p:sp>
+      <p:sp>
+        <p:nvSpPr>
+          <p:cNvPr id="3" name="Text Placeholder 2"/>
+          <p:cNvSpPr>
+            <a:spLocks noGrp="1"/>
+          </p:cNvSpPr>
+          <p:nvPr>
+            <p:ph type="body" idx="1"/>
+          </p:nvPr>
+        </p:nvSpPr>
+        <p:spPr>
+          <a:xfrm>
+            <a:off x="311700" y="885950"/>
+            <a:ext cx="8520600" cy="521208"/>
+          </a:xfrm>
+        </p:spPr>
+        <p:txBody>
+          <a:bodyPr/>
+          <a:lstStyle/>
+          <a:p>
+            <a:pPr indent="-330200" lvl="0" marL="457200" rtl="0" algn="l">
+              <a:spcBef>
+                <a:spcPts val="0"/>
+              </a:spcBef>
+              <a:spcAft>
+                <a:spcPts val="0"/>
+              </a:spcAft>
+              <a:buSzPts val="1600"/>
+              <a:buChar char="●"/>
+            </a:pPr>
+            <a:r>
+              <a:rPr lang="en" b="1"/>
+              <a:t>Sokoban4 adds a title screen, seven levels and a restart. The rules did not change.</a:t>
+            </a:r>
+            <a:endParaRPr/>
+          </a:p>
+        </p:txBody>
+      </p:sp>
+      <p:sp>
+        <p:nvSpPr>
+          <p:cNvPr id="4" name="Rounded Rectangle 3"/>
+          <p:cNvSpPr/>
+          <p:nvPr/>
+        </p:nvSpPr>
+        <p:spPr>
+          <a:xfrm>
+            <a:off x="3429000" y="1481328"/>
+            <a:ext cx="2286000" cy="566928"/>
+          </a:xfrm>
+          <a:prstGeom prst="roundRect">
+            <a:avLst>
+              <a:gd name="adj" fmla="val 12000"/>
+            </a:avLst>
+          </a:prstGeom>
+          <a:solidFill>
+            <a:srgbClr val="2E3338"/>
+          </a:solidFill>
+          <a:ln w="25400">
+            <a:solidFill>
+              <a:srgbClr val="D45D35"/>
+            </a:solidFill>
+          </a:ln>
+          <a:effectLst/>
+        </p:spPr>
+        <p:style>
+          <a:lnRef idx="1">
+            <a:schemeClr val="accent1"/>
+          </a:lnRef>
+          <a:fillRef idx="3">
+            <a:schemeClr val="accent1"/>
+          </a:fillRef>
+          <a:effectRef idx="2">
+            <a:schemeClr val="accent1"/>
+          </a:effectRef>
+          <a:fontRef idx="minor">
+            <a:schemeClr val="lt1"/>
+          </a:fontRef>
+        </p:style>
+        <p:txBody>
+          <a:bodyPr rtlCol="0" anchor="ctr" wrap="square" lIns="73152" rIns="73152"/>
+          <a:lstStyle/>
+          <a:p>
+            <a:pPr algn="ctr"/>
+            <a:r>
+              <a:rPr sz="1300" b="1">
+                <a:solidFill>
+                  <a:srgbClr val="DEE2E6"/>
+                </a:solidFill>
+              </a:rPr>
+              <a:t>Game1 : Core</a:t>
+            </a:r>
+          </a:p>
+          <a:p>
+            <a:pPr algn="ctr"/>
+            <a:r>
+              <a:rPr sz="1100" b="0">
+                <a:solidFill>
+                  <a:srgbClr val="9AA3AB"/>
+                </a:solidFill>
+              </a:rPr>
+              <a:t>connects the parts</a:t>
+            </a:r>
+          </a:p>
+        </p:txBody>
+      </p:sp>
+      <p:sp>
+        <p:nvSpPr>
+          <p:cNvPr id="5" name="Rounded Rectangle 4"/>
+          <p:cNvSpPr/>
+          <p:nvPr/>
+        </p:nvSpPr>
+        <p:spPr>
+          <a:xfrm>
+            <a:off x="374904" y="2596896"/>
+            <a:ext cx="2016252" cy="566928"/>
+          </a:xfrm>
+          <a:prstGeom prst="roundRect">
+            <a:avLst>
+              <a:gd name="adj" fmla="val 12000"/>
+            </a:avLst>
+          </a:prstGeom>
+          <a:solidFill>
+            <a:srgbClr val="2E3338"/>
+          </a:solidFill>
+          <a:ln>
+            <a:noFill/>
+          </a:ln>
+          <a:effectLst/>
+        </p:spPr>
+        <p:style>
+          <a:lnRef idx="1">
+            <a:schemeClr val="accent1"/>
+          </a:lnRef>
+          <a:fillRef idx="3">
+            <a:schemeClr val="accent1"/>
+          </a:fillRef>
+          <a:effectRef idx="2">
+            <a:schemeClr val="accent1"/>
+          </a:effectRef>
+          <a:fontRef idx="minor">
+            <a:schemeClr val="lt1"/>
+          </a:fontRef>
+        </p:style>
+        <p:txBody>
+          <a:bodyPr rtlCol="0" anchor="ctr" wrap="square" lIns="73152" rIns="73152"/>
+          <a:lstStyle/>
+          <a:p>
+            <a:pPr algn="ctr"/>
+            <a:r>
+              <a:rPr sz="1300" b="1">
+                <a:solidFill>
+                  <a:srgbClr val="DEE2E6"/>
+                </a:solidFill>
+              </a:rPr>
+              <a:t>Level</a:t>
+            </a:r>
+          </a:p>
+          <a:p>
+            <a:pPr algn="ctr"/>
+            <a:r>
+              <a:rPr sz="1100" b="0">
+                <a:solidFill>
+                  <a:srgbClr val="9AA3AB"/>
+                </a:solidFill>
+              </a:rPr>
+              <a:t>state and rules</a:t>
+            </a:r>
+          </a:p>
+        </p:txBody>
+      </p:sp>
+      <p:cxnSp>
+        <p:nvCxnSpPr>
+          <p:cNvPr id="6" name="Connector 5"/>
+          <p:cNvCxnSpPr/>
+          <p:nvPr/>
+        </p:nvCxnSpPr>
+        <p:spPr>
+          <a:xfrm flipH="1">
+            <a:off x="1383030" y="2066544"/>
+            <a:ext cx="3188970" cy="512064"/>
+          </a:xfrm>
+          <a:prstGeom prst="line">
+            <a:avLst/>
+          </a:prstGeom>
+          <a:ln w="25400">
+            <a:solidFill>
+              <a:srgbClr val="9AA3AB"/>
+            </a:solidFill>
+            <a:tailEnd type="triangle"/>
+          </a:ln>
+        </p:spPr>
+        <p:style>
+          <a:lnRef idx="2">
+            <a:schemeClr val="accent1"/>
+          </a:lnRef>
+          <a:fillRef idx="0">
+            <a:schemeClr val="accent1"/>
+          </a:fillRef>
+          <a:effectRef idx="1">
+            <a:schemeClr val="accent1"/>
+          </a:effectRef>
+          <a:fontRef idx="minor">
+            <a:schemeClr val="tx1"/>
+          </a:fontRef>
+        </p:style>
+      </p:cxnSp>
+      <p:sp>
+        <p:nvSpPr>
+          <p:cNvPr id="7" name="Rounded Rectangle 6"/>
+          <p:cNvSpPr/>
+          <p:nvPr/>
+        </p:nvSpPr>
+        <p:spPr>
+          <a:xfrm>
+            <a:off x="2500884" y="2596896"/>
+            <a:ext cx="2016252" cy="566928"/>
+          </a:xfrm>
+          <a:prstGeom prst="roundRect">
+            <a:avLst>
+              <a:gd name="adj" fmla="val 12000"/>
+            </a:avLst>
+          </a:prstGeom>
+          <a:solidFill>
+            <a:srgbClr val="2E3338"/>
+          </a:solidFill>
+          <a:ln>
+            <a:noFill/>
+          </a:ln>
+          <a:effectLst/>
+        </p:spPr>
+        <p:style>
+          <a:lnRef idx="1">
+            <a:schemeClr val="accent1"/>
+          </a:lnRef>
+          <a:fillRef idx="3">
+            <a:schemeClr val="accent1"/>
+          </a:fillRef>
+          <a:effectRef idx="2">
+            <a:schemeClr val="accent1"/>
+          </a:effectRef>
+          <a:fontRef idx="minor">
+            <a:schemeClr val="lt1"/>
+          </a:fontRef>
+        </p:style>
+        <p:txBody>
+          <a:bodyPr rtlCol="0" anchor="ctr" wrap="square" lIns="73152" rIns="73152"/>
+          <a:lstStyle/>
+          <a:p>
+            <a:pPr algn="ctr"/>
+            <a:r>
+              <a:rPr sz="1300" b="1">
+                <a:solidFill>
+                  <a:srgbClr val="DEE2E6"/>
+                </a:solidFill>
+              </a:rPr>
+              <a:t>LevelView</a:t>
+            </a:r>
+          </a:p>
+          <a:p>
+            <a:pPr algn="ctr"/>
+            <a:r>
+              <a:rPr sz="1100" b="0">
+                <a:solidFill>
+                  <a:srgbClr val="9AA3AB"/>
+                </a:solidFill>
+              </a:rPr>
+              <a:t>only reads the level</a:t>
+            </a:r>
+          </a:p>
+        </p:txBody>
+      </p:sp>
+      <p:cxnSp>
+        <p:nvCxnSpPr>
+          <p:cNvPr id="8" name="Connector 7"/>
+          <p:cNvCxnSpPr/>
+          <p:nvPr/>
+        </p:nvCxnSpPr>
+        <p:spPr>
+          <a:xfrm flipH="1">
+            <a:off x="3509010" y="2066544"/>
+            <a:ext cx="1062990" cy="512064"/>
+          </a:xfrm>
+          <a:prstGeom prst="line">
+            <a:avLst/>
+          </a:prstGeom>
+          <a:ln w="25400">
+            <a:solidFill>
+              <a:srgbClr val="9AA3AB"/>
+            </a:solidFill>
+            <a:tailEnd type="triangle"/>
+          </a:ln>
+        </p:spPr>
+        <p:style>
+          <a:lnRef idx="2">
+            <a:schemeClr val="accent1"/>
+          </a:lnRef>
+          <a:fillRef idx="0">
+            <a:schemeClr val="accent1"/>
+          </a:fillRef>
+          <a:effectRef idx="1">
+            <a:schemeClr val="accent1"/>
+          </a:effectRef>
+          <a:fontRef idx="minor">
+            <a:schemeClr val="tx1"/>
+          </a:fontRef>
+        </p:style>
+      </p:cxnSp>
+      <p:sp>
+        <p:nvSpPr>
+          <p:cNvPr id="9" name="Rounded Rectangle 8"/>
+          <p:cNvSpPr/>
+          <p:nvPr/>
+        </p:nvSpPr>
+        <p:spPr>
+          <a:xfrm>
+            <a:off x="4626864" y="2596896"/>
+            <a:ext cx="2016252" cy="566928"/>
+          </a:xfrm>
+          <a:prstGeom prst="roundRect">
+            <a:avLst>
+              <a:gd name="adj" fmla="val 12000"/>
+            </a:avLst>
+          </a:prstGeom>
+          <a:solidFill>
+            <a:srgbClr val="2E3338"/>
+          </a:solidFill>
+          <a:ln>
+            <a:noFill/>
+          </a:ln>
+          <a:effectLst/>
+        </p:spPr>
+        <p:style>
+          <a:lnRef idx="1">
+            <a:schemeClr val="accent1"/>
+          </a:lnRef>
+          <a:fillRef idx="3">
+            <a:schemeClr val="accent1"/>
+          </a:fillRef>
+          <a:effectRef idx="2">
+            <a:schemeClr val="accent1"/>
+          </a:effectRef>
+          <a:fontRef idx="minor">
+            <a:schemeClr val="lt1"/>
+          </a:fontRef>
+        </p:style>
+        <p:txBody>
+          <a:bodyPr rtlCol="0" anchor="ctr" wrap="square" lIns="73152" rIns="73152"/>
+          <a:lstStyle/>
+          <a:p>
+            <a:pPr algn="ctr"/>
+            <a:r>
+              <a:rPr sz="1300" b="1">
+                <a:solidFill>
+                  <a:srgbClr val="DEE2E6"/>
+                </a:solidFill>
+              </a:rPr>
+              <a:t>CommandHistory</a:t>
+            </a:r>
+          </a:p>
+          <a:p>
+            <a:pPr algn="ctr"/>
+            <a:r>
+              <a:rPr sz="1100" b="0">
+                <a:solidFill>
+                  <a:srgbClr val="9AA3AB"/>
+                </a:solidFill>
+              </a:rPr>
+              <a:t>done and undone</a:t>
+            </a:r>
+          </a:p>
+        </p:txBody>
+      </p:sp>
+      <p:sp>
+        <p:nvSpPr>
+          <p:cNvPr id="10" name="Rounded Rectangle 9"/>
+          <p:cNvSpPr/>
+          <p:nvPr/>
+        </p:nvSpPr>
+        <p:spPr>
+          <a:xfrm>
+            <a:off x="4626864" y="3712464"/>
+            <a:ext cx="2016252" cy="566928"/>
+          </a:xfrm>
+          <a:prstGeom prst="roundRect">
+            <a:avLst>
+              <a:gd name="adj" fmla="val 12000"/>
+            </a:avLst>
+          </a:prstGeom>
+          <a:solidFill>
+            <a:srgbClr val="2E3338"/>
+          </a:solidFill>
+          <a:ln>
+            <a:noFill/>
+          </a:ln>
+          <a:effectLst/>
+        </p:spPr>
+        <p:style>
+          <a:lnRef idx="1">
+            <a:schemeClr val="accent1"/>
+          </a:lnRef>
+          <a:fillRef idx="3">
+            <a:schemeClr val="accent1"/>
+          </a:fillRef>
+          <a:effectRef idx="2">
+            <a:schemeClr val="accent1"/>
+          </a:effectRef>
+          <a:fontRef idx="minor">
+            <a:schemeClr val="lt1"/>
+          </a:fontRef>
+        </p:style>
+        <p:txBody>
+          <a:bodyPr rtlCol="0" anchor="ctr" wrap="square" lIns="73152" rIns="73152"/>
+          <a:lstStyle/>
+          <a:p>
+            <a:pPr algn="ctr"/>
+            <a:r>
+              <a:rPr sz="1300" b="1">
+                <a:solidFill>
+                  <a:srgbClr val="DEE2E6"/>
+                </a:solidFill>
+              </a:rPr>
+              <a:t>MoveCommand</a:t>
+            </a:r>
+          </a:p>
+          <a:p>
+            <a:pPr algn="ctr"/>
+            <a:r>
+              <a:rPr sz="1100" b="0">
+                <a:solidFill>
+                  <a:srgbClr val="9AA3AB"/>
+                </a:solidFill>
+              </a:rPr>
+              <a:t>changes the level</a:t>
+            </a:r>
+          </a:p>
+        </p:txBody>
+      </p:sp>
+      <p:cxnSp>
+        <p:nvCxnSpPr>
+          <p:cNvPr id="11" name="Connector 10"/>
+          <p:cNvCxnSpPr/>
+          <p:nvPr/>
+        </p:nvCxnSpPr>
+        <p:spPr>
+          <a:xfrm>
+            <a:off x="5634990" y="3182112"/>
+            <a:ext cx="0" cy="512064"/>
+          </a:xfrm>
+          <a:prstGeom prst="line">
+            <a:avLst/>
+          </a:prstGeom>
+          <a:ln w="25400">
+            <a:solidFill>
+              <a:srgbClr val="9AA3AB"/>
+            </a:solidFill>
+            <a:tailEnd type="triangle"/>
+          </a:ln>
+        </p:spPr>
+        <p:style>
+          <a:lnRef idx="2">
+            <a:schemeClr val="accent1"/>
+          </a:lnRef>
+          <a:fillRef idx="0">
+            <a:schemeClr val="accent1"/>
+          </a:fillRef>
+          <a:effectRef idx="1">
+            <a:schemeClr val="accent1"/>
+          </a:effectRef>
+          <a:fontRef idx="minor">
+            <a:schemeClr val="tx1"/>
+          </a:fontRef>
+        </p:style>
+      </p:cxnSp>
+      <p:cxnSp>
+        <p:nvCxnSpPr>
+          <p:cNvPr id="12" name="Connector 11"/>
+          <p:cNvCxnSpPr/>
+          <p:nvPr/>
+        </p:nvCxnSpPr>
+        <p:spPr>
+          <a:xfrm>
+            <a:off x="4572000" y="2066544"/>
+            <a:ext cx="1062990" cy="512064"/>
+          </a:xfrm>
+          <a:prstGeom prst="line">
+            <a:avLst/>
+          </a:prstGeom>
+          <a:ln w="25400">
+            <a:solidFill>
+              <a:srgbClr val="9AA3AB"/>
+            </a:solidFill>
+            <a:tailEnd type="triangle"/>
+          </a:ln>
+        </p:spPr>
+        <p:style>
+          <a:lnRef idx="2">
+            <a:schemeClr val="accent1"/>
+          </a:lnRef>
+          <a:fillRef idx="0">
+            <a:schemeClr val="accent1"/>
+          </a:fillRef>
+          <a:effectRef idx="1">
+            <a:schemeClr val="accent1"/>
+          </a:effectRef>
+          <a:fontRef idx="minor">
+            <a:schemeClr val="tx1"/>
+          </a:fontRef>
+        </p:style>
+      </p:cxnSp>
+      <p:sp>
+        <p:nvSpPr>
+          <p:cNvPr id="13" name="Rounded Rectangle 12"/>
+          <p:cNvSpPr/>
+          <p:nvPr/>
+        </p:nvSpPr>
+        <p:spPr>
+          <a:xfrm>
+            <a:off x="6752844" y="2596896"/>
+            <a:ext cx="2016252" cy="566928"/>
+          </a:xfrm>
+          <a:prstGeom prst="roundRect">
+            <a:avLst>
+              <a:gd name="adj" fmla="val 12000"/>
+            </a:avLst>
+          </a:prstGeom>
+          <a:solidFill>
+            <a:srgbClr val="2E3338"/>
+          </a:solidFill>
+          <a:ln>
+            <a:noFill/>
+          </a:ln>
+          <a:effectLst/>
+        </p:spPr>
+        <p:style>
+          <a:lnRef idx="1">
+            <a:schemeClr val="accent1"/>
+          </a:lnRef>
+          <a:fillRef idx="3">
+            <a:schemeClr val="accent1"/>
+          </a:fillRef>
+          <a:effectRef idx="2">
+            <a:schemeClr val="accent1"/>
+          </a:effectRef>
+          <a:fontRef idx="minor">
+            <a:schemeClr val="lt1"/>
+          </a:fontRef>
+        </p:style>
+        <p:txBody>
+          <a:bodyPr rtlCol="0" anchor="ctr" wrap="square" lIns="73152" rIns="73152"/>
+          <a:lstStyle/>
+          <a:p>
+            <a:pPr algn="ctr"/>
+            <a:r>
+              <a:rPr sz="1300" b="1">
+                <a:solidFill>
+                  <a:srgbClr val="DEE2E6"/>
+                </a:solidFill>
+              </a:rPr>
+              <a:t>GameController</a:t>
+            </a:r>
+          </a:p>
+          <a:p>
+            <a:pPr algn="ctr"/>
+            <a:r>
+              <a:rPr sz="1100" b="0">
+                <a:solidFill>
+                  <a:srgbClr val="9AA3AB"/>
+                </a:solidFill>
+              </a:rPr>
+              <a:t>asked for actions</a:t>
+            </a:r>
+          </a:p>
+        </p:txBody>
+      </p:sp>
+      <p:cxnSp>
+        <p:nvCxnSpPr>
+          <p:cNvPr id="14" name="Connector 13"/>
+          <p:cNvCxnSpPr/>
+          <p:nvPr/>
+        </p:nvCxnSpPr>
+        <p:spPr>
+          <a:xfrm>
+            <a:off x="4572000" y="2066544"/>
+            <a:ext cx="3188970" cy="512064"/>
+          </a:xfrm>
+          <a:prstGeom prst="line">
+            <a:avLst/>
+          </a:prstGeom>
+          <a:ln w="25400">
+            <a:solidFill>
+              <a:srgbClr val="9AA3AB"/>
+            </a:solidFill>
+            <a:tailEnd type="triangle"/>
+          </a:ln>
+        </p:spPr>
+        <p:style>
+          <a:lnRef idx="2">
+            <a:schemeClr val="accent1"/>
+          </a:lnRef>
+          <a:fillRef idx="0">
+            <a:schemeClr val="accent1"/>
+          </a:fillRef>
+          <a:effectRef idx="1">
+            <a:schemeClr val="accent1"/>
+          </a:effectRef>
+          <a:fontRef idx="minor">
+            <a:schemeClr val="tx1"/>
+          </a:fontRef>
+        </p:style>
+      </p:cxnSp>
+      <p:sp>
+        <p:nvSpPr>
+          <p:cNvPr id="15" name="TextBox 14"/>
+          <p:cNvSpPr txBox="1"/>
+          <p:nvPr/>
+        </p:nvSpPr>
+        <p:spPr>
+          <a:xfrm>
+            <a:off x="457200" y="4462272"/>
+            <a:ext cx="8229600" cy="365760"/>
+          </a:xfrm>
+          <a:prstGeom prst="rect">
+            <a:avLst/>
+          </a:prstGeom>
+          <a:noFill/>
+        </p:spPr>
+        <p:txBody>
+          <a:bodyPr wrap="square">
+            <a:spAutoFit/>
+          </a:bodyPr>
+          <a:lstStyle/>
+          <a:p>
+            <a:pPr algn="ctr"/>
+            <a:r>
+              <a:rPr sz="1300" b="0" i="0">
+                <a:solidFill>
+                  <a:srgbClr val="9AA3AB"/>
+                </a:solidFill>
+              </a:rPr>
+              <a:t>The rules, the view and the history never refer to each other.</a:t>
+            </a:r>
+          </a:p>
+        </p:txBody>
+      </p:sp>
+    </p:spTree>
+  </p:cSld>
+  <p:clrMapOvr>
+    <a:masterClrMapping/>
+  </p:clrMapOvr>
+</p:sld>
+</file>
+
+<file path=ppt/slides/slide37.xml><?xml version="1.0" encoding="utf-8"?>
+<p:sld xmlns:a="http://schemas.openxmlformats.org/drawingml/2006/main" xmlns:p="http://schemas.openxmlformats.org/presentationml/2006/main" xmlns:r="http://schemas.openxmlformats.org/officeDocument/2006/relationships">
+  <p:cSld>
+    <p:spTree>
+      <p:nvGrpSpPr>
+        <p:cNvPr id="1" name=""/>
+        <p:cNvGrpSpPr/>
+        <p:nvPr/>
+      </p:nvGrpSpPr>
+      <p:grpSpPr/>
+      <p:sp>
+        <p:nvSpPr>
+          <p:cNvPr id="2" name="Title 1"/>
+          <p:cNvSpPr>
+            <a:spLocks noGrp="1"/>
+          </p:cNvSpPr>
+          <p:nvPr>
+            <p:ph type="title"/>
+          </p:nvPr>
+        </p:nvSpPr>
+        <p:spPr/>
+        <p:txBody>
+          <a:bodyPr/>
+          <a:lstStyle/>
+          <a:p>
+            <a:pPr indent="0" lvl="0" marL="0" rtl="0" algn="l">
+              <a:spcBef>
+                <a:spcPts val="0"/>
+              </a:spcBef>
+              <a:spcAft>
+                <a:spcPts val="0"/>
+              </a:spcAft>
+              <a:buNone/>
+            </a:pPr>
+            <a:r>
+              <a:rPr lang="en"/>
+              <a:t>Summary</a:t>
+            </a:r>
+            <a:endParaRPr/>
+          </a:p>
+        </p:txBody>
+      </p:sp>
+      <p:sp>
+        <p:nvSpPr>
+          <p:cNvPr id="3" name="Text Placeholder 2"/>
+          <p:cNvSpPr>
+            <a:spLocks noGrp="1"/>
+          </p:cNvSpPr>
+          <p:nvPr>
+            <p:ph type="body" idx="1"/>
+          </p:nvPr>
+        </p:nvSpPr>
+        <p:spPr>
+          <a:xfrm>
+            <a:off x="311700" y="885950"/>
+            <a:ext cx="8520600" cy="521208"/>
+          </a:xfrm>
+        </p:spPr>
+        <p:txBody>
+          <a:bodyPr/>
+          <a:lstStyle/>
+          <a:p>
+            <a:pPr indent="-330200" lvl="0" marL="457200" rtl="0" algn="l">
+              <a:spcBef>
+                <a:spcPts val="0"/>
+              </a:spcBef>
+              <a:spcAft>
+                <a:spcPts val="0"/>
+              </a:spcAft>
+              <a:buSzPts val="1600"/>
+              <a:buChar char="●"/>
+            </a:pPr>
+            <a:r>
+              <a:rPr lang="en" b="1"/>
+              <a:t>Six concerns, and this session’s answer to each.</a:t>
+            </a:r>
+            <a:endParaRPr/>
+          </a:p>
+        </p:txBody>
+      </p:sp>
+      <p:sp>
+        <p:nvSpPr>
+          <p:cNvPr id="4" name="Rounded Rectangle 3"/>
+          <p:cNvSpPr/>
+          <p:nvPr/>
+        </p:nvSpPr>
+        <p:spPr>
+          <a:xfrm>
+            <a:off x="548640" y="1417320"/>
+            <a:ext cx="2560320" cy="914400"/>
+          </a:xfrm>
+          <a:prstGeom prst="roundRect">
+            <a:avLst>
+              <a:gd name="adj" fmla="val 12000"/>
+            </a:avLst>
+          </a:prstGeom>
+          <a:solidFill>
+            <a:srgbClr val="2E3338"/>
+          </a:solidFill>
+          <a:ln>
+            <a:noFill/>
+          </a:ln>
+          <a:effectLst/>
+        </p:spPr>
+        <p:style>
+          <a:lnRef idx="1">
+            <a:schemeClr val="accent1"/>
+          </a:lnRef>
+          <a:fillRef idx="3">
+            <a:schemeClr val="accent1"/>
+          </a:fillRef>
+          <a:effectRef idx="2">
+            <a:schemeClr val="accent1"/>
+          </a:effectRef>
+          <a:fontRef idx="minor">
+            <a:schemeClr val="lt1"/>
+          </a:fontRef>
+        </p:style>
+        <p:txBody>
+          <a:bodyPr rtlCol="0" anchor="ctr" wrap="square" lIns="73152" rIns="73152"/>
+          <a:lstStyle/>
+          <a:p>
+            <a:pPr algn="ctr"/>
+            <a:r>
+              <a:rPr sz="1500" b="1">
+                <a:solidFill>
+                  <a:srgbClr val="DEE2E6"/>
+                </a:solidFill>
+              </a:rPr>
+              <a:t>What a level looks like</a:t>
+            </a:r>
+          </a:p>
+          <a:p>
+            <a:pPr algn="ctr"/>
+            <a:r>
+              <a:rPr sz="1300" b="0">
+                <a:solidFill>
+                  <a:srgbClr val="9AA3AB"/>
+                </a:solidFill>
+              </a:rPr>
+              <a:t>A text file, a character per cell</a:t>
+            </a:r>
+          </a:p>
+        </p:txBody>
+      </p:sp>
+      <p:sp>
+        <p:nvSpPr>
+          <p:cNvPr id="5" name="Rounded Rectangle 4"/>
+          <p:cNvSpPr/>
+          <p:nvPr/>
+        </p:nvSpPr>
+        <p:spPr>
+          <a:xfrm>
+            <a:off x="3291840" y="1417320"/>
+            <a:ext cx="2560320" cy="914400"/>
+          </a:xfrm>
+          <a:prstGeom prst="roundRect">
+            <a:avLst>
+              <a:gd name="adj" fmla="val 12000"/>
+            </a:avLst>
+          </a:prstGeom>
+          <a:solidFill>
+            <a:srgbClr val="2E3338"/>
+          </a:solidFill>
+          <a:ln>
+            <a:noFill/>
+          </a:ln>
+          <a:effectLst/>
+        </p:spPr>
+        <p:style>
+          <a:lnRef idx="1">
+            <a:schemeClr val="accent1"/>
+          </a:lnRef>
+          <a:fillRef idx="3">
+            <a:schemeClr val="accent1"/>
+          </a:fillRef>
+          <a:effectRef idx="2">
+            <a:schemeClr val="accent1"/>
+          </a:effectRef>
+          <a:fontRef idx="minor">
+            <a:schemeClr val="lt1"/>
+          </a:fontRef>
+        </p:style>
+        <p:txBody>
+          <a:bodyPr rtlCol="0" anchor="ctr" wrap="square" lIns="73152" rIns="73152"/>
+          <a:lstStyle/>
+          <a:p>
+            <a:pPr algn="ctr"/>
+            <a:r>
+              <a:rPr sz="1500" b="1">
+                <a:solidFill>
+                  <a:srgbClr val="DEE2E6"/>
+                </a:solidFill>
+              </a:rPr>
+              <a:t>Rules that can be tested</a:t>
+            </a:r>
+          </a:p>
+          <a:p>
+            <a:pPr algn="ctr"/>
+            <a:r>
+              <a:rPr sz="1300" b="0">
+                <a:solidFill>
+                  <a:srgbClr val="9AA3AB"/>
+                </a:solidFill>
+              </a:rPr>
+              <a:t>Level, apart from LevelView</a:t>
+            </a:r>
+          </a:p>
+        </p:txBody>
+      </p:sp>
+      <p:sp>
+        <p:nvSpPr>
+          <p:cNvPr id="6" name="Rounded Rectangle 5"/>
+          <p:cNvSpPr/>
+          <p:nvPr/>
+        </p:nvSpPr>
+        <p:spPr>
+          <a:xfrm>
+            <a:off x="6035040" y="1417320"/>
+            <a:ext cx="2560320" cy="914400"/>
+          </a:xfrm>
+          <a:prstGeom prst="roundRect">
+            <a:avLst>
+              <a:gd name="adj" fmla="val 12000"/>
+            </a:avLst>
+          </a:prstGeom>
+          <a:solidFill>
+            <a:srgbClr val="2E3338"/>
+          </a:solidFill>
+          <a:ln>
+            <a:noFill/>
+          </a:ln>
+          <a:effectLst/>
+        </p:spPr>
+        <p:style>
+          <a:lnRef idx="1">
+            <a:schemeClr val="accent1"/>
+          </a:lnRef>
+          <a:fillRef idx="3">
+            <a:schemeClr val="accent1"/>
+          </a:fillRef>
+          <a:effectRef idx="2">
+            <a:schemeClr val="accent1"/>
+          </a:effectRef>
+          <a:fontRef idx="minor">
+            <a:schemeClr val="lt1"/>
+          </a:fontRef>
+        </p:style>
+        <p:txBody>
+          <a:bodyPr rtlCol="0" anchor="ctr" wrap="square" lIns="73152" rIns="73152"/>
+          <a:lstStyle/>
+          <a:p>
+            <a:pPr algn="ctr"/>
+            <a:r>
+              <a:rPr sz="1500" b="1">
+                <a:solidFill>
+                  <a:srgbClr val="DEE2E6"/>
+                </a:solidFill>
+              </a:rPr>
+              <a:t>Checking the rules</a:t>
+            </a:r>
+          </a:p>
+          <a:p>
+            <a:pPr algn="ctr"/>
+            <a:r>
+              <a:rPr sz="1300" b="0">
+                <a:solidFill>
+                  <a:srgbClr val="9AA3AB"/>
+                </a:solidFill>
+              </a:rPr>
+              <a:t>Unit tests: arrange, act, assert</a:t>
+            </a:r>
+          </a:p>
+        </p:txBody>
+      </p:sp>
+      <p:sp>
+        <p:nvSpPr>
+          <p:cNvPr id="7" name="Rounded Rectangle 6"/>
+          <p:cNvSpPr/>
+          <p:nvPr/>
+        </p:nvSpPr>
+        <p:spPr>
+          <a:xfrm>
+            <a:off x="548640" y="2468880"/>
+            <a:ext cx="2560320" cy="914400"/>
+          </a:xfrm>
+          <a:prstGeom prst="roundRect">
+            <a:avLst>
+              <a:gd name="adj" fmla="val 12000"/>
+            </a:avLst>
+          </a:prstGeom>
+          <a:solidFill>
+            <a:srgbClr val="2E3338"/>
+          </a:solidFill>
+          <a:ln>
+            <a:noFill/>
+          </a:ln>
+          <a:effectLst/>
+        </p:spPr>
+        <p:style>
+          <a:lnRef idx="1">
+            <a:schemeClr val="accent1"/>
+          </a:lnRef>
+          <a:fillRef idx="3">
+            <a:schemeClr val="accent1"/>
+          </a:fillRef>
+          <a:effectRef idx="2">
+            <a:schemeClr val="accent1"/>
+          </a:effectRef>
+          <a:fontRef idx="minor">
+            <a:schemeClr val="lt1"/>
+          </a:fontRef>
+        </p:style>
+        <p:txBody>
+          <a:bodyPr rtlCol="0" anchor="ctr" wrap="square" lIns="73152" rIns="73152"/>
+          <a:lstStyle/>
+          <a:p>
+            <a:pPr algn="ctr"/>
+            <a:r>
+              <a:rPr sz="1500" b="1">
+                <a:solidFill>
+                  <a:srgbClr val="DEE2E6"/>
+                </a:solidFill>
+              </a:rPr>
+              <a:t>A move that can be kept</a:t>
+            </a:r>
+          </a:p>
+          <a:p>
+            <a:pPr algn="ctr"/>
+            <a:r>
+              <a:rPr sz="1300" b="0">
+                <a:solidFill>
+                  <a:srgbClr val="9AA3AB"/>
+                </a:solidFill>
+              </a:rPr>
+              <a:t>Command</a:t>
+            </a:r>
+          </a:p>
+        </p:txBody>
+      </p:sp>
+      <p:sp>
+        <p:nvSpPr>
+          <p:cNvPr id="8" name="Rounded Rectangle 7"/>
+          <p:cNvSpPr/>
+          <p:nvPr/>
+        </p:nvSpPr>
+        <p:spPr>
+          <a:xfrm>
+            <a:off x="3291840" y="2468880"/>
+            <a:ext cx="2560320" cy="914400"/>
+          </a:xfrm>
+          <a:prstGeom prst="roundRect">
+            <a:avLst>
+              <a:gd name="adj" fmla="val 12000"/>
+            </a:avLst>
+          </a:prstGeom>
+          <a:solidFill>
+            <a:srgbClr val="2E3338"/>
+          </a:solidFill>
+          <a:ln>
+            <a:noFill/>
+          </a:ln>
+          <a:effectLst/>
+        </p:spPr>
+        <p:style>
+          <a:lnRef idx="1">
+            <a:schemeClr val="accent1"/>
+          </a:lnRef>
+          <a:fillRef idx="3">
+            <a:schemeClr val="accent1"/>
+          </a:fillRef>
+          <a:effectRef idx="2">
+            <a:schemeClr val="accent1"/>
+          </a:effectRef>
+          <a:fontRef idx="minor">
+            <a:schemeClr val="lt1"/>
+          </a:fontRef>
+        </p:style>
+        <p:txBody>
+          <a:bodyPr rtlCol="0" anchor="ctr" wrap="square" lIns="73152" rIns="73152"/>
+          <a:lstStyle/>
+          <a:p>
+            <a:pPr algn="ctr"/>
+            <a:r>
+              <a:rPr sz="1500" b="1">
+                <a:solidFill>
+                  <a:srgbClr val="DEE2E6"/>
+                </a:solidFill>
+              </a:rPr>
+              <a:t>Undo and redo</a:t>
+            </a:r>
+          </a:p>
+          <a:p>
+            <a:pPr algn="ctr"/>
+            <a:r>
+              <a:rPr sz="1300" b="0">
+                <a:solidFill>
+                  <a:srgbClr val="9AA3AB"/>
+                </a:solidFill>
+              </a:rPr>
+              <a:t>Two stacks of commands</a:t>
+            </a:r>
+          </a:p>
+        </p:txBody>
+      </p:sp>
+      <p:sp>
+        <p:nvSpPr>
+          <p:cNvPr id="9" name="Rounded Rectangle 8"/>
+          <p:cNvSpPr/>
+          <p:nvPr/>
+        </p:nvSpPr>
+        <p:spPr>
+          <a:xfrm>
+            <a:off x="6035040" y="2468880"/>
+            <a:ext cx="2560320" cy="914400"/>
+          </a:xfrm>
+          <a:prstGeom prst="roundRect">
+            <a:avLst>
+              <a:gd name="adj" fmla="val 12000"/>
+            </a:avLst>
+          </a:prstGeom>
+          <a:solidFill>
+            <a:srgbClr val="2E3338"/>
+          </a:solidFill>
+          <a:ln>
+            <a:noFill/>
+          </a:ln>
+          <a:effectLst/>
+        </p:spPr>
+        <p:style>
+          <a:lnRef idx="1">
+            <a:schemeClr val="accent1"/>
+          </a:lnRef>
+          <a:fillRef idx="3">
+            <a:schemeClr val="accent1"/>
+          </a:fillRef>
+          <a:effectRef idx="2">
+            <a:schemeClr val="accent1"/>
+          </a:effectRef>
+          <a:fontRef idx="minor">
+            <a:schemeClr val="lt1"/>
+          </a:fontRef>
+        </p:style>
+        <p:txBody>
+          <a:bodyPr rtlCol="0" anchor="ctr" wrap="square" lIns="73152" rIns="73152"/>
+          <a:lstStyle/>
+          <a:p>
+            <a:pPr algn="ctr"/>
+            <a:r>
+              <a:rPr sz="1500" b="1">
+                <a:solidFill>
+                  <a:srgbClr val="DEE2E6"/>
+                </a:solidFill>
+              </a:rPr>
+              <a:t>Keys the player can change</a:t>
+            </a:r>
+          </a:p>
+          <a:p>
+            <a:pPr algn="ctr"/>
+            <a:r>
+              <a:rPr sz="1300" b="0">
+                <a:solidFill>
+                  <a:srgbClr val="9AA3AB"/>
+                </a:solidFill>
+              </a:rPr>
+              <a:t>A table from keys to moves</a:t>
+            </a:r>
+          </a:p>
+        </p:txBody>
+      </p:sp>
+    </p:spTree>
+  </p:cSld>
+  <p:clrMapOvr>
+    <a:masterClrMapping/>
+  </p:clrMapOvr>
+</p:sld>
+</file>
+
+<file path=ppt/slides/slide38.xml><?xml version="1.0" encoding="utf-8"?>
 <p:sld xmlns:a="http://schemas.openxmlformats.org/drawingml/2006/main" xmlns:r="http://schemas.openxmlformats.org/officeDocument/2006/relationships" xmlns:mc="http://schemas.openxmlformats.org/markup-compatibility/2006" xmlns:mv="urn:schemas-microsoft-com:mac:vml" xmlns:p="http://schemas.openxmlformats.org/presentationml/2006/main" xmlns:c="http://schemas.openxmlformats.org/drawingml/2006/chart" xmlns:dgm="http://schemas.openxmlformats.org/drawingml/2006/diagram" xmlns:o="urn:schemas-microsoft-com:office:office" xmlns:v="urn:schemas-microsoft-com:vml" xmlns:pvml="urn:schemas-microsoft-com:office:powerpoint" xmlns:com="http://schemas.openxmlformats.org/drawingml/2006/compatibility" xmlns:p14="http://schemas.microsoft.com/office/powerpoint/2010/main" xmlns:p15="http://schemas.microsoft.com/office/powerpoint/2012/main" xmlns:ahyp="http://schemas.microsoft.com/office/drawing/2018/hyperlinkcolor">
   <p:cSld>
     <p:spTree>
@@ -20455,1045 +21627,6 @@
 </p:sld>
 </file>
 
-<file path=ppt/slides/slide37.xml><?xml version="1.0" encoding="utf-8"?>
-<p:sld xmlns:a="http://schemas.openxmlformats.org/drawingml/2006/main" xmlns:r="http://schemas.openxmlformats.org/officeDocument/2006/relationships" xmlns:mc="http://schemas.openxmlformats.org/markup-compatibility/2006" xmlns:mv="urn:schemas-microsoft-com:mac:vml" xmlns:p="http://schemas.openxmlformats.org/presentationml/2006/main" xmlns:c="http://schemas.openxmlformats.org/drawingml/2006/chart" xmlns:dgm="http://schemas.openxmlformats.org/drawingml/2006/diagram" xmlns:o="urn:schemas-microsoft-com:office:office" xmlns:v="urn:schemas-microsoft-com:vml" xmlns:pvml="urn:schemas-microsoft-com:office:powerpoint" xmlns:com="http://schemas.openxmlformats.org/drawingml/2006/compatibility" xmlns:p14="http://schemas.microsoft.com/office/powerpoint/2010/main" xmlns:p15="http://schemas.microsoft.com/office/powerpoint/2012/main" xmlns:ahyp="http://schemas.microsoft.com/office/drawing/2018/hyperlinkcolor">
-  <p:cSld>
-    <p:spTree>
-      <p:nvGrpSpPr>
-        <p:cNvPr id="292" name="Shape 292"/>
-        <p:cNvGrpSpPr/>
-        <p:nvPr/>
-      </p:nvGrpSpPr>
-      <p:grpSpPr>
-        <a:xfrm>
-          <a:off x="0" y="0"/>
-          <a:ext cx="0" cy="0"/>
-          <a:chOff x="0" y="0"/>
-          <a:chExt cx="0" cy="0"/>
-        </a:xfrm>
-      </p:grpSpPr>
-      <p:sp>
-        <p:nvSpPr>
-          <p:cNvPr id="293" name="Google Shape;293;p45"/>
-          <p:cNvSpPr txBox="1"/>
-          <p:nvPr>
-            <p:ph type="title"/>
-          </p:nvPr>
-        </p:nvSpPr>
-        <p:spPr>
-          <a:xfrm>
-            <a:off x="311700" y="195615"/>
-            <a:ext cx="8520600" cy="572700"/>
-          </a:xfrm>
-          <a:prstGeom prst="rect">
-            <a:avLst/>
-          </a:prstGeom>
-        </p:spPr>
-        <p:txBody>
-          <a:bodyPr anchorCtr="0" anchor="t" bIns="91425" lIns="91425" spcFirstLastPara="1" rIns="91425" wrap="square" tIns="91425">
-            <a:normAutofit fontScale="90000"/>
-          </a:bodyPr>
-          <a:lstStyle/>
-          <a:p>
-            <a:pPr indent="0" lvl="0" marL="0" rtl="0" algn="l">
-              <a:spcBef>
-                <a:spcPts val="0"/>
-              </a:spcBef>
-              <a:spcAft>
-                <a:spcPts val="0"/>
-              </a:spcAft>
-              <a:buNone/>
-            </a:pPr>
-            <a:r>
-              <a:rPr lang="en">
-                <a:solidFill>
-                  <a:schemeClr val="accent5"/>
-                </a:solidFill>
-              </a:rPr>
-              <a:t>Exercise: Commands</a:t>
-            </a:r>
-            <a:endParaRPr>
-              <a:solidFill>
-                <a:schemeClr val="accent5"/>
-              </a:solidFill>
-            </a:endParaRPr>
-          </a:p>
-        </p:txBody>
-      </p:sp>
-      <p:sp>
-        <p:nvSpPr>
-          <p:cNvPr id="294" name="Google Shape;294;p45"/>
-          <p:cNvSpPr txBox="1"/>
-          <p:nvPr>
-            <p:ph idx="1" type="body"/>
-          </p:nvPr>
-        </p:nvSpPr>
-        <p:spPr>
-          <a:xfrm>
-            <a:off x="311700" y="885950"/>
-            <a:ext cx="8520600" cy="4023300"/>
-          </a:xfrm>
-          <a:prstGeom prst="rect">
-            <a:avLst/>
-          </a:prstGeom>
-        </p:spPr>
-        <p:txBody>
-          <a:bodyPr anchorCtr="0" anchor="t" bIns="91425" lIns="91425" spcFirstLastPara="1" rIns="91425" wrap="square" tIns="91425">
-            <a:normAutofit/>
-          </a:bodyPr>
-          <a:lstStyle/>
-          <a:p>
-            <a:pPr indent="-330200" lvl="0" marL="457200" rtl="0" algn="l">
-              <a:spcBef>
-                <a:spcPts val="0"/>
-              </a:spcBef>
-              <a:spcAft>
-                <a:spcPts val="0"/>
-              </a:spcAft>
-              <a:buSzPts val="1600"/>
-              <a:buChar char="●"/>
-            </a:pPr>
-            <a:r>
-              <a:rPr lang="en"/>
-              <a:t>Restart as a command</a:t>
-            </a:r>
-            <a:endParaRPr/>
-          </a:p>
-          <a:p>
-            <a:pPr indent="-317500" lvl="1" marL="914400" rtl="0" algn="l">
-              <a:spcBef>
-                <a:spcPts val="0"/>
-              </a:spcBef>
-              <a:spcAft>
-                <a:spcPts val="0"/>
-              </a:spcAft>
-              <a:buSzPts val="1400"/>
-              <a:buChar char="○"/>
-            </a:pPr>
-            <a:r>
-              <a:rPr lang="en"/>
-              <a:t>Make R a command too, so a restart can be undone</a:t>
-            </a:r>
-            <a:endParaRPr/>
-          </a:p>
-          <a:p>
-            <a:pPr indent="-317500" lvl="1" marL="914400" rtl="0" algn="l">
-              <a:spcBef>
-                <a:spcPts val="0"/>
-              </a:spcBef>
-              <a:spcAft>
-                <a:spcPts val="0"/>
-              </a:spcAft>
-              <a:buSzPts val="1400"/>
-              <a:buChar char="○"/>
-            </a:pPr>
-            <a:r>
-              <a:rPr lang="en"/>
-              <a:t>What must it remember?</a:t>
-            </a:r>
-            <a:endParaRPr/>
-          </a:p>
-          <a:p>
-            <a:pPr indent="-330200" lvl="0" marL="457200" rtl="0" algn="l">
-              <a:spcBef>
-                <a:spcPts val="0"/>
-              </a:spcBef>
-              <a:spcAft>
-                <a:spcPts val="0"/>
-              </a:spcAft>
-              <a:buSzPts val="1600"/>
-              <a:buChar char="●"/>
-            </a:pPr>
-            <a:r>
-              <a:rPr lang="en"/>
-              <a:t>Stretch: snapshot undo</a:t>
-            </a:r>
-            <a:endParaRPr/>
-          </a:p>
-          <a:p>
-            <a:pPr indent="-317500" lvl="1" marL="914400" rtl="0" algn="l">
-              <a:spcBef>
-                <a:spcPts val="0"/>
-              </a:spcBef>
-              <a:spcAft>
-                <a:spcPts val="0"/>
-              </a:spcAft>
-              <a:buSzPts val="1400"/>
-              <a:buChar char="○"/>
-            </a:pPr>
-            <a:r>
-              <a:rPr lang="en"/>
-              <a:t>Replace CommandHistory with a history of Level snapshots</a:t>
-            </a:r>
-            <a:endParaRPr/>
-          </a:p>
-          <a:p>
-            <a:pPr indent="-317500" lvl="1" marL="914400" rtl="0" algn="l">
-              <a:spcBef>
-                <a:spcPts val="0"/>
-              </a:spcBef>
-              <a:spcAft>
-                <a:spcPts val="0"/>
-              </a:spcAft>
-              <a:buSzPts val="1400"/>
-              <a:buChar char="○"/>
-            </a:pPr>
-            <a:r>
-              <a:rPr lang="en"/>
-              <a:t>Compare: code, memory, and how easy each is to get wrong</a:t>
-            </a:r>
-            <a:endParaRPr/>
-          </a:p>
-        </p:txBody>
-      </p:sp>
-    </p:spTree>
-  </p:cSld>
-  <p:clrMapOvr>
-    <a:masterClrMapping/>
-  </p:clrMapOvr>
-  <p:timing>
-    <p:tnLst>
-      <p:par>
-        <p:cTn dur="indefinite" nodeType="tmRoot" restart="never">
-          <p:childTnLst>
-            <p:seq concurrent="1" nextAc="seek">
-              <p:cTn dur="indefinite" id="2" nodeType="mainSeq">
-                <p:childTnLst>
-                  <p:par>
-                    <p:cTn fill="hold">
-                      <p:stCondLst>
-                        <p:cond delay="indefinite"/>
-                      </p:stCondLst>
-                      <p:childTnLst>
-                        <p:par>
-                          <p:cTn fill="hold">
-                            <p:stCondLst>
-                              <p:cond delay="0"/>
-                            </p:stCondLst>
-                            <p:childTnLst>
-                              <p:par>
-                                <p:cTn fill="hold" nodeType="clickEffect" presetClass="entr" presetID="1" presetSubtype="0">
-                                  <p:stCondLst>
-                                    <p:cond delay="0"/>
-                                  </p:stCondLst>
-                                  <p:childTnLst>
-                                    <p:set>
-                                      <p:cBhvr>
-                                        <p:cTn dur="1" fill="hold">
-                                          <p:stCondLst>
-                                            <p:cond delay="0"/>
-                                          </p:stCondLst>
-                                        </p:cTn>
-                                        <p:tgtEl>
-                                          <p:spTgt spid="294">
-                                            <p:txEl>
-                                              <p:pRg end="0" st="0"/>
-                                            </p:txEl>
-                                          </p:spTgt>
-                                        </p:tgtEl>
-                                        <p:attrNameLst>
-                                          <p:attrName>style.visibility</p:attrName>
-                                        </p:attrNameLst>
-                                      </p:cBhvr>
-                                      <p:to>
-                                        <p:strVal val="visible"/>
-                                      </p:to>
-                                    </p:set>
-                                  </p:childTnLst>
-                                </p:cTn>
-                              </p:par>
-                            </p:childTnLst>
-                          </p:cTn>
-                        </p:par>
-                      </p:childTnLst>
-                    </p:cTn>
-                  </p:par>
-                  <p:par>
-                    <p:cTn fill="hold">
-                      <p:stCondLst>
-                        <p:cond delay="indefinite"/>
-                      </p:stCondLst>
-                      <p:childTnLst>
-                        <p:par>
-                          <p:cTn fill="hold">
-                            <p:stCondLst>
-                              <p:cond delay="0"/>
-                            </p:stCondLst>
-                            <p:childTnLst>
-                              <p:par>
-                                <p:cTn fill="hold" nodeType="clickEffect" presetClass="entr" presetID="1" presetSubtype="0">
-                                  <p:stCondLst>
-                                    <p:cond delay="0"/>
-                                  </p:stCondLst>
-                                  <p:childTnLst>
-                                    <p:set>
-                                      <p:cBhvr>
-                                        <p:cTn dur="1" fill="hold">
-                                          <p:stCondLst>
-                                            <p:cond delay="0"/>
-                                          </p:stCondLst>
-                                        </p:cTn>
-                                        <p:tgtEl>
-                                          <p:spTgt spid="294">
-                                            <p:txEl>
-                                              <p:pRg end="1" st="1"/>
-                                            </p:txEl>
-                                          </p:spTgt>
-                                        </p:tgtEl>
-                                        <p:attrNameLst>
-                                          <p:attrName>style.visibility</p:attrName>
-                                        </p:attrNameLst>
-                                      </p:cBhvr>
-                                      <p:to>
-                                        <p:strVal val="visible"/>
-                                      </p:to>
-                                    </p:set>
-                                  </p:childTnLst>
-                                </p:cTn>
-                              </p:par>
-                            </p:childTnLst>
-                          </p:cTn>
-                        </p:par>
-                      </p:childTnLst>
-                    </p:cTn>
-                  </p:par>
-                  <p:par>
-                    <p:cTn fill="hold">
-                      <p:stCondLst>
-                        <p:cond delay="indefinite"/>
-                      </p:stCondLst>
-                      <p:childTnLst>
-                        <p:par>
-                          <p:cTn fill="hold">
-                            <p:stCondLst>
-                              <p:cond delay="0"/>
-                            </p:stCondLst>
-                            <p:childTnLst>
-                              <p:par>
-                                <p:cTn fill="hold" nodeType="clickEffect" presetClass="entr" presetID="1" presetSubtype="0">
-                                  <p:stCondLst>
-                                    <p:cond delay="0"/>
-                                  </p:stCondLst>
-                                  <p:childTnLst>
-                                    <p:set>
-                                      <p:cBhvr>
-                                        <p:cTn dur="1" fill="hold">
-                                          <p:stCondLst>
-                                            <p:cond delay="0"/>
-                                          </p:stCondLst>
-                                        </p:cTn>
-                                        <p:tgtEl>
-                                          <p:spTgt spid="294">
-                                            <p:txEl>
-                                              <p:pRg end="2" st="2"/>
-                                            </p:txEl>
-                                          </p:spTgt>
-                                        </p:tgtEl>
-                                        <p:attrNameLst>
-                                          <p:attrName>style.visibility</p:attrName>
-                                        </p:attrNameLst>
-                                      </p:cBhvr>
-                                      <p:to>
-                                        <p:strVal val="visible"/>
-                                      </p:to>
-                                    </p:set>
-                                  </p:childTnLst>
-                                </p:cTn>
-                              </p:par>
-                            </p:childTnLst>
-                          </p:cTn>
-                        </p:par>
-                      </p:childTnLst>
-                    </p:cTn>
-                  </p:par>
-                  <p:par>
-                    <p:cTn fill="hold">
-                      <p:stCondLst>
-                        <p:cond delay="indefinite"/>
-                      </p:stCondLst>
-                      <p:childTnLst>
-                        <p:par>
-                          <p:cTn fill="hold">
-                            <p:stCondLst>
-                              <p:cond delay="0"/>
-                            </p:stCondLst>
-                            <p:childTnLst>
-                              <p:par>
-                                <p:cTn fill="hold" nodeType="clickEffect" presetClass="entr" presetID="1" presetSubtype="0">
-                                  <p:stCondLst>
-                                    <p:cond delay="0"/>
-                                  </p:stCondLst>
-                                  <p:childTnLst>
-                                    <p:set>
-                                      <p:cBhvr>
-                                        <p:cTn dur="1" fill="hold">
-                                          <p:stCondLst>
-                                            <p:cond delay="0"/>
-                                          </p:stCondLst>
-                                        </p:cTn>
-                                        <p:tgtEl>
-                                          <p:spTgt spid="294">
-                                            <p:txEl>
-                                              <p:pRg end="3" st="3"/>
-                                            </p:txEl>
-                                          </p:spTgt>
-                                        </p:tgtEl>
-                                        <p:attrNameLst>
-                                          <p:attrName>style.visibility</p:attrName>
-                                        </p:attrNameLst>
-                                      </p:cBhvr>
-                                      <p:to>
-                                        <p:strVal val="visible"/>
-                                      </p:to>
-                                    </p:set>
-                                  </p:childTnLst>
-                                </p:cTn>
-                              </p:par>
-                            </p:childTnLst>
-                          </p:cTn>
-                        </p:par>
-                      </p:childTnLst>
-                    </p:cTn>
-                  </p:par>
-                  <p:par>
-                    <p:cTn fill="hold">
-                      <p:stCondLst>
-                        <p:cond delay="indefinite"/>
-                      </p:stCondLst>
-                      <p:childTnLst>
-                        <p:par>
-                          <p:cTn fill="hold">
-                            <p:stCondLst>
-                              <p:cond delay="0"/>
-                            </p:stCondLst>
-                            <p:childTnLst>
-                              <p:par>
-                                <p:cTn fill="hold" nodeType="clickEffect" presetClass="entr" presetID="1" presetSubtype="0">
-                                  <p:stCondLst>
-                                    <p:cond delay="0"/>
-                                  </p:stCondLst>
-                                  <p:childTnLst>
-                                    <p:set>
-                                      <p:cBhvr>
-                                        <p:cTn dur="1" fill="hold">
-                                          <p:stCondLst>
-                                            <p:cond delay="0"/>
-                                          </p:stCondLst>
-                                        </p:cTn>
-                                        <p:tgtEl>
-                                          <p:spTgt spid="294">
-                                            <p:txEl>
-                                              <p:pRg end="4" st="4"/>
-                                            </p:txEl>
-                                          </p:spTgt>
-                                        </p:tgtEl>
-                                        <p:attrNameLst>
-                                          <p:attrName>style.visibility</p:attrName>
-                                        </p:attrNameLst>
-                                      </p:cBhvr>
-                                      <p:to>
-                                        <p:strVal val="visible"/>
-                                      </p:to>
-                                    </p:set>
-                                  </p:childTnLst>
-                                </p:cTn>
-                              </p:par>
-                            </p:childTnLst>
-                          </p:cTn>
-                        </p:par>
-                      </p:childTnLst>
-                    </p:cTn>
-                  </p:par>
-                  <p:par>
-                    <p:cTn fill="hold">
-                      <p:stCondLst>
-                        <p:cond delay="indefinite"/>
-                      </p:stCondLst>
-                      <p:childTnLst>
-                        <p:par>
-                          <p:cTn fill="hold">
-                            <p:stCondLst>
-                              <p:cond delay="0"/>
-                            </p:stCondLst>
-                            <p:childTnLst>
-                              <p:par>
-                                <p:cTn fill="hold" nodeType="clickEffect" presetClass="entr" presetID="1" presetSubtype="0">
-                                  <p:stCondLst>
-                                    <p:cond delay="0"/>
-                                  </p:stCondLst>
-                                  <p:childTnLst>
-                                    <p:set>
-                                      <p:cBhvr>
-                                        <p:cTn dur="1" fill="hold">
-                                          <p:stCondLst>
-                                            <p:cond delay="0"/>
-                                          </p:stCondLst>
-                                        </p:cTn>
-                                        <p:tgtEl>
-                                          <p:spTgt spid="294">
-                                            <p:txEl>
-                                              <p:pRg end="5" st="5"/>
-                                            </p:txEl>
-                                          </p:spTgt>
-                                        </p:tgtEl>
-                                        <p:attrNameLst>
-                                          <p:attrName>style.visibility</p:attrName>
-                                        </p:attrNameLst>
-                                      </p:cBhvr>
-                                      <p:to>
-                                        <p:strVal val="visible"/>
-                                      </p:to>
-                                    </p:set>
-                                  </p:childTnLst>
-                                </p:cTn>
-                              </p:par>
-                            </p:childTnLst>
-                          </p:cTn>
-                        </p:par>
-                      </p:childTnLst>
-                    </p:cTn>
-                  </p:par>
-                  <p:par>
-                    <p:cTn fill="hold">
-                      <p:stCondLst>
-                        <p:cond delay="indefinite"/>
-                      </p:stCondLst>
-                      <p:childTnLst>
-                        <p:par>
-                          <p:cTn fill="hold">
-                            <p:stCondLst>
-                              <p:cond delay="0"/>
-                            </p:stCondLst>
-                            <p:childTnLst>
-                              <p:par>
-                                <p:cTn fill="hold" nodeType="clickEffect" presetClass="entr" presetID="1" presetSubtype="0">
-                                  <p:stCondLst>
-                                    <p:cond delay="0"/>
-                                  </p:stCondLst>
-                                  <p:childTnLst>
-                                    <p:set>
-                                      <p:cBhvr>
-                                        <p:cTn dur="1" fill="hold">
-                                          <p:stCondLst>
-                                            <p:cond delay="0"/>
-                                          </p:stCondLst>
-                                        </p:cTn>
-                                        <p:tgtEl>
-                                          <p:spTgt spid="294">
-                                            <p:txEl>
-                                              <p:pRg end="6" st="6"/>
-                                            </p:txEl>
-                                          </p:spTgt>
-                                        </p:tgtEl>
-                                        <p:attrNameLst>
-                                          <p:attrName>style.visibility</p:attrName>
-                                        </p:attrNameLst>
-                                      </p:cBhvr>
-                                      <p:to>
-                                        <p:strVal val="visible"/>
-                                      </p:to>
-                                    </p:set>
-                                  </p:childTnLst>
-                                </p:cTn>
-                              </p:par>
-                            </p:childTnLst>
-                          </p:cTn>
-                        </p:par>
-                      </p:childTnLst>
-                    </p:cTn>
-                  </p:par>
-                  <p:par>
-                    <p:cTn fill="hold">
-                      <p:stCondLst>
-                        <p:cond delay="indefinite"/>
-                      </p:stCondLst>
-                      <p:childTnLst>
-                        <p:par>
-                          <p:cTn fill="hold">
-                            <p:stCondLst>
-                              <p:cond delay="0"/>
-                            </p:stCondLst>
-                            <p:childTnLst>
-                              <p:par>
-                                <p:cTn fill="hold" nodeType="clickEffect" presetClass="entr" presetID="1" presetSubtype="0">
-                                  <p:stCondLst>
-                                    <p:cond delay="0"/>
-                                  </p:stCondLst>
-                                  <p:childTnLst>
-                                    <p:set>
-                                      <p:cBhvr>
-                                        <p:cTn dur="1" fill="hold">
-                                          <p:stCondLst>
-                                            <p:cond delay="0"/>
-                                          </p:stCondLst>
-                                        </p:cTn>
-                                        <p:tgtEl>
-                                          <p:spTgt spid="294">
-                                            <p:txEl>
-                                              <p:pRg end="7" st="7"/>
-                                            </p:txEl>
-                                          </p:spTgt>
-                                        </p:tgtEl>
-                                        <p:attrNameLst>
-                                          <p:attrName>style.visibility</p:attrName>
-                                        </p:attrNameLst>
-                                      </p:cBhvr>
-                                      <p:to>
-                                        <p:strVal val="visible"/>
-                                      </p:to>
-                                    </p:set>
-                                  </p:childTnLst>
-                                </p:cTn>
-                              </p:par>
-                            </p:childTnLst>
-                          </p:cTn>
-                        </p:par>
-                      </p:childTnLst>
-                    </p:cTn>
-                  </p:par>
-                  <p:par>
-                    <p:cTn fill="hold">
-                      <p:stCondLst>
-                        <p:cond delay="indefinite"/>
-                      </p:stCondLst>
-                      <p:childTnLst>
-                        <p:par>
-                          <p:cTn fill="hold">
-                            <p:stCondLst>
-                              <p:cond delay="0"/>
-                            </p:stCondLst>
-                            <p:childTnLst>
-                              <p:par>
-                                <p:cTn fill="hold" nodeType="clickEffect" presetClass="entr" presetID="1" presetSubtype="0">
-                                  <p:stCondLst>
-                                    <p:cond delay="0"/>
-                                  </p:stCondLst>
-                                  <p:childTnLst>
-                                    <p:set>
-                                      <p:cBhvr>
-                                        <p:cTn dur="1" fill="hold">
-                                          <p:stCondLst>
-                                            <p:cond delay="0"/>
-                                          </p:stCondLst>
-                                        </p:cTn>
-                                        <p:tgtEl>
-                                          <p:spTgt spid="294">
-                                            <p:txEl>
-                                              <p:pRg end="8" st="8"/>
-                                            </p:txEl>
-                                          </p:spTgt>
-                                        </p:tgtEl>
-                                        <p:attrNameLst>
-                                          <p:attrName>style.visibility</p:attrName>
-                                        </p:attrNameLst>
-                                      </p:cBhvr>
-                                      <p:to>
-                                        <p:strVal val="visible"/>
-                                      </p:to>
-                                    </p:set>
-                                  </p:childTnLst>
-                                </p:cTn>
-                              </p:par>
-                            </p:childTnLst>
-                          </p:cTn>
-                        </p:par>
-                      </p:childTnLst>
-                    </p:cTn>
-                  </p:par>
-                  <p:par>
-                    <p:cTn fill="hold">
-                      <p:stCondLst>
-                        <p:cond delay="indefinite"/>
-                      </p:stCondLst>
-                      <p:childTnLst>
-                        <p:par>
-                          <p:cTn fill="hold">
-                            <p:stCondLst>
-                              <p:cond delay="0"/>
-                            </p:stCondLst>
-                            <p:childTnLst>
-                              <p:par>
-                                <p:cTn fill="hold" nodeType="clickEffect" presetClass="entr" presetID="1" presetSubtype="0">
-                                  <p:stCondLst>
-                                    <p:cond delay="0"/>
-                                  </p:stCondLst>
-                                  <p:childTnLst>
-                                    <p:set>
-                                      <p:cBhvr>
-                                        <p:cTn dur="1" fill="hold">
-                                          <p:stCondLst>
-                                            <p:cond delay="0"/>
-                                          </p:stCondLst>
-                                        </p:cTn>
-                                        <p:tgtEl>
-                                          <p:spTgt spid="294">
-                                            <p:txEl>
-                                              <p:pRg end="9" st="9"/>
-                                            </p:txEl>
-                                          </p:spTgt>
-                                        </p:tgtEl>
-                                        <p:attrNameLst>
-                                          <p:attrName>style.visibility</p:attrName>
-                                        </p:attrNameLst>
-                                      </p:cBhvr>
-                                      <p:to>
-                                        <p:strVal val="visible"/>
-                                      </p:to>
-                                    </p:set>
-                                  </p:childTnLst>
-                                </p:cTn>
-                              </p:par>
-                            </p:childTnLst>
-                          </p:cTn>
-                        </p:par>
-                      </p:childTnLst>
-                    </p:cTn>
-                  </p:par>
-                  <p:par>
-                    <p:cTn fill="hold">
-                      <p:stCondLst>
-                        <p:cond delay="indefinite"/>
-                      </p:stCondLst>
-                      <p:childTnLst>
-                        <p:par>
-                          <p:cTn fill="hold">
-                            <p:stCondLst>
-                              <p:cond delay="0"/>
-                            </p:stCondLst>
-                            <p:childTnLst>
-                              <p:par>
-                                <p:cTn fill="hold" nodeType="clickEffect" presetClass="entr" presetID="1" presetSubtype="0">
-                                  <p:stCondLst>
-                                    <p:cond delay="0"/>
-                                  </p:stCondLst>
-                                  <p:childTnLst>
-                                    <p:set>
-                                      <p:cBhvr>
-                                        <p:cTn dur="1" fill="hold">
-                                          <p:stCondLst>
-                                            <p:cond delay="0"/>
-                                          </p:stCondLst>
-                                        </p:cTn>
-                                        <p:tgtEl>
-                                          <p:spTgt spid="294">
-                                            <p:txEl>
-                                              <p:pRg end="10" st="10"/>
-                                            </p:txEl>
-                                          </p:spTgt>
-                                        </p:tgtEl>
-                                        <p:attrNameLst>
-                                          <p:attrName>style.visibility</p:attrName>
-                                        </p:attrNameLst>
-                                      </p:cBhvr>
-                                      <p:to>
-                                        <p:strVal val="visible"/>
-                                      </p:to>
-                                    </p:set>
-                                  </p:childTnLst>
-                                </p:cTn>
-                              </p:par>
-                            </p:childTnLst>
-                          </p:cTn>
-                        </p:par>
-                      </p:childTnLst>
-                    </p:cTn>
-                  </p:par>
-                  <p:par>
-                    <p:cTn fill="hold">
-                      <p:stCondLst>
-                        <p:cond delay="indefinite"/>
-                      </p:stCondLst>
-                      <p:childTnLst>
-                        <p:par>
-                          <p:cTn fill="hold">
-                            <p:stCondLst>
-                              <p:cond delay="0"/>
-                            </p:stCondLst>
-                            <p:childTnLst>
-                              <p:par>
-                                <p:cTn fill="hold" nodeType="clickEffect" presetClass="entr" presetID="1" presetSubtype="0">
-                                  <p:stCondLst>
-                                    <p:cond delay="0"/>
-                                  </p:stCondLst>
-                                  <p:childTnLst>
-                                    <p:set>
-                                      <p:cBhvr>
-                                        <p:cTn dur="1" fill="hold">
-                                          <p:stCondLst>
-                                            <p:cond delay="0"/>
-                                          </p:stCondLst>
-                                        </p:cTn>
-                                        <p:tgtEl>
-                                          <p:spTgt spid="294">
-                                            <p:txEl>
-                                              <p:pRg end="11" st="11"/>
-                                            </p:txEl>
-                                          </p:spTgt>
-                                        </p:tgtEl>
-                                        <p:attrNameLst>
-                                          <p:attrName>style.visibility</p:attrName>
-                                        </p:attrNameLst>
-                                      </p:cBhvr>
-                                      <p:to>
-                                        <p:strVal val="visible"/>
-                                      </p:to>
-                                    </p:set>
-                                  </p:childTnLst>
-                                </p:cTn>
-                              </p:par>
-                            </p:childTnLst>
-                          </p:cTn>
-                        </p:par>
-                      </p:childTnLst>
-                    </p:cTn>
-                  </p:par>
-                  <p:par>
-                    <p:cTn fill="hold">
-                      <p:stCondLst>
-                        <p:cond delay="indefinite"/>
-                      </p:stCondLst>
-                      <p:childTnLst>
-                        <p:par>
-                          <p:cTn fill="hold">
-                            <p:stCondLst>
-                              <p:cond delay="0"/>
-                            </p:stCondLst>
-                            <p:childTnLst>
-                              <p:par>
-                                <p:cTn fill="hold" nodeType="clickEffect" presetClass="entr" presetID="1" presetSubtype="0">
-                                  <p:stCondLst>
-                                    <p:cond delay="0"/>
-                                  </p:stCondLst>
-                                  <p:childTnLst>
-                                    <p:set>
-                                      <p:cBhvr>
-                                        <p:cTn dur="1" fill="hold">
-                                          <p:stCondLst>
-                                            <p:cond delay="0"/>
-                                          </p:stCondLst>
-                                        </p:cTn>
-                                        <p:tgtEl>
-                                          <p:spTgt spid="294">
-                                            <p:txEl>
-                                              <p:pRg end="12" st="12"/>
-                                            </p:txEl>
-                                          </p:spTgt>
-                                        </p:tgtEl>
-                                        <p:attrNameLst>
-                                          <p:attrName>style.visibility</p:attrName>
-                                        </p:attrNameLst>
-                                      </p:cBhvr>
-                                      <p:to>
-                                        <p:strVal val="visible"/>
-                                      </p:to>
-                                    </p:set>
-                                  </p:childTnLst>
-                                </p:cTn>
-                              </p:par>
-                            </p:childTnLst>
-                          </p:cTn>
-                        </p:par>
-                      </p:childTnLst>
-                    </p:cTn>
-                  </p:par>
-                </p:childTnLst>
-              </p:cTn>
-              <p:prevCondLst>
-                <p:cond evt="onPrev">
-                  <p:tgtEl>
-                    <p:sldTgt/>
-                  </p:tgtEl>
-                </p:cond>
-              </p:prevCondLst>
-              <p:nextCondLst>
-                <p:cond evt="onNext">
-                  <p:tgtEl>
-                    <p:sldTgt/>
-                  </p:tgtEl>
-                </p:cond>
-              </p:nextCondLst>
-            </p:seq>
-          </p:childTnLst>
-        </p:cTn>
-      </p:par>
-    </p:tnLst>
-  </p:timing>
-</p:sld>
-</file>
-
-<file path=ppt/slides/slide38.xml><?xml version="1.0" encoding="utf-8"?>
-<p:sld xmlns:a="http://schemas.openxmlformats.org/drawingml/2006/main" xmlns:p="http://schemas.openxmlformats.org/presentationml/2006/main" xmlns:r="http://schemas.openxmlformats.org/officeDocument/2006/relationships">
-  <p:cSld>
-    <p:spTree>
-      <p:nvGrpSpPr>
-        <p:cNvPr id="1" name=""/>
-        <p:cNvGrpSpPr/>
-        <p:nvPr/>
-      </p:nvGrpSpPr>
-      <p:grpSpPr/>
-      <p:sp>
-        <p:nvSpPr>
-          <p:cNvPr id="2" name="Title 1"/>
-          <p:cNvSpPr>
-            <a:spLocks noGrp="1"/>
-          </p:cNvSpPr>
-          <p:nvPr>
-            <p:ph type="title"/>
-          </p:nvPr>
-        </p:nvSpPr>
-        <p:spPr/>
-        <p:txBody>
-          <a:bodyPr/>
-          <a:lstStyle/>
-          <a:p>
-            <a:pPr indent="0" lvl="0" marL="0" rtl="0" algn="l">
-              <a:spcBef>
-                <a:spcPts val="0"/>
-              </a:spcBef>
-              <a:spcAft>
-                <a:spcPts val="0"/>
-              </a:spcAft>
-              <a:buNone/>
-            </a:pPr>
-            <a:r>
-              <a:rPr lang="en"/>
-              <a:t>Check Yourself</a:t>
-            </a:r>
-            <a:endParaRPr/>
-          </a:p>
-        </p:txBody>
-      </p:sp>
-      <p:sp>
-        <p:nvSpPr>
-          <p:cNvPr id="3" name="Text Placeholder 2"/>
-          <p:cNvSpPr>
-            <a:spLocks noGrp="1"/>
-          </p:cNvSpPr>
-          <p:nvPr>
-            <p:ph type="body" idx="1"/>
-          </p:nvPr>
-        </p:nvSpPr>
-        <p:spPr>
-          <a:xfrm>
-            <a:off x="311700" y="885950"/>
-            <a:ext cx="8520600" cy="1719072"/>
-          </a:xfrm>
-        </p:spPr>
-        <p:txBody>
-          <a:bodyPr/>
-          <a:lstStyle/>
-          <a:p>
-            <a:pPr indent="-330200" lvl="0" marL="457200" rtl="0" algn="l">
-              <a:spcBef>
-                <a:spcPts val="0"/>
-              </a:spcBef>
-              <a:spcAft>
-                <a:spcPts val="0"/>
-              </a:spcAft>
-              <a:buSzPts val="1600"/>
-              <a:buChar char="●"/>
-            </a:pPr>
-            <a:r>
-              <a:rPr lang="en"/>
-              <a:t>What does turning a request into an object make possible?</a:t>
-            </a:r>
-            <a:endParaRPr/>
-          </a:p>
-          <a:p>
-            <a:pPr indent="-330200" lvl="0" marL="457200" rtl="0" algn="l">
-              <a:spcBef>
-                <a:spcPts val="0"/>
-              </a:spcBef>
-              <a:spcAft>
-                <a:spcPts val="0"/>
-              </a:spcAft>
-              <a:buSzPts val="1600"/>
-              <a:buChar char="●"/>
-            </a:pPr>
-            <a:r>
-              <a:rPr lang="en"/>
-              <a:t>Why does a move command remember whether it pushed a box?</a:t>
-            </a:r>
-            <a:endParaRPr/>
-          </a:p>
-          <a:p>
-            <a:pPr indent="-330200" lvl="0" marL="457200" rtl="0" algn="l">
-              <a:spcBef>
-                <a:spcPts val="0"/>
-              </a:spcBef>
-              <a:spcAft>
-                <a:spcPts val="0"/>
-              </a:spcAft>
-              <a:buSzPts val="1600"/>
-              <a:buChar char="●"/>
-            </a:pPr>
-            <a:r>
-              <a:rPr lang="en"/>
-              <a:t>Why is the redo stack cleared when a new command is executed?</a:t>
-            </a:r>
-            <a:endParaRPr/>
-          </a:p>
-          <a:p>
-            <a:pPr indent="-330200" lvl="0" marL="457200" rtl="0" algn="l">
-              <a:spcBef>
-                <a:spcPts val="0"/>
-              </a:spcBef>
-              <a:spcAft>
-                <a:spcPts val="0"/>
-              </a:spcAft>
-              <a:buSzPts val="1600"/>
-              <a:buChar char="●"/>
-            </a:pPr>
-            <a:r>
-              <a:rPr lang="en"/>
-              <a:t>Why can Level be unit-tested, but not code in Game1.Update?</a:t>
-            </a:r>
-            <a:endParaRPr/>
-          </a:p>
-        </p:txBody>
-      </p:sp>
-      <p:sp>
-        <p:nvSpPr>
-          <p:cNvPr id="4" name="TextBox 3"/>
-          <p:cNvSpPr txBox="1"/>
-          <p:nvPr/>
-        </p:nvSpPr>
-        <p:spPr>
-          <a:xfrm>
-            <a:off x="457200" y="3182112"/>
-            <a:ext cx="8229600" cy="457200"/>
-          </a:xfrm>
-          <a:prstGeom prst="rect">
-            <a:avLst/>
-          </a:prstGeom>
-          <a:noFill/>
-        </p:spPr>
-        <p:txBody>
-          <a:bodyPr wrap="square">
-            <a:spAutoFit/>
-          </a:bodyPr>
-          <a:lstStyle/>
-          <a:p>
-            <a:pPr algn="ctr"/>
-            <a:r>
-              <a:rPr sz="1400" b="0" i="0">
-                <a:solidFill>
-                  <a:srgbClr val="9AA3AB"/>
-                </a:solidFill>
-              </a:rPr>
-              <a:t>The answers, and more questions, are on the course site.</a:t>
-            </a:r>
-          </a:p>
-        </p:txBody>
-      </p:sp>
-    </p:spTree>
-  </p:cSld>
-  <p:clrMapOvr>
-    <a:masterClrMapping/>
-  </p:clrMapOvr>
-</p:sld>
-</file>
-
 <file path=ppt/slides/slide39.xml><?xml version="1.0" encoding="utf-8"?>
 <p:sld xmlns:a="http://schemas.openxmlformats.org/drawingml/2006/main" xmlns:r="http://schemas.openxmlformats.org/officeDocument/2006/relationships" xmlns:mc="http://schemas.openxmlformats.org/markup-compatibility/2006" xmlns:mv="urn:schemas-microsoft-com:mac:vml" xmlns:p="http://schemas.openxmlformats.org/presentationml/2006/main" xmlns:c="http://schemas.openxmlformats.org/drawingml/2006/chart" xmlns:dgm="http://schemas.openxmlformats.org/drawingml/2006/diagram" xmlns:o="urn:schemas-microsoft-com:office:office" xmlns:v="urn:schemas-microsoft-com:vml" xmlns:pvml="urn:schemas-microsoft-com:office:powerpoint" xmlns:com="http://schemas.openxmlformats.org/drawingml/2006/compatibility" xmlns:p14="http://schemas.microsoft.com/office/powerpoint/2010/main" xmlns:p15="http://schemas.microsoft.com/office/powerpoint/2012/main" xmlns:ahyp="http://schemas.microsoft.com/office/drawing/2018/hyperlinkcolor">
   <p:cSld>
@@ -21549,7 +21682,7 @@
                   <a:schemeClr val="accent5"/>
                 </a:solidFill>
               </a:rPr>
-              <a:t>Apply It to Your Project</a:t>
+              <a:t>Exercise: Commands</a:t>
             </a:r>
             <a:endParaRPr>
               <a:solidFill>
@@ -21594,7 +21727,7 @@
             </a:pPr>
             <a:r>
               <a:rPr lang="en"/>
-              <a:t>Which rules could be separated from drawing and input?</a:t>
+              <a:t>Restart as a command</a:t>
             </a:r>
             <a:endParaRPr/>
           </a:p>
@@ -21611,7 +21744,24 @@
             </a:pPr>
             <a:r>
               <a:rPr lang="en"/>
-              <a:t>Write one unit test for one of them</a:t>
+              <a:t>Make R a command too, so a restart can be undone</a:t>
+            </a:r>
+            <a:endParaRPr/>
+          </a:p>
+          <a:p>
+            <a:pPr indent="-317500" lvl="1" marL="914400" rtl="0" algn="l">
+              <a:spcBef>
+                <a:spcPts val="0"/>
+              </a:spcBef>
+              <a:spcAft>
+                <a:spcPts val="0"/>
+              </a:spcAft>
+              <a:buSzPts val="1400"/>
+              <a:buChar char="○"/>
+            </a:pPr>
+            <a:r>
+              <a:rPr lang="en"/>
+              <a:t>What must it remember?</a:t>
             </a:r>
             <a:endParaRPr/>
           </a:p>
@@ -21628,7 +21778,7 @@
             </a:pPr>
             <a:r>
               <a:rPr lang="en"/>
-              <a:t>Would undo, replays or queued actions be useful in your game?</a:t>
+              <a:t>Stretch: snapshot undo</a:t>
             </a:r>
             <a:endParaRPr/>
           </a:p>
@@ -21645,24 +21795,24 @@
             </a:pPr>
             <a:r>
               <a:rPr lang="en"/>
-              <a:t>Which actions would become commands, and what would each remember?</a:t>
+              <a:t>Replace CommandHistory with a history of Level snapshots</a:t>
             </a:r>
             <a:endParaRPr/>
           </a:p>
           <a:p>
-            <a:pPr indent="-330200" lvl="0" marL="457200" rtl="0" algn="l">
-              <a:spcBef>
-                <a:spcPts val="0"/>
-              </a:spcBef>
-              <a:spcAft>
-                <a:spcPts val="0"/>
-              </a:spcAft>
-              <a:buSzPts val="1600"/>
-              <a:buChar char="●"/>
+            <a:pPr indent="-317500" lvl="1" marL="914400" rtl="0" algn="l">
+              <a:spcBef>
+                <a:spcPts val="0"/>
+              </a:spcBef>
+              <a:spcAft>
+                <a:spcPts val="0"/>
+              </a:spcAft>
+              <a:buSzPts val="1400"/>
+              <a:buChar char="○"/>
             </a:pPr>
             <a:r>
               <a:rPr lang="en"/>
-              <a:t>Could your levels, or part of them, be data files?</a:t>
+              <a:t>Compare: code, memory, and how easy each is to get wrong</a:t>
             </a:r>
             <a:endParaRPr/>
           </a:p>
@@ -22845,7 +22995,7 @@
             </a:pPr>
             <a:r>
               <a:rPr lang="en"/>
-              <a:t>The Whole Game</a:t>
+              <a:t>Check Yourself</a:t>
             </a:r>
             <a:endParaRPr/>
           </a:p>
@@ -22864,7 +23014,7 @@
         <p:spPr>
           <a:xfrm>
             <a:off x="311700" y="885950"/>
-            <a:ext cx="8520600" cy="521208"/>
+            <a:ext cx="8520600" cy="1719072"/>
           </a:xfrm>
         </p:spPr>
         <p:txBody>
@@ -22882,8 +23032,59 @@
               <a:buChar char="●"/>
             </a:pPr>
             <a:r>
-              <a:rPr lang="en" b="1"/>
-              <a:t>Sokoban4 adds a title screen, seven levels and a restart. The rules did not change.</a:t>
+              <a:rPr lang="en"/>
+              <a:t>What does turning a request into an object make possible?</a:t>
+            </a:r>
+            <a:endParaRPr/>
+          </a:p>
+          <a:p>
+            <a:pPr indent="-330200" lvl="0" marL="457200" rtl="0" algn="l">
+              <a:spcBef>
+                <a:spcPts val="0"/>
+              </a:spcBef>
+              <a:spcAft>
+                <a:spcPts val="0"/>
+              </a:spcAft>
+              <a:buSzPts val="1600"/>
+              <a:buChar char="●"/>
+            </a:pPr>
+            <a:r>
+              <a:rPr lang="en"/>
+              <a:t>Why does a move command remember whether it pushed a box?</a:t>
+            </a:r>
+            <a:endParaRPr/>
+          </a:p>
+          <a:p>
+            <a:pPr indent="-330200" lvl="0" marL="457200" rtl="0" algn="l">
+              <a:spcBef>
+                <a:spcPts val="0"/>
+              </a:spcBef>
+              <a:spcAft>
+                <a:spcPts val="0"/>
+              </a:spcAft>
+              <a:buSzPts val="1600"/>
+              <a:buChar char="●"/>
+            </a:pPr>
+            <a:r>
+              <a:rPr lang="en"/>
+              <a:t>Why is the redo stack cleared when a new command is executed?</a:t>
+            </a:r>
+            <a:endParaRPr/>
+          </a:p>
+          <a:p>
+            <a:pPr indent="-330200" lvl="0" marL="457200" rtl="0" algn="l">
+              <a:spcBef>
+                <a:spcPts val="0"/>
+              </a:spcBef>
+              <a:spcAft>
+                <a:spcPts val="0"/>
+              </a:spcAft>
+              <a:buSzPts val="1600"/>
+              <a:buChar char="●"/>
+            </a:pPr>
+            <a:r>
+              <a:rPr lang="en"/>
+              <a:t>Why can Level be unit-tested, but not code in Game1.Update?</a:t>
             </a:r>
             <a:endParaRPr/>
           </a:p>
@@ -22891,586 +23092,14 @@
       </p:sp>
       <p:sp>
         <p:nvSpPr>
-          <p:cNvPr id="4" name="Rounded Rectangle 3"/>
-          <p:cNvSpPr/>
-          <p:nvPr/>
-        </p:nvSpPr>
-        <p:spPr>
-          <a:xfrm>
-            <a:off x="3429000" y="1481328"/>
-            <a:ext cx="2286000" cy="566928"/>
-          </a:xfrm>
-          <a:prstGeom prst="roundRect">
-            <a:avLst>
-              <a:gd name="adj" fmla="val 12000"/>
-            </a:avLst>
-          </a:prstGeom>
-          <a:solidFill>
-            <a:srgbClr val="2E3338"/>
-          </a:solidFill>
-          <a:ln w="25400">
-            <a:solidFill>
-              <a:srgbClr val="D45D35"/>
-            </a:solidFill>
-          </a:ln>
-          <a:effectLst/>
-        </p:spPr>
-        <p:style>
-          <a:lnRef idx="1">
-            <a:schemeClr val="accent1"/>
-          </a:lnRef>
-          <a:fillRef idx="3">
-            <a:schemeClr val="accent1"/>
-          </a:fillRef>
-          <a:effectRef idx="2">
-            <a:schemeClr val="accent1"/>
-          </a:effectRef>
-          <a:fontRef idx="minor">
-            <a:schemeClr val="lt1"/>
-          </a:fontRef>
-        </p:style>
-        <p:txBody>
-          <a:bodyPr rtlCol="0" anchor="ctr" wrap="square" lIns="73152" rIns="73152"/>
-          <a:lstStyle/>
-          <a:p>
-            <a:pPr algn="ctr"/>
-            <a:r>
-              <a:rPr sz="1300" b="1">
-                <a:solidFill>
-                  <a:srgbClr val="DEE2E6"/>
-                </a:solidFill>
-              </a:rPr>
-              <a:t>Game1 : Core</a:t>
-            </a:r>
-          </a:p>
-          <a:p>
-            <a:pPr algn="ctr"/>
-            <a:r>
-              <a:rPr sz="1100" b="0">
-                <a:solidFill>
-                  <a:srgbClr val="9AA3AB"/>
-                </a:solidFill>
-              </a:rPr>
-              <a:t>connects the parts</a:t>
-            </a:r>
-          </a:p>
-        </p:txBody>
-      </p:sp>
-      <p:sp>
-        <p:nvSpPr>
-          <p:cNvPr id="5" name="Rounded Rectangle 4"/>
-          <p:cNvSpPr/>
-          <p:nvPr/>
-        </p:nvSpPr>
-        <p:spPr>
-          <a:xfrm>
-            <a:off x="374904" y="2596896"/>
-            <a:ext cx="2016252" cy="566928"/>
-          </a:xfrm>
-          <a:prstGeom prst="roundRect">
-            <a:avLst>
-              <a:gd name="adj" fmla="val 12000"/>
-            </a:avLst>
-          </a:prstGeom>
-          <a:solidFill>
-            <a:srgbClr val="2E3338"/>
-          </a:solidFill>
-          <a:ln>
-            <a:noFill/>
-          </a:ln>
-          <a:effectLst/>
-        </p:spPr>
-        <p:style>
-          <a:lnRef idx="1">
-            <a:schemeClr val="accent1"/>
-          </a:lnRef>
-          <a:fillRef idx="3">
-            <a:schemeClr val="accent1"/>
-          </a:fillRef>
-          <a:effectRef idx="2">
-            <a:schemeClr val="accent1"/>
-          </a:effectRef>
-          <a:fontRef idx="minor">
-            <a:schemeClr val="lt1"/>
-          </a:fontRef>
-        </p:style>
-        <p:txBody>
-          <a:bodyPr rtlCol="0" anchor="ctr" wrap="square" lIns="73152" rIns="73152"/>
-          <a:lstStyle/>
-          <a:p>
-            <a:pPr algn="ctr"/>
-            <a:r>
-              <a:rPr sz="1300" b="1">
-                <a:solidFill>
-                  <a:srgbClr val="DEE2E6"/>
-                </a:solidFill>
-              </a:rPr>
-              <a:t>Level</a:t>
-            </a:r>
-          </a:p>
-          <a:p>
-            <a:pPr algn="ctr"/>
-            <a:r>
-              <a:rPr sz="1100" b="0">
-                <a:solidFill>
-                  <a:srgbClr val="9AA3AB"/>
-                </a:solidFill>
-              </a:rPr>
-              <a:t>state and rules</a:t>
-            </a:r>
-          </a:p>
-        </p:txBody>
-      </p:sp>
-      <p:cxnSp>
-        <p:nvCxnSpPr>
-          <p:cNvPr id="6" name="Connector 5"/>
-          <p:cNvCxnSpPr/>
-          <p:nvPr/>
-        </p:nvCxnSpPr>
-        <p:spPr>
-          <a:xfrm flipH="1">
-            <a:off x="1383030" y="2066544"/>
-            <a:ext cx="3188970" cy="512064"/>
-          </a:xfrm>
-          <a:prstGeom prst="line">
-            <a:avLst/>
-          </a:prstGeom>
-          <a:ln w="25400">
-            <a:solidFill>
-              <a:srgbClr val="9AA3AB"/>
-            </a:solidFill>
-            <a:tailEnd type="triangle"/>
-          </a:ln>
-        </p:spPr>
-        <p:style>
-          <a:lnRef idx="2">
-            <a:schemeClr val="accent1"/>
-          </a:lnRef>
-          <a:fillRef idx="0">
-            <a:schemeClr val="accent1"/>
-          </a:fillRef>
-          <a:effectRef idx="1">
-            <a:schemeClr val="accent1"/>
-          </a:effectRef>
-          <a:fontRef idx="minor">
-            <a:schemeClr val="tx1"/>
-          </a:fontRef>
-        </p:style>
-      </p:cxnSp>
-      <p:sp>
-        <p:nvSpPr>
-          <p:cNvPr id="7" name="Rounded Rectangle 6"/>
-          <p:cNvSpPr/>
-          <p:nvPr/>
-        </p:nvSpPr>
-        <p:spPr>
-          <a:xfrm>
-            <a:off x="2500884" y="2596896"/>
-            <a:ext cx="2016252" cy="566928"/>
-          </a:xfrm>
-          <a:prstGeom prst="roundRect">
-            <a:avLst>
-              <a:gd name="adj" fmla="val 12000"/>
-            </a:avLst>
-          </a:prstGeom>
-          <a:solidFill>
-            <a:srgbClr val="2E3338"/>
-          </a:solidFill>
-          <a:ln>
-            <a:noFill/>
-          </a:ln>
-          <a:effectLst/>
-        </p:spPr>
-        <p:style>
-          <a:lnRef idx="1">
-            <a:schemeClr val="accent1"/>
-          </a:lnRef>
-          <a:fillRef idx="3">
-            <a:schemeClr val="accent1"/>
-          </a:fillRef>
-          <a:effectRef idx="2">
-            <a:schemeClr val="accent1"/>
-          </a:effectRef>
-          <a:fontRef idx="minor">
-            <a:schemeClr val="lt1"/>
-          </a:fontRef>
-        </p:style>
-        <p:txBody>
-          <a:bodyPr rtlCol="0" anchor="ctr" wrap="square" lIns="73152" rIns="73152"/>
-          <a:lstStyle/>
-          <a:p>
-            <a:pPr algn="ctr"/>
-            <a:r>
-              <a:rPr sz="1300" b="1">
-                <a:solidFill>
-                  <a:srgbClr val="DEE2E6"/>
-                </a:solidFill>
-              </a:rPr>
-              <a:t>LevelView</a:t>
-            </a:r>
-          </a:p>
-          <a:p>
-            <a:pPr algn="ctr"/>
-            <a:r>
-              <a:rPr sz="1100" b="0">
-                <a:solidFill>
-                  <a:srgbClr val="9AA3AB"/>
-                </a:solidFill>
-              </a:rPr>
-              <a:t>only reads the level</a:t>
-            </a:r>
-          </a:p>
-        </p:txBody>
-      </p:sp>
-      <p:cxnSp>
-        <p:nvCxnSpPr>
-          <p:cNvPr id="8" name="Connector 7"/>
-          <p:cNvCxnSpPr/>
-          <p:nvPr/>
-        </p:nvCxnSpPr>
-        <p:spPr>
-          <a:xfrm flipH="1">
-            <a:off x="3509010" y="2066544"/>
-            <a:ext cx="1062990" cy="512064"/>
-          </a:xfrm>
-          <a:prstGeom prst="line">
-            <a:avLst/>
-          </a:prstGeom>
-          <a:ln w="25400">
-            <a:solidFill>
-              <a:srgbClr val="9AA3AB"/>
-            </a:solidFill>
-            <a:tailEnd type="triangle"/>
-          </a:ln>
-        </p:spPr>
-        <p:style>
-          <a:lnRef idx="2">
-            <a:schemeClr val="accent1"/>
-          </a:lnRef>
-          <a:fillRef idx="0">
-            <a:schemeClr val="accent1"/>
-          </a:fillRef>
-          <a:effectRef idx="1">
-            <a:schemeClr val="accent1"/>
-          </a:effectRef>
-          <a:fontRef idx="minor">
-            <a:schemeClr val="tx1"/>
-          </a:fontRef>
-        </p:style>
-      </p:cxnSp>
-      <p:sp>
-        <p:nvSpPr>
-          <p:cNvPr id="9" name="Rounded Rectangle 8"/>
-          <p:cNvSpPr/>
-          <p:nvPr/>
-        </p:nvSpPr>
-        <p:spPr>
-          <a:xfrm>
-            <a:off x="4626864" y="2596896"/>
-            <a:ext cx="2016252" cy="566928"/>
-          </a:xfrm>
-          <a:prstGeom prst="roundRect">
-            <a:avLst>
-              <a:gd name="adj" fmla="val 12000"/>
-            </a:avLst>
-          </a:prstGeom>
-          <a:solidFill>
-            <a:srgbClr val="2E3338"/>
-          </a:solidFill>
-          <a:ln>
-            <a:noFill/>
-          </a:ln>
-          <a:effectLst/>
-        </p:spPr>
-        <p:style>
-          <a:lnRef idx="1">
-            <a:schemeClr val="accent1"/>
-          </a:lnRef>
-          <a:fillRef idx="3">
-            <a:schemeClr val="accent1"/>
-          </a:fillRef>
-          <a:effectRef idx="2">
-            <a:schemeClr val="accent1"/>
-          </a:effectRef>
-          <a:fontRef idx="minor">
-            <a:schemeClr val="lt1"/>
-          </a:fontRef>
-        </p:style>
-        <p:txBody>
-          <a:bodyPr rtlCol="0" anchor="ctr" wrap="square" lIns="73152" rIns="73152"/>
-          <a:lstStyle/>
-          <a:p>
-            <a:pPr algn="ctr"/>
-            <a:r>
-              <a:rPr sz="1300" b="1">
-                <a:solidFill>
-                  <a:srgbClr val="DEE2E6"/>
-                </a:solidFill>
-              </a:rPr>
-              <a:t>CommandHistory</a:t>
-            </a:r>
-          </a:p>
-          <a:p>
-            <a:pPr algn="ctr"/>
-            <a:r>
-              <a:rPr sz="1100" b="0">
-                <a:solidFill>
-                  <a:srgbClr val="9AA3AB"/>
-                </a:solidFill>
-              </a:rPr>
-              <a:t>done and undone</a:t>
-            </a:r>
-          </a:p>
-        </p:txBody>
-      </p:sp>
-      <p:sp>
-        <p:nvSpPr>
-          <p:cNvPr id="10" name="Rounded Rectangle 9"/>
-          <p:cNvSpPr/>
-          <p:nvPr/>
-        </p:nvSpPr>
-        <p:spPr>
-          <a:xfrm>
-            <a:off x="4626864" y="3712464"/>
-            <a:ext cx="2016252" cy="566928"/>
-          </a:xfrm>
-          <a:prstGeom prst="roundRect">
-            <a:avLst>
-              <a:gd name="adj" fmla="val 12000"/>
-            </a:avLst>
-          </a:prstGeom>
-          <a:solidFill>
-            <a:srgbClr val="2E3338"/>
-          </a:solidFill>
-          <a:ln>
-            <a:noFill/>
-          </a:ln>
-          <a:effectLst/>
-        </p:spPr>
-        <p:style>
-          <a:lnRef idx="1">
-            <a:schemeClr val="accent1"/>
-          </a:lnRef>
-          <a:fillRef idx="3">
-            <a:schemeClr val="accent1"/>
-          </a:fillRef>
-          <a:effectRef idx="2">
-            <a:schemeClr val="accent1"/>
-          </a:effectRef>
-          <a:fontRef idx="minor">
-            <a:schemeClr val="lt1"/>
-          </a:fontRef>
-        </p:style>
-        <p:txBody>
-          <a:bodyPr rtlCol="0" anchor="ctr" wrap="square" lIns="73152" rIns="73152"/>
-          <a:lstStyle/>
-          <a:p>
-            <a:pPr algn="ctr"/>
-            <a:r>
-              <a:rPr sz="1300" b="1">
-                <a:solidFill>
-                  <a:srgbClr val="DEE2E6"/>
-                </a:solidFill>
-              </a:rPr>
-              <a:t>MoveCommand</a:t>
-            </a:r>
-          </a:p>
-          <a:p>
-            <a:pPr algn="ctr"/>
-            <a:r>
-              <a:rPr sz="1100" b="0">
-                <a:solidFill>
-                  <a:srgbClr val="9AA3AB"/>
-                </a:solidFill>
-              </a:rPr>
-              <a:t>changes the level</a:t>
-            </a:r>
-          </a:p>
-        </p:txBody>
-      </p:sp>
-      <p:cxnSp>
-        <p:nvCxnSpPr>
-          <p:cNvPr id="11" name="Connector 10"/>
-          <p:cNvCxnSpPr/>
-          <p:nvPr/>
-        </p:nvCxnSpPr>
-        <p:spPr>
-          <a:xfrm>
-            <a:off x="5634990" y="3182112"/>
-            <a:ext cx="0" cy="512064"/>
-          </a:xfrm>
-          <a:prstGeom prst="line">
-            <a:avLst/>
-          </a:prstGeom>
-          <a:ln w="25400">
-            <a:solidFill>
-              <a:srgbClr val="9AA3AB"/>
-            </a:solidFill>
-            <a:tailEnd type="triangle"/>
-          </a:ln>
-        </p:spPr>
-        <p:style>
-          <a:lnRef idx="2">
-            <a:schemeClr val="accent1"/>
-          </a:lnRef>
-          <a:fillRef idx="0">
-            <a:schemeClr val="accent1"/>
-          </a:fillRef>
-          <a:effectRef idx="1">
-            <a:schemeClr val="accent1"/>
-          </a:effectRef>
-          <a:fontRef idx="minor">
-            <a:schemeClr val="tx1"/>
-          </a:fontRef>
-        </p:style>
-      </p:cxnSp>
-      <p:cxnSp>
-        <p:nvCxnSpPr>
-          <p:cNvPr id="12" name="Connector 11"/>
-          <p:cNvCxnSpPr/>
-          <p:nvPr/>
-        </p:nvCxnSpPr>
-        <p:spPr>
-          <a:xfrm>
-            <a:off x="4572000" y="2066544"/>
-            <a:ext cx="1062990" cy="512064"/>
-          </a:xfrm>
-          <a:prstGeom prst="line">
-            <a:avLst/>
-          </a:prstGeom>
-          <a:ln w="25400">
-            <a:solidFill>
-              <a:srgbClr val="9AA3AB"/>
-            </a:solidFill>
-            <a:tailEnd type="triangle"/>
-          </a:ln>
-        </p:spPr>
-        <p:style>
-          <a:lnRef idx="2">
-            <a:schemeClr val="accent1"/>
-          </a:lnRef>
-          <a:fillRef idx="0">
-            <a:schemeClr val="accent1"/>
-          </a:fillRef>
-          <a:effectRef idx="1">
-            <a:schemeClr val="accent1"/>
-          </a:effectRef>
-          <a:fontRef idx="minor">
-            <a:schemeClr val="tx1"/>
-          </a:fontRef>
-        </p:style>
-      </p:cxnSp>
-      <p:sp>
-        <p:nvSpPr>
-          <p:cNvPr id="13" name="Rounded Rectangle 12"/>
-          <p:cNvSpPr/>
-          <p:nvPr/>
-        </p:nvSpPr>
-        <p:spPr>
-          <a:xfrm>
-            <a:off x="6752844" y="2596896"/>
-            <a:ext cx="2016252" cy="566928"/>
-          </a:xfrm>
-          <a:prstGeom prst="roundRect">
-            <a:avLst>
-              <a:gd name="adj" fmla="val 12000"/>
-            </a:avLst>
-          </a:prstGeom>
-          <a:solidFill>
-            <a:srgbClr val="2E3338"/>
-          </a:solidFill>
-          <a:ln>
-            <a:noFill/>
-          </a:ln>
-          <a:effectLst/>
-        </p:spPr>
-        <p:style>
-          <a:lnRef idx="1">
-            <a:schemeClr val="accent1"/>
-          </a:lnRef>
-          <a:fillRef idx="3">
-            <a:schemeClr val="accent1"/>
-          </a:fillRef>
-          <a:effectRef idx="2">
-            <a:schemeClr val="accent1"/>
-          </a:effectRef>
-          <a:fontRef idx="minor">
-            <a:schemeClr val="lt1"/>
-          </a:fontRef>
-        </p:style>
-        <p:txBody>
-          <a:bodyPr rtlCol="0" anchor="ctr" wrap="square" lIns="73152" rIns="73152"/>
-          <a:lstStyle/>
-          <a:p>
-            <a:pPr algn="ctr"/>
-            <a:r>
-              <a:rPr sz="1300" b="1">
-                <a:solidFill>
-                  <a:srgbClr val="DEE2E6"/>
-                </a:solidFill>
-              </a:rPr>
-              <a:t>GameController</a:t>
-            </a:r>
-          </a:p>
-          <a:p>
-            <a:pPr algn="ctr"/>
-            <a:r>
-              <a:rPr sz="1100" b="0">
-                <a:solidFill>
-                  <a:srgbClr val="9AA3AB"/>
-                </a:solidFill>
-              </a:rPr>
-              <a:t>asked for actions</a:t>
-            </a:r>
-          </a:p>
-        </p:txBody>
-      </p:sp>
-      <p:cxnSp>
-        <p:nvCxnSpPr>
-          <p:cNvPr id="14" name="Connector 13"/>
-          <p:cNvCxnSpPr/>
-          <p:nvPr/>
-        </p:nvCxnSpPr>
-        <p:spPr>
-          <a:xfrm>
-            <a:off x="4572000" y="2066544"/>
-            <a:ext cx="3188970" cy="512064"/>
-          </a:xfrm>
-          <a:prstGeom prst="line">
-            <a:avLst/>
-          </a:prstGeom>
-          <a:ln w="25400">
-            <a:solidFill>
-              <a:srgbClr val="9AA3AB"/>
-            </a:solidFill>
-            <a:tailEnd type="triangle"/>
-          </a:ln>
-        </p:spPr>
-        <p:style>
-          <a:lnRef idx="2">
-            <a:schemeClr val="accent1"/>
-          </a:lnRef>
-          <a:fillRef idx="0">
-            <a:schemeClr val="accent1"/>
-          </a:fillRef>
-          <a:effectRef idx="1">
-            <a:schemeClr val="accent1"/>
-          </a:effectRef>
-          <a:fontRef idx="minor">
-            <a:schemeClr val="tx1"/>
-          </a:fontRef>
-        </p:style>
-      </p:cxnSp>
-      <p:sp>
-        <p:nvSpPr>
-          <p:cNvPr id="15" name="TextBox 14"/>
+          <p:cNvPr id="4" name="TextBox 3"/>
           <p:cNvSpPr txBox="1"/>
           <p:nvPr/>
         </p:nvSpPr>
         <p:spPr>
           <a:xfrm>
-            <a:off x="457200" y="4462272"/>
-            <a:ext cx="8229600" cy="365760"/>
+            <a:off x="457200" y="3182112"/>
+            <a:ext cx="8229600" cy="457200"/>
           </a:xfrm>
           <a:prstGeom prst="rect">
             <a:avLst/>
@@ -23485,12 +23114,12 @@
           <a:p>
             <a:pPr algn="ctr"/>
             <a:r>
-              <a:rPr sz="1300" b="0" i="0">
+              <a:rPr sz="1400" b="0" i="0">
                 <a:solidFill>
                   <a:srgbClr val="9AA3AB"/>
                 </a:solidFill>
               </a:rPr>
-              <a:t>The rules, the view and the history never refer to each other.</a:t>
+              <a:t>The answers, and more questions, are on the course site.</a:t>
             </a:r>
           </a:p>
         </p:txBody>
@@ -23504,28 +23133,43 @@
 </file>
 
 <file path=ppt/slides/slide41.xml><?xml version="1.0" encoding="utf-8"?>
-<p:sld xmlns:a="http://schemas.openxmlformats.org/drawingml/2006/main" xmlns:p="http://schemas.openxmlformats.org/presentationml/2006/main" xmlns:r="http://schemas.openxmlformats.org/officeDocument/2006/relationships">
+<p:sld xmlns:a="http://schemas.openxmlformats.org/drawingml/2006/main" xmlns:r="http://schemas.openxmlformats.org/officeDocument/2006/relationships" xmlns:mc="http://schemas.openxmlformats.org/markup-compatibility/2006" xmlns:mv="urn:schemas-microsoft-com:mac:vml" xmlns:p="http://schemas.openxmlformats.org/presentationml/2006/main" xmlns:c="http://schemas.openxmlformats.org/drawingml/2006/chart" xmlns:dgm="http://schemas.openxmlformats.org/drawingml/2006/diagram" xmlns:o="urn:schemas-microsoft-com:office:office" xmlns:v="urn:schemas-microsoft-com:vml" xmlns:pvml="urn:schemas-microsoft-com:office:powerpoint" xmlns:com="http://schemas.openxmlformats.org/drawingml/2006/compatibility" xmlns:p14="http://schemas.microsoft.com/office/powerpoint/2010/main" xmlns:p15="http://schemas.microsoft.com/office/powerpoint/2012/main" xmlns:ahyp="http://schemas.microsoft.com/office/drawing/2018/hyperlinkcolor">
   <p:cSld>
     <p:spTree>
       <p:nvGrpSpPr>
-        <p:cNvPr id="1" name=""/>
+        <p:cNvPr id="292" name="Shape 292"/>
         <p:cNvGrpSpPr/>
         <p:nvPr/>
       </p:nvGrpSpPr>
-      <p:grpSpPr/>
+      <p:grpSpPr>
+        <a:xfrm>
+          <a:off x="0" y="0"/>
+          <a:ext cx="0" cy="0"/>
+          <a:chOff x="0" y="0"/>
+          <a:chExt cx="0" cy="0"/>
+        </a:xfrm>
+      </p:grpSpPr>
       <p:sp>
         <p:nvSpPr>
-          <p:cNvPr id="2" name="Title 1"/>
-          <p:cNvSpPr>
-            <a:spLocks noGrp="1"/>
-          </p:cNvSpPr>
+          <p:cNvPr id="293" name="Google Shape;293;p45"/>
+          <p:cNvSpPr txBox="1"/>
           <p:nvPr>
             <p:ph type="title"/>
           </p:nvPr>
         </p:nvSpPr>
-        <p:spPr/>
+        <p:spPr>
+          <a:xfrm>
+            <a:off x="311700" y="195615"/>
+            <a:ext cx="8520600" cy="572700"/>
+          </a:xfrm>
+          <a:prstGeom prst="rect">
+            <a:avLst/>
+          </a:prstGeom>
+        </p:spPr>
         <p:txBody>
-          <a:bodyPr/>
+          <a:bodyPr anchorCtr="0" anchor="t" bIns="91425" lIns="91425" spcFirstLastPara="1" rIns="91425" wrap="square" tIns="91425">
+            <a:normAutofit fontScale="90000"/>
+          </a:bodyPr>
           <a:lstStyle/>
           <a:p>
             <a:pPr indent="0" lvl="0" marL="0" rtl="0" algn="l">
@@ -23538,31 +23182,42 @@
               <a:buNone/>
             </a:pPr>
             <a:r>
-              <a:rPr lang="en"/>
-              <a:t>Summary</a:t>
-            </a:r>
-            <a:endParaRPr/>
+              <a:rPr lang="en">
+                <a:solidFill>
+                  <a:schemeClr val="accent5"/>
+                </a:solidFill>
+              </a:rPr>
+              <a:t>Apply It to Your Project</a:t>
+            </a:r>
+            <a:endParaRPr>
+              <a:solidFill>
+                <a:schemeClr val="accent5"/>
+              </a:solidFill>
+            </a:endParaRPr>
           </a:p>
         </p:txBody>
       </p:sp>
       <p:sp>
         <p:nvSpPr>
-          <p:cNvPr id="3" name="Text Placeholder 2"/>
-          <p:cNvSpPr>
-            <a:spLocks noGrp="1"/>
-          </p:cNvSpPr>
+          <p:cNvPr id="294" name="Google Shape;294;p45"/>
+          <p:cNvSpPr txBox="1"/>
           <p:nvPr>
-            <p:ph type="body" idx="1"/>
+            <p:ph idx="1" type="body"/>
           </p:nvPr>
         </p:nvSpPr>
         <p:spPr>
           <a:xfrm>
             <a:off x="311700" y="885950"/>
-            <a:ext cx="8520600" cy="521208"/>
+            <a:ext cx="8520600" cy="4023300"/>
           </a:xfrm>
+          <a:prstGeom prst="rect">
+            <a:avLst/>
+          </a:prstGeom>
         </p:spPr>
         <p:txBody>
-          <a:bodyPr/>
+          <a:bodyPr anchorCtr="0" anchor="t" bIns="91425" lIns="91425" spcFirstLastPara="1" rIns="91425" wrap="square" tIns="91425">
+            <a:normAutofit/>
+          </a:bodyPr>
           <a:lstStyle/>
           <a:p>
             <a:pPr indent="-330200" lvl="0" marL="457200" rtl="0" algn="l">
@@ -23576,400 +23231,78 @@
               <a:buChar char="●"/>
             </a:pPr>
             <a:r>
-              <a:rPr lang="en" b="1"/>
-              <a:t>Six concerns, and this session’s answer to each.</a:t>
+              <a:rPr lang="en"/>
+              <a:t>Which rules could be separated from drawing and input?</a:t>
             </a:r>
             <a:endParaRPr/>
           </a:p>
-        </p:txBody>
-      </p:sp>
-      <p:sp>
-        <p:nvSpPr>
-          <p:cNvPr id="4" name="Rounded Rectangle 3"/>
-          <p:cNvSpPr/>
-          <p:nvPr/>
-        </p:nvSpPr>
-        <p:spPr>
-          <a:xfrm>
-            <a:off x="548640" y="1417320"/>
-            <a:ext cx="2560320" cy="914400"/>
-          </a:xfrm>
-          <a:prstGeom prst="roundRect">
-            <a:avLst>
-              <a:gd name="adj" fmla="val 12000"/>
-            </a:avLst>
-          </a:prstGeom>
-          <a:solidFill>
-            <a:srgbClr val="2E3338"/>
-          </a:solidFill>
-          <a:ln>
-            <a:noFill/>
-          </a:ln>
-          <a:effectLst/>
-        </p:spPr>
-        <p:style>
-          <a:lnRef idx="1">
-            <a:schemeClr val="accent1"/>
-          </a:lnRef>
-          <a:fillRef idx="3">
-            <a:schemeClr val="accent1"/>
-          </a:fillRef>
-          <a:effectRef idx="2">
-            <a:schemeClr val="accent1"/>
-          </a:effectRef>
-          <a:fontRef idx="minor">
-            <a:schemeClr val="lt1"/>
-          </a:fontRef>
-        </p:style>
-        <p:txBody>
-          <a:bodyPr rtlCol="0" anchor="ctr" wrap="square" lIns="73152" rIns="73152"/>
-          <a:lstStyle/>
-          <a:p>
-            <a:pPr algn="ctr"/>
-            <a:r>
-              <a:rPr sz="1500" b="1">
-                <a:solidFill>
-                  <a:srgbClr val="DEE2E6"/>
-                </a:solidFill>
-              </a:rPr>
-              <a:t>What a level looks like</a:t>
-            </a:r>
-          </a:p>
-          <a:p>
-            <a:pPr algn="ctr"/>
-            <a:r>
-              <a:rPr sz="1300" b="0">
-                <a:solidFill>
-                  <a:srgbClr val="9AA3AB"/>
-                </a:solidFill>
-              </a:rPr>
-              <a:t>A text file, a character per cell</a:t>
-            </a:r>
-          </a:p>
-        </p:txBody>
-      </p:sp>
-      <p:sp>
-        <p:nvSpPr>
-          <p:cNvPr id="5" name="Rounded Rectangle 4"/>
-          <p:cNvSpPr/>
-          <p:nvPr/>
-        </p:nvSpPr>
-        <p:spPr>
-          <a:xfrm>
-            <a:off x="3291840" y="1417320"/>
-            <a:ext cx="2560320" cy="914400"/>
-          </a:xfrm>
-          <a:prstGeom prst="roundRect">
-            <a:avLst>
-              <a:gd name="adj" fmla="val 12000"/>
-            </a:avLst>
-          </a:prstGeom>
-          <a:solidFill>
-            <a:srgbClr val="2E3338"/>
-          </a:solidFill>
-          <a:ln>
-            <a:noFill/>
-          </a:ln>
-          <a:effectLst/>
-        </p:spPr>
-        <p:style>
-          <a:lnRef idx="1">
-            <a:schemeClr val="accent1"/>
-          </a:lnRef>
-          <a:fillRef idx="3">
-            <a:schemeClr val="accent1"/>
-          </a:fillRef>
-          <a:effectRef idx="2">
-            <a:schemeClr val="accent1"/>
-          </a:effectRef>
-          <a:fontRef idx="minor">
-            <a:schemeClr val="lt1"/>
-          </a:fontRef>
-        </p:style>
-        <p:txBody>
-          <a:bodyPr rtlCol="0" anchor="ctr" wrap="square" lIns="73152" rIns="73152"/>
-          <a:lstStyle/>
-          <a:p>
-            <a:pPr algn="ctr"/>
-            <a:r>
-              <a:rPr sz="1500" b="1">
-                <a:solidFill>
-                  <a:srgbClr val="DEE2E6"/>
-                </a:solidFill>
-              </a:rPr>
-              <a:t>Rules that can be tested</a:t>
-            </a:r>
-          </a:p>
-          <a:p>
-            <a:pPr algn="ctr"/>
-            <a:r>
-              <a:rPr sz="1300" b="0">
-                <a:solidFill>
-                  <a:srgbClr val="9AA3AB"/>
-                </a:solidFill>
-              </a:rPr>
-              <a:t>Level, apart from LevelView</a:t>
-            </a:r>
-          </a:p>
-        </p:txBody>
-      </p:sp>
-      <p:sp>
-        <p:nvSpPr>
-          <p:cNvPr id="6" name="Rounded Rectangle 5"/>
-          <p:cNvSpPr/>
-          <p:nvPr/>
-        </p:nvSpPr>
-        <p:spPr>
-          <a:xfrm>
-            <a:off x="6035040" y="1417320"/>
-            <a:ext cx="2560320" cy="914400"/>
-          </a:xfrm>
-          <a:prstGeom prst="roundRect">
-            <a:avLst>
-              <a:gd name="adj" fmla="val 12000"/>
-            </a:avLst>
-          </a:prstGeom>
-          <a:solidFill>
-            <a:srgbClr val="2E3338"/>
-          </a:solidFill>
-          <a:ln>
-            <a:noFill/>
-          </a:ln>
-          <a:effectLst/>
-        </p:spPr>
-        <p:style>
-          <a:lnRef idx="1">
-            <a:schemeClr val="accent1"/>
-          </a:lnRef>
-          <a:fillRef idx="3">
-            <a:schemeClr val="accent1"/>
-          </a:fillRef>
-          <a:effectRef idx="2">
-            <a:schemeClr val="accent1"/>
-          </a:effectRef>
-          <a:fontRef idx="minor">
-            <a:schemeClr val="lt1"/>
-          </a:fontRef>
-        </p:style>
-        <p:txBody>
-          <a:bodyPr rtlCol="0" anchor="ctr" wrap="square" lIns="73152" rIns="73152"/>
-          <a:lstStyle/>
-          <a:p>
-            <a:pPr algn="ctr"/>
-            <a:r>
-              <a:rPr sz="1500" b="1">
-                <a:solidFill>
-                  <a:srgbClr val="DEE2E6"/>
-                </a:solidFill>
-              </a:rPr>
-              <a:t>Checking the rules</a:t>
-            </a:r>
-          </a:p>
-          <a:p>
-            <a:pPr algn="ctr"/>
-            <a:r>
-              <a:rPr sz="1300" b="0">
-                <a:solidFill>
-                  <a:srgbClr val="9AA3AB"/>
-                </a:solidFill>
-              </a:rPr>
-              <a:t>Unit tests: arrange, act, assert</a:t>
-            </a:r>
-          </a:p>
-        </p:txBody>
-      </p:sp>
-      <p:sp>
-        <p:nvSpPr>
-          <p:cNvPr id="7" name="Rounded Rectangle 6"/>
-          <p:cNvSpPr/>
-          <p:nvPr/>
-        </p:nvSpPr>
-        <p:spPr>
-          <a:xfrm>
-            <a:off x="548640" y="2468880"/>
-            <a:ext cx="2560320" cy="914400"/>
-          </a:xfrm>
-          <a:prstGeom prst="roundRect">
-            <a:avLst>
-              <a:gd name="adj" fmla="val 12000"/>
-            </a:avLst>
-          </a:prstGeom>
-          <a:solidFill>
-            <a:srgbClr val="2E3338"/>
-          </a:solidFill>
-          <a:ln>
-            <a:noFill/>
-          </a:ln>
-          <a:effectLst/>
-        </p:spPr>
-        <p:style>
-          <a:lnRef idx="1">
-            <a:schemeClr val="accent1"/>
-          </a:lnRef>
-          <a:fillRef idx="3">
-            <a:schemeClr val="accent1"/>
-          </a:fillRef>
-          <a:effectRef idx="2">
-            <a:schemeClr val="accent1"/>
-          </a:effectRef>
-          <a:fontRef idx="minor">
-            <a:schemeClr val="lt1"/>
-          </a:fontRef>
-        </p:style>
-        <p:txBody>
-          <a:bodyPr rtlCol="0" anchor="ctr" wrap="square" lIns="73152" rIns="73152"/>
-          <a:lstStyle/>
-          <a:p>
-            <a:pPr algn="ctr"/>
-            <a:r>
-              <a:rPr sz="1500" b="1">
-                <a:solidFill>
-                  <a:srgbClr val="DEE2E6"/>
-                </a:solidFill>
-              </a:rPr>
-              <a:t>A move that can be kept</a:t>
-            </a:r>
-          </a:p>
-          <a:p>
-            <a:pPr algn="ctr"/>
-            <a:r>
-              <a:rPr sz="1300" b="0">
-                <a:solidFill>
-                  <a:srgbClr val="9AA3AB"/>
-                </a:solidFill>
-              </a:rPr>
-              <a:t>Command</a:t>
-            </a:r>
-          </a:p>
-        </p:txBody>
-      </p:sp>
-      <p:sp>
-        <p:nvSpPr>
-          <p:cNvPr id="8" name="Rounded Rectangle 7"/>
-          <p:cNvSpPr/>
-          <p:nvPr/>
-        </p:nvSpPr>
-        <p:spPr>
-          <a:xfrm>
-            <a:off x="3291840" y="2468880"/>
-            <a:ext cx="2560320" cy="914400"/>
-          </a:xfrm>
-          <a:prstGeom prst="roundRect">
-            <a:avLst>
-              <a:gd name="adj" fmla="val 12000"/>
-            </a:avLst>
-          </a:prstGeom>
-          <a:solidFill>
-            <a:srgbClr val="2E3338"/>
-          </a:solidFill>
-          <a:ln>
-            <a:noFill/>
-          </a:ln>
-          <a:effectLst/>
-        </p:spPr>
-        <p:style>
-          <a:lnRef idx="1">
-            <a:schemeClr val="accent1"/>
-          </a:lnRef>
-          <a:fillRef idx="3">
-            <a:schemeClr val="accent1"/>
-          </a:fillRef>
-          <a:effectRef idx="2">
-            <a:schemeClr val="accent1"/>
-          </a:effectRef>
-          <a:fontRef idx="minor">
-            <a:schemeClr val="lt1"/>
-          </a:fontRef>
-        </p:style>
-        <p:txBody>
-          <a:bodyPr rtlCol="0" anchor="ctr" wrap="square" lIns="73152" rIns="73152"/>
-          <a:lstStyle/>
-          <a:p>
-            <a:pPr algn="ctr"/>
-            <a:r>
-              <a:rPr sz="1500" b="1">
-                <a:solidFill>
-                  <a:srgbClr val="DEE2E6"/>
-                </a:solidFill>
-              </a:rPr>
-              <a:t>Undo and redo</a:t>
-            </a:r>
-          </a:p>
-          <a:p>
-            <a:pPr algn="ctr"/>
-            <a:r>
-              <a:rPr sz="1300" b="0">
-                <a:solidFill>
-                  <a:srgbClr val="9AA3AB"/>
-                </a:solidFill>
-              </a:rPr>
-              <a:t>Two stacks of commands</a:t>
-            </a:r>
-          </a:p>
-        </p:txBody>
-      </p:sp>
-      <p:sp>
-        <p:nvSpPr>
-          <p:cNvPr id="9" name="Rounded Rectangle 8"/>
-          <p:cNvSpPr/>
-          <p:nvPr/>
-        </p:nvSpPr>
-        <p:spPr>
-          <a:xfrm>
-            <a:off x="6035040" y="2468880"/>
-            <a:ext cx="2560320" cy="914400"/>
-          </a:xfrm>
-          <a:prstGeom prst="roundRect">
-            <a:avLst>
-              <a:gd name="adj" fmla="val 12000"/>
-            </a:avLst>
-          </a:prstGeom>
-          <a:solidFill>
-            <a:srgbClr val="2E3338"/>
-          </a:solidFill>
-          <a:ln>
-            <a:noFill/>
-          </a:ln>
-          <a:effectLst/>
-        </p:spPr>
-        <p:style>
-          <a:lnRef idx="1">
-            <a:schemeClr val="accent1"/>
-          </a:lnRef>
-          <a:fillRef idx="3">
-            <a:schemeClr val="accent1"/>
-          </a:fillRef>
-          <a:effectRef idx="2">
-            <a:schemeClr val="accent1"/>
-          </a:effectRef>
-          <a:fontRef idx="minor">
-            <a:schemeClr val="lt1"/>
-          </a:fontRef>
-        </p:style>
-        <p:txBody>
-          <a:bodyPr rtlCol="0" anchor="ctr" wrap="square" lIns="73152" rIns="73152"/>
-          <a:lstStyle/>
-          <a:p>
-            <a:pPr algn="ctr"/>
-            <a:r>
-              <a:rPr sz="1500" b="1">
-                <a:solidFill>
-                  <a:srgbClr val="DEE2E6"/>
-                </a:solidFill>
-              </a:rPr>
-              <a:t>Keys the player can change</a:t>
-            </a:r>
-          </a:p>
-          <a:p>
-            <a:pPr algn="ctr"/>
-            <a:r>
-              <a:rPr sz="1300" b="0">
-                <a:solidFill>
-                  <a:srgbClr val="9AA3AB"/>
-                </a:solidFill>
-              </a:rPr>
-              <a:t>A table from keys to moves</a:t>
-            </a:r>
+          <a:p>
+            <a:pPr indent="-317500" lvl="1" marL="914400" rtl="0" algn="l">
+              <a:spcBef>
+                <a:spcPts val="0"/>
+              </a:spcBef>
+              <a:spcAft>
+                <a:spcPts val="0"/>
+              </a:spcAft>
+              <a:buSzPts val="1400"/>
+              <a:buChar char="○"/>
+            </a:pPr>
+            <a:r>
+              <a:rPr lang="en"/>
+              <a:t>Write one unit test for one of them</a:t>
+            </a:r>
+            <a:endParaRPr/>
+          </a:p>
+          <a:p>
+            <a:pPr indent="-330200" lvl="0" marL="457200" rtl="0" algn="l">
+              <a:spcBef>
+                <a:spcPts val="0"/>
+              </a:spcBef>
+              <a:spcAft>
+                <a:spcPts val="0"/>
+              </a:spcAft>
+              <a:buSzPts val="1600"/>
+              <a:buChar char="●"/>
+            </a:pPr>
+            <a:r>
+              <a:rPr lang="en"/>
+              <a:t>Would undo, replays or queued actions be useful in your game?</a:t>
+            </a:r>
+            <a:endParaRPr/>
+          </a:p>
+          <a:p>
+            <a:pPr indent="-317500" lvl="1" marL="914400" rtl="0" algn="l">
+              <a:spcBef>
+                <a:spcPts val="0"/>
+              </a:spcBef>
+              <a:spcAft>
+                <a:spcPts val="0"/>
+              </a:spcAft>
+              <a:buSzPts val="1400"/>
+              <a:buChar char="○"/>
+            </a:pPr>
+            <a:r>
+              <a:rPr lang="en"/>
+              <a:t>Which actions would become commands, and what would each remember?</a:t>
+            </a:r>
+            <a:endParaRPr/>
+          </a:p>
+          <a:p>
+            <a:pPr indent="-330200" lvl="0" marL="457200" rtl="0" algn="l">
+              <a:spcBef>
+                <a:spcPts val="0"/>
+              </a:spcBef>
+              <a:spcAft>
+                <a:spcPts val="0"/>
+              </a:spcAft>
+              <a:buSzPts val="1600"/>
+              <a:buChar char="●"/>
+            </a:pPr>
+            <a:r>
+              <a:rPr lang="en"/>
+              <a:t>Could your levels, or part of them, be data files?</a:t>
+            </a:r>
+            <a:endParaRPr/>
           </a:p>
         </p:txBody>
       </p:sp>
@@ -23978,6 +23311,673 @@
   <p:clrMapOvr>
     <a:masterClrMapping/>
   </p:clrMapOvr>
+  <p:timing>
+    <p:tnLst>
+      <p:par>
+        <p:cTn dur="indefinite" nodeType="tmRoot" restart="never">
+          <p:childTnLst>
+            <p:seq concurrent="1" nextAc="seek">
+              <p:cTn dur="indefinite" id="2" nodeType="mainSeq">
+                <p:childTnLst>
+                  <p:par>
+                    <p:cTn fill="hold">
+                      <p:stCondLst>
+                        <p:cond delay="indefinite"/>
+                      </p:stCondLst>
+                      <p:childTnLst>
+                        <p:par>
+                          <p:cTn fill="hold">
+                            <p:stCondLst>
+                              <p:cond delay="0"/>
+                            </p:stCondLst>
+                            <p:childTnLst>
+                              <p:par>
+                                <p:cTn fill="hold" nodeType="clickEffect" presetClass="entr" presetID="1" presetSubtype="0">
+                                  <p:stCondLst>
+                                    <p:cond delay="0"/>
+                                  </p:stCondLst>
+                                  <p:childTnLst>
+                                    <p:set>
+                                      <p:cBhvr>
+                                        <p:cTn dur="1" fill="hold">
+                                          <p:stCondLst>
+                                            <p:cond delay="0"/>
+                                          </p:stCondLst>
+                                        </p:cTn>
+                                        <p:tgtEl>
+                                          <p:spTgt spid="294">
+                                            <p:txEl>
+                                              <p:pRg end="0" st="0"/>
+                                            </p:txEl>
+                                          </p:spTgt>
+                                        </p:tgtEl>
+                                        <p:attrNameLst>
+                                          <p:attrName>style.visibility</p:attrName>
+                                        </p:attrNameLst>
+                                      </p:cBhvr>
+                                      <p:to>
+                                        <p:strVal val="visible"/>
+                                      </p:to>
+                                    </p:set>
+                                  </p:childTnLst>
+                                </p:cTn>
+                              </p:par>
+                            </p:childTnLst>
+                          </p:cTn>
+                        </p:par>
+                      </p:childTnLst>
+                    </p:cTn>
+                  </p:par>
+                  <p:par>
+                    <p:cTn fill="hold">
+                      <p:stCondLst>
+                        <p:cond delay="indefinite"/>
+                      </p:stCondLst>
+                      <p:childTnLst>
+                        <p:par>
+                          <p:cTn fill="hold">
+                            <p:stCondLst>
+                              <p:cond delay="0"/>
+                            </p:stCondLst>
+                            <p:childTnLst>
+                              <p:par>
+                                <p:cTn fill="hold" nodeType="clickEffect" presetClass="entr" presetID="1" presetSubtype="0">
+                                  <p:stCondLst>
+                                    <p:cond delay="0"/>
+                                  </p:stCondLst>
+                                  <p:childTnLst>
+                                    <p:set>
+                                      <p:cBhvr>
+                                        <p:cTn dur="1" fill="hold">
+                                          <p:stCondLst>
+                                            <p:cond delay="0"/>
+                                          </p:stCondLst>
+                                        </p:cTn>
+                                        <p:tgtEl>
+                                          <p:spTgt spid="294">
+                                            <p:txEl>
+                                              <p:pRg end="1" st="1"/>
+                                            </p:txEl>
+                                          </p:spTgt>
+                                        </p:tgtEl>
+                                        <p:attrNameLst>
+                                          <p:attrName>style.visibility</p:attrName>
+                                        </p:attrNameLst>
+                                      </p:cBhvr>
+                                      <p:to>
+                                        <p:strVal val="visible"/>
+                                      </p:to>
+                                    </p:set>
+                                  </p:childTnLst>
+                                </p:cTn>
+                              </p:par>
+                            </p:childTnLst>
+                          </p:cTn>
+                        </p:par>
+                      </p:childTnLst>
+                    </p:cTn>
+                  </p:par>
+                  <p:par>
+                    <p:cTn fill="hold">
+                      <p:stCondLst>
+                        <p:cond delay="indefinite"/>
+                      </p:stCondLst>
+                      <p:childTnLst>
+                        <p:par>
+                          <p:cTn fill="hold">
+                            <p:stCondLst>
+                              <p:cond delay="0"/>
+                            </p:stCondLst>
+                            <p:childTnLst>
+                              <p:par>
+                                <p:cTn fill="hold" nodeType="clickEffect" presetClass="entr" presetID="1" presetSubtype="0">
+                                  <p:stCondLst>
+                                    <p:cond delay="0"/>
+                                  </p:stCondLst>
+                                  <p:childTnLst>
+                                    <p:set>
+                                      <p:cBhvr>
+                                        <p:cTn dur="1" fill="hold">
+                                          <p:stCondLst>
+                                            <p:cond delay="0"/>
+                                          </p:stCondLst>
+                                        </p:cTn>
+                                        <p:tgtEl>
+                                          <p:spTgt spid="294">
+                                            <p:txEl>
+                                              <p:pRg end="2" st="2"/>
+                                            </p:txEl>
+                                          </p:spTgt>
+                                        </p:tgtEl>
+                                        <p:attrNameLst>
+                                          <p:attrName>style.visibility</p:attrName>
+                                        </p:attrNameLst>
+                                      </p:cBhvr>
+                                      <p:to>
+                                        <p:strVal val="visible"/>
+                                      </p:to>
+                                    </p:set>
+                                  </p:childTnLst>
+                                </p:cTn>
+                              </p:par>
+                            </p:childTnLst>
+                          </p:cTn>
+                        </p:par>
+                      </p:childTnLst>
+                    </p:cTn>
+                  </p:par>
+                  <p:par>
+                    <p:cTn fill="hold">
+                      <p:stCondLst>
+                        <p:cond delay="indefinite"/>
+                      </p:stCondLst>
+                      <p:childTnLst>
+                        <p:par>
+                          <p:cTn fill="hold">
+                            <p:stCondLst>
+                              <p:cond delay="0"/>
+                            </p:stCondLst>
+                            <p:childTnLst>
+                              <p:par>
+                                <p:cTn fill="hold" nodeType="clickEffect" presetClass="entr" presetID="1" presetSubtype="0">
+                                  <p:stCondLst>
+                                    <p:cond delay="0"/>
+                                  </p:stCondLst>
+                                  <p:childTnLst>
+                                    <p:set>
+                                      <p:cBhvr>
+                                        <p:cTn dur="1" fill="hold">
+                                          <p:stCondLst>
+                                            <p:cond delay="0"/>
+                                          </p:stCondLst>
+                                        </p:cTn>
+                                        <p:tgtEl>
+                                          <p:spTgt spid="294">
+                                            <p:txEl>
+                                              <p:pRg end="3" st="3"/>
+                                            </p:txEl>
+                                          </p:spTgt>
+                                        </p:tgtEl>
+                                        <p:attrNameLst>
+                                          <p:attrName>style.visibility</p:attrName>
+                                        </p:attrNameLst>
+                                      </p:cBhvr>
+                                      <p:to>
+                                        <p:strVal val="visible"/>
+                                      </p:to>
+                                    </p:set>
+                                  </p:childTnLst>
+                                </p:cTn>
+                              </p:par>
+                            </p:childTnLst>
+                          </p:cTn>
+                        </p:par>
+                      </p:childTnLst>
+                    </p:cTn>
+                  </p:par>
+                  <p:par>
+                    <p:cTn fill="hold">
+                      <p:stCondLst>
+                        <p:cond delay="indefinite"/>
+                      </p:stCondLst>
+                      <p:childTnLst>
+                        <p:par>
+                          <p:cTn fill="hold">
+                            <p:stCondLst>
+                              <p:cond delay="0"/>
+                            </p:stCondLst>
+                            <p:childTnLst>
+                              <p:par>
+                                <p:cTn fill="hold" nodeType="clickEffect" presetClass="entr" presetID="1" presetSubtype="0">
+                                  <p:stCondLst>
+                                    <p:cond delay="0"/>
+                                  </p:stCondLst>
+                                  <p:childTnLst>
+                                    <p:set>
+                                      <p:cBhvr>
+                                        <p:cTn dur="1" fill="hold">
+                                          <p:stCondLst>
+                                            <p:cond delay="0"/>
+                                          </p:stCondLst>
+                                        </p:cTn>
+                                        <p:tgtEl>
+                                          <p:spTgt spid="294">
+                                            <p:txEl>
+                                              <p:pRg end="4" st="4"/>
+                                            </p:txEl>
+                                          </p:spTgt>
+                                        </p:tgtEl>
+                                        <p:attrNameLst>
+                                          <p:attrName>style.visibility</p:attrName>
+                                        </p:attrNameLst>
+                                      </p:cBhvr>
+                                      <p:to>
+                                        <p:strVal val="visible"/>
+                                      </p:to>
+                                    </p:set>
+                                  </p:childTnLst>
+                                </p:cTn>
+                              </p:par>
+                            </p:childTnLst>
+                          </p:cTn>
+                        </p:par>
+                      </p:childTnLst>
+                    </p:cTn>
+                  </p:par>
+                  <p:par>
+                    <p:cTn fill="hold">
+                      <p:stCondLst>
+                        <p:cond delay="indefinite"/>
+                      </p:stCondLst>
+                      <p:childTnLst>
+                        <p:par>
+                          <p:cTn fill="hold">
+                            <p:stCondLst>
+                              <p:cond delay="0"/>
+                            </p:stCondLst>
+                            <p:childTnLst>
+                              <p:par>
+                                <p:cTn fill="hold" nodeType="clickEffect" presetClass="entr" presetID="1" presetSubtype="0">
+                                  <p:stCondLst>
+                                    <p:cond delay="0"/>
+                                  </p:stCondLst>
+                                  <p:childTnLst>
+                                    <p:set>
+                                      <p:cBhvr>
+                                        <p:cTn dur="1" fill="hold">
+                                          <p:stCondLst>
+                                            <p:cond delay="0"/>
+                                          </p:stCondLst>
+                                        </p:cTn>
+                                        <p:tgtEl>
+                                          <p:spTgt spid="294">
+                                            <p:txEl>
+                                              <p:pRg end="5" st="5"/>
+                                            </p:txEl>
+                                          </p:spTgt>
+                                        </p:tgtEl>
+                                        <p:attrNameLst>
+                                          <p:attrName>style.visibility</p:attrName>
+                                        </p:attrNameLst>
+                                      </p:cBhvr>
+                                      <p:to>
+                                        <p:strVal val="visible"/>
+                                      </p:to>
+                                    </p:set>
+                                  </p:childTnLst>
+                                </p:cTn>
+                              </p:par>
+                            </p:childTnLst>
+                          </p:cTn>
+                        </p:par>
+                      </p:childTnLst>
+                    </p:cTn>
+                  </p:par>
+                  <p:par>
+                    <p:cTn fill="hold">
+                      <p:stCondLst>
+                        <p:cond delay="indefinite"/>
+                      </p:stCondLst>
+                      <p:childTnLst>
+                        <p:par>
+                          <p:cTn fill="hold">
+                            <p:stCondLst>
+                              <p:cond delay="0"/>
+                            </p:stCondLst>
+                            <p:childTnLst>
+                              <p:par>
+                                <p:cTn fill="hold" nodeType="clickEffect" presetClass="entr" presetID="1" presetSubtype="0">
+                                  <p:stCondLst>
+                                    <p:cond delay="0"/>
+                                  </p:stCondLst>
+                                  <p:childTnLst>
+                                    <p:set>
+                                      <p:cBhvr>
+                                        <p:cTn dur="1" fill="hold">
+                                          <p:stCondLst>
+                                            <p:cond delay="0"/>
+                                          </p:stCondLst>
+                                        </p:cTn>
+                                        <p:tgtEl>
+                                          <p:spTgt spid="294">
+                                            <p:txEl>
+                                              <p:pRg end="6" st="6"/>
+                                            </p:txEl>
+                                          </p:spTgt>
+                                        </p:tgtEl>
+                                        <p:attrNameLst>
+                                          <p:attrName>style.visibility</p:attrName>
+                                        </p:attrNameLst>
+                                      </p:cBhvr>
+                                      <p:to>
+                                        <p:strVal val="visible"/>
+                                      </p:to>
+                                    </p:set>
+                                  </p:childTnLst>
+                                </p:cTn>
+                              </p:par>
+                            </p:childTnLst>
+                          </p:cTn>
+                        </p:par>
+                      </p:childTnLst>
+                    </p:cTn>
+                  </p:par>
+                  <p:par>
+                    <p:cTn fill="hold">
+                      <p:stCondLst>
+                        <p:cond delay="indefinite"/>
+                      </p:stCondLst>
+                      <p:childTnLst>
+                        <p:par>
+                          <p:cTn fill="hold">
+                            <p:stCondLst>
+                              <p:cond delay="0"/>
+                            </p:stCondLst>
+                            <p:childTnLst>
+                              <p:par>
+                                <p:cTn fill="hold" nodeType="clickEffect" presetClass="entr" presetID="1" presetSubtype="0">
+                                  <p:stCondLst>
+                                    <p:cond delay="0"/>
+                                  </p:stCondLst>
+                                  <p:childTnLst>
+                                    <p:set>
+                                      <p:cBhvr>
+                                        <p:cTn dur="1" fill="hold">
+                                          <p:stCondLst>
+                                            <p:cond delay="0"/>
+                                          </p:stCondLst>
+                                        </p:cTn>
+                                        <p:tgtEl>
+                                          <p:spTgt spid="294">
+                                            <p:txEl>
+                                              <p:pRg end="7" st="7"/>
+                                            </p:txEl>
+                                          </p:spTgt>
+                                        </p:tgtEl>
+                                        <p:attrNameLst>
+                                          <p:attrName>style.visibility</p:attrName>
+                                        </p:attrNameLst>
+                                      </p:cBhvr>
+                                      <p:to>
+                                        <p:strVal val="visible"/>
+                                      </p:to>
+                                    </p:set>
+                                  </p:childTnLst>
+                                </p:cTn>
+                              </p:par>
+                            </p:childTnLst>
+                          </p:cTn>
+                        </p:par>
+                      </p:childTnLst>
+                    </p:cTn>
+                  </p:par>
+                  <p:par>
+                    <p:cTn fill="hold">
+                      <p:stCondLst>
+                        <p:cond delay="indefinite"/>
+                      </p:stCondLst>
+                      <p:childTnLst>
+                        <p:par>
+                          <p:cTn fill="hold">
+                            <p:stCondLst>
+                              <p:cond delay="0"/>
+                            </p:stCondLst>
+                            <p:childTnLst>
+                              <p:par>
+                                <p:cTn fill="hold" nodeType="clickEffect" presetClass="entr" presetID="1" presetSubtype="0">
+                                  <p:stCondLst>
+                                    <p:cond delay="0"/>
+                                  </p:stCondLst>
+                                  <p:childTnLst>
+                                    <p:set>
+                                      <p:cBhvr>
+                                        <p:cTn dur="1" fill="hold">
+                                          <p:stCondLst>
+                                            <p:cond delay="0"/>
+                                          </p:stCondLst>
+                                        </p:cTn>
+                                        <p:tgtEl>
+                                          <p:spTgt spid="294">
+                                            <p:txEl>
+                                              <p:pRg end="8" st="8"/>
+                                            </p:txEl>
+                                          </p:spTgt>
+                                        </p:tgtEl>
+                                        <p:attrNameLst>
+                                          <p:attrName>style.visibility</p:attrName>
+                                        </p:attrNameLst>
+                                      </p:cBhvr>
+                                      <p:to>
+                                        <p:strVal val="visible"/>
+                                      </p:to>
+                                    </p:set>
+                                  </p:childTnLst>
+                                </p:cTn>
+                              </p:par>
+                            </p:childTnLst>
+                          </p:cTn>
+                        </p:par>
+                      </p:childTnLst>
+                    </p:cTn>
+                  </p:par>
+                  <p:par>
+                    <p:cTn fill="hold">
+                      <p:stCondLst>
+                        <p:cond delay="indefinite"/>
+                      </p:stCondLst>
+                      <p:childTnLst>
+                        <p:par>
+                          <p:cTn fill="hold">
+                            <p:stCondLst>
+                              <p:cond delay="0"/>
+                            </p:stCondLst>
+                            <p:childTnLst>
+                              <p:par>
+                                <p:cTn fill="hold" nodeType="clickEffect" presetClass="entr" presetID="1" presetSubtype="0">
+                                  <p:stCondLst>
+                                    <p:cond delay="0"/>
+                                  </p:stCondLst>
+                                  <p:childTnLst>
+                                    <p:set>
+                                      <p:cBhvr>
+                                        <p:cTn dur="1" fill="hold">
+                                          <p:stCondLst>
+                                            <p:cond delay="0"/>
+                                          </p:stCondLst>
+                                        </p:cTn>
+                                        <p:tgtEl>
+                                          <p:spTgt spid="294">
+                                            <p:txEl>
+                                              <p:pRg end="9" st="9"/>
+                                            </p:txEl>
+                                          </p:spTgt>
+                                        </p:tgtEl>
+                                        <p:attrNameLst>
+                                          <p:attrName>style.visibility</p:attrName>
+                                        </p:attrNameLst>
+                                      </p:cBhvr>
+                                      <p:to>
+                                        <p:strVal val="visible"/>
+                                      </p:to>
+                                    </p:set>
+                                  </p:childTnLst>
+                                </p:cTn>
+                              </p:par>
+                            </p:childTnLst>
+                          </p:cTn>
+                        </p:par>
+                      </p:childTnLst>
+                    </p:cTn>
+                  </p:par>
+                  <p:par>
+                    <p:cTn fill="hold">
+                      <p:stCondLst>
+                        <p:cond delay="indefinite"/>
+                      </p:stCondLst>
+                      <p:childTnLst>
+                        <p:par>
+                          <p:cTn fill="hold">
+                            <p:stCondLst>
+                              <p:cond delay="0"/>
+                            </p:stCondLst>
+                            <p:childTnLst>
+                              <p:par>
+                                <p:cTn fill="hold" nodeType="clickEffect" presetClass="entr" presetID="1" presetSubtype="0">
+                                  <p:stCondLst>
+                                    <p:cond delay="0"/>
+                                  </p:stCondLst>
+                                  <p:childTnLst>
+                                    <p:set>
+                                      <p:cBhvr>
+                                        <p:cTn dur="1" fill="hold">
+                                          <p:stCondLst>
+                                            <p:cond delay="0"/>
+                                          </p:stCondLst>
+                                        </p:cTn>
+                                        <p:tgtEl>
+                                          <p:spTgt spid="294">
+                                            <p:txEl>
+                                              <p:pRg end="10" st="10"/>
+                                            </p:txEl>
+                                          </p:spTgt>
+                                        </p:tgtEl>
+                                        <p:attrNameLst>
+                                          <p:attrName>style.visibility</p:attrName>
+                                        </p:attrNameLst>
+                                      </p:cBhvr>
+                                      <p:to>
+                                        <p:strVal val="visible"/>
+                                      </p:to>
+                                    </p:set>
+                                  </p:childTnLst>
+                                </p:cTn>
+                              </p:par>
+                            </p:childTnLst>
+                          </p:cTn>
+                        </p:par>
+                      </p:childTnLst>
+                    </p:cTn>
+                  </p:par>
+                  <p:par>
+                    <p:cTn fill="hold">
+                      <p:stCondLst>
+                        <p:cond delay="indefinite"/>
+                      </p:stCondLst>
+                      <p:childTnLst>
+                        <p:par>
+                          <p:cTn fill="hold">
+                            <p:stCondLst>
+                              <p:cond delay="0"/>
+                            </p:stCondLst>
+                            <p:childTnLst>
+                              <p:par>
+                                <p:cTn fill="hold" nodeType="clickEffect" presetClass="entr" presetID="1" presetSubtype="0">
+                                  <p:stCondLst>
+                                    <p:cond delay="0"/>
+                                  </p:stCondLst>
+                                  <p:childTnLst>
+                                    <p:set>
+                                      <p:cBhvr>
+                                        <p:cTn dur="1" fill="hold">
+                                          <p:stCondLst>
+                                            <p:cond delay="0"/>
+                                          </p:stCondLst>
+                                        </p:cTn>
+                                        <p:tgtEl>
+                                          <p:spTgt spid="294">
+                                            <p:txEl>
+                                              <p:pRg end="11" st="11"/>
+                                            </p:txEl>
+                                          </p:spTgt>
+                                        </p:tgtEl>
+                                        <p:attrNameLst>
+                                          <p:attrName>style.visibility</p:attrName>
+                                        </p:attrNameLst>
+                                      </p:cBhvr>
+                                      <p:to>
+                                        <p:strVal val="visible"/>
+                                      </p:to>
+                                    </p:set>
+                                  </p:childTnLst>
+                                </p:cTn>
+                              </p:par>
+                            </p:childTnLst>
+                          </p:cTn>
+                        </p:par>
+                      </p:childTnLst>
+                    </p:cTn>
+                  </p:par>
+                  <p:par>
+                    <p:cTn fill="hold">
+                      <p:stCondLst>
+                        <p:cond delay="indefinite"/>
+                      </p:stCondLst>
+                      <p:childTnLst>
+                        <p:par>
+                          <p:cTn fill="hold">
+                            <p:stCondLst>
+                              <p:cond delay="0"/>
+                            </p:stCondLst>
+                            <p:childTnLst>
+                              <p:par>
+                                <p:cTn fill="hold" nodeType="clickEffect" presetClass="entr" presetID="1" presetSubtype="0">
+                                  <p:stCondLst>
+                                    <p:cond delay="0"/>
+                                  </p:stCondLst>
+                                  <p:childTnLst>
+                                    <p:set>
+                                      <p:cBhvr>
+                                        <p:cTn dur="1" fill="hold">
+                                          <p:stCondLst>
+                                            <p:cond delay="0"/>
+                                          </p:stCondLst>
+                                        </p:cTn>
+                                        <p:tgtEl>
+                                          <p:spTgt spid="294">
+                                            <p:txEl>
+                                              <p:pRg end="12" st="12"/>
+                                            </p:txEl>
+                                          </p:spTgt>
+                                        </p:tgtEl>
+                                        <p:attrNameLst>
+                                          <p:attrName>style.visibility</p:attrName>
+                                        </p:attrNameLst>
+                                      </p:cBhvr>
+                                      <p:to>
+                                        <p:strVal val="visible"/>
+                                      </p:to>
+                                    </p:set>
+                                  </p:childTnLst>
+                                </p:cTn>
+                              </p:par>
+                            </p:childTnLst>
+                          </p:cTn>
+                        </p:par>
+                      </p:childTnLst>
+                    </p:cTn>
+                  </p:par>
+                </p:childTnLst>
+              </p:cTn>
+              <p:prevCondLst>
+                <p:cond evt="onPrev">
+                  <p:tgtEl>
+                    <p:sldTgt/>
+                  </p:tgtEl>
+                </p:cond>
+              </p:prevCondLst>
+              <p:nextCondLst>
+                <p:cond evt="onNext">
+                  <p:tgtEl>
+                    <p:sldTgt/>
+                  </p:tgtEl>
+                </p:cond>
+              </p:nextCondLst>
+            </p:seq>
+          </p:childTnLst>
+        </p:cTn>
+      </p:par>
+    </p:tnLst>
+  </p:timing>
 </p:sld>
 </file>
 
